--- a/Attachment/Schema/schema.pptx
+++ b/Attachment/Schema/schema.pptx
@@ -6,7 +6,7 @@
   </p:sldMasterIdLst>
   <p:sldIdLst>
     <p:sldId id="257" r:id="rId2"/>
-    <p:sldId id="258" r:id="rId3"/>
+    <p:sldId id="259" r:id="rId3"/>
   </p:sldIdLst>
   <p:sldSz cx="12192000" cy="6858000"/>
   <p:notesSz cx="6858000" cy="9144000"/>
@@ -262,7 +262,7 @@
           <a:p>
             <a:fld id="{619190FE-5B53-445B-A2B6-CFE3664BDC25}" type="datetimeFigureOut">
               <a:rPr lang="fr-FR" smtClean="0"/>
-              <a:t>10/09/2025</a:t>
+              <a:t>19/11/2025</a:t>
             </a:fld>
             <a:endParaRPr lang="fr-FR"/>
           </a:p>
@@ -462,7 +462,7 @@
           <a:p>
             <a:fld id="{619190FE-5B53-445B-A2B6-CFE3664BDC25}" type="datetimeFigureOut">
               <a:rPr lang="fr-FR" smtClean="0"/>
-              <a:t>10/09/2025</a:t>
+              <a:t>19/11/2025</a:t>
             </a:fld>
             <a:endParaRPr lang="fr-FR"/>
           </a:p>
@@ -672,7 +672,7 @@
           <a:p>
             <a:fld id="{619190FE-5B53-445B-A2B6-CFE3664BDC25}" type="datetimeFigureOut">
               <a:rPr lang="fr-FR" smtClean="0"/>
-              <a:t>10/09/2025</a:t>
+              <a:t>19/11/2025</a:t>
             </a:fld>
             <a:endParaRPr lang="fr-FR"/>
           </a:p>
@@ -872,7 +872,7 @@
           <a:p>
             <a:fld id="{619190FE-5B53-445B-A2B6-CFE3664BDC25}" type="datetimeFigureOut">
               <a:rPr lang="fr-FR" smtClean="0"/>
-              <a:t>10/09/2025</a:t>
+              <a:t>19/11/2025</a:t>
             </a:fld>
             <a:endParaRPr lang="fr-FR"/>
           </a:p>
@@ -1148,7 +1148,7 @@
           <a:p>
             <a:fld id="{619190FE-5B53-445B-A2B6-CFE3664BDC25}" type="datetimeFigureOut">
               <a:rPr lang="fr-FR" smtClean="0"/>
-              <a:t>10/09/2025</a:t>
+              <a:t>19/11/2025</a:t>
             </a:fld>
             <a:endParaRPr lang="fr-FR"/>
           </a:p>
@@ -1416,7 +1416,7 @@
           <a:p>
             <a:fld id="{619190FE-5B53-445B-A2B6-CFE3664BDC25}" type="datetimeFigureOut">
               <a:rPr lang="fr-FR" smtClean="0"/>
-              <a:t>10/09/2025</a:t>
+              <a:t>19/11/2025</a:t>
             </a:fld>
             <a:endParaRPr lang="fr-FR"/>
           </a:p>
@@ -1831,7 +1831,7 @@
           <a:p>
             <a:fld id="{619190FE-5B53-445B-A2B6-CFE3664BDC25}" type="datetimeFigureOut">
               <a:rPr lang="fr-FR" smtClean="0"/>
-              <a:t>10/09/2025</a:t>
+              <a:t>19/11/2025</a:t>
             </a:fld>
             <a:endParaRPr lang="fr-FR"/>
           </a:p>
@@ -1973,7 +1973,7 @@
           <a:p>
             <a:fld id="{619190FE-5B53-445B-A2B6-CFE3664BDC25}" type="datetimeFigureOut">
               <a:rPr lang="fr-FR" smtClean="0"/>
-              <a:t>10/09/2025</a:t>
+              <a:t>19/11/2025</a:t>
             </a:fld>
             <a:endParaRPr lang="fr-FR"/>
           </a:p>
@@ -2086,7 +2086,7 @@
           <a:p>
             <a:fld id="{619190FE-5B53-445B-A2B6-CFE3664BDC25}" type="datetimeFigureOut">
               <a:rPr lang="fr-FR" smtClean="0"/>
-              <a:t>10/09/2025</a:t>
+              <a:t>19/11/2025</a:t>
             </a:fld>
             <a:endParaRPr lang="fr-FR"/>
           </a:p>
@@ -2399,7 +2399,7 @@
           <a:p>
             <a:fld id="{619190FE-5B53-445B-A2B6-CFE3664BDC25}" type="datetimeFigureOut">
               <a:rPr lang="fr-FR" smtClean="0"/>
-              <a:t>10/09/2025</a:t>
+              <a:t>19/11/2025</a:t>
             </a:fld>
             <a:endParaRPr lang="fr-FR"/>
           </a:p>
@@ -2688,7 +2688,7 @@
           <a:p>
             <a:fld id="{619190FE-5B53-445B-A2B6-CFE3664BDC25}" type="datetimeFigureOut">
               <a:rPr lang="fr-FR" smtClean="0"/>
-              <a:t>10/09/2025</a:t>
+              <a:t>19/11/2025</a:t>
             </a:fld>
             <a:endParaRPr lang="fr-FR"/>
           </a:p>
@@ -2931,7 +2931,7 @@
           <a:p>
             <a:fld id="{619190FE-5B53-445B-A2B6-CFE3664BDC25}" type="datetimeFigureOut">
               <a:rPr lang="fr-FR" smtClean="0"/>
-              <a:t>10/09/2025</a:t>
+              <a:t>19/11/2025</a:t>
             </a:fld>
             <a:endParaRPr lang="fr-FR"/>
           </a:p>
@@ -3350,3098 +3350,10 @@
       </p:grpSpPr>
       <p:grpSp>
         <p:nvGrpSpPr>
-          <p:cNvPr id="116" name="Group 115">
-            <a:extLst>
-              <a:ext uri="{FF2B5EF4-FFF2-40B4-BE49-F238E27FC236}">
-                <a16:creationId xmlns:a16="http://schemas.microsoft.com/office/drawing/2014/main" id="{02AB8DBE-1516-EC48-E61A-184B6A59339B}"/>
-              </a:ext>
-            </a:extLst>
-          </p:cNvPr>
-          <p:cNvGrpSpPr/>
-          <p:nvPr/>
-        </p:nvGrpSpPr>
-        <p:grpSpPr>
-          <a:xfrm>
-            <a:off x="2596262" y="905585"/>
-            <a:ext cx="4698239" cy="3790026"/>
-            <a:chOff x="2596262" y="905585"/>
-            <a:chExt cx="4698239" cy="3790026"/>
-          </a:xfrm>
-        </p:grpSpPr>
-        <p:grpSp>
-          <p:nvGrpSpPr>
-            <p:cNvPr id="31" name="Group 30">
-              <a:extLst>
-                <a:ext uri="{FF2B5EF4-FFF2-40B4-BE49-F238E27FC236}">
-                  <a16:creationId xmlns:a16="http://schemas.microsoft.com/office/drawing/2014/main" id="{785024DB-49A4-CE9F-DC40-55045011A618}"/>
-                </a:ext>
-              </a:extLst>
-            </p:cNvPr>
-            <p:cNvGrpSpPr/>
-            <p:nvPr/>
-          </p:nvGrpSpPr>
-          <p:grpSpPr>
-            <a:xfrm>
-              <a:off x="4105274" y="1544541"/>
-              <a:ext cx="710566" cy="2516919"/>
-              <a:chOff x="6436994" y="2687541"/>
-              <a:chExt cx="429123" cy="1501969"/>
-            </a:xfrm>
-          </p:grpSpPr>
-          <p:sp>
-            <p:nvSpPr>
-              <p:cNvPr id="5" name="Rectangle 4">
-                <a:extLst>
-                  <a:ext uri="{FF2B5EF4-FFF2-40B4-BE49-F238E27FC236}">
-                    <a16:creationId xmlns:a16="http://schemas.microsoft.com/office/drawing/2014/main" id="{B91BCFDF-EA80-AC89-9D45-692FAC670553}"/>
-                  </a:ext>
-                </a:extLst>
-              </p:cNvPr>
-              <p:cNvSpPr/>
-              <p:nvPr/>
-            </p:nvSpPr>
-            <p:spPr>
-              <a:xfrm>
-                <a:off x="6438260" y="2798859"/>
-                <a:ext cx="427382" cy="1296063"/>
-              </a:xfrm>
-              <a:prstGeom prst="rect">
-                <a:avLst/>
-              </a:prstGeom>
-              <a:solidFill>
-                <a:schemeClr val="bg2"/>
-              </a:solidFill>
-              <a:ln>
-                <a:noFill/>
-              </a:ln>
-            </p:spPr>
-            <p:style>
-              <a:lnRef idx="2">
-                <a:schemeClr val="accent1">
-                  <a:shade val="15000"/>
-                </a:schemeClr>
-              </a:lnRef>
-              <a:fillRef idx="1">
-                <a:schemeClr val="accent1"/>
-              </a:fillRef>
-              <a:effectRef idx="0">
-                <a:schemeClr val="accent1"/>
-              </a:effectRef>
-              <a:fontRef idx="minor">
-                <a:schemeClr val="lt1"/>
-              </a:fontRef>
-            </p:style>
-            <p:txBody>
-              <a:bodyPr rtlCol="0" anchor="ctr"/>
-              <a:lstStyle/>
-              <a:p>
-                <a:pPr algn="ctr"/>
-                <a:endParaRPr lang="fr-FR"/>
-              </a:p>
-            </p:txBody>
-          </p:sp>
-          <p:sp>
-            <p:nvSpPr>
-              <p:cNvPr id="4" name="Oval 3">
-                <a:extLst>
-                  <a:ext uri="{FF2B5EF4-FFF2-40B4-BE49-F238E27FC236}">
-                    <a16:creationId xmlns:a16="http://schemas.microsoft.com/office/drawing/2014/main" id="{C6C99AAB-DEF2-3B77-0388-F53BF4924808}"/>
-                  </a:ext>
-                </a:extLst>
-              </p:cNvPr>
-              <p:cNvSpPr/>
-              <p:nvPr/>
-            </p:nvSpPr>
-            <p:spPr>
-              <a:xfrm>
-                <a:off x="6438260" y="2687541"/>
-                <a:ext cx="427382" cy="222637"/>
-              </a:xfrm>
-              <a:prstGeom prst="ellipse">
-                <a:avLst/>
-              </a:prstGeom>
-              <a:solidFill>
-                <a:schemeClr val="bg2"/>
-              </a:solidFill>
-              <a:ln w="6350">
-                <a:solidFill>
-                  <a:schemeClr val="bg1">
-                    <a:lumMod val="95000"/>
-                  </a:schemeClr>
-                </a:solidFill>
-              </a:ln>
-            </p:spPr>
-            <p:style>
-              <a:lnRef idx="2">
-                <a:schemeClr val="accent1">
-                  <a:shade val="15000"/>
-                </a:schemeClr>
-              </a:lnRef>
-              <a:fillRef idx="1">
-                <a:schemeClr val="accent1"/>
-              </a:fillRef>
-              <a:effectRef idx="0">
-                <a:schemeClr val="accent1"/>
-              </a:effectRef>
-              <a:fontRef idx="minor">
-                <a:schemeClr val="lt1"/>
-              </a:fontRef>
-            </p:style>
-            <p:txBody>
-              <a:bodyPr rtlCol="0" anchor="ctr"/>
-              <a:lstStyle/>
-              <a:p>
-                <a:pPr algn="ctr"/>
-                <a:r>
-                  <a:rPr lang="fr-FR" sz="1100" b="1" dirty="0">
-                    <a:solidFill>
-                      <a:schemeClr val="tx1"/>
-                    </a:solidFill>
-                  </a:rPr>
-                  <a:t>N</a:t>
-                </a:r>
-              </a:p>
-            </p:txBody>
-          </p:sp>
-          <p:sp>
-            <p:nvSpPr>
-              <p:cNvPr id="19" name="Freeform: Shape 18">
-                <a:extLst>
-                  <a:ext uri="{FF2B5EF4-FFF2-40B4-BE49-F238E27FC236}">
-                    <a16:creationId xmlns:a16="http://schemas.microsoft.com/office/drawing/2014/main" id="{BD8DEEE9-595C-06F2-9B7C-DCAA0A3E3BB6}"/>
-                  </a:ext>
-                </a:extLst>
-              </p:cNvPr>
-              <p:cNvSpPr/>
-              <p:nvPr/>
-            </p:nvSpPr>
-            <p:spPr>
-              <a:xfrm>
-                <a:off x="6436995" y="3061335"/>
-                <a:ext cx="421005" cy="24791"/>
-              </a:xfrm>
-              <a:custGeom>
-                <a:avLst/>
-                <a:gdLst>
-                  <a:gd name="connsiteX0" fmla="*/ 0 w 421005"/>
-                  <a:gd name="connsiteY0" fmla="*/ 0 h 24791"/>
-                  <a:gd name="connsiteX1" fmla="*/ 219075 w 421005"/>
-                  <a:gd name="connsiteY1" fmla="*/ 24765 h 24791"/>
-                  <a:gd name="connsiteX2" fmla="*/ 421005 w 421005"/>
-                  <a:gd name="connsiteY2" fmla="*/ 3810 h 24791"/>
-                </a:gdLst>
-                <a:ahLst/>
-                <a:cxnLst>
-                  <a:cxn ang="0">
-                    <a:pos x="connsiteX0" y="connsiteY0"/>
-                  </a:cxn>
-                  <a:cxn ang="0">
-                    <a:pos x="connsiteX1" y="connsiteY1"/>
-                  </a:cxn>
-                  <a:cxn ang="0">
-                    <a:pos x="connsiteX2" y="connsiteY2"/>
-                  </a:cxn>
-                </a:cxnLst>
-                <a:rect l="l" t="t" r="r" b="b"/>
-                <a:pathLst>
-                  <a:path w="421005" h="24791">
-                    <a:moveTo>
-                      <a:pt x="0" y="0"/>
-                    </a:moveTo>
-                    <a:cubicBezTo>
-                      <a:pt x="74454" y="12065"/>
-                      <a:pt x="148908" y="24130"/>
-                      <a:pt x="219075" y="24765"/>
-                    </a:cubicBezTo>
-                    <a:cubicBezTo>
-                      <a:pt x="289242" y="25400"/>
-                      <a:pt x="355123" y="14605"/>
-                      <a:pt x="421005" y="3810"/>
-                    </a:cubicBezTo>
-                  </a:path>
-                </a:pathLst>
-              </a:custGeom>
-            </p:spPr>
-            <p:style>
-              <a:lnRef idx="1">
-                <a:schemeClr val="accent2"/>
-              </a:lnRef>
-              <a:fillRef idx="0">
-                <a:schemeClr val="accent2"/>
-              </a:fillRef>
-              <a:effectRef idx="0">
-                <a:schemeClr val="accent2"/>
-              </a:effectRef>
-              <a:fontRef idx="minor">
-                <a:schemeClr val="tx1"/>
-              </a:fontRef>
-            </p:style>
-            <p:txBody>
-              <a:bodyPr rtlCol="0" anchor="ctr"/>
-              <a:lstStyle/>
-              <a:p>
-                <a:pPr algn="ctr"/>
-                <a:endParaRPr lang="fr-FR"/>
-              </a:p>
-            </p:txBody>
-          </p:sp>
-          <p:sp>
-            <p:nvSpPr>
-              <p:cNvPr id="20" name="Freeform: Shape 19">
-                <a:extLst>
-                  <a:ext uri="{FF2B5EF4-FFF2-40B4-BE49-F238E27FC236}">
-                    <a16:creationId xmlns:a16="http://schemas.microsoft.com/office/drawing/2014/main" id="{C108FF23-E7CB-6DE7-A5B9-DFCF6DB2E536}"/>
-                  </a:ext>
-                </a:extLst>
-              </p:cNvPr>
-              <p:cNvSpPr/>
-              <p:nvPr/>
-            </p:nvSpPr>
-            <p:spPr>
-              <a:xfrm>
-                <a:off x="6436994" y="3155509"/>
-                <a:ext cx="421005" cy="24791"/>
-              </a:xfrm>
-              <a:custGeom>
-                <a:avLst/>
-                <a:gdLst>
-                  <a:gd name="connsiteX0" fmla="*/ 0 w 421005"/>
-                  <a:gd name="connsiteY0" fmla="*/ 0 h 24791"/>
-                  <a:gd name="connsiteX1" fmla="*/ 219075 w 421005"/>
-                  <a:gd name="connsiteY1" fmla="*/ 24765 h 24791"/>
-                  <a:gd name="connsiteX2" fmla="*/ 421005 w 421005"/>
-                  <a:gd name="connsiteY2" fmla="*/ 3810 h 24791"/>
-                </a:gdLst>
-                <a:ahLst/>
-                <a:cxnLst>
-                  <a:cxn ang="0">
-                    <a:pos x="connsiteX0" y="connsiteY0"/>
-                  </a:cxn>
-                  <a:cxn ang="0">
-                    <a:pos x="connsiteX1" y="connsiteY1"/>
-                  </a:cxn>
-                  <a:cxn ang="0">
-                    <a:pos x="connsiteX2" y="connsiteY2"/>
-                  </a:cxn>
-                </a:cxnLst>
-                <a:rect l="l" t="t" r="r" b="b"/>
-                <a:pathLst>
-                  <a:path w="421005" h="24791">
-                    <a:moveTo>
-                      <a:pt x="0" y="0"/>
-                    </a:moveTo>
-                    <a:cubicBezTo>
-                      <a:pt x="74454" y="12065"/>
-                      <a:pt x="148908" y="24130"/>
-                      <a:pt x="219075" y="24765"/>
-                    </a:cubicBezTo>
-                    <a:cubicBezTo>
-                      <a:pt x="289242" y="25400"/>
-                      <a:pt x="355123" y="14605"/>
-                      <a:pt x="421005" y="3810"/>
-                    </a:cubicBezTo>
-                  </a:path>
-                </a:pathLst>
-              </a:custGeom>
-            </p:spPr>
-            <p:style>
-              <a:lnRef idx="1">
-                <a:schemeClr val="accent2"/>
-              </a:lnRef>
-              <a:fillRef idx="0">
-                <a:schemeClr val="accent2"/>
-              </a:fillRef>
-              <a:effectRef idx="0">
-                <a:schemeClr val="accent2"/>
-              </a:effectRef>
-              <a:fontRef idx="minor">
-                <a:schemeClr val="tx1"/>
-              </a:fontRef>
-            </p:style>
-            <p:txBody>
-              <a:bodyPr rtlCol="0" anchor="ctr"/>
-              <a:lstStyle/>
-              <a:p>
-                <a:pPr algn="ctr"/>
-                <a:endParaRPr lang="fr-FR"/>
-              </a:p>
-            </p:txBody>
-          </p:sp>
-          <p:sp>
-            <p:nvSpPr>
-              <p:cNvPr id="21" name="Freeform: Shape 20">
-                <a:extLst>
-                  <a:ext uri="{FF2B5EF4-FFF2-40B4-BE49-F238E27FC236}">
-                    <a16:creationId xmlns:a16="http://schemas.microsoft.com/office/drawing/2014/main" id="{26EA9AB3-C42D-A042-1B92-3ED337EEFF22}"/>
-                  </a:ext>
-                </a:extLst>
-              </p:cNvPr>
-              <p:cNvSpPr/>
-              <p:nvPr/>
-            </p:nvSpPr>
-            <p:spPr>
-              <a:xfrm>
-                <a:off x="6436994" y="3249683"/>
-                <a:ext cx="421005" cy="24791"/>
-              </a:xfrm>
-              <a:custGeom>
-                <a:avLst/>
-                <a:gdLst>
-                  <a:gd name="connsiteX0" fmla="*/ 0 w 421005"/>
-                  <a:gd name="connsiteY0" fmla="*/ 0 h 24791"/>
-                  <a:gd name="connsiteX1" fmla="*/ 219075 w 421005"/>
-                  <a:gd name="connsiteY1" fmla="*/ 24765 h 24791"/>
-                  <a:gd name="connsiteX2" fmla="*/ 421005 w 421005"/>
-                  <a:gd name="connsiteY2" fmla="*/ 3810 h 24791"/>
-                </a:gdLst>
-                <a:ahLst/>
-                <a:cxnLst>
-                  <a:cxn ang="0">
-                    <a:pos x="connsiteX0" y="connsiteY0"/>
-                  </a:cxn>
-                  <a:cxn ang="0">
-                    <a:pos x="connsiteX1" y="connsiteY1"/>
-                  </a:cxn>
-                  <a:cxn ang="0">
-                    <a:pos x="connsiteX2" y="connsiteY2"/>
-                  </a:cxn>
-                </a:cxnLst>
-                <a:rect l="l" t="t" r="r" b="b"/>
-                <a:pathLst>
-                  <a:path w="421005" h="24791">
-                    <a:moveTo>
-                      <a:pt x="0" y="0"/>
-                    </a:moveTo>
-                    <a:cubicBezTo>
-                      <a:pt x="74454" y="12065"/>
-                      <a:pt x="148908" y="24130"/>
-                      <a:pt x="219075" y="24765"/>
-                    </a:cubicBezTo>
-                    <a:cubicBezTo>
-                      <a:pt x="289242" y="25400"/>
-                      <a:pt x="355123" y="14605"/>
-                      <a:pt x="421005" y="3810"/>
-                    </a:cubicBezTo>
-                  </a:path>
-                </a:pathLst>
-              </a:custGeom>
-            </p:spPr>
-            <p:style>
-              <a:lnRef idx="1">
-                <a:schemeClr val="accent2"/>
-              </a:lnRef>
-              <a:fillRef idx="0">
-                <a:schemeClr val="accent2"/>
-              </a:fillRef>
-              <a:effectRef idx="0">
-                <a:schemeClr val="accent2"/>
-              </a:effectRef>
-              <a:fontRef idx="minor">
-                <a:schemeClr val="tx1"/>
-              </a:fontRef>
-            </p:style>
-            <p:txBody>
-              <a:bodyPr rtlCol="0" anchor="ctr"/>
-              <a:lstStyle/>
-              <a:p>
-                <a:pPr algn="ctr"/>
-                <a:endParaRPr lang="fr-FR"/>
-              </a:p>
-            </p:txBody>
-          </p:sp>
-          <p:sp>
-            <p:nvSpPr>
-              <p:cNvPr id="22" name="Freeform: Shape 21">
-                <a:extLst>
-                  <a:ext uri="{FF2B5EF4-FFF2-40B4-BE49-F238E27FC236}">
-                    <a16:creationId xmlns:a16="http://schemas.microsoft.com/office/drawing/2014/main" id="{F30638CD-42CC-7A5C-1976-64C466A8C4CB}"/>
-                  </a:ext>
-                </a:extLst>
-              </p:cNvPr>
-              <p:cNvSpPr/>
-              <p:nvPr/>
-            </p:nvSpPr>
-            <p:spPr>
-              <a:xfrm>
-                <a:off x="6436994" y="3349567"/>
-                <a:ext cx="421005" cy="24791"/>
-              </a:xfrm>
-              <a:custGeom>
-                <a:avLst/>
-                <a:gdLst>
-                  <a:gd name="connsiteX0" fmla="*/ 0 w 421005"/>
-                  <a:gd name="connsiteY0" fmla="*/ 0 h 24791"/>
-                  <a:gd name="connsiteX1" fmla="*/ 219075 w 421005"/>
-                  <a:gd name="connsiteY1" fmla="*/ 24765 h 24791"/>
-                  <a:gd name="connsiteX2" fmla="*/ 421005 w 421005"/>
-                  <a:gd name="connsiteY2" fmla="*/ 3810 h 24791"/>
-                </a:gdLst>
-                <a:ahLst/>
-                <a:cxnLst>
-                  <a:cxn ang="0">
-                    <a:pos x="connsiteX0" y="connsiteY0"/>
-                  </a:cxn>
-                  <a:cxn ang="0">
-                    <a:pos x="connsiteX1" y="connsiteY1"/>
-                  </a:cxn>
-                  <a:cxn ang="0">
-                    <a:pos x="connsiteX2" y="connsiteY2"/>
-                  </a:cxn>
-                </a:cxnLst>
-                <a:rect l="l" t="t" r="r" b="b"/>
-                <a:pathLst>
-                  <a:path w="421005" h="24791">
-                    <a:moveTo>
-                      <a:pt x="0" y="0"/>
-                    </a:moveTo>
-                    <a:cubicBezTo>
-                      <a:pt x="74454" y="12065"/>
-                      <a:pt x="148908" y="24130"/>
-                      <a:pt x="219075" y="24765"/>
-                    </a:cubicBezTo>
-                    <a:cubicBezTo>
-                      <a:pt x="289242" y="25400"/>
-                      <a:pt x="355123" y="14605"/>
-                      <a:pt x="421005" y="3810"/>
-                    </a:cubicBezTo>
-                  </a:path>
-                </a:pathLst>
-              </a:custGeom>
-            </p:spPr>
-            <p:style>
-              <a:lnRef idx="1">
-                <a:schemeClr val="accent2"/>
-              </a:lnRef>
-              <a:fillRef idx="0">
-                <a:schemeClr val="accent2"/>
-              </a:fillRef>
-              <a:effectRef idx="0">
-                <a:schemeClr val="accent2"/>
-              </a:effectRef>
-              <a:fontRef idx="minor">
-                <a:schemeClr val="tx1"/>
-              </a:fontRef>
-            </p:style>
-            <p:txBody>
-              <a:bodyPr rtlCol="0" anchor="ctr"/>
-              <a:lstStyle/>
-              <a:p>
-                <a:pPr algn="ctr"/>
-                <a:endParaRPr lang="fr-FR"/>
-              </a:p>
-            </p:txBody>
-          </p:sp>
-          <p:sp>
-            <p:nvSpPr>
-              <p:cNvPr id="23" name="Freeform: Shape 22">
-                <a:extLst>
-                  <a:ext uri="{FF2B5EF4-FFF2-40B4-BE49-F238E27FC236}">
-                    <a16:creationId xmlns:a16="http://schemas.microsoft.com/office/drawing/2014/main" id="{DD10DA60-E38F-6332-9D82-FC2B1E01BABE}"/>
-                  </a:ext>
-                </a:extLst>
-              </p:cNvPr>
-              <p:cNvSpPr/>
-              <p:nvPr/>
-            </p:nvSpPr>
-            <p:spPr>
-              <a:xfrm>
-                <a:off x="6436994" y="3451766"/>
-                <a:ext cx="421005" cy="24791"/>
-              </a:xfrm>
-              <a:custGeom>
-                <a:avLst/>
-                <a:gdLst>
-                  <a:gd name="connsiteX0" fmla="*/ 0 w 421005"/>
-                  <a:gd name="connsiteY0" fmla="*/ 0 h 24791"/>
-                  <a:gd name="connsiteX1" fmla="*/ 219075 w 421005"/>
-                  <a:gd name="connsiteY1" fmla="*/ 24765 h 24791"/>
-                  <a:gd name="connsiteX2" fmla="*/ 421005 w 421005"/>
-                  <a:gd name="connsiteY2" fmla="*/ 3810 h 24791"/>
-                </a:gdLst>
-                <a:ahLst/>
-                <a:cxnLst>
-                  <a:cxn ang="0">
-                    <a:pos x="connsiteX0" y="connsiteY0"/>
-                  </a:cxn>
-                  <a:cxn ang="0">
-                    <a:pos x="connsiteX1" y="connsiteY1"/>
-                  </a:cxn>
-                  <a:cxn ang="0">
-                    <a:pos x="connsiteX2" y="connsiteY2"/>
-                  </a:cxn>
-                </a:cxnLst>
-                <a:rect l="l" t="t" r="r" b="b"/>
-                <a:pathLst>
-                  <a:path w="421005" h="24791">
-                    <a:moveTo>
-                      <a:pt x="0" y="0"/>
-                    </a:moveTo>
-                    <a:cubicBezTo>
-                      <a:pt x="74454" y="12065"/>
-                      <a:pt x="148908" y="24130"/>
-                      <a:pt x="219075" y="24765"/>
-                    </a:cubicBezTo>
-                    <a:cubicBezTo>
-                      <a:pt x="289242" y="25400"/>
-                      <a:pt x="355123" y="14605"/>
-                      <a:pt x="421005" y="3810"/>
-                    </a:cubicBezTo>
-                  </a:path>
-                </a:pathLst>
-              </a:custGeom>
-            </p:spPr>
-            <p:style>
-              <a:lnRef idx="1">
-                <a:schemeClr val="accent2"/>
-              </a:lnRef>
-              <a:fillRef idx="0">
-                <a:schemeClr val="accent2"/>
-              </a:fillRef>
-              <a:effectRef idx="0">
-                <a:schemeClr val="accent2"/>
-              </a:effectRef>
-              <a:fontRef idx="minor">
-                <a:schemeClr val="tx1"/>
-              </a:fontRef>
-            </p:style>
-            <p:txBody>
-              <a:bodyPr rtlCol="0" anchor="ctr"/>
-              <a:lstStyle/>
-              <a:p>
-                <a:pPr algn="ctr"/>
-                <a:endParaRPr lang="fr-FR"/>
-              </a:p>
-            </p:txBody>
-          </p:sp>
-          <p:sp>
-            <p:nvSpPr>
-              <p:cNvPr id="24" name="Freeform: Shape 23">
-                <a:extLst>
-                  <a:ext uri="{FF2B5EF4-FFF2-40B4-BE49-F238E27FC236}">
-                    <a16:creationId xmlns:a16="http://schemas.microsoft.com/office/drawing/2014/main" id="{9F8F694C-F7E7-396D-0ED7-47F5D5C0FA12}"/>
-                  </a:ext>
-                </a:extLst>
-              </p:cNvPr>
-              <p:cNvSpPr/>
-              <p:nvPr/>
-            </p:nvSpPr>
-            <p:spPr>
-              <a:xfrm>
-                <a:off x="6436994" y="3550155"/>
-                <a:ext cx="421005" cy="24791"/>
-              </a:xfrm>
-              <a:custGeom>
-                <a:avLst/>
-                <a:gdLst>
-                  <a:gd name="connsiteX0" fmla="*/ 0 w 421005"/>
-                  <a:gd name="connsiteY0" fmla="*/ 0 h 24791"/>
-                  <a:gd name="connsiteX1" fmla="*/ 219075 w 421005"/>
-                  <a:gd name="connsiteY1" fmla="*/ 24765 h 24791"/>
-                  <a:gd name="connsiteX2" fmla="*/ 421005 w 421005"/>
-                  <a:gd name="connsiteY2" fmla="*/ 3810 h 24791"/>
-                </a:gdLst>
-                <a:ahLst/>
-                <a:cxnLst>
-                  <a:cxn ang="0">
-                    <a:pos x="connsiteX0" y="connsiteY0"/>
-                  </a:cxn>
-                  <a:cxn ang="0">
-                    <a:pos x="connsiteX1" y="connsiteY1"/>
-                  </a:cxn>
-                  <a:cxn ang="0">
-                    <a:pos x="connsiteX2" y="connsiteY2"/>
-                  </a:cxn>
-                </a:cxnLst>
-                <a:rect l="l" t="t" r="r" b="b"/>
-                <a:pathLst>
-                  <a:path w="421005" h="24791">
-                    <a:moveTo>
-                      <a:pt x="0" y="0"/>
-                    </a:moveTo>
-                    <a:cubicBezTo>
-                      <a:pt x="74454" y="12065"/>
-                      <a:pt x="148908" y="24130"/>
-                      <a:pt x="219075" y="24765"/>
-                    </a:cubicBezTo>
-                    <a:cubicBezTo>
-                      <a:pt x="289242" y="25400"/>
-                      <a:pt x="355123" y="14605"/>
-                      <a:pt x="421005" y="3810"/>
-                    </a:cubicBezTo>
-                  </a:path>
-                </a:pathLst>
-              </a:custGeom>
-            </p:spPr>
-            <p:style>
-              <a:lnRef idx="1">
-                <a:schemeClr val="accent2"/>
-              </a:lnRef>
-              <a:fillRef idx="0">
-                <a:schemeClr val="accent2"/>
-              </a:fillRef>
-              <a:effectRef idx="0">
-                <a:schemeClr val="accent2"/>
-              </a:effectRef>
-              <a:fontRef idx="minor">
-                <a:schemeClr val="tx1"/>
-              </a:fontRef>
-            </p:style>
-            <p:txBody>
-              <a:bodyPr rtlCol="0" anchor="ctr"/>
-              <a:lstStyle/>
-              <a:p>
-                <a:pPr algn="ctr"/>
-                <a:endParaRPr lang="fr-FR"/>
-              </a:p>
-            </p:txBody>
-          </p:sp>
-          <p:sp>
-            <p:nvSpPr>
-              <p:cNvPr id="25" name="Freeform: Shape 24">
-                <a:extLst>
-                  <a:ext uri="{FF2B5EF4-FFF2-40B4-BE49-F238E27FC236}">
-                    <a16:creationId xmlns:a16="http://schemas.microsoft.com/office/drawing/2014/main" id="{F646A30C-5935-E3DC-57FD-3876459449CC}"/>
-                  </a:ext>
-                </a:extLst>
-              </p:cNvPr>
-              <p:cNvSpPr/>
-              <p:nvPr/>
-            </p:nvSpPr>
-            <p:spPr>
-              <a:xfrm>
-                <a:off x="6438900" y="3634740"/>
-                <a:ext cx="421005" cy="24791"/>
-              </a:xfrm>
-              <a:custGeom>
-                <a:avLst/>
-                <a:gdLst>
-                  <a:gd name="connsiteX0" fmla="*/ 0 w 421005"/>
-                  <a:gd name="connsiteY0" fmla="*/ 0 h 24791"/>
-                  <a:gd name="connsiteX1" fmla="*/ 219075 w 421005"/>
-                  <a:gd name="connsiteY1" fmla="*/ 24765 h 24791"/>
-                  <a:gd name="connsiteX2" fmla="*/ 421005 w 421005"/>
-                  <a:gd name="connsiteY2" fmla="*/ 3810 h 24791"/>
-                </a:gdLst>
-                <a:ahLst/>
-                <a:cxnLst>
-                  <a:cxn ang="0">
-                    <a:pos x="connsiteX0" y="connsiteY0"/>
-                  </a:cxn>
-                  <a:cxn ang="0">
-                    <a:pos x="connsiteX1" y="connsiteY1"/>
-                  </a:cxn>
-                  <a:cxn ang="0">
-                    <a:pos x="connsiteX2" y="connsiteY2"/>
-                  </a:cxn>
-                </a:cxnLst>
-                <a:rect l="l" t="t" r="r" b="b"/>
-                <a:pathLst>
-                  <a:path w="421005" h="24791">
-                    <a:moveTo>
-                      <a:pt x="0" y="0"/>
-                    </a:moveTo>
-                    <a:cubicBezTo>
-                      <a:pt x="74454" y="12065"/>
-                      <a:pt x="148908" y="24130"/>
-                      <a:pt x="219075" y="24765"/>
-                    </a:cubicBezTo>
-                    <a:cubicBezTo>
-                      <a:pt x="289242" y="25400"/>
-                      <a:pt x="355123" y="14605"/>
-                      <a:pt x="421005" y="3810"/>
-                    </a:cubicBezTo>
-                  </a:path>
-                </a:pathLst>
-              </a:custGeom>
-            </p:spPr>
-            <p:style>
-              <a:lnRef idx="1">
-                <a:schemeClr val="accent2"/>
-              </a:lnRef>
-              <a:fillRef idx="0">
-                <a:schemeClr val="accent2"/>
-              </a:fillRef>
-              <a:effectRef idx="0">
-                <a:schemeClr val="accent2"/>
-              </a:effectRef>
-              <a:fontRef idx="minor">
-                <a:schemeClr val="tx1"/>
-              </a:fontRef>
-            </p:style>
-            <p:txBody>
-              <a:bodyPr rtlCol="0" anchor="ctr"/>
-              <a:lstStyle/>
-              <a:p>
-                <a:pPr algn="ctr"/>
-                <a:endParaRPr lang="fr-FR"/>
-              </a:p>
-            </p:txBody>
-          </p:sp>
-          <p:sp>
-            <p:nvSpPr>
-              <p:cNvPr id="26" name="Freeform: Shape 25">
-                <a:extLst>
-                  <a:ext uri="{FF2B5EF4-FFF2-40B4-BE49-F238E27FC236}">
-                    <a16:creationId xmlns:a16="http://schemas.microsoft.com/office/drawing/2014/main" id="{A3C43178-88E0-26E0-983E-A5F8BCE59B95}"/>
-                  </a:ext>
-                </a:extLst>
-              </p:cNvPr>
-              <p:cNvSpPr/>
-              <p:nvPr/>
-            </p:nvSpPr>
-            <p:spPr>
-              <a:xfrm>
-                <a:off x="6438899" y="3728914"/>
-                <a:ext cx="421005" cy="24791"/>
-              </a:xfrm>
-              <a:custGeom>
-                <a:avLst/>
-                <a:gdLst>
-                  <a:gd name="connsiteX0" fmla="*/ 0 w 421005"/>
-                  <a:gd name="connsiteY0" fmla="*/ 0 h 24791"/>
-                  <a:gd name="connsiteX1" fmla="*/ 219075 w 421005"/>
-                  <a:gd name="connsiteY1" fmla="*/ 24765 h 24791"/>
-                  <a:gd name="connsiteX2" fmla="*/ 421005 w 421005"/>
-                  <a:gd name="connsiteY2" fmla="*/ 3810 h 24791"/>
-                </a:gdLst>
-                <a:ahLst/>
-                <a:cxnLst>
-                  <a:cxn ang="0">
-                    <a:pos x="connsiteX0" y="connsiteY0"/>
-                  </a:cxn>
-                  <a:cxn ang="0">
-                    <a:pos x="connsiteX1" y="connsiteY1"/>
-                  </a:cxn>
-                  <a:cxn ang="0">
-                    <a:pos x="connsiteX2" y="connsiteY2"/>
-                  </a:cxn>
-                </a:cxnLst>
-                <a:rect l="l" t="t" r="r" b="b"/>
-                <a:pathLst>
-                  <a:path w="421005" h="24791">
-                    <a:moveTo>
-                      <a:pt x="0" y="0"/>
-                    </a:moveTo>
-                    <a:cubicBezTo>
-                      <a:pt x="74454" y="12065"/>
-                      <a:pt x="148908" y="24130"/>
-                      <a:pt x="219075" y="24765"/>
-                    </a:cubicBezTo>
-                    <a:cubicBezTo>
-                      <a:pt x="289242" y="25400"/>
-                      <a:pt x="355123" y="14605"/>
-                      <a:pt x="421005" y="3810"/>
-                    </a:cubicBezTo>
-                  </a:path>
-                </a:pathLst>
-              </a:custGeom>
-            </p:spPr>
-            <p:style>
-              <a:lnRef idx="1">
-                <a:schemeClr val="accent2"/>
-              </a:lnRef>
-              <a:fillRef idx="0">
-                <a:schemeClr val="accent2"/>
-              </a:fillRef>
-              <a:effectRef idx="0">
-                <a:schemeClr val="accent2"/>
-              </a:effectRef>
-              <a:fontRef idx="minor">
-                <a:schemeClr val="tx1"/>
-              </a:fontRef>
-            </p:style>
-            <p:txBody>
-              <a:bodyPr rtlCol="0" anchor="ctr"/>
-              <a:lstStyle/>
-              <a:p>
-                <a:pPr algn="ctr"/>
-                <a:endParaRPr lang="fr-FR"/>
-              </a:p>
-            </p:txBody>
-          </p:sp>
-          <p:sp>
-            <p:nvSpPr>
-              <p:cNvPr id="27" name="Freeform: Shape 26">
-                <a:extLst>
-                  <a:ext uri="{FF2B5EF4-FFF2-40B4-BE49-F238E27FC236}">
-                    <a16:creationId xmlns:a16="http://schemas.microsoft.com/office/drawing/2014/main" id="{6B9693ED-60C1-082B-DB57-4408A2828E96}"/>
-                  </a:ext>
-                </a:extLst>
-              </p:cNvPr>
-              <p:cNvSpPr/>
-              <p:nvPr/>
-            </p:nvSpPr>
-            <p:spPr>
-              <a:xfrm>
-                <a:off x="6438899" y="3823088"/>
-                <a:ext cx="421005" cy="24791"/>
-              </a:xfrm>
-              <a:custGeom>
-                <a:avLst/>
-                <a:gdLst>
-                  <a:gd name="connsiteX0" fmla="*/ 0 w 421005"/>
-                  <a:gd name="connsiteY0" fmla="*/ 0 h 24791"/>
-                  <a:gd name="connsiteX1" fmla="*/ 219075 w 421005"/>
-                  <a:gd name="connsiteY1" fmla="*/ 24765 h 24791"/>
-                  <a:gd name="connsiteX2" fmla="*/ 421005 w 421005"/>
-                  <a:gd name="connsiteY2" fmla="*/ 3810 h 24791"/>
-                </a:gdLst>
-                <a:ahLst/>
-                <a:cxnLst>
-                  <a:cxn ang="0">
-                    <a:pos x="connsiteX0" y="connsiteY0"/>
-                  </a:cxn>
-                  <a:cxn ang="0">
-                    <a:pos x="connsiteX1" y="connsiteY1"/>
-                  </a:cxn>
-                  <a:cxn ang="0">
-                    <a:pos x="connsiteX2" y="connsiteY2"/>
-                  </a:cxn>
-                </a:cxnLst>
-                <a:rect l="l" t="t" r="r" b="b"/>
-                <a:pathLst>
-                  <a:path w="421005" h="24791">
-                    <a:moveTo>
-                      <a:pt x="0" y="0"/>
-                    </a:moveTo>
-                    <a:cubicBezTo>
-                      <a:pt x="74454" y="12065"/>
-                      <a:pt x="148908" y="24130"/>
-                      <a:pt x="219075" y="24765"/>
-                    </a:cubicBezTo>
-                    <a:cubicBezTo>
-                      <a:pt x="289242" y="25400"/>
-                      <a:pt x="355123" y="14605"/>
-                      <a:pt x="421005" y="3810"/>
-                    </a:cubicBezTo>
-                  </a:path>
-                </a:pathLst>
-              </a:custGeom>
-            </p:spPr>
-            <p:style>
-              <a:lnRef idx="1">
-                <a:schemeClr val="accent2"/>
-              </a:lnRef>
-              <a:fillRef idx="0">
-                <a:schemeClr val="accent2"/>
-              </a:fillRef>
-              <a:effectRef idx="0">
-                <a:schemeClr val="accent2"/>
-              </a:effectRef>
-              <a:fontRef idx="minor">
-                <a:schemeClr val="tx1"/>
-              </a:fontRef>
-            </p:style>
-            <p:txBody>
-              <a:bodyPr rtlCol="0" anchor="ctr"/>
-              <a:lstStyle/>
-              <a:p>
-                <a:pPr algn="ctr"/>
-                <a:endParaRPr lang="fr-FR"/>
-              </a:p>
-            </p:txBody>
-          </p:sp>
-          <p:sp>
-            <p:nvSpPr>
-              <p:cNvPr id="28" name="Freeform: Shape 27">
-                <a:extLst>
-                  <a:ext uri="{FF2B5EF4-FFF2-40B4-BE49-F238E27FC236}">
-                    <a16:creationId xmlns:a16="http://schemas.microsoft.com/office/drawing/2014/main" id="{2C599F15-A677-5DBE-5285-8EEBE13F2D0C}"/>
-                  </a:ext>
-                </a:extLst>
-              </p:cNvPr>
-              <p:cNvSpPr/>
-              <p:nvPr/>
-            </p:nvSpPr>
-            <p:spPr>
-              <a:xfrm>
-                <a:off x="6438899" y="3922972"/>
-                <a:ext cx="421005" cy="24791"/>
-              </a:xfrm>
-              <a:custGeom>
-                <a:avLst/>
-                <a:gdLst>
-                  <a:gd name="connsiteX0" fmla="*/ 0 w 421005"/>
-                  <a:gd name="connsiteY0" fmla="*/ 0 h 24791"/>
-                  <a:gd name="connsiteX1" fmla="*/ 219075 w 421005"/>
-                  <a:gd name="connsiteY1" fmla="*/ 24765 h 24791"/>
-                  <a:gd name="connsiteX2" fmla="*/ 421005 w 421005"/>
-                  <a:gd name="connsiteY2" fmla="*/ 3810 h 24791"/>
-                </a:gdLst>
-                <a:ahLst/>
-                <a:cxnLst>
-                  <a:cxn ang="0">
-                    <a:pos x="connsiteX0" y="connsiteY0"/>
-                  </a:cxn>
-                  <a:cxn ang="0">
-                    <a:pos x="connsiteX1" y="connsiteY1"/>
-                  </a:cxn>
-                  <a:cxn ang="0">
-                    <a:pos x="connsiteX2" y="connsiteY2"/>
-                  </a:cxn>
-                </a:cxnLst>
-                <a:rect l="l" t="t" r="r" b="b"/>
-                <a:pathLst>
-                  <a:path w="421005" h="24791">
-                    <a:moveTo>
-                      <a:pt x="0" y="0"/>
-                    </a:moveTo>
-                    <a:cubicBezTo>
-                      <a:pt x="74454" y="12065"/>
-                      <a:pt x="148908" y="24130"/>
-                      <a:pt x="219075" y="24765"/>
-                    </a:cubicBezTo>
-                    <a:cubicBezTo>
-                      <a:pt x="289242" y="25400"/>
-                      <a:pt x="355123" y="14605"/>
-                      <a:pt x="421005" y="3810"/>
-                    </a:cubicBezTo>
-                  </a:path>
-                </a:pathLst>
-              </a:custGeom>
-            </p:spPr>
-            <p:style>
-              <a:lnRef idx="1">
-                <a:schemeClr val="accent2"/>
-              </a:lnRef>
-              <a:fillRef idx="0">
-                <a:schemeClr val="accent2"/>
-              </a:fillRef>
-              <a:effectRef idx="0">
-                <a:schemeClr val="accent2"/>
-              </a:effectRef>
-              <a:fontRef idx="minor">
-                <a:schemeClr val="tx1"/>
-              </a:fontRef>
-            </p:style>
-            <p:txBody>
-              <a:bodyPr rtlCol="0" anchor="ctr"/>
-              <a:lstStyle/>
-              <a:p>
-                <a:pPr algn="ctr"/>
-                <a:endParaRPr lang="fr-FR"/>
-              </a:p>
-            </p:txBody>
-          </p:sp>
-          <p:sp>
-            <p:nvSpPr>
-              <p:cNvPr id="6" name="Oval 5">
-                <a:extLst>
-                  <a:ext uri="{FF2B5EF4-FFF2-40B4-BE49-F238E27FC236}">
-                    <a16:creationId xmlns:a16="http://schemas.microsoft.com/office/drawing/2014/main" id="{0D4CF9DC-DCFB-B4AA-BF5D-4AA0FF2DD1DA}"/>
-                  </a:ext>
-                </a:extLst>
-              </p:cNvPr>
-              <p:cNvSpPr/>
-              <p:nvPr/>
-            </p:nvSpPr>
-            <p:spPr>
-              <a:xfrm>
-                <a:off x="6438735" y="3966873"/>
-                <a:ext cx="427382" cy="222637"/>
-              </a:xfrm>
-              <a:prstGeom prst="ellipse">
-                <a:avLst/>
-              </a:prstGeom>
-              <a:solidFill>
-                <a:schemeClr val="bg2"/>
-              </a:solidFill>
-              <a:ln>
-                <a:noFill/>
-              </a:ln>
-            </p:spPr>
-            <p:style>
-              <a:lnRef idx="2">
-                <a:schemeClr val="accent1">
-                  <a:shade val="15000"/>
-                </a:schemeClr>
-              </a:lnRef>
-              <a:fillRef idx="1">
-                <a:schemeClr val="accent1"/>
-              </a:fillRef>
-              <a:effectRef idx="0">
-                <a:schemeClr val="accent1"/>
-              </a:effectRef>
-              <a:fontRef idx="minor">
-                <a:schemeClr val="lt1"/>
-              </a:fontRef>
-            </p:style>
-            <p:txBody>
-              <a:bodyPr rtlCol="0" anchor="ctr"/>
-              <a:lstStyle/>
-              <a:p>
-                <a:pPr algn="ctr"/>
-                <a:r>
-                  <a:rPr lang="fr-FR" sz="1100" b="1" dirty="0">
-                    <a:solidFill>
-                      <a:schemeClr val="tx1"/>
-                    </a:solidFill>
-                  </a:rPr>
-                  <a:t>S</a:t>
-                </a:r>
-              </a:p>
-            </p:txBody>
-          </p:sp>
-        </p:grpSp>
-        <p:grpSp>
-          <p:nvGrpSpPr>
-            <p:cNvPr id="46" name="Group 45">
-              <a:extLst>
-                <a:ext uri="{FF2B5EF4-FFF2-40B4-BE49-F238E27FC236}">
-                  <a16:creationId xmlns:a16="http://schemas.microsoft.com/office/drawing/2014/main" id="{5E417193-AEED-414D-F123-FA03EC4B6581}"/>
-                </a:ext>
-              </a:extLst>
-            </p:cNvPr>
-            <p:cNvGrpSpPr/>
-            <p:nvPr/>
-          </p:nvGrpSpPr>
-          <p:grpSpPr>
-            <a:xfrm>
-              <a:off x="4802398" y="1544541"/>
-              <a:ext cx="710566" cy="2516919"/>
-              <a:chOff x="6436994" y="2687541"/>
-              <a:chExt cx="429123" cy="1501969"/>
-            </a:xfrm>
-          </p:grpSpPr>
-          <p:sp>
-            <p:nvSpPr>
-              <p:cNvPr id="47" name="Rectangle 46">
-                <a:extLst>
-                  <a:ext uri="{FF2B5EF4-FFF2-40B4-BE49-F238E27FC236}">
-                    <a16:creationId xmlns:a16="http://schemas.microsoft.com/office/drawing/2014/main" id="{E142F9DB-0DED-50AB-9840-E859630B1EB8}"/>
-                  </a:ext>
-                </a:extLst>
-              </p:cNvPr>
-              <p:cNvSpPr/>
-              <p:nvPr/>
-            </p:nvSpPr>
-            <p:spPr>
-              <a:xfrm>
-                <a:off x="6438260" y="2798859"/>
-                <a:ext cx="427382" cy="1296063"/>
-              </a:xfrm>
-              <a:prstGeom prst="rect">
-                <a:avLst/>
-              </a:prstGeom>
-              <a:solidFill>
-                <a:schemeClr val="bg2"/>
-              </a:solidFill>
-              <a:ln>
-                <a:noFill/>
-              </a:ln>
-            </p:spPr>
-            <p:style>
-              <a:lnRef idx="2">
-                <a:schemeClr val="accent1">
-                  <a:shade val="15000"/>
-                </a:schemeClr>
-              </a:lnRef>
-              <a:fillRef idx="1">
-                <a:schemeClr val="accent1"/>
-              </a:fillRef>
-              <a:effectRef idx="0">
-                <a:schemeClr val="accent1"/>
-              </a:effectRef>
-              <a:fontRef idx="minor">
-                <a:schemeClr val="lt1"/>
-              </a:fontRef>
-            </p:style>
-            <p:txBody>
-              <a:bodyPr rtlCol="0" anchor="ctr"/>
-              <a:lstStyle/>
-              <a:p>
-                <a:pPr algn="ctr"/>
-                <a:endParaRPr lang="fr-FR"/>
-              </a:p>
-            </p:txBody>
-          </p:sp>
-          <p:sp>
-            <p:nvSpPr>
-              <p:cNvPr id="48" name="Oval 47">
-                <a:extLst>
-                  <a:ext uri="{FF2B5EF4-FFF2-40B4-BE49-F238E27FC236}">
-                    <a16:creationId xmlns:a16="http://schemas.microsoft.com/office/drawing/2014/main" id="{A883E24D-9647-C740-683F-2B26C074528D}"/>
-                  </a:ext>
-                </a:extLst>
-              </p:cNvPr>
-              <p:cNvSpPr/>
-              <p:nvPr/>
-            </p:nvSpPr>
-            <p:spPr>
-              <a:xfrm>
-                <a:off x="6438260" y="2687541"/>
-                <a:ext cx="427382" cy="222637"/>
-              </a:xfrm>
-              <a:prstGeom prst="ellipse">
-                <a:avLst/>
-              </a:prstGeom>
-              <a:solidFill>
-                <a:schemeClr val="bg2"/>
-              </a:solidFill>
-              <a:ln w="6350">
-                <a:solidFill>
-                  <a:schemeClr val="bg1">
-                    <a:lumMod val="95000"/>
-                  </a:schemeClr>
-                </a:solidFill>
-              </a:ln>
-            </p:spPr>
-            <p:style>
-              <a:lnRef idx="2">
-                <a:schemeClr val="accent1">
-                  <a:shade val="15000"/>
-                </a:schemeClr>
-              </a:lnRef>
-              <a:fillRef idx="1">
-                <a:schemeClr val="accent1"/>
-              </a:fillRef>
-              <a:effectRef idx="0">
-                <a:schemeClr val="accent1"/>
-              </a:effectRef>
-              <a:fontRef idx="minor">
-                <a:schemeClr val="lt1"/>
-              </a:fontRef>
-            </p:style>
-            <p:txBody>
-              <a:bodyPr rtlCol="0" anchor="ctr"/>
-              <a:lstStyle/>
-              <a:p>
-                <a:pPr algn="ctr"/>
-                <a:r>
-                  <a:rPr lang="fr-FR" sz="1100" b="1" dirty="0">
-                    <a:solidFill>
-                      <a:schemeClr val="tx1"/>
-                    </a:solidFill>
-                  </a:rPr>
-                  <a:t>S</a:t>
-                </a:r>
-              </a:p>
-            </p:txBody>
-          </p:sp>
-          <p:sp>
-            <p:nvSpPr>
-              <p:cNvPr id="49" name="Freeform: Shape 48">
-                <a:extLst>
-                  <a:ext uri="{FF2B5EF4-FFF2-40B4-BE49-F238E27FC236}">
-                    <a16:creationId xmlns:a16="http://schemas.microsoft.com/office/drawing/2014/main" id="{2D83D27B-C7A4-175D-EF38-C060EA6136D2}"/>
-                  </a:ext>
-                </a:extLst>
-              </p:cNvPr>
-              <p:cNvSpPr/>
-              <p:nvPr/>
-            </p:nvSpPr>
-            <p:spPr>
-              <a:xfrm>
-                <a:off x="6436995" y="3061335"/>
-                <a:ext cx="421005" cy="24791"/>
-              </a:xfrm>
-              <a:custGeom>
-                <a:avLst/>
-                <a:gdLst>
-                  <a:gd name="connsiteX0" fmla="*/ 0 w 421005"/>
-                  <a:gd name="connsiteY0" fmla="*/ 0 h 24791"/>
-                  <a:gd name="connsiteX1" fmla="*/ 219075 w 421005"/>
-                  <a:gd name="connsiteY1" fmla="*/ 24765 h 24791"/>
-                  <a:gd name="connsiteX2" fmla="*/ 421005 w 421005"/>
-                  <a:gd name="connsiteY2" fmla="*/ 3810 h 24791"/>
-                </a:gdLst>
-                <a:ahLst/>
-                <a:cxnLst>
-                  <a:cxn ang="0">
-                    <a:pos x="connsiteX0" y="connsiteY0"/>
-                  </a:cxn>
-                  <a:cxn ang="0">
-                    <a:pos x="connsiteX1" y="connsiteY1"/>
-                  </a:cxn>
-                  <a:cxn ang="0">
-                    <a:pos x="connsiteX2" y="connsiteY2"/>
-                  </a:cxn>
-                </a:cxnLst>
-                <a:rect l="l" t="t" r="r" b="b"/>
-                <a:pathLst>
-                  <a:path w="421005" h="24791">
-                    <a:moveTo>
-                      <a:pt x="0" y="0"/>
-                    </a:moveTo>
-                    <a:cubicBezTo>
-                      <a:pt x="74454" y="12065"/>
-                      <a:pt x="148908" y="24130"/>
-                      <a:pt x="219075" y="24765"/>
-                    </a:cubicBezTo>
-                    <a:cubicBezTo>
-                      <a:pt x="289242" y="25400"/>
-                      <a:pt x="355123" y="14605"/>
-                      <a:pt x="421005" y="3810"/>
-                    </a:cubicBezTo>
-                  </a:path>
-                </a:pathLst>
-              </a:custGeom>
-            </p:spPr>
-            <p:style>
-              <a:lnRef idx="1">
-                <a:schemeClr val="accent2"/>
-              </a:lnRef>
-              <a:fillRef idx="0">
-                <a:schemeClr val="accent2"/>
-              </a:fillRef>
-              <a:effectRef idx="0">
-                <a:schemeClr val="accent2"/>
-              </a:effectRef>
-              <a:fontRef idx="minor">
-                <a:schemeClr val="tx1"/>
-              </a:fontRef>
-            </p:style>
-            <p:txBody>
-              <a:bodyPr rtlCol="0" anchor="ctr"/>
-              <a:lstStyle/>
-              <a:p>
-                <a:pPr algn="ctr"/>
-                <a:endParaRPr lang="fr-FR"/>
-              </a:p>
-            </p:txBody>
-          </p:sp>
-          <p:sp>
-            <p:nvSpPr>
-              <p:cNvPr id="50" name="Freeform: Shape 49">
-                <a:extLst>
-                  <a:ext uri="{FF2B5EF4-FFF2-40B4-BE49-F238E27FC236}">
-                    <a16:creationId xmlns:a16="http://schemas.microsoft.com/office/drawing/2014/main" id="{CE072788-0B09-A33E-0F6B-BF884EAD0B2E}"/>
-                  </a:ext>
-                </a:extLst>
-              </p:cNvPr>
-              <p:cNvSpPr/>
-              <p:nvPr/>
-            </p:nvSpPr>
-            <p:spPr>
-              <a:xfrm>
-                <a:off x="6436994" y="3155509"/>
-                <a:ext cx="421005" cy="24791"/>
-              </a:xfrm>
-              <a:custGeom>
-                <a:avLst/>
-                <a:gdLst>
-                  <a:gd name="connsiteX0" fmla="*/ 0 w 421005"/>
-                  <a:gd name="connsiteY0" fmla="*/ 0 h 24791"/>
-                  <a:gd name="connsiteX1" fmla="*/ 219075 w 421005"/>
-                  <a:gd name="connsiteY1" fmla="*/ 24765 h 24791"/>
-                  <a:gd name="connsiteX2" fmla="*/ 421005 w 421005"/>
-                  <a:gd name="connsiteY2" fmla="*/ 3810 h 24791"/>
-                </a:gdLst>
-                <a:ahLst/>
-                <a:cxnLst>
-                  <a:cxn ang="0">
-                    <a:pos x="connsiteX0" y="connsiteY0"/>
-                  </a:cxn>
-                  <a:cxn ang="0">
-                    <a:pos x="connsiteX1" y="connsiteY1"/>
-                  </a:cxn>
-                  <a:cxn ang="0">
-                    <a:pos x="connsiteX2" y="connsiteY2"/>
-                  </a:cxn>
-                </a:cxnLst>
-                <a:rect l="l" t="t" r="r" b="b"/>
-                <a:pathLst>
-                  <a:path w="421005" h="24791">
-                    <a:moveTo>
-                      <a:pt x="0" y="0"/>
-                    </a:moveTo>
-                    <a:cubicBezTo>
-                      <a:pt x="74454" y="12065"/>
-                      <a:pt x="148908" y="24130"/>
-                      <a:pt x="219075" y="24765"/>
-                    </a:cubicBezTo>
-                    <a:cubicBezTo>
-                      <a:pt x="289242" y="25400"/>
-                      <a:pt x="355123" y="14605"/>
-                      <a:pt x="421005" y="3810"/>
-                    </a:cubicBezTo>
-                  </a:path>
-                </a:pathLst>
-              </a:custGeom>
-            </p:spPr>
-            <p:style>
-              <a:lnRef idx="1">
-                <a:schemeClr val="accent2"/>
-              </a:lnRef>
-              <a:fillRef idx="0">
-                <a:schemeClr val="accent2"/>
-              </a:fillRef>
-              <a:effectRef idx="0">
-                <a:schemeClr val="accent2"/>
-              </a:effectRef>
-              <a:fontRef idx="minor">
-                <a:schemeClr val="tx1"/>
-              </a:fontRef>
-            </p:style>
-            <p:txBody>
-              <a:bodyPr rtlCol="0" anchor="ctr"/>
-              <a:lstStyle/>
-              <a:p>
-                <a:pPr algn="ctr"/>
-                <a:endParaRPr lang="fr-FR"/>
-              </a:p>
-            </p:txBody>
-          </p:sp>
-          <p:sp>
-            <p:nvSpPr>
-              <p:cNvPr id="51" name="Freeform: Shape 50">
-                <a:extLst>
-                  <a:ext uri="{FF2B5EF4-FFF2-40B4-BE49-F238E27FC236}">
-                    <a16:creationId xmlns:a16="http://schemas.microsoft.com/office/drawing/2014/main" id="{095A759C-B292-A1AB-C477-610E202C2D29}"/>
-                  </a:ext>
-                </a:extLst>
-              </p:cNvPr>
-              <p:cNvSpPr/>
-              <p:nvPr/>
-            </p:nvSpPr>
-            <p:spPr>
-              <a:xfrm>
-                <a:off x="6436994" y="3249683"/>
-                <a:ext cx="421005" cy="24791"/>
-              </a:xfrm>
-              <a:custGeom>
-                <a:avLst/>
-                <a:gdLst>
-                  <a:gd name="connsiteX0" fmla="*/ 0 w 421005"/>
-                  <a:gd name="connsiteY0" fmla="*/ 0 h 24791"/>
-                  <a:gd name="connsiteX1" fmla="*/ 219075 w 421005"/>
-                  <a:gd name="connsiteY1" fmla="*/ 24765 h 24791"/>
-                  <a:gd name="connsiteX2" fmla="*/ 421005 w 421005"/>
-                  <a:gd name="connsiteY2" fmla="*/ 3810 h 24791"/>
-                </a:gdLst>
-                <a:ahLst/>
-                <a:cxnLst>
-                  <a:cxn ang="0">
-                    <a:pos x="connsiteX0" y="connsiteY0"/>
-                  </a:cxn>
-                  <a:cxn ang="0">
-                    <a:pos x="connsiteX1" y="connsiteY1"/>
-                  </a:cxn>
-                  <a:cxn ang="0">
-                    <a:pos x="connsiteX2" y="connsiteY2"/>
-                  </a:cxn>
-                </a:cxnLst>
-                <a:rect l="l" t="t" r="r" b="b"/>
-                <a:pathLst>
-                  <a:path w="421005" h="24791">
-                    <a:moveTo>
-                      <a:pt x="0" y="0"/>
-                    </a:moveTo>
-                    <a:cubicBezTo>
-                      <a:pt x="74454" y="12065"/>
-                      <a:pt x="148908" y="24130"/>
-                      <a:pt x="219075" y="24765"/>
-                    </a:cubicBezTo>
-                    <a:cubicBezTo>
-                      <a:pt x="289242" y="25400"/>
-                      <a:pt x="355123" y="14605"/>
-                      <a:pt x="421005" y="3810"/>
-                    </a:cubicBezTo>
-                  </a:path>
-                </a:pathLst>
-              </a:custGeom>
-            </p:spPr>
-            <p:style>
-              <a:lnRef idx="1">
-                <a:schemeClr val="accent2"/>
-              </a:lnRef>
-              <a:fillRef idx="0">
-                <a:schemeClr val="accent2"/>
-              </a:fillRef>
-              <a:effectRef idx="0">
-                <a:schemeClr val="accent2"/>
-              </a:effectRef>
-              <a:fontRef idx="minor">
-                <a:schemeClr val="tx1"/>
-              </a:fontRef>
-            </p:style>
-            <p:txBody>
-              <a:bodyPr rtlCol="0" anchor="ctr"/>
-              <a:lstStyle/>
-              <a:p>
-                <a:pPr algn="ctr"/>
-                <a:endParaRPr lang="fr-FR"/>
-              </a:p>
-            </p:txBody>
-          </p:sp>
-          <p:sp>
-            <p:nvSpPr>
-              <p:cNvPr id="52" name="Freeform: Shape 51">
-                <a:extLst>
-                  <a:ext uri="{FF2B5EF4-FFF2-40B4-BE49-F238E27FC236}">
-                    <a16:creationId xmlns:a16="http://schemas.microsoft.com/office/drawing/2014/main" id="{09EC7194-9AF4-E871-C713-C481F40327AF}"/>
-                  </a:ext>
-                </a:extLst>
-              </p:cNvPr>
-              <p:cNvSpPr/>
-              <p:nvPr/>
-            </p:nvSpPr>
-            <p:spPr>
-              <a:xfrm>
-                <a:off x="6436994" y="3349567"/>
-                <a:ext cx="421005" cy="24791"/>
-              </a:xfrm>
-              <a:custGeom>
-                <a:avLst/>
-                <a:gdLst>
-                  <a:gd name="connsiteX0" fmla="*/ 0 w 421005"/>
-                  <a:gd name="connsiteY0" fmla="*/ 0 h 24791"/>
-                  <a:gd name="connsiteX1" fmla="*/ 219075 w 421005"/>
-                  <a:gd name="connsiteY1" fmla="*/ 24765 h 24791"/>
-                  <a:gd name="connsiteX2" fmla="*/ 421005 w 421005"/>
-                  <a:gd name="connsiteY2" fmla="*/ 3810 h 24791"/>
-                </a:gdLst>
-                <a:ahLst/>
-                <a:cxnLst>
-                  <a:cxn ang="0">
-                    <a:pos x="connsiteX0" y="connsiteY0"/>
-                  </a:cxn>
-                  <a:cxn ang="0">
-                    <a:pos x="connsiteX1" y="connsiteY1"/>
-                  </a:cxn>
-                  <a:cxn ang="0">
-                    <a:pos x="connsiteX2" y="connsiteY2"/>
-                  </a:cxn>
-                </a:cxnLst>
-                <a:rect l="l" t="t" r="r" b="b"/>
-                <a:pathLst>
-                  <a:path w="421005" h="24791">
-                    <a:moveTo>
-                      <a:pt x="0" y="0"/>
-                    </a:moveTo>
-                    <a:cubicBezTo>
-                      <a:pt x="74454" y="12065"/>
-                      <a:pt x="148908" y="24130"/>
-                      <a:pt x="219075" y="24765"/>
-                    </a:cubicBezTo>
-                    <a:cubicBezTo>
-                      <a:pt x="289242" y="25400"/>
-                      <a:pt x="355123" y="14605"/>
-                      <a:pt x="421005" y="3810"/>
-                    </a:cubicBezTo>
-                  </a:path>
-                </a:pathLst>
-              </a:custGeom>
-            </p:spPr>
-            <p:style>
-              <a:lnRef idx="1">
-                <a:schemeClr val="accent2"/>
-              </a:lnRef>
-              <a:fillRef idx="0">
-                <a:schemeClr val="accent2"/>
-              </a:fillRef>
-              <a:effectRef idx="0">
-                <a:schemeClr val="accent2"/>
-              </a:effectRef>
-              <a:fontRef idx="minor">
-                <a:schemeClr val="tx1"/>
-              </a:fontRef>
-            </p:style>
-            <p:txBody>
-              <a:bodyPr rtlCol="0" anchor="ctr"/>
-              <a:lstStyle/>
-              <a:p>
-                <a:pPr algn="ctr"/>
-                <a:endParaRPr lang="fr-FR"/>
-              </a:p>
-            </p:txBody>
-          </p:sp>
-          <p:sp>
-            <p:nvSpPr>
-              <p:cNvPr id="53" name="Freeform: Shape 52">
-                <a:extLst>
-                  <a:ext uri="{FF2B5EF4-FFF2-40B4-BE49-F238E27FC236}">
-                    <a16:creationId xmlns:a16="http://schemas.microsoft.com/office/drawing/2014/main" id="{F3B635C9-F2EA-E0B0-ED77-E0CCE8574E9F}"/>
-                  </a:ext>
-                </a:extLst>
-              </p:cNvPr>
-              <p:cNvSpPr/>
-              <p:nvPr/>
-            </p:nvSpPr>
-            <p:spPr>
-              <a:xfrm>
-                <a:off x="6436994" y="3451766"/>
-                <a:ext cx="421005" cy="24791"/>
-              </a:xfrm>
-              <a:custGeom>
-                <a:avLst/>
-                <a:gdLst>
-                  <a:gd name="connsiteX0" fmla="*/ 0 w 421005"/>
-                  <a:gd name="connsiteY0" fmla="*/ 0 h 24791"/>
-                  <a:gd name="connsiteX1" fmla="*/ 219075 w 421005"/>
-                  <a:gd name="connsiteY1" fmla="*/ 24765 h 24791"/>
-                  <a:gd name="connsiteX2" fmla="*/ 421005 w 421005"/>
-                  <a:gd name="connsiteY2" fmla="*/ 3810 h 24791"/>
-                </a:gdLst>
-                <a:ahLst/>
-                <a:cxnLst>
-                  <a:cxn ang="0">
-                    <a:pos x="connsiteX0" y="connsiteY0"/>
-                  </a:cxn>
-                  <a:cxn ang="0">
-                    <a:pos x="connsiteX1" y="connsiteY1"/>
-                  </a:cxn>
-                  <a:cxn ang="0">
-                    <a:pos x="connsiteX2" y="connsiteY2"/>
-                  </a:cxn>
-                </a:cxnLst>
-                <a:rect l="l" t="t" r="r" b="b"/>
-                <a:pathLst>
-                  <a:path w="421005" h="24791">
-                    <a:moveTo>
-                      <a:pt x="0" y="0"/>
-                    </a:moveTo>
-                    <a:cubicBezTo>
-                      <a:pt x="74454" y="12065"/>
-                      <a:pt x="148908" y="24130"/>
-                      <a:pt x="219075" y="24765"/>
-                    </a:cubicBezTo>
-                    <a:cubicBezTo>
-                      <a:pt x="289242" y="25400"/>
-                      <a:pt x="355123" y="14605"/>
-                      <a:pt x="421005" y="3810"/>
-                    </a:cubicBezTo>
-                  </a:path>
-                </a:pathLst>
-              </a:custGeom>
-            </p:spPr>
-            <p:style>
-              <a:lnRef idx="1">
-                <a:schemeClr val="accent2"/>
-              </a:lnRef>
-              <a:fillRef idx="0">
-                <a:schemeClr val="accent2"/>
-              </a:fillRef>
-              <a:effectRef idx="0">
-                <a:schemeClr val="accent2"/>
-              </a:effectRef>
-              <a:fontRef idx="minor">
-                <a:schemeClr val="tx1"/>
-              </a:fontRef>
-            </p:style>
-            <p:txBody>
-              <a:bodyPr rtlCol="0" anchor="ctr"/>
-              <a:lstStyle/>
-              <a:p>
-                <a:pPr algn="ctr"/>
-                <a:endParaRPr lang="fr-FR"/>
-              </a:p>
-            </p:txBody>
-          </p:sp>
-          <p:sp>
-            <p:nvSpPr>
-              <p:cNvPr id="54" name="Freeform: Shape 53">
-                <a:extLst>
-                  <a:ext uri="{FF2B5EF4-FFF2-40B4-BE49-F238E27FC236}">
-                    <a16:creationId xmlns:a16="http://schemas.microsoft.com/office/drawing/2014/main" id="{4787287F-76C3-25D3-7F47-C04FC290A118}"/>
-                  </a:ext>
-                </a:extLst>
-              </p:cNvPr>
-              <p:cNvSpPr/>
-              <p:nvPr/>
-            </p:nvSpPr>
-            <p:spPr>
-              <a:xfrm>
-                <a:off x="6436994" y="3550155"/>
-                <a:ext cx="421005" cy="24791"/>
-              </a:xfrm>
-              <a:custGeom>
-                <a:avLst/>
-                <a:gdLst>
-                  <a:gd name="connsiteX0" fmla="*/ 0 w 421005"/>
-                  <a:gd name="connsiteY0" fmla="*/ 0 h 24791"/>
-                  <a:gd name="connsiteX1" fmla="*/ 219075 w 421005"/>
-                  <a:gd name="connsiteY1" fmla="*/ 24765 h 24791"/>
-                  <a:gd name="connsiteX2" fmla="*/ 421005 w 421005"/>
-                  <a:gd name="connsiteY2" fmla="*/ 3810 h 24791"/>
-                </a:gdLst>
-                <a:ahLst/>
-                <a:cxnLst>
-                  <a:cxn ang="0">
-                    <a:pos x="connsiteX0" y="connsiteY0"/>
-                  </a:cxn>
-                  <a:cxn ang="0">
-                    <a:pos x="connsiteX1" y="connsiteY1"/>
-                  </a:cxn>
-                  <a:cxn ang="0">
-                    <a:pos x="connsiteX2" y="connsiteY2"/>
-                  </a:cxn>
-                </a:cxnLst>
-                <a:rect l="l" t="t" r="r" b="b"/>
-                <a:pathLst>
-                  <a:path w="421005" h="24791">
-                    <a:moveTo>
-                      <a:pt x="0" y="0"/>
-                    </a:moveTo>
-                    <a:cubicBezTo>
-                      <a:pt x="74454" y="12065"/>
-                      <a:pt x="148908" y="24130"/>
-                      <a:pt x="219075" y="24765"/>
-                    </a:cubicBezTo>
-                    <a:cubicBezTo>
-                      <a:pt x="289242" y="25400"/>
-                      <a:pt x="355123" y="14605"/>
-                      <a:pt x="421005" y="3810"/>
-                    </a:cubicBezTo>
-                  </a:path>
-                </a:pathLst>
-              </a:custGeom>
-            </p:spPr>
-            <p:style>
-              <a:lnRef idx="1">
-                <a:schemeClr val="accent2"/>
-              </a:lnRef>
-              <a:fillRef idx="0">
-                <a:schemeClr val="accent2"/>
-              </a:fillRef>
-              <a:effectRef idx="0">
-                <a:schemeClr val="accent2"/>
-              </a:effectRef>
-              <a:fontRef idx="minor">
-                <a:schemeClr val="tx1"/>
-              </a:fontRef>
-            </p:style>
-            <p:txBody>
-              <a:bodyPr rtlCol="0" anchor="ctr"/>
-              <a:lstStyle/>
-              <a:p>
-                <a:pPr algn="ctr"/>
-                <a:endParaRPr lang="fr-FR"/>
-              </a:p>
-            </p:txBody>
-          </p:sp>
-          <p:sp>
-            <p:nvSpPr>
-              <p:cNvPr id="55" name="Freeform: Shape 54">
-                <a:extLst>
-                  <a:ext uri="{FF2B5EF4-FFF2-40B4-BE49-F238E27FC236}">
-                    <a16:creationId xmlns:a16="http://schemas.microsoft.com/office/drawing/2014/main" id="{55258253-48FA-E9F5-297F-1EE40790B856}"/>
-                  </a:ext>
-                </a:extLst>
-              </p:cNvPr>
-              <p:cNvSpPr/>
-              <p:nvPr/>
-            </p:nvSpPr>
-            <p:spPr>
-              <a:xfrm>
-                <a:off x="6438900" y="3634740"/>
-                <a:ext cx="421005" cy="24791"/>
-              </a:xfrm>
-              <a:custGeom>
-                <a:avLst/>
-                <a:gdLst>
-                  <a:gd name="connsiteX0" fmla="*/ 0 w 421005"/>
-                  <a:gd name="connsiteY0" fmla="*/ 0 h 24791"/>
-                  <a:gd name="connsiteX1" fmla="*/ 219075 w 421005"/>
-                  <a:gd name="connsiteY1" fmla="*/ 24765 h 24791"/>
-                  <a:gd name="connsiteX2" fmla="*/ 421005 w 421005"/>
-                  <a:gd name="connsiteY2" fmla="*/ 3810 h 24791"/>
-                </a:gdLst>
-                <a:ahLst/>
-                <a:cxnLst>
-                  <a:cxn ang="0">
-                    <a:pos x="connsiteX0" y="connsiteY0"/>
-                  </a:cxn>
-                  <a:cxn ang="0">
-                    <a:pos x="connsiteX1" y="connsiteY1"/>
-                  </a:cxn>
-                  <a:cxn ang="0">
-                    <a:pos x="connsiteX2" y="connsiteY2"/>
-                  </a:cxn>
-                </a:cxnLst>
-                <a:rect l="l" t="t" r="r" b="b"/>
-                <a:pathLst>
-                  <a:path w="421005" h="24791">
-                    <a:moveTo>
-                      <a:pt x="0" y="0"/>
-                    </a:moveTo>
-                    <a:cubicBezTo>
-                      <a:pt x="74454" y="12065"/>
-                      <a:pt x="148908" y="24130"/>
-                      <a:pt x="219075" y="24765"/>
-                    </a:cubicBezTo>
-                    <a:cubicBezTo>
-                      <a:pt x="289242" y="25400"/>
-                      <a:pt x="355123" y="14605"/>
-                      <a:pt x="421005" y="3810"/>
-                    </a:cubicBezTo>
-                  </a:path>
-                </a:pathLst>
-              </a:custGeom>
-            </p:spPr>
-            <p:style>
-              <a:lnRef idx="1">
-                <a:schemeClr val="accent2"/>
-              </a:lnRef>
-              <a:fillRef idx="0">
-                <a:schemeClr val="accent2"/>
-              </a:fillRef>
-              <a:effectRef idx="0">
-                <a:schemeClr val="accent2"/>
-              </a:effectRef>
-              <a:fontRef idx="minor">
-                <a:schemeClr val="tx1"/>
-              </a:fontRef>
-            </p:style>
-            <p:txBody>
-              <a:bodyPr rtlCol="0" anchor="ctr"/>
-              <a:lstStyle/>
-              <a:p>
-                <a:pPr algn="ctr"/>
-                <a:endParaRPr lang="fr-FR"/>
-              </a:p>
-            </p:txBody>
-          </p:sp>
-          <p:sp>
-            <p:nvSpPr>
-              <p:cNvPr id="56" name="Freeform: Shape 55">
-                <a:extLst>
-                  <a:ext uri="{FF2B5EF4-FFF2-40B4-BE49-F238E27FC236}">
-                    <a16:creationId xmlns:a16="http://schemas.microsoft.com/office/drawing/2014/main" id="{A2164A3C-ECEC-7DF8-9C6F-F120A4B323D7}"/>
-                  </a:ext>
-                </a:extLst>
-              </p:cNvPr>
-              <p:cNvSpPr/>
-              <p:nvPr/>
-            </p:nvSpPr>
-            <p:spPr>
-              <a:xfrm>
-                <a:off x="6438899" y="3728914"/>
-                <a:ext cx="421005" cy="24791"/>
-              </a:xfrm>
-              <a:custGeom>
-                <a:avLst/>
-                <a:gdLst>
-                  <a:gd name="connsiteX0" fmla="*/ 0 w 421005"/>
-                  <a:gd name="connsiteY0" fmla="*/ 0 h 24791"/>
-                  <a:gd name="connsiteX1" fmla="*/ 219075 w 421005"/>
-                  <a:gd name="connsiteY1" fmla="*/ 24765 h 24791"/>
-                  <a:gd name="connsiteX2" fmla="*/ 421005 w 421005"/>
-                  <a:gd name="connsiteY2" fmla="*/ 3810 h 24791"/>
-                </a:gdLst>
-                <a:ahLst/>
-                <a:cxnLst>
-                  <a:cxn ang="0">
-                    <a:pos x="connsiteX0" y="connsiteY0"/>
-                  </a:cxn>
-                  <a:cxn ang="0">
-                    <a:pos x="connsiteX1" y="connsiteY1"/>
-                  </a:cxn>
-                  <a:cxn ang="0">
-                    <a:pos x="connsiteX2" y="connsiteY2"/>
-                  </a:cxn>
-                </a:cxnLst>
-                <a:rect l="l" t="t" r="r" b="b"/>
-                <a:pathLst>
-                  <a:path w="421005" h="24791">
-                    <a:moveTo>
-                      <a:pt x="0" y="0"/>
-                    </a:moveTo>
-                    <a:cubicBezTo>
-                      <a:pt x="74454" y="12065"/>
-                      <a:pt x="148908" y="24130"/>
-                      <a:pt x="219075" y="24765"/>
-                    </a:cubicBezTo>
-                    <a:cubicBezTo>
-                      <a:pt x="289242" y="25400"/>
-                      <a:pt x="355123" y="14605"/>
-                      <a:pt x="421005" y="3810"/>
-                    </a:cubicBezTo>
-                  </a:path>
-                </a:pathLst>
-              </a:custGeom>
-            </p:spPr>
-            <p:style>
-              <a:lnRef idx="1">
-                <a:schemeClr val="accent2"/>
-              </a:lnRef>
-              <a:fillRef idx="0">
-                <a:schemeClr val="accent2"/>
-              </a:fillRef>
-              <a:effectRef idx="0">
-                <a:schemeClr val="accent2"/>
-              </a:effectRef>
-              <a:fontRef idx="minor">
-                <a:schemeClr val="tx1"/>
-              </a:fontRef>
-            </p:style>
-            <p:txBody>
-              <a:bodyPr rtlCol="0" anchor="ctr"/>
-              <a:lstStyle/>
-              <a:p>
-                <a:pPr algn="ctr"/>
-                <a:endParaRPr lang="fr-FR"/>
-              </a:p>
-            </p:txBody>
-          </p:sp>
-          <p:sp>
-            <p:nvSpPr>
-              <p:cNvPr id="57" name="Freeform: Shape 56">
-                <a:extLst>
-                  <a:ext uri="{FF2B5EF4-FFF2-40B4-BE49-F238E27FC236}">
-                    <a16:creationId xmlns:a16="http://schemas.microsoft.com/office/drawing/2014/main" id="{4D8BCBB4-9740-CC07-A9D0-52B25C29CC6A}"/>
-                  </a:ext>
-                </a:extLst>
-              </p:cNvPr>
-              <p:cNvSpPr/>
-              <p:nvPr/>
-            </p:nvSpPr>
-            <p:spPr>
-              <a:xfrm>
-                <a:off x="6438899" y="3823088"/>
-                <a:ext cx="421005" cy="24791"/>
-              </a:xfrm>
-              <a:custGeom>
-                <a:avLst/>
-                <a:gdLst>
-                  <a:gd name="connsiteX0" fmla="*/ 0 w 421005"/>
-                  <a:gd name="connsiteY0" fmla="*/ 0 h 24791"/>
-                  <a:gd name="connsiteX1" fmla="*/ 219075 w 421005"/>
-                  <a:gd name="connsiteY1" fmla="*/ 24765 h 24791"/>
-                  <a:gd name="connsiteX2" fmla="*/ 421005 w 421005"/>
-                  <a:gd name="connsiteY2" fmla="*/ 3810 h 24791"/>
-                </a:gdLst>
-                <a:ahLst/>
-                <a:cxnLst>
-                  <a:cxn ang="0">
-                    <a:pos x="connsiteX0" y="connsiteY0"/>
-                  </a:cxn>
-                  <a:cxn ang="0">
-                    <a:pos x="connsiteX1" y="connsiteY1"/>
-                  </a:cxn>
-                  <a:cxn ang="0">
-                    <a:pos x="connsiteX2" y="connsiteY2"/>
-                  </a:cxn>
-                </a:cxnLst>
-                <a:rect l="l" t="t" r="r" b="b"/>
-                <a:pathLst>
-                  <a:path w="421005" h="24791">
-                    <a:moveTo>
-                      <a:pt x="0" y="0"/>
-                    </a:moveTo>
-                    <a:cubicBezTo>
-                      <a:pt x="74454" y="12065"/>
-                      <a:pt x="148908" y="24130"/>
-                      <a:pt x="219075" y="24765"/>
-                    </a:cubicBezTo>
-                    <a:cubicBezTo>
-                      <a:pt x="289242" y="25400"/>
-                      <a:pt x="355123" y="14605"/>
-                      <a:pt x="421005" y="3810"/>
-                    </a:cubicBezTo>
-                  </a:path>
-                </a:pathLst>
-              </a:custGeom>
-            </p:spPr>
-            <p:style>
-              <a:lnRef idx="1">
-                <a:schemeClr val="accent2"/>
-              </a:lnRef>
-              <a:fillRef idx="0">
-                <a:schemeClr val="accent2"/>
-              </a:fillRef>
-              <a:effectRef idx="0">
-                <a:schemeClr val="accent2"/>
-              </a:effectRef>
-              <a:fontRef idx="minor">
-                <a:schemeClr val="tx1"/>
-              </a:fontRef>
-            </p:style>
-            <p:txBody>
-              <a:bodyPr rtlCol="0" anchor="ctr"/>
-              <a:lstStyle/>
-              <a:p>
-                <a:pPr algn="ctr"/>
-                <a:endParaRPr lang="fr-FR"/>
-              </a:p>
-            </p:txBody>
-          </p:sp>
-          <p:sp>
-            <p:nvSpPr>
-              <p:cNvPr id="58" name="Freeform: Shape 57">
-                <a:extLst>
-                  <a:ext uri="{FF2B5EF4-FFF2-40B4-BE49-F238E27FC236}">
-                    <a16:creationId xmlns:a16="http://schemas.microsoft.com/office/drawing/2014/main" id="{C279A635-A94D-4040-F3E0-7B9223CB7B71}"/>
-                  </a:ext>
-                </a:extLst>
-              </p:cNvPr>
-              <p:cNvSpPr/>
-              <p:nvPr/>
-            </p:nvSpPr>
-            <p:spPr>
-              <a:xfrm>
-                <a:off x="6438899" y="3922972"/>
-                <a:ext cx="421005" cy="24791"/>
-              </a:xfrm>
-              <a:custGeom>
-                <a:avLst/>
-                <a:gdLst>
-                  <a:gd name="connsiteX0" fmla="*/ 0 w 421005"/>
-                  <a:gd name="connsiteY0" fmla="*/ 0 h 24791"/>
-                  <a:gd name="connsiteX1" fmla="*/ 219075 w 421005"/>
-                  <a:gd name="connsiteY1" fmla="*/ 24765 h 24791"/>
-                  <a:gd name="connsiteX2" fmla="*/ 421005 w 421005"/>
-                  <a:gd name="connsiteY2" fmla="*/ 3810 h 24791"/>
-                </a:gdLst>
-                <a:ahLst/>
-                <a:cxnLst>
-                  <a:cxn ang="0">
-                    <a:pos x="connsiteX0" y="connsiteY0"/>
-                  </a:cxn>
-                  <a:cxn ang="0">
-                    <a:pos x="connsiteX1" y="connsiteY1"/>
-                  </a:cxn>
-                  <a:cxn ang="0">
-                    <a:pos x="connsiteX2" y="connsiteY2"/>
-                  </a:cxn>
-                </a:cxnLst>
-                <a:rect l="l" t="t" r="r" b="b"/>
-                <a:pathLst>
-                  <a:path w="421005" h="24791">
-                    <a:moveTo>
-                      <a:pt x="0" y="0"/>
-                    </a:moveTo>
-                    <a:cubicBezTo>
-                      <a:pt x="74454" y="12065"/>
-                      <a:pt x="148908" y="24130"/>
-                      <a:pt x="219075" y="24765"/>
-                    </a:cubicBezTo>
-                    <a:cubicBezTo>
-                      <a:pt x="289242" y="25400"/>
-                      <a:pt x="355123" y="14605"/>
-                      <a:pt x="421005" y="3810"/>
-                    </a:cubicBezTo>
-                  </a:path>
-                </a:pathLst>
-              </a:custGeom>
-            </p:spPr>
-            <p:style>
-              <a:lnRef idx="1">
-                <a:schemeClr val="accent2"/>
-              </a:lnRef>
-              <a:fillRef idx="0">
-                <a:schemeClr val="accent2"/>
-              </a:fillRef>
-              <a:effectRef idx="0">
-                <a:schemeClr val="accent2"/>
-              </a:effectRef>
-              <a:fontRef idx="minor">
-                <a:schemeClr val="tx1"/>
-              </a:fontRef>
-            </p:style>
-            <p:txBody>
-              <a:bodyPr rtlCol="0" anchor="ctr"/>
-              <a:lstStyle/>
-              <a:p>
-                <a:pPr algn="ctr"/>
-                <a:endParaRPr lang="fr-FR"/>
-              </a:p>
-            </p:txBody>
-          </p:sp>
-          <p:sp>
-            <p:nvSpPr>
-              <p:cNvPr id="59" name="Oval 58">
-                <a:extLst>
-                  <a:ext uri="{FF2B5EF4-FFF2-40B4-BE49-F238E27FC236}">
-                    <a16:creationId xmlns:a16="http://schemas.microsoft.com/office/drawing/2014/main" id="{0DBD33AA-37C2-FEE3-1971-C394E6F2430B}"/>
-                  </a:ext>
-                </a:extLst>
-              </p:cNvPr>
-              <p:cNvSpPr/>
-              <p:nvPr/>
-            </p:nvSpPr>
-            <p:spPr>
-              <a:xfrm>
-                <a:off x="6438735" y="3966873"/>
-                <a:ext cx="427382" cy="222637"/>
-              </a:xfrm>
-              <a:prstGeom prst="ellipse">
-                <a:avLst/>
-              </a:prstGeom>
-              <a:solidFill>
-                <a:schemeClr val="bg2"/>
-              </a:solidFill>
-              <a:ln>
-                <a:noFill/>
-              </a:ln>
-            </p:spPr>
-            <p:style>
-              <a:lnRef idx="2">
-                <a:schemeClr val="accent1">
-                  <a:shade val="15000"/>
-                </a:schemeClr>
-              </a:lnRef>
-              <a:fillRef idx="1">
-                <a:schemeClr val="accent1"/>
-              </a:fillRef>
-              <a:effectRef idx="0">
-                <a:schemeClr val="accent1"/>
-              </a:effectRef>
-              <a:fontRef idx="minor">
-                <a:schemeClr val="lt1"/>
-              </a:fontRef>
-            </p:style>
-            <p:txBody>
-              <a:bodyPr rtlCol="0" anchor="ctr"/>
-              <a:lstStyle/>
-              <a:p>
-                <a:pPr algn="ctr"/>
-                <a:r>
-                  <a:rPr lang="fr-FR" sz="1100" b="1" dirty="0">
-                    <a:solidFill>
-                      <a:schemeClr val="tx1"/>
-                    </a:solidFill>
-                  </a:rPr>
-                  <a:t>N</a:t>
-                </a:r>
-              </a:p>
-            </p:txBody>
-          </p:sp>
-        </p:grpSp>
-        <p:sp>
-          <p:nvSpPr>
-            <p:cNvPr id="63" name="Rectangle 62">
-              <a:extLst>
-                <a:ext uri="{FF2B5EF4-FFF2-40B4-BE49-F238E27FC236}">
-                  <a16:creationId xmlns:a16="http://schemas.microsoft.com/office/drawing/2014/main" id="{584F810C-ED7D-A33F-51CC-F141822DADB6}"/>
-                </a:ext>
-              </a:extLst>
-            </p:cNvPr>
-            <p:cNvSpPr/>
-            <p:nvPr/>
-          </p:nvSpPr>
-          <p:spPr>
-            <a:xfrm>
-              <a:off x="3177084" y="1176839"/>
-              <a:ext cx="3275937" cy="76737"/>
-            </a:xfrm>
-            <a:prstGeom prst="rect">
-              <a:avLst/>
-            </a:prstGeom>
-            <a:blipFill>
-              <a:blip r:embed="rId2">
-                <a:extLst>
-                  <a:ext uri="{837473B0-CC2E-450A-ABE3-18F120FF3D39}">
-                    <a1611:picAttrSrcUrl xmlns:a1611="http://schemas.microsoft.com/office/drawing/2016/11/main" r:id="rId3"/>
-                  </a:ext>
-                </a:extLst>
-              </a:blip>
-              <a:stretch>
-                <a:fillRect/>
-              </a:stretch>
-            </a:blipFill>
-            <a:ln>
-              <a:noFill/>
-            </a:ln>
-          </p:spPr>
-          <p:style>
-            <a:lnRef idx="2">
-              <a:schemeClr val="accent1">
-                <a:shade val="15000"/>
-              </a:schemeClr>
-            </a:lnRef>
-            <a:fillRef idx="1">
-              <a:schemeClr val="accent1"/>
-            </a:fillRef>
-            <a:effectRef idx="0">
-              <a:schemeClr val="accent1"/>
-            </a:effectRef>
-            <a:fontRef idx="minor">
-              <a:schemeClr val="lt1"/>
-            </a:fontRef>
-          </p:style>
-          <p:txBody>
-            <a:bodyPr rtlCol="0" anchor="ctr"/>
-            <a:lstStyle/>
-            <a:p>
-              <a:pPr algn="ctr"/>
-              <a:endParaRPr lang="fr-FR"/>
-            </a:p>
-          </p:txBody>
-        </p:sp>
-        <p:cxnSp>
-          <p:nvCxnSpPr>
-            <p:cNvPr id="69" name="Straight Arrow Connector 68">
-              <a:extLst>
-                <a:ext uri="{FF2B5EF4-FFF2-40B4-BE49-F238E27FC236}">
-                  <a16:creationId xmlns:a16="http://schemas.microsoft.com/office/drawing/2014/main" id="{8B2E9DDC-362F-FE8B-FE18-AA007CD25203}"/>
-                </a:ext>
-              </a:extLst>
-            </p:cNvPr>
-            <p:cNvCxnSpPr>
-              <a:cxnSpLocks/>
-              <a:endCxn id="57" idx="2"/>
-            </p:cNvCxnSpPr>
-            <p:nvPr/>
-          </p:nvCxnSpPr>
-          <p:spPr>
-            <a:xfrm flipH="1" flipV="1">
-              <a:off x="5502676" y="3453815"/>
-              <a:ext cx="1791825" cy="11966"/>
-            </a:xfrm>
-            <a:prstGeom prst="straightConnector1">
-              <a:avLst/>
-            </a:prstGeom>
-            <a:ln>
-              <a:tailEnd type="triangle"/>
-            </a:ln>
-          </p:spPr>
-          <p:style>
-            <a:lnRef idx="2">
-              <a:schemeClr val="dk1"/>
-            </a:lnRef>
-            <a:fillRef idx="0">
-              <a:schemeClr val="dk1"/>
-            </a:fillRef>
-            <a:effectRef idx="1">
-              <a:schemeClr val="dk1"/>
-            </a:effectRef>
-            <a:fontRef idx="minor">
-              <a:schemeClr val="tx1"/>
-            </a:fontRef>
-          </p:style>
-        </p:cxnSp>
-        <p:cxnSp>
-          <p:nvCxnSpPr>
-            <p:cNvPr id="71" name="Straight Arrow Connector 70">
-              <a:extLst>
-                <a:ext uri="{FF2B5EF4-FFF2-40B4-BE49-F238E27FC236}">
-                  <a16:creationId xmlns:a16="http://schemas.microsoft.com/office/drawing/2014/main" id="{8D9CD150-2774-0ACD-EBA0-BA608AB1A2E7}"/>
-                </a:ext>
-              </a:extLst>
-            </p:cNvPr>
-            <p:cNvCxnSpPr>
-              <a:cxnSpLocks/>
-            </p:cNvCxnSpPr>
-            <p:nvPr/>
-          </p:nvCxnSpPr>
-          <p:spPr>
-            <a:xfrm flipH="1">
-              <a:off x="5490021" y="1974290"/>
-              <a:ext cx="1727764" cy="0"/>
-            </a:xfrm>
-            <a:prstGeom prst="straightConnector1">
-              <a:avLst/>
-            </a:prstGeom>
-            <a:ln>
-              <a:tailEnd type="triangle"/>
-            </a:ln>
-          </p:spPr>
-          <p:style>
-            <a:lnRef idx="2">
-              <a:schemeClr val="dk1"/>
-            </a:lnRef>
-            <a:fillRef idx="0">
-              <a:schemeClr val="dk1"/>
-            </a:fillRef>
-            <a:effectRef idx="1">
-              <a:schemeClr val="dk1"/>
-            </a:effectRef>
-            <a:fontRef idx="minor">
-              <a:schemeClr val="tx1"/>
-            </a:fontRef>
-          </p:style>
-        </p:cxnSp>
-        <p:cxnSp>
-          <p:nvCxnSpPr>
-            <p:cNvPr id="74" name="Straight Arrow Connector 73">
-              <a:extLst>
-                <a:ext uri="{FF2B5EF4-FFF2-40B4-BE49-F238E27FC236}">
-                  <a16:creationId xmlns:a16="http://schemas.microsoft.com/office/drawing/2014/main" id="{65E5121D-D778-166D-BAC0-AE41CC3AD6FD}"/>
-                </a:ext>
-              </a:extLst>
-            </p:cNvPr>
-            <p:cNvCxnSpPr>
-              <a:cxnSpLocks/>
-            </p:cNvCxnSpPr>
-            <p:nvPr/>
-          </p:nvCxnSpPr>
-          <p:spPr>
-            <a:xfrm flipH="1">
-              <a:off x="4802398" y="1974290"/>
-              <a:ext cx="2415387" cy="0"/>
-            </a:xfrm>
-            <a:prstGeom prst="straightConnector1">
-              <a:avLst/>
-            </a:prstGeom>
-            <a:ln>
-              <a:tailEnd type="triangle"/>
-            </a:ln>
-          </p:spPr>
-          <p:style>
-            <a:lnRef idx="2">
-              <a:schemeClr val="dk1"/>
-            </a:lnRef>
-            <a:fillRef idx="0">
-              <a:schemeClr val="dk1"/>
-            </a:fillRef>
-            <a:effectRef idx="1">
-              <a:schemeClr val="dk1"/>
-            </a:effectRef>
-            <a:fontRef idx="minor">
-              <a:schemeClr val="tx1"/>
-            </a:fontRef>
-          </p:style>
-        </p:cxnSp>
-        <p:grpSp>
-          <p:nvGrpSpPr>
-            <p:cNvPr id="91" name="Group 90">
-              <a:extLst>
-                <a:ext uri="{FF2B5EF4-FFF2-40B4-BE49-F238E27FC236}">
-                  <a16:creationId xmlns:a16="http://schemas.microsoft.com/office/drawing/2014/main" id="{4A14E8B6-09D5-5AAA-C87A-C7CE44E061A3}"/>
-                </a:ext>
-              </a:extLst>
-            </p:cNvPr>
-            <p:cNvGrpSpPr/>
-            <p:nvPr/>
-          </p:nvGrpSpPr>
-          <p:grpSpPr>
-            <a:xfrm>
-              <a:off x="2596262" y="996307"/>
-              <a:ext cx="2087055" cy="3699304"/>
-              <a:chOff x="2596262" y="996307"/>
-              <a:chExt cx="2087055" cy="3699304"/>
-            </a:xfrm>
-          </p:grpSpPr>
-          <p:sp>
-            <p:nvSpPr>
-              <p:cNvPr id="78" name="Arc 77">
-                <a:extLst>
-                  <a:ext uri="{FF2B5EF4-FFF2-40B4-BE49-F238E27FC236}">
-                    <a16:creationId xmlns:a16="http://schemas.microsoft.com/office/drawing/2014/main" id="{02F93204-9F89-2C9E-8DDE-EAE548F4DA74}"/>
-                  </a:ext>
-                </a:extLst>
-              </p:cNvPr>
-              <p:cNvSpPr/>
-              <p:nvPr/>
-            </p:nvSpPr>
-            <p:spPr>
-              <a:xfrm rot="10800000">
-                <a:off x="3283888" y="1768343"/>
-                <a:ext cx="1399429" cy="2097350"/>
-              </a:xfrm>
-              <a:prstGeom prst="arc">
-                <a:avLst>
-                  <a:gd name="adj1" fmla="val 15885701"/>
-                  <a:gd name="adj2" fmla="val 5692140"/>
-                </a:avLst>
-              </a:prstGeom>
-            </p:spPr>
-            <p:style>
-              <a:lnRef idx="1">
-                <a:schemeClr val="accent1"/>
-              </a:lnRef>
-              <a:fillRef idx="0">
-                <a:schemeClr val="accent1"/>
-              </a:fillRef>
-              <a:effectRef idx="0">
-                <a:schemeClr val="accent1"/>
-              </a:effectRef>
-              <a:fontRef idx="minor">
-                <a:schemeClr val="tx1"/>
-              </a:fontRef>
-            </p:style>
-            <p:txBody>
-              <a:bodyPr rtlCol="0" anchor="ctr"/>
-              <a:lstStyle/>
-              <a:p>
-                <a:pPr algn="ctr"/>
-                <a:endParaRPr lang="fr-FR"/>
-              </a:p>
-            </p:txBody>
-          </p:sp>
-          <p:sp>
-            <p:nvSpPr>
-              <p:cNvPr id="79" name="Arc 78">
-                <a:extLst>
-                  <a:ext uri="{FF2B5EF4-FFF2-40B4-BE49-F238E27FC236}">
-                    <a16:creationId xmlns:a16="http://schemas.microsoft.com/office/drawing/2014/main" id="{D61DDABF-9808-9D54-3794-56EABCCC7B88}"/>
-                  </a:ext>
-                </a:extLst>
-              </p:cNvPr>
-              <p:cNvSpPr/>
-              <p:nvPr/>
-            </p:nvSpPr>
-            <p:spPr>
-              <a:xfrm rot="10800000">
-                <a:off x="3068368" y="1444773"/>
-                <a:ext cx="1399429" cy="2802372"/>
-              </a:xfrm>
-              <a:prstGeom prst="arc">
-                <a:avLst>
-                  <a:gd name="adj1" fmla="val 15039800"/>
-                  <a:gd name="adj2" fmla="val 6385720"/>
-                </a:avLst>
-              </a:prstGeom>
-            </p:spPr>
-            <p:style>
-              <a:lnRef idx="1">
-                <a:schemeClr val="accent1"/>
-              </a:lnRef>
-              <a:fillRef idx="0">
-                <a:schemeClr val="accent1"/>
-              </a:fillRef>
-              <a:effectRef idx="0">
-                <a:schemeClr val="accent1"/>
-              </a:effectRef>
-              <a:fontRef idx="minor">
-                <a:schemeClr val="tx1"/>
-              </a:fontRef>
-            </p:style>
-            <p:txBody>
-              <a:bodyPr rtlCol="0" anchor="ctr"/>
-              <a:lstStyle/>
-              <a:p>
-                <a:pPr algn="ctr"/>
-                <a:endParaRPr lang="fr-FR"/>
-              </a:p>
-            </p:txBody>
-          </p:sp>
-          <p:sp>
-            <p:nvSpPr>
-              <p:cNvPr id="80" name="Arc 79">
-                <a:extLst>
-                  <a:ext uri="{FF2B5EF4-FFF2-40B4-BE49-F238E27FC236}">
-                    <a16:creationId xmlns:a16="http://schemas.microsoft.com/office/drawing/2014/main" id="{6E671BEF-F78A-A13D-59E6-EF5544CEB01B}"/>
-                  </a:ext>
-                </a:extLst>
-              </p:cNvPr>
-              <p:cNvSpPr/>
-              <p:nvPr/>
-            </p:nvSpPr>
-            <p:spPr>
-              <a:xfrm rot="10800000">
-                <a:off x="2656135" y="996307"/>
-                <a:ext cx="1854352" cy="3699304"/>
-              </a:xfrm>
-              <a:prstGeom prst="arc">
-                <a:avLst>
-                  <a:gd name="adj1" fmla="val 14349328"/>
-                  <a:gd name="adj2" fmla="val 6991892"/>
-                </a:avLst>
-              </a:prstGeom>
-            </p:spPr>
-            <p:style>
-              <a:lnRef idx="1">
-                <a:schemeClr val="accent1"/>
-              </a:lnRef>
-              <a:fillRef idx="0">
-                <a:schemeClr val="accent1"/>
-              </a:fillRef>
-              <a:effectRef idx="0">
-                <a:schemeClr val="accent1"/>
-              </a:effectRef>
-              <a:fontRef idx="minor">
-                <a:schemeClr val="tx1"/>
-              </a:fontRef>
-            </p:style>
-            <p:txBody>
-              <a:bodyPr rtlCol="0" anchor="ctr"/>
-              <a:lstStyle/>
-              <a:p>
-                <a:pPr algn="ctr"/>
-                <a:endParaRPr lang="fr-FR"/>
-              </a:p>
-            </p:txBody>
-          </p:sp>
-          <p:cxnSp>
-            <p:nvCxnSpPr>
-              <p:cNvPr id="82" name="Straight Connector 81">
-                <a:extLst>
-                  <a:ext uri="{FF2B5EF4-FFF2-40B4-BE49-F238E27FC236}">
-                    <a16:creationId xmlns:a16="http://schemas.microsoft.com/office/drawing/2014/main" id="{C2A1F321-4235-A6E4-8C33-496596240492}"/>
-                  </a:ext>
-                </a:extLst>
-              </p:cNvPr>
-              <p:cNvCxnSpPr>
-                <a:cxnSpLocks/>
-              </p:cNvCxnSpPr>
-              <p:nvPr/>
-            </p:nvCxnSpPr>
-            <p:spPr>
-              <a:xfrm>
-                <a:off x="2596262" y="2922270"/>
-                <a:ext cx="59872" cy="67793"/>
-              </a:xfrm>
-              <a:prstGeom prst="line">
-                <a:avLst/>
-              </a:prstGeom>
-            </p:spPr>
-            <p:style>
-              <a:lnRef idx="1">
-                <a:schemeClr val="accent1"/>
-              </a:lnRef>
-              <a:fillRef idx="0">
-                <a:schemeClr val="accent1"/>
-              </a:fillRef>
-              <a:effectRef idx="0">
-                <a:schemeClr val="accent1"/>
-              </a:effectRef>
-              <a:fontRef idx="minor">
-                <a:schemeClr val="tx1"/>
-              </a:fontRef>
-            </p:style>
-          </p:cxnSp>
-          <p:cxnSp>
-            <p:nvCxnSpPr>
-              <p:cNvPr id="83" name="Straight Connector 82">
-                <a:extLst>
-                  <a:ext uri="{FF2B5EF4-FFF2-40B4-BE49-F238E27FC236}">
-                    <a16:creationId xmlns:a16="http://schemas.microsoft.com/office/drawing/2014/main" id="{ABF99BD9-FFDF-1F5D-EEED-4F5A572CB05E}"/>
-                  </a:ext>
-                </a:extLst>
-              </p:cNvPr>
-              <p:cNvCxnSpPr>
-                <a:cxnSpLocks/>
-              </p:cNvCxnSpPr>
-              <p:nvPr/>
-            </p:nvCxnSpPr>
-            <p:spPr>
-              <a:xfrm flipV="1">
-                <a:off x="2662704" y="2922270"/>
-                <a:ext cx="64406" cy="67793"/>
-              </a:xfrm>
-              <a:prstGeom prst="line">
-                <a:avLst/>
-              </a:prstGeom>
-            </p:spPr>
-            <p:style>
-              <a:lnRef idx="1">
-                <a:schemeClr val="accent1"/>
-              </a:lnRef>
-              <a:fillRef idx="0">
-                <a:schemeClr val="accent1"/>
-              </a:fillRef>
-              <a:effectRef idx="0">
-                <a:schemeClr val="accent1"/>
-              </a:effectRef>
-              <a:fontRef idx="minor">
-                <a:schemeClr val="tx1"/>
-              </a:fontRef>
-            </p:style>
-          </p:cxnSp>
-          <p:cxnSp>
-            <p:nvCxnSpPr>
-              <p:cNvPr id="87" name="Straight Connector 86">
-                <a:extLst>
-                  <a:ext uri="{FF2B5EF4-FFF2-40B4-BE49-F238E27FC236}">
-                    <a16:creationId xmlns:a16="http://schemas.microsoft.com/office/drawing/2014/main" id="{469D2BF5-09C5-DDEC-4C4B-D602032CBDD9}"/>
-                  </a:ext>
-                </a:extLst>
-              </p:cNvPr>
-              <p:cNvCxnSpPr>
-                <a:cxnSpLocks/>
-              </p:cNvCxnSpPr>
-              <p:nvPr/>
-            </p:nvCxnSpPr>
-            <p:spPr>
-              <a:xfrm flipV="1">
-                <a:off x="3067580" y="2888373"/>
-                <a:ext cx="64406" cy="67793"/>
-              </a:xfrm>
-              <a:prstGeom prst="line">
-                <a:avLst/>
-              </a:prstGeom>
-            </p:spPr>
-            <p:style>
-              <a:lnRef idx="1">
-                <a:schemeClr val="accent1"/>
-              </a:lnRef>
-              <a:fillRef idx="0">
-                <a:schemeClr val="accent1"/>
-              </a:fillRef>
-              <a:effectRef idx="0">
-                <a:schemeClr val="accent1"/>
-              </a:effectRef>
-              <a:fontRef idx="minor">
-                <a:schemeClr val="tx1"/>
-              </a:fontRef>
-            </p:style>
-          </p:cxnSp>
-          <p:cxnSp>
-            <p:nvCxnSpPr>
-              <p:cNvPr id="88" name="Straight Connector 87">
-                <a:extLst>
-                  <a:ext uri="{FF2B5EF4-FFF2-40B4-BE49-F238E27FC236}">
-                    <a16:creationId xmlns:a16="http://schemas.microsoft.com/office/drawing/2014/main" id="{FBF9E69C-7CE0-5040-5869-BB0BF47D4970}"/>
-                  </a:ext>
-                </a:extLst>
-              </p:cNvPr>
-              <p:cNvCxnSpPr>
-                <a:cxnSpLocks/>
-              </p:cNvCxnSpPr>
-              <p:nvPr/>
-            </p:nvCxnSpPr>
-            <p:spPr>
-              <a:xfrm>
-                <a:off x="3015800" y="2888373"/>
-                <a:ext cx="59872" cy="67793"/>
-              </a:xfrm>
-              <a:prstGeom prst="line">
-                <a:avLst/>
-              </a:prstGeom>
-            </p:spPr>
-            <p:style>
-              <a:lnRef idx="1">
-                <a:schemeClr val="accent1"/>
-              </a:lnRef>
-              <a:fillRef idx="0">
-                <a:schemeClr val="accent1"/>
-              </a:fillRef>
-              <a:effectRef idx="0">
-                <a:schemeClr val="accent1"/>
-              </a:effectRef>
-              <a:fontRef idx="minor">
-                <a:schemeClr val="tx1"/>
-              </a:fontRef>
-            </p:style>
-          </p:cxnSp>
-          <p:cxnSp>
-            <p:nvCxnSpPr>
-              <p:cNvPr id="89" name="Straight Connector 88">
-                <a:extLst>
-                  <a:ext uri="{FF2B5EF4-FFF2-40B4-BE49-F238E27FC236}">
-                    <a16:creationId xmlns:a16="http://schemas.microsoft.com/office/drawing/2014/main" id="{3561BB8F-CC7A-299A-7F6C-4B6B16805733}"/>
-                  </a:ext>
-                </a:extLst>
-              </p:cNvPr>
-              <p:cNvCxnSpPr>
-                <a:cxnSpLocks/>
-              </p:cNvCxnSpPr>
-              <p:nvPr/>
-            </p:nvCxnSpPr>
-            <p:spPr>
-              <a:xfrm>
-                <a:off x="3224015" y="2867797"/>
-                <a:ext cx="59872" cy="67793"/>
-              </a:xfrm>
-              <a:prstGeom prst="line">
-                <a:avLst/>
-              </a:prstGeom>
-            </p:spPr>
-            <p:style>
-              <a:lnRef idx="1">
-                <a:schemeClr val="accent1"/>
-              </a:lnRef>
-              <a:fillRef idx="0">
-                <a:schemeClr val="accent1"/>
-              </a:fillRef>
-              <a:effectRef idx="0">
-                <a:schemeClr val="accent1"/>
-              </a:effectRef>
-              <a:fontRef idx="minor">
-                <a:schemeClr val="tx1"/>
-              </a:fontRef>
-            </p:style>
-          </p:cxnSp>
-          <p:cxnSp>
-            <p:nvCxnSpPr>
-              <p:cNvPr id="90" name="Straight Connector 89">
-                <a:extLst>
-                  <a:ext uri="{FF2B5EF4-FFF2-40B4-BE49-F238E27FC236}">
-                    <a16:creationId xmlns:a16="http://schemas.microsoft.com/office/drawing/2014/main" id="{66CC4658-5D21-3D2C-9720-FA7E52587C9C}"/>
-                  </a:ext>
-                </a:extLst>
-              </p:cNvPr>
-              <p:cNvCxnSpPr>
-                <a:cxnSpLocks/>
-              </p:cNvCxnSpPr>
-              <p:nvPr/>
-            </p:nvCxnSpPr>
-            <p:spPr>
-              <a:xfrm flipV="1">
-                <a:off x="3287634" y="2866731"/>
-                <a:ext cx="64406" cy="67793"/>
-              </a:xfrm>
-              <a:prstGeom prst="line">
-                <a:avLst/>
-              </a:prstGeom>
-            </p:spPr>
-            <p:style>
-              <a:lnRef idx="1">
-                <a:schemeClr val="accent1"/>
-              </a:lnRef>
-              <a:fillRef idx="0">
-                <a:schemeClr val="accent1"/>
-              </a:fillRef>
-              <a:effectRef idx="0">
-                <a:schemeClr val="accent1"/>
-              </a:effectRef>
-              <a:fontRef idx="minor">
-                <a:schemeClr val="tx1"/>
-              </a:fontRef>
-            </p:style>
-          </p:cxnSp>
-        </p:grpSp>
-        <p:grpSp>
-          <p:nvGrpSpPr>
-            <p:cNvPr id="92" name="Group 91">
-              <a:extLst>
-                <a:ext uri="{FF2B5EF4-FFF2-40B4-BE49-F238E27FC236}">
-                  <a16:creationId xmlns:a16="http://schemas.microsoft.com/office/drawing/2014/main" id="{4525346A-BDB3-0721-4D94-F0F1074B6D10}"/>
-                </a:ext>
-              </a:extLst>
-            </p:cNvPr>
-            <p:cNvGrpSpPr/>
-            <p:nvPr/>
-          </p:nvGrpSpPr>
-          <p:grpSpPr>
-            <a:xfrm rot="10800000">
-              <a:off x="4759508" y="905585"/>
-              <a:ext cx="2458277" cy="3699304"/>
-              <a:chOff x="2596262" y="996307"/>
-              <a:chExt cx="2087055" cy="3699304"/>
-            </a:xfrm>
-          </p:grpSpPr>
-          <p:sp>
-            <p:nvSpPr>
-              <p:cNvPr id="93" name="Arc 92">
-                <a:extLst>
-                  <a:ext uri="{FF2B5EF4-FFF2-40B4-BE49-F238E27FC236}">
-                    <a16:creationId xmlns:a16="http://schemas.microsoft.com/office/drawing/2014/main" id="{EE083B42-6005-01FD-A97D-33C9765F41B2}"/>
-                  </a:ext>
-                </a:extLst>
-              </p:cNvPr>
-              <p:cNvSpPr/>
-              <p:nvPr/>
-            </p:nvSpPr>
-            <p:spPr>
-              <a:xfrm rot="10800000">
-                <a:off x="3283888" y="1768343"/>
-                <a:ext cx="1399429" cy="2097350"/>
-              </a:xfrm>
-              <a:prstGeom prst="arc">
-                <a:avLst>
-                  <a:gd name="adj1" fmla="val 15885701"/>
-                  <a:gd name="adj2" fmla="val 5692140"/>
-                </a:avLst>
-              </a:prstGeom>
-            </p:spPr>
-            <p:style>
-              <a:lnRef idx="1">
-                <a:schemeClr val="accent1"/>
-              </a:lnRef>
-              <a:fillRef idx="0">
-                <a:schemeClr val="accent1"/>
-              </a:fillRef>
-              <a:effectRef idx="0">
-                <a:schemeClr val="accent1"/>
-              </a:effectRef>
-              <a:fontRef idx="minor">
-                <a:schemeClr val="tx1"/>
-              </a:fontRef>
-            </p:style>
-            <p:txBody>
-              <a:bodyPr rtlCol="0" anchor="ctr"/>
-              <a:lstStyle/>
-              <a:p>
-                <a:pPr algn="ctr"/>
-                <a:endParaRPr lang="fr-FR"/>
-              </a:p>
-            </p:txBody>
-          </p:sp>
-          <p:sp>
-            <p:nvSpPr>
-              <p:cNvPr id="94" name="Arc 93">
-                <a:extLst>
-                  <a:ext uri="{FF2B5EF4-FFF2-40B4-BE49-F238E27FC236}">
-                    <a16:creationId xmlns:a16="http://schemas.microsoft.com/office/drawing/2014/main" id="{9F37E834-0E05-A5F0-0ADC-98B01F21ECFB}"/>
-                  </a:ext>
-                </a:extLst>
-              </p:cNvPr>
-              <p:cNvSpPr/>
-              <p:nvPr/>
-            </p:nvSpPr>
-            <p:spPr>
-              <a:xfrm rot="10800000">
-                <a:off x="3068368" y="1444773"/>
-                <a:ext cx="1399429" cy="2802372"/>
-              </a:xfrm>
-              <a:prstGeom prst="arc">
-                <a:avLst>
-                  <a:gd name="adj1" fmla="val 15039800"/>
-                  <a:gd name="adj2" fmla="val 6385720"/>
-                </a:avLst>
-              </a:prstGeom>
-            </p:spPr>
-            <p:style>
-              <a:lnRef idx="1">
-                <a:schemeClr val="accent1"/>
-              </a:lnRef>
-              <a:fillRef idx="0">
-                <a:schemeClr val="accent1"/>
-              </a:fillRef>
-              <a:effectRef idx="0">
-                <a:schemeClr val="accent1"/>
-              </a:effectRef>
-              <a:fontRef idx="minor">
-                <a:schemeClr val="tx1"/>
-              </a:fontRef>
-            </p:style>
-            <p:txBody>
-              <a:bodyPr rtlCol="0" anchor="ctr"/>
-              <a:lstStyle/>
-              <a:p>
-                <a:pPr algn="ctr"/>
-                <a:endParaRPr lang="fr-FR"/>
-              </a:p>
-            </p:txBody>
-          </p:sp>
-          <p:sp>
-            <p:nvSpPr>
-              <p:cNvPr id="95" name="Arc 94">
-                <a:extLst>
-                  <a:ext uri="{FF2B5EF4-FFF2-40B4-BE49-F238E27FC236}">
-                    <a16:creationId xmlns:a16="http://schemas.microsoft.com/office/drawing/2014/main" id="{0F219F75-9589-A628-1216-826B7855196F}"/>
-                  </a:ext>
-                </a:extLst>
-              </p:cNvPr>
-              <p:cNvSpPr/>
-              <p:nvPr/>
-            </p:nvSpPr>
-            <p:spPr>
-              <a:xfrm rot="10800000">
-                <a:off x="2656135" y="996307"/>
-                <a:ext cx="1854352" cy="3699304"/>
-              </a:xfrm>
-              <a:prstGeom prst="arc">
-                <a:avLst>
-                  <a:gd name="adj1" fmla="val 14274424"/>
-                  <a:gd name="adj2" fmla="val 7225553"/>
-                </a:avLst>
-              </a:prstGeom>
-            </p:spPr>
-            <p:style>
-              <a:lnRef idx="1">
-                <a:schemeClr val="accent1"/>
-              </a:lnRef>
-              <a:fillRef idx="0">
-                <a:schemeClr val="accent1"/>
-              </a:fillRef>
-              <a:effectRef idx="0">
-                <a:schemeClr val="accent1"/>
-              </a:effectRef>
-              <a:fontRef idx="minor">
-                <a:schemeClr val="tx1"/>
-              </a:fontRef>
-            </p:style>
-            <p:txBody>
-              <a:bodyPr rtlCol="0" anchor="ctr"/>
-              <a:lstStyle/>
-              <a:p>
-                <a:pPr algn="ctr"/>
-                <a:endParaRPr lang="fr-FR"/>
-              </a:p>
-            </p:txBody>
-          </p:sp>
-          <p:cxnSp>
-            <p:nvCxnSpPr>
-              <p:cNvPr id="96" name="Straight Connector 95">
-                <a:extLst>
-                  <a:ext uri="{FF2B5EF4-FFF2-40B4-BE49-F238E27FC236}">
-                    <a16:creationId xmlns:a16="http://schemas.microsoft.com/office/drawing/2014/main" id="{9F2470BA-F805-22EB-4E2D-0503AFB7D679}"/>
-                  </a:ext>
-                </a:extLst>
-              </p:cNvPr>
-              <p:cNvCxnSpPr>
-                <a:cxnSpLocks/>
-              </p:cNvCxnSpPr>
-              <p:nvPr/>
-            </p:nvCxnSpPr>
-            <p:spPr>
-              <a:xfrm>
-                <a:off x="2596262" y="2922270"/>
-                <a:ext cx="59872" cy="67793"/>
-              </a:xfrm>
-              <a:prstGeom prst="line">
-                <a:avLst/>
-              </a:prstGeom>
-            </p:spPr>
-            <p:style>
-              <a:lnRef idx="1">
-                <a:schemeClr val="accent1"/>
-              </a:lnRef>
-              <a:fillRef idx="0">
-                <a:schemeClr val="accent1"/>
-              </a:fillRef>
-              <a:effectRef idx="0">
-                <a:schemeClr val="accent1"/>
-              </a:effectRef>
-              <a:fontRef idx="minor">
-                <a:schemeClr val="tx1"/>
-              </a:fontRef>
-            </p:style>
-          </p:cxnSp>
-          <p:cxnSp>
-            <p:nvCxnSpPr>
-              <p:cNvPr id="97" name="Straight Connector 96">
-                <a:extLst>
-                  <a:ext uri="{FF2B5EF4-FFF2-40B4-BE49-F238E27FC236}">
-                    <a16:creationId xmlns:a16="http://schemas.microsoft.com/office/drawing/2014/main" id="{76BF596F-947E-41EA-C7FF-2A8B65A14971}"/>
-                  </a:ext>
-                </a:extLst>
-              </p:cNvPr>
-              <p:cNvCxnSpPr>
-                <a:cxnSpLocks/>
-              </p:cNvCxnSpPr>
-              <p:nvPr/>
-            </p:nvCxnSpPr>
-            <p:spPr>
-              <a:xfrm flipV="1">
-                <a:off x="2662704" y="2922270"/>
-                <a:ext cx="64406" cy="67793"/>
-              </a:xfrm>
-              <a:prstGeom prst="line">
-                <a:avLst/>
-              </a:prstGeom>
-            </p:spPr>
-            <p:style>
-              <a:lnRef idx="1">
-                <a:schemeClr val="accent1"/>
-              </a:lnRef>
-              <a:fillRef idx="0">
-                <a:schemeClr val="accent1"/>
-              </a:fillRef>
-              <a:effectRef idx="0">
-                <a:schemeClr val="accent1"/>
-              </a:effectRef>
-              <a:fontRef idx="minor">
-                <a:schemeClr val="tx1"/>
-              </a:fontRef>
-            </p:style>
-          </p:cxnSp>
-          <p:cxnSp>
-            <p:nvCxnSpPr>
-              <p:cNvPr id="98" name="Straight Connector 97">
-                <a:extLst>
-                  <a:ext uri="{FF2B5EF4-FFF2-40B4-BE49-F238E27FC236}">
-                    <a16:creationId xmlns:a16="http://schemas.microsoft.com/office/drawing/2014/main" id="{948807FF-EADA-081D-8388-ED7A202FD18E}"/>
-                  </a:ext>
-                </a:extLst>
-              </p:cNvPr>
-              <p:cNvCxnSpPr>
-                <a:cxnSpLocks/>
-              </p:cNvCxnSpPr>
-              <p:nvPr/>
-            </p:nvCxnSpPr>
-            <p:spPr>
-              <a:xfrm flipV="1">
-                <a:off x="3067580" y="2888373"/>
-                <a:ext cx="64406" cy="67793"/>
-              </a:xfrm>
-              <a:prstGeom prst="line">
-                <a:avLst/>
-              </a:prstGeom>
-            </p:spPr>
-            <p:style>
-              <a:lnRef idx="1">
-                <a:schemeClr val="accent1"/>
-              </a:lnRef>
-              <a:fillRef idx="0">
-                <a:schemeClr val="accent1"/>
-              </a:fillRef>
-              <a:effectRef idx="0">
-                <a:schemeClr val="accent1"/>
-              </a:effectRef>
-              <a:fontRef idx="minor">
-                <a:schemeClr val="tx1"/>
-              </a:fontRef>
-            </p:style>
-          </p:cxnSp>
-          <p:cxnSp>
-            <p:nvCxnSpPr>
-              <p:cNvPr id="99" name="Straight Connector 98">
-                <a:extLst>
-                  <a:ext uri="{FF2B5EF4-FFF2-40B4-BE49-F238E27FC236}">
-                    <a16:creationId xmlns:a16="http://schemas.microsoft.com/office/drawing/2014/main" id="{9CFF0590-AAB4-7CC9-2130-2744903F33DF}"/>
-                  </a:ext>
-                </a:extLst>
-              </p:cNvPr>
-              <p:cNvCxnSpPr>
-                <a:cxnSpLocks/>
-              </p:cNvCxnSpPr>
-              <p:nvPr/>
-            </p:nvCxnSpPr>
-            <p:spPr>
-              <a:xfrm>
-                <a:off x="3015800" y="2888373"/>
-                <a:ext cx="59872" cy="67793"/>
-              </a:xfrm>
-              <a:prstGeom prst="line">
-                <a:avLst/>
-              </a:prstGeom>
-            </p:spPr>
-            <p:style>
-              <a:lnRef idx="1">
-                <a:schemeClr val="accent1"/>
-              </a:lnRef>
-              <a:fillRef idx="0">
-                <a:schemeClr val="accent1"/>
-              </a:fillRef>
-              <a:effectRef idx="0">
-                <a:schemeClr val="accent1"/>
-              </a:effectRef>
-              <a:fontRef idx="minor">
-                <a:schemeClr val="tx1"/>
-              </a:fontRef>
-            </p:style>
-          </p:cxnSp>
-          <p:cxnSp>
-            <p:nvCxnSpPr>
-              <p:cNvPr id="100" name="Straight Connector 99">
-                <a:extLst>
-                  <a:ext uri="{FF2B5EF4-FFF2-40B4-BE49-F238E27FC236}">
-                    <a16:creationId xmlns:a16="http://schemas.microsoft.com/office/drawing/2014/main" id="{57F9F332-42CA-26E0-362B-7CF605EFD442}"/>
-                  </a:ext>
-                </a:extLst>
-              </p:cNvPr>
-              <p:cNvCxnSpPr>
-                <a:cxnSpLocks/>
-              </p:cNvCxnSpPr>
-              <p:nvPr/>
-            </p:nvCxnSpPr>
-            <p:spPr>
-              <a:xfrm>
-                <a:off x="3224015" y="2867797"/>
-                <a:ext cx="59872" cy="67793"/>
-              </a:xfrm>
-              <a:prstGeom prst="line">
-                <a:avLst/>
-              </a:prstGeom>
-            </p:spPr>
-            <p:style>
-              <a:lnRef idx="1">
-                <a:schemeClr val="accent1"/>
-              </a:lnRef>
-              <a:fillRef idx="0">
-                <a:schemeClr val="accent1"/>
-              </a:fillRef>
-              <a:effectRef idx="0">
-                <a:schemeClr val="accent1"/>
-              </a:effectRef>
-              <a:fontRef idx="minor">
-                <a:schemeClr val="tx1"/>
-              </a:fontRef>
-            </p:style>
-          </p:cxnSp>
-          <p:cxnSp>
-            <p:nvCxnSpPr>
-              <p:cNvPr id="101" name="Straight Connector 100">
-                <a:extLst>
-                  <a:ext uri="{FF2B5EF4-FFF2-40B4-BE49-F238E27FC236}">
-                    <a16:creationId xmlns:a16="http://schemas.microsoft.com/office/drawing/2014/main" id="{4B87C225-D2E8-BAD4-4780-5FE18D628533}"/>
-                  </a:ext>
-                </a:extLst>
-              </p:cNvPr>
-              <p:cNvCxnSpPr>
-                <a:cxnSpLocks/>
-              </p:cNvCxnSpPr>
-              <p:nvPr/>
-            </p:nvCxnSpPr>
-            <p:spPr>
-              <a:xfrm flipV="1">
-                <a:off x="3287634" y="2866731"/>
-                <a:ext cx="64406" cy="67793"/>
-              </a:xfrm>
-              <a:prstGeom prst="line">
-                <a:avLst/>
-              </a:prstGeom>
-            </p:spPr>
-            <p:style>
-              <a:lnRef idx="1">
-                <a:schemeClr val="accent1"/>
-              </a:lnRef>
-              <a:fillRef idx="0">
-                <a:schemeClr val="accent1"/>
-              </a:fillRef>
-              <a:effectRef idx="0">
-                <a:schemeClr val="accent1"/>
-              </a:effectRef>
-              <a:fontRef idx="minor">
-                <a:schemeClr val="tx1"/>
-              </a:fontRef>
-            </p:style>
-          </p:cxnSp>
-        </p:grpSp>
-        <p:cxnSp>
-          <p:nvCxnSpPr>
-            <p:cNvPr id="115" name="Straight Arrow Connector 114">
-              <a:extLst>
-                <a:ext uri="{FF2B5EF4-FFF2-40B4-BE49-F238E27FC236}">
-                  <a16:creationId xmlns:a16="http://schemas.microsoft.com/office/drawing/2014/main" id="{DC46B8DE-FCE1-DCA3-DCDE-BE17F59716AB}"/>
-                </a:ext>
-              </a:extLst>
-            </p:cNvPr>
-            <p:cNvCxnSpPr>
-              <a:cxnSpLocks/>
-              <a:endCxn id="63" idx="3"/>
-            </p:cNvCxnSpPr>
-            <p:nvPr/>
-          </p:nvCxnSpPr>
-          <p:spPr>
-            <a:xfrm flipH="1">
-              <a:off x="6453021" y="1211379"/>
-              <a:ext cx="833074" cy="3829"/>
-            </a:xfrm>
-            <a:prstGeom prst="straightConnector1">
-              <a:avLst/>
-            </a:prstGeom>
-            <a:ln>
-              <a:tailEnd type="triangle"/>
-            </a:ln>
-          </p:spPr>
-          <p:style>
-            <a:lnRef idx="2">
-              <a:schemeClr val="dk1"/>
-            </a:lnRef>
-            <a:fillRef idx="0">
-              <a:schemeClr val="dk1"/>
-            </a:fillRef>
-            <a:effectRef idx="1">
-              <a:schemeClr val="dk1"/>
-            </a:effectRef>
-            <a:fontRef idx="minor">
-              <a:schemeClr val="tx1"/>
-            </a:fontRef>
-          </p:style>
-        </p:cxnSp>
-      </p:grpSp>
-    </p:spTree>
-    <p:extLst>
-      <p:ext uri="{BB962C8B-B14F-4D97-AF65-F5344CB8AC3E}">
-        <p14:creationId xmlns:p14="http://schemas.microsoft.com/office/powerpoint/2010/main" val="2517241274"/>
-      </p:ext>
-    </p:extLst>
-  </p:cSld>
-  <p:clrMapOvr>
-    <a:masterClrMapping/>
-  </p:clrMapOvr>
-</p:sld>
-</file>
-
-<file path=ppt/slides/slide2.xml><?xml version="1.0" encoding="utf-8"?>
-<p:sld xmlns:a="http://schemas.openxmlformats.org/drawingml/2006/main" xmlns:r="http://schemas.openxmlformats.org/officeDocument/2006/relationships" xmlns:p="http://schemas.openxmlformats.org/presentationml/2006/main">
-  <p:cSld>
-    <p:spTree>
-      <p:nvGrpSpPr>
-        <p:cNvPr id="1" name=""/>
-        <p:cNvGrpSpPr/>
-        <p:nvPr/>
-      </p:nvGrpSpPr>
-      <p:grpSpPr>
-        <a:xfrm>
-          <a:off x="0" y="0"/>
-          <a:ext cx="0" cy="0"/>
-          <a:chOff x="0" y="0"/>
-          <a:chExt cx="0" cy="0"/>
-        </a:xfrm>
-      </p:grpSpPr>
-      <p:grpSp>
-        <p:nvGrpSpPr>
-          <p:cNvPr id="3" name="Group 2">
-            <a:extLst>
-              <a:ext uri="{FF2B5EF4-FFF2-40B4-BE49-F238E27FC236}">
-                <a16:creationId xmlns:a16="http://schemas.microsoft.com/office/drawing/2014/main" id="{DA4CF7E6-A0FE-9590-0820-161067C55DF1}"/>
+          <p:cNvPr id="31" name="Group 30">
+            <a:extLst>
+              <a:ext uri="{FF2B5EF4-FFF2-40B4-BE49-F238E27FC236}">
+                <a16:creationId xmlns:a16="http://schemas.microsoft.com/office/drawing/2014/main" id="{785024DB-49A4-CE9F-DC40-55045011A618}"/>
               </a:ext>
             </a:extLst>
           </p:cNvPr>
@@ -6458,10 +3370,10 @@
         </p:grpSpPr>
         <p:sp>
           <p:nvSpPr>
-            <p:cNvPr id="46" name="Rectangle 45">
+            <p:cNvPr id="5" name="Rectangle 4">
               <a:extLst>
                 <a:ext uri="{FF2B5EF4-FFF2-40B4-BE49-F238E27FC236}">
-                  <a16:creationId xmlns:a16="http://schemas.microsoft.com/office/drawing/2014/main" id="{B6EED7DA-2788-DC52-27B6-1D0DB22B6B90}"/>
+                  <a16:creationId xmlns:a16="http://schemas.microsoft.com/office/drawing/2014/main" id="{B91BCFDF-EA80-AC89-9D45-692FAC670553}"/>
                 </a:ext>
               </a:extLst>
             </p:cNvPr>
@@ -6477,10 +3389,14 @@
               <a:avLst/>
             </a:prstGeom>
             <a:solidFill>
-              <a:schemeClr val="bg2"/>
+              <a:schemeClr val="bg2">
+                <a:lumMod val="75000"/>
+              </a:schemeClr>
             </a:solidFill>
-            <a:ln>
-              <a:noFill/>
+            <a:ln w="28575">
+              <a:solidFill>
+                <a:schemeClr val="tx1"/>
+              </a:solidFill>
             </a:ln>
           </p:spPr>
           <p:style>
@@ -6510,10 +3426,10 @@
         </p:sp>
         <p:sp>
           <p:nvSpPr>
-            <p:cNvPr id="47" name="Oval 46">
+            <p:cNvPr id="4" name="Oval 3">
               <a:extLst>
                 <a:ext uri="{FF2B5EF4-FFF2-40B4-BE49-F238E27FC236}">
-                  <a16:creationId xmlns:a16="http://schemas.microsoft.com/office/drawing/2014/main" id="{529C0052-CF46-C5D1-CCFB-9E5C85531D2F}"/>
+                  <a16:creationId xmlns:a16="http://schemas.microsoft.com/office/drawing/2014/main" id="{C6C99AAB-DEF2-3B77-0388-F53BF4924808}"/>
                 </a:ext>
               </a:extLst>
             </p:cNvPr>
@@ -6529,13 +3445,13 @@
               <a:avLst/>
             </a:prstGeom>
             <a:solidFill>
-              <a:schemeClr val="bg2"/>
+              <a:schemeClr val="bg2">
+                <a:lumMod val="75000"/>
+              </a:schemeClr>
             </a:solidFill>
-            <a:ln w="6350">
+            <a:ln w="28575">
               <a:solidFill>
-                <a:schemeClr val="bg1">
-                  <a:lumMod val="95000"/>
-                </a:schemeClr>
+                <a:schemeClr val="tx1"/>
               </a:solidFill>
             </a:ln>
           </p:spPr>
@@ -6573,10 +3489,10 @@
         </p:sp>
         <p:sp>
           <p:nvSpPr>
-            <p:cNvPr id="48" name="Freeform: Shape 47">
+            <p:cNvPr id="19" name="Freeform: Shape 18">
               <a:extLst>
                 <a:ext uri="{FF2B5EF4-FFF2-40B4-BE49-F238E27FC236}">
-                  <a16:creationId xmlns:a16="http://schemas.microsoft.com/office/drawing/2014/main" id="{078E145E-B6DB-032C-8A21-1D8B1C1AF240}"/>
+                  <a16:creationId xmlns:a16="http://schemas.microsoft.com/office/drawing/2014/main" id="{BD8DEEE9-595C-06F2-9B7C-DCAA0A3E3BB6}"/>
                 </a:ext>
               </a:extLst>
             </p:cNvPr>
@@ -6629,6 +3545,13 @@
                 </a:path>
               </a:pathLst>
             </a:custGeom>
+            <a:ln w="28575">
+              <a:solidFill>
+                <a:schemeClr val="accent2">
+                  <a:lumMod val="75000"/>
+                </a:schemeClr>
+              </a:solidFill>
+            </a:ln>
           </p:spPr>
           <p:style>
             <a:lnRef idx="1">
@@ -6655,10 +3578,10 @@
         </p:sp>
         <p:sp>
           <p:nvSpPr>
-            <p:cNvPr id="49" name="Freeform: Shape 48">
+            <p:cNvPr id="20" name="Freeform: Shape 19">
               <a:extLst>
                 <a:ext uri="{FF2B5EF4-FFF2-40B4-BE49-F238E27FC236}">
-                  <a16:creationId xmlns:a16="http://schemas.microsoft.com/office/drawing/2014/main" id="{011D94E1-5D02-768D-BADF-3ACF4B7614AE}"/>
+                  <a16:creationId xmlns:a16="http://schemas.microsoft.com/office/drawing/2014/main" id="{C108FF23-E7CB-6DE7-A5B9-DFCF6DB2E536}"/>
                 </a:ext>
               </a:extLst>
             </p:cNvPr>
@@ -6711,6 +3634,13 @@
                 </a:path>
               </a:pathLst>
             </a:custGeom>
+            <a:ln w="28575">
+              <a:solidFill>
+                <a:schemeClr val="accent2">
+                  <a:lumMod val="75000"/>
+                </a:schemeClr>
+              </a:solidFill>
+            </a:ln>
           </p:spPr>
           <p:style>
             <a:lnRef idx="1">
@@ -6737,10 +3667,10 @@
         </p:sp>
         <p:sp>
           <p:nvSpPr>
-            <p:cNvPr id="50" name="Freeform: Shape 49">
+            <p:cNvPr id="21" name="Freeform: Shape 20">
               <a:extLst>
                 <a:ext uri="{FF2B5EF4-FFF2-40B4-BE49-F238E27FC236}">
-                  <a16:creationId xmlns:a16="http://schemas.microsoft.com/office/drawing/2014/main" id="{96E8D6B9-AFA9-82CF-7AF4-909643A62A73}"/>
+                  <a16:creationId xmlns:a16="http://schemas.microsoft.com/office/drawing/2014/main" id="{26EA9AB3-C42D-A042-1B92-3ED337EEFF22}"/>
                 </a:ext>
               </a:extLst>
             </p:cNvPr>
@@ -6793,6 +3723,13 @@
                 </a:path>
               </a:pathLst>
             </a:custGeom>
+            <a:ln w="28575">
+              <a:solidFill>
+                <a:schemeClr val="accent2">
+                  <a:lumMod val="75000"/>
+                </a:schemeClr>
+              </a:solidFill>
+            </a:ln>
           </p:spPr>
           <p:style>
             <a:lnRef idx="1">
@@ -6819,10 +3756,10 @@
         </p:sp>
         <p:sp>
           <p:nvSpPr>
-            <p:cNvPr id="51" name="Freeform: Shape 50">
+            <p:cNvPr id="22" name="Freeform: Shape 21">
               <a:extLst>
                 <a:ext uri="{FF2B5EF4-FFF2-40B4-BE49-F238E27FC236}">
-                  <a16:creationId xmlns:a16="http://schemas.microsoft.com/office/drawing/2014/main" id="{C63C5031-5DF2-8F8F-60A6-C59E9D9E9C25}"/>
+                  <a16:creationId xmlns:a16="http://schemas.microsoft.com/office/drawing/2014/main" id="{F30638CD-42CC-7A5C-1976-64C466A8C4CB}"/>
                 </a:ext>
               </a:extLst>
             </p:cNvPr>
@@ -6875,6 +3812,13 @@
                 </a:path>
               </a:pathLst>
             </a:custGeom>
+            <a:ln w="28575">
+              <a:solidFill>
+                <a:schemeClr val="accent2">
+                  <a:lumMod val="75000"/>
+                </a:schemeClr>
+              </a:solidFill>
+            </a:ln>
           </p:spPr>
           <p:style>
             <a:lnRef idx="1">
@@ -6901,10 +3845,10 @@
         </p:sp>
         <p:sp>
           <p:nvSpPr>
-            <p:cNvPr id="52" name="Freeform: Shape 51">
+            <p:cNvPr id="23" name="Freeform: Shape 22">
               <a:extLst>
                 <a:ext uri="{FF2B5EF4-FFF2-40B4-BE49-F238E27FC236}">
-                  <a16:creationId xmlns:a16="http://schemas.microsoft.com/office/drawing/2014/main" id="{655CCA20-ED4F-D87E-8BF0-3DB3A9A68CC5}"/>
+                  <a16:creationId xmlns:a16="http://schemas.microsoft.com/office/drawing/2014/main" id="{DD10DA60-E38F-6332-9D82-FC2B1E01BABE}"/>
                 </a:ext>
               </a:extLst>
             </p:cNvPr>
@@ -6957,6 +3901,13 @@
                 </a:path>
               </a:pathLst>
             </a:custGeom>
+            <a:ln w="28575">
+              <a:solidFill>
+                <a:schemeClr val="accent2">
+                  <a:lumMod val="75000"/>
+                </a:schemeClr>
+              </a:solidFill>
+            </a:ln>
           </p:spPr>
           <p:style>
             <a:lnRef idx="1">
@@ -6983,10 +3934,10 @@
         </p:sp>
         <p:sp>
           <p:nvSpPr>
-            <p:cNvPr id="53" name="Freeform: Shape 52">
+            <p:cNvPr id="24" name="Freeform: Shape 23">
               <a:extLst>
                 <a:ext uri="{FF2B5EF4-FFF2-40B4-BE49-F238E27FC236}">
-                  <a16:creationId xmlns:a16="http://schemas.microsoft.com/office/drawing/2014/main" id="{27EB360C-5C1F-43A6-9ABA-37C0A6301798}"/>
+                  <a16:creationId xmlns:a16="http://schemas.microsoft.com/office/drawing/2014/main" id="{9F8F694C-F7E7-396D-0ED7-47F5D5C0FA12}"/>
                 </a:ext>
               </a:extLst>
             </p:cNvPr>
@@ -7039,6 +3990,13 @@
                 </a:path>
               </a:pathLst>
             </a:custGeom>
+            <a:ln w="28575">
+              <a:solidFill>
+                <a:schemeClr val="accent2">
+                  <a:lumMod val="75000"/>
+                </a:schemeClr>
+              </a:solidFill>
+            </a:ln>
           </p:spPr>
           <p:style>
             <a:lnRef idx="1">
@@ -7065,10 +4023,10 @@
         </p:sp>
         <p:sp>
           <p:nvSpPr>
-            <p:cNvPr id="54" name="Freeform: Shape 53">
+            <p:cNvPr id="25" name="Freeform: Shape 24">
               <a:extLst>
                 <a:ext uri="{FF2B5EF4-FFF2-40B4-BE49-F238E27FC236}">
-                  <a16:creationId xmlns:a16="http://schemas.microsoft.com/office/drawing/2014/main" id="{2A8FFEF3-7691-E719-9B5C-4BCE8F451D2E}"/>
+                  <a16:creationId xmlns:a16="http://schemas.microsoft.com/office/drawing/2014/main" id="{F646A30C-5935-E3DC-57FD-3876459449CC}"/>
                 </a:ext>
               </a:extLst>
             </p:cNvPr>
@@ -7121,6 +4079,13 @@
                 </a:path>
               </a:pathLst>
             </a:custGeom>
+            <a:ln w="28575">
+              <a:solidFill>
+                <a:schemeClr val="accent2">
+                  <a:lumMod val="75000"/>
+                </a:schemeClr>
+              </a:solidFill>
+            </a:ln>
           </p:spPr>
           <p:style>
             <a:lnRef idx="1">
@@ -7147,10 +4112,10 @@
         </p:sp>
         <p:sp>
           <p:nvSpPr>
-            <p:cNvPr id="55" name="Freeform: Shape 54">
+            <p:cNvPr id="26" name="Freeform: Shape 25">
               <a:extLst>
                 <a:ext uri="{FF2B5EF4-FFF2-40B4-BE49-F238E27FC236}">
-                  <a16:creationId xmlns:a16="http://schemas.microsoft.com/office/drawing/2014/main" id="{AC143F58-3136-31DB-9CA5-29444EF123F8}"/>
+                  <a16:creationId xmlns:a16="http://schemas.microsoft.com/office/drawing/2014/main" id="{A3C43178-88E0-26E0-983E-A5F8BCE59B95}"/>
                 </a:ext>
               </a:extLst>
             </p:cNvPr>
@@ -7203,6 +4168,13 @@
                 </a:path>
               </a:pathLst>
             </a:custGeom>
+            <a:ln w="28575">
+              <a:solidFill>
+                <a:schemeClr val="accent2">
+                  <a:lumMod val="75000"/>
+                </a:schemeClr>
+              </a:solidFill>
+            </a:ln>
           </p:spPr>
           <p:style>
             <a:lnRef idx="1">
@@ -7229,10 +4201,10 @@
         </p:sp>
         <p:sp>
           <p:nvSpPr>
-            <p:cNvPr id="56" name="Freeform: Shape 55">
+            <p:cNvPr id="27" name="Freeform: Shape 26">
               <a:extLst>
                 <a:ext uri="{FF2B5EF4-FFF2-40B4-BE49-F238E27FC236}">
-                  <a16:creationId xmlns:a16="http://schemas.microsoft.com/office/drawing/2014/main" id="{7ED8AAF8-0BEA-B29A-1247-0399D8D42EFE}"/>
+                  <a16:creationId xmlns:a16="http://schemas.microsoft.com/office/drawing/2014/main" id="{6B9693ED-60C1-082B-DB57-4408A2828E96}"/>
                 </a:ext>
               </a:extLst>
             </p:cNvPr>
@@ -7285,6 +4257,13 @@
                 </a:path>
               </a:pathLst>
             </a:custGeom>
+            <a:ln w="28575">
+              <a:solidFill>
+                <a:schemeClr val="accent2">
+                  <a:lumMod val="75000"/>
+                </a:schemeClr>
+              </a:solidFill>
+            </a:ln>
           </p:spPr>
           <p:style>
             <a:lnRef idx="1">
@@ -7311,10 +4290,10 @@
         </p:sp>
         <p:sp>
           <p:nvSpPr>
-            <p:cNvPr id="57" name="Freeform: Shape 56">
+            <p:cNvPr id="28" name="Freeform: Shape 27">
               <a:extLst>
                 <a:ext uri="{FF2B5EF4-FFF2-40B4-BE49-F238E27FC236}">
-                  <a16:creationId xmlns:a16="http://schemas.microsoft.com/office/drawing/2014/main" id="{55B65B92-53B1-4CC7-3FBF-031CEB79F5E7}"/>
+                  <a16:creationId xmlns:a16="http://schemas.microsoft.com/office/drawing/2014/main" id="{2C599F15-A677-5DBE-5285-8EEBE13F2D0C}"/>
                 </a:ext>
               </a:extLst>
             </p:cNvPr>
@@ -7367,6 +4346,13 @@
                 </a:path>
               </a:pathLst>
             </a:custGeom>
+            <a:ln w="28575">
+              <a:solidFill>
+                <a:schemeClr val="accent2">
+                  <a:lumMod val="75000"/>
+                </a:schemeClr>
+              </a:solidFill>
+            </a:ln>
           </p:spPr>
           <p:style>
             <a:lnRef idx="1">
@@ -7393,10 +4379,10 @@
         </p:sp>
         <p:sp>
           <p:nvSpPr>
-            <p:cNvPr id="58" name="Oval 57">
+            <p:cNvPr id="6" name="Oval 5">
               <a:extLst>
                 <a:ext uri="{FF2B5EF4-FFF2-40B4-BE49-F238E27FC236}">
-                  <a16:creationId xmlns:a16="http://schemas.microsoft.com/office/drawing/2014/main" id="{710608F1-32B5-CF62-BC56-D324E9348C1E}"/>
+                  <a16:creationId xmlns:a16="http://schemas.microsoft.com/office/drawing/2014/main" id="{0D4CF9DC-DCFB-B4AA-BF5D-4AA0FF2DD1DA}"/>
                 </a:ext>
               </a:extLst>
             </p:cNvPr>
@@ -7412,10 +4398,14 @@
               <a:avLst/>
             </a:prstGeom>
             <a:solidFill>
-              <a:schemeClr val="bg2"/>
+              <a:schemeClr val="bg2">
+                <a:lumMod val="75000"/>
+              </a:schemeClr>
             </a:solidFill>
-            <a:ln>
-              <a:noFill/>
+            <a:ln w="28575">
+              <a:solidFill>
+                <a:schemeClr val="tx1"/>
+              </a:solidFill>
             </a:ln>
           </p:spPr>
           <p:style>
@@ -7451,94 +4441,12 @@
           </p:txBody>
         </p:sp>
       </p:grpSp>
-      <p:cxnSp>
-        <p:nvCxnSpPr>
-          <p:cNvPr id="9" name="Straight Arrow Connector 8">
-            <a:extLst>
-              <a:ext uri="{FF2B5EF4-FFF2-40B4-BE49-F238E27FC236}">
-                <a16:creationId xmlns:a16="http://schemas.microsoft.com/office/drawing/2014/main" id="{9754D816-0878-AB87-4077-890AF04A1AD4}"/>
-              </a:ext>
-            </a:extLst>
-          </p:cNvPr>
-          <p:cNvCxnSpPr>
-            <a:cxnSpLocks/>
-          </p:cNvCxnSpPr>
-          <p:nvPr/>
-        </p:nvCxnSpPr>
-        <p:spPr>
-          <a:xfrm flipH="1">
-            <a:off x="4743189" y="3465781"/>
-            <a:ext cx="2551312" cy="23192"/>
-          </a:xfrm>
-          <a:prstGeom prst="straightConnector1">
-            <a:avLst/>
-          </a:prstGeom>
-          <a:ln>
-            <a:tailEnd type="triangle"/>
-          </a:ln>
-        </p:spPr>
-        <p:style>
-          <a:lnRef idx="2">
-            <a:schemeClr val="dk1"/>
-          </a:lnRef>
-          <a:fillRef idx="0">
-            <a:schemeClr val="dk1"/>
-          </a:fillRef>
-          <a:effectRef idx="1">
-            <a:schemeClr val="dk1"/>
-          </a:effectRef>
-          <a:fontRef idx="minor">
-            <a:schemeClr val="tx1"/>
-          </a:fontRef>
-        </p:style>
-      </p:cxnSp>
-      <p:cxnSp>
-        <p:nvCxnSpPr>
-          <p:cNvPr id="10" name="Straight Arrow Connector 9">
-            <a:extLst>
-              <a:ext uri="{FF2B5EF4-FFF2-40B4-BE49-F238E27FC236}">
-                <a16:creationId xmlns:a16="http://schemas.microsoft.com/office/drawing/2014/main" id="{13155FB7-3BA4-A1C8-D9D2-2A5FAB15FDD4}"/>
-              </a:ext>
-            </a:extLst>
-          </p:cNvPr>
-          <p:cNvCxnSpPr>
-            <a:cxnSpLocks/>
-          </p:cNvCxnSpPr>
-          <p:nvPr/>
-        </p:nvCxnSpPr>
-        <p:spPr>
-          <a:xfrm flipH="1">
-            <a:off x="4815052" y="1974290"/>
-            <a:ext cx="2402733" cy="0"/>
-          </a:xfrm>
-          <a:prstGeom prst="straightConnector1">
-            <a:avLst/>
-          </a:prstGeom>
-          <a:ln>
-            <a:tailEnd type="triangle"/>
-          </a:ln>
-        </p:spPr>
-        <p:style>
-          <a:lnRef idx="2">
-            <a:schemeClr val="dk1"/>
-          </a:lnRef>
-          <a:fillRef idx="0">
-            <a:schemeClr val="dk1"/>
-          </a:fillRef>
-          <a:effectRef idx="1">
-            <a:schemeClr val="dk1"/>
-          </a:effectRef>
-          <a:fontRef idx="minor">
-            <a:schemeClr val="tx1"/>
-          </a:fontRef>
-        </p:style>
-      </p:cxnSp>
       <p:grpSp>
         <p:nvGrpSpPr>
-          <p:cNvPr id="12" name="Group 11">
-            <a:extLst>
-              <a:ext uri="{FF2B5EF4-FFF2-40B4-BE49-F238E27FC236}">
-                <a16:creationId xmlns:a16="http://schemas.microsoft.com/office/drawing/2014/main" id="{27454BE4-7878-8B3C-5698-7E045F8D1251}"/>
+          <p:cNvPr id="46" name="Group 45">
+            <a:extLst>
+              <a:ext uri="{FF2B5EF4-FFF2-40B4-BE49-F238E27FC236}">
+                <a16:creationId xmlns:a16="http://schemas.microsoft.com/office/drawing/2014/main" id="{5E417193-AEED-414D-F123-FA03EC4B6581}"/>
               </a:ext>
             </a:extLst>
           </p:cNvPr>
@@ -7547,18 +4455,18 @@
         </p:nvGrpSpPr>
         <p:grpSpPr>
           <a:xfrm>
-            <a:off x="2596262" y="996307"/>
-            <a:ext cx="2087055" cy="3699304"/>
-            <a:chOff x="2596262" y="996307"/>
-            <a:chExt cx="2087055" cy="3699304"/>
+            <a:off x="4804499" y="1544541"/>
+            <a:ext cx="708470" cy="2516919"/>
+            <a:chOff x="6438260" y="2687541"/>
+            <a:chExt cx="427857" cy="1501969"/>
           </a:xfrm>
         </p:grpSpPr>
         <p:sp>
           <p:nvSpPr>
-            <p:cNvPr id="24" name="Arc 23">
+            <p:cNvPr id="47" name="Rectangle 46">
               <a:extLst>
                 <a:ext uri="{FF2B5EF4-FFF2-40B4-BE49-F238E27FC236}">
-                  <a16:creationId xmlns:a16="http://schemas.microsoft.com/office/drawing/2014/main" id="{5B3330F7-5594-A398-639D-D42B23930623}"/>
+                  <a16:creationId xmlns:a16="http://schemas.microsoft.com/office/drawing/2014/main" id="{E142F9DB-0DED-50AB-9840-E859630B1EB8}"/>
                 </a:ext>
               </a:extLst>
             </p:cNvPr>
@@ -7566,29 +4474,38 @@
             <p:nvPr/>
           </p:nvSpPr>
           <p:spPr>
-            <a:xfrm rot="10800000">
-              <a:off x="3283888" y="1768343"/>
-              <a:ext cx="1399429" cy="2097350"/>
+            <a:xfrm>
+              <a:off x="6438260" y="2798859"/>
+              <a:ext cx="427382" cy="1296063"/>
             </a:xfrm>
-            <a:prstGeom prst="arc">
-              <a:avLst>
-                <a:gd name="adj1" fmla="val 15885701"/>
-                <a:gd name="adj2" fmla="val 5692140"/>
-              </a:avLst>
+            <a:prstGeom prst="rect">
+              <a:avLst/>
             </a:prstGeom>
+            <a:solidFill>
+              <a:schemeClr val="bg2">
+                <a:lumMod val="75000"/>
+              </a:schemeClr>
+            </a:solidFill>
+            <a:ln w="28575">
+              <a:solidFill>
+                <a:schemeClr val="tx1"/>
+              </a:solidFill>
+            </a:ln>
           </p:spPr>
           <p:style>
-            <a:lnRef idx="1">
-              <a:schemeClr val="accent1"/>
+            <a:lnRef idx="2">
+              <a:schemeClr val="accent1">
+                <a:shade val="15000"/>
+              </a:schemeClr>
             </a:lnRef>
-            <a:fillRef idx="0">
+            <a:fillRef idx="1">
               <a:schemeClr val="accent1"/>
             </a:fillRef>
             <a:effectRef idx="0">
               <a:schemeClr val="accent1"/>
             </a:effectRef>
             <a:fontRef idx="minor">
-              <a:schemeClr val="tx1"/>
+              <a:schemeClr val="lt1"/>
             </a:fontRef>
           </p:style>
           <p:txBody>
@@ -7602,10 +4519,10 @@
         </p:sp>
         <p:sp>
           <p:nvSpPr>
-            <p:cNvPr id="25" name="Arc 24">
+            <p:cNvPr id="48" name="Oval 47">
               <a:extLst>
                 <a:ext uri="{FF2B5EF4-FFF2-40B4-BE49-F238E27FC236}">
-                  <a16:creationId xmlns:a16="http://schemas.microsoft.com/office/drawing/2014/main" id="{C9159EBE-2DE7-1F3C-D1F1-865D67A0AEB4}"/>
+                  <a16:creationId xmlns:a16="http://schemas.microsoft.com/office/drawing/2014/main" id="{A883E24D-9647-C740-683F-2B26C074528D}"/>
                 </a:ext>
               </a:extLst>
             </p:cNvPr>
@@ -7613,29 +4530,38 @@
             <p:nvPr/>
           </p:nvSpPr>
           <p:spPr>
-            <a:xfrm rot="10800000">
-              <a:off x="3068368" y="1444773"/>
-              <a:ext cx="1399429" cy="2802372"/>
+            <a:xfrm>
+              <a:off x="6438260" y="2687541"/>
+              <a:ext cx="427382" cy="222637"/>
             </a:xfrm>
-            <a:prstGeom prst="arc">
-              <a:avLst>
-                <a:gd name="adj1" fmla="val 15039800"/>
-                <a:gd name="adj2" fmla="val 6385720"/>
-              </a:avLst>
+            <a:prstGeom prst="ellipse">
+              <a:avLst/>
             </a:prstGeom>
+            <a:solidFill>
+              <a:schemeClr val="bg2">
+                <a:lumMod val="75000"/>
+              </a:schemeClr>
+            </a:solidFill>
+            <a:ln w="28575">
+              <a:solidFill>
+                <a:schemeClr val="tx1"/>
+              </a:solidFill>
+            </a:ln>
           </p:spPr>
           <p:style>
-            <a:lnRef idx="1">
-              <a:schemeClr val="accent1"/>
+            <a:lnRef idx="2">
+              <a:schemeClr val="accent1">
+                <a:shade val="15000"/>
+              </a:schemeClr>
             </a:lnRef>
-            <a:fillRef idx="0">
+            <a:fillRef idx="1">
               <a:schemeClr val="accent1"/>
             </a:fillRef>
             <a:effectRef idx="0">
               <a:schemeClr val="accent1"/>
             </a:effectRef>
             <a:fontRef idx="minor">
-              <a:schemeClr val="tx1"/>
+              <a:schemeClr val="lt1"/>
             </a:fontRef>
           </p:style>
           <p:txBody>
@@ -7643,16 +4569,23 @@
             <a:lstStyle/>
             <a:p>
               <a:pPr algn="ctr"/>
-              <a:endParaRPr lang="fr-FR"/>
+              <a:r>
+                <a:rPr lang="fr-FR" sz="1100" b="1" dirty="0">
+                  <a:solidFill>
+                    <a:schemeClr val="tx1"/>
+                  </a:solidFill>
+                </a:rPr>
+                <a:t>S</a:t>
+              </a:r>
             </a:p>
           </p:txBody>
         </p:sp>
         <p:sp>
           <p:nvSpPr>
-            <p:cNvPr id="26" name="Arc 25">
+            <p:cNvPr id="59" name="Oval 58">
               <a:extLst>
                 <a:ext uri="{FF2B5EF4-FFF2-40B4-BE49-F238E27FC236}">
-                  <a16:creationId xmlns:a16="http://schemas.microsoft.com/office/drawing/2014/main" id="{BE8B40DE-C637-A8AE-1773-0018A3F547C7}"/>
+                  <a16:creationId xmlns:a16="http://schemas.microsoft.com/office/drawing/2014/main" id="{0DBD33AA-37C2-FEE3-1971-C394E6F2430B}"/>
                 </a:ext>
               </a:extLst>
             </p:cNvPr>
@@ -7660,29 +4593,38 @@
             <p:nvPr/>
           </p:nvSpPr>
           <p:spPr>
-            <a:xfrm rot="10800000">
-              <a:off x="2656135" y="996307"/>
-              <a:ext cx="1854352" cy="3699304"/>
+            <a:xfrm>
+              <a:off x="6438735" y="3966873"/>
+              <a:ext cx="427382" cy="222637"/>
             </a:xfrm>
-            <a:prstGeom prst="arc">
-              <a:avLst>
-                <a:gd name="adj1" fmla="val 14349328"/>
-                <a:gd name="adj2" fmla="val 6991892"/>
-              </a:avLst>
+            <a:prstGeom prst="ellipse">
+              <a:avLst/>
             </a:prstGeom>
+            <a:solidFill>
+              <a:schemeClr val="bg2">
+                <a:lumMod val="75000"/>
+              </a:schemeClr>
+            </a:solidFill>
+            <a:ln w="28575">
+              <a:solidFill>
+                <a:schemeClr val="tx1"/>
+              </a:solidFill>
+            </a:ln>
           </p:spPr>
           <p:style>
-            <a:lnRef idx="1">
-              <a:schemeClr val="accent1"/>
+            <a:lnRef idx="2">
+              <a:schemeClr val="accent1">
+                <a:shade val="15000"/>
+              </a:schemeClr>
             </a:lnRef>
-            <a:fillRef idx="0">
+            <a:fillRef idx="1">
               <a:schemeClr val="accent1"/>
             </a:fillRef>
             <a:effectRef idx="0">
               <a:schemeClr val="accent1"/>
             </a:effectRef>
             <a:fontRef idx="minor">
-              <a:schemeClr val="tx1"/>
+              <a:schemeClr val="lt1"/>
             </a:fontRef>
           </p:style>
           <p:txBody>
@@ -7690,665 +4632,444 @@
             <a:lstStyle/>
             <a:p>
               <a:pPr algn="ctr"/>
-              <a:endParaRPr lang="fr-FR"/>
+              <a:r>
+                <a:rPr lang="fr-FR" sz="1100" b="1" dirty="0">
+                  <a:solidFill>
+                    <a:schemeClr val="tx1"/>
+                  </a:solidFill>
+                </a:rPr>
+                <a:t>N</a:t>
+              </a:r>
             </a:p>
           </p:txBody>
         </p:sp>
-        <p:cxnSp>
-          <p:nvCxnSpPr>
-            <p:cNvPr id="27" name="Straight Connector 26">
-              <a:extLst>
-                <a:ext uri="{FF2B5EF4-FFF2-40B4-BE49-F238E27FC236}">
-                  <a16:creationId xmlns:a16="http://schemas.microsoft.com/office/drawing/2014/main" id="{8DE79FF2-0249-C2F6-5A44-3CC538C16009}"/>
-                </a:ext>
-              </a:extLst>
-            </p:cNvPr>
-            <p:cNvCxnSpPr>
-              <a:cxnSpLocks/>
-            </p:cNvCxnSpPr>
-            <p:nvPr/>
-          </p:nvCxnSpPr>
-          <p:spPr>
-            <a:xfrm>
-              <a:off x="2596262" y="2922270"/>
-              <a:ext cx="59872" cy="67793"/>
-            </a:xfrm>
-            <a:prstGeom prst="line">
-              <a:avLst/>
-            </a:prstGeom>
-          </p:spPr>
-          <p:style>
-            <a:lnRef idx="1">
-              <a:schemeClr val="accent1"/>
-            </a:lnRef>
-            <a:fillRef idx="0">
-              <a:schemeClr val="accent1"/>
-            </a:fillRef>
-            <a:effectRef idx="0">
-              <a:schemeClr val="accent1"/>
-            </a:effectRef>
-            <a:fontRef idx="minor">
-              <a:schemeClr val="tx1"/>
-            </a:fontRef>
-          </p:style>
-        </p:cxnSp>
-        <p:cxnSp>
-          <p:nvCxnSpPr>
-            <p:cNvPr id="28" name="Straight Connector 27">
-              <a:extLst>
-                <a:ext uri="{FF2B5EF4-FFF2-40B4-BE49-F238E27FC236}">
-                  <a16:creationId xmlns:a16="http://schemas.microsoft.com/office/drawing/2014/main" id="{4028F7CA-E374-A95C-95DE-B10E29076FE8}"/>
-                </a:ext>
-              </a:extLst>
-            </p:cNvPr>
-            <p:cNvCxnSpPr>
-              <a:cxnSpLocks/>
-            </p:cNvCxnSpPr>
-            <p:nvPr/>
-          </p:nvCxnSpPr>
-          <p:spPr>
-            <a:xfrm flipV="1">
-              <a:off x="2662704" y="2922270"/>
-              <a:ext cx="64406" cy="67793"/>
-            </a:xfrm>
-            <a:prstGeom prst="line">
-              <a:avLst/>
-            </a:prstGeom>
-          </p:spPr>
-          <p:style>
-            <a:lnRef idx="1">
-              <a:schemeClr val="accent1"/>
-            </a:lnRef>
-            <a:fillRef idx="0">
-              <a:schemeClr val="accent1"/>
-            </a:fillRef>
-            <a:effectRef idx="0">
-              <a:schemeClr val="accent1"/>
-            </a:effectRef>
-            <a:fontRef idx="minor">
-              <a:schemeClr val="tx1"/>
-            </a:fontRef>
-          </p:style>
-        </p:cxnSp>
-        <p:cxnSp>
-          <p:nvCxnSpPr>
-            <p:cNvPr id="29" name="Straight Connector 28">
-              <a:extLst>
-                <a:ext uri="{FF2B5EF4-FFF2-40B4-BE49-F238E27FC236}">
-                  <a16:creationId xmlns:a16="http://schemas.microsoft.com/office/drawing/2014/main" id="{74EB1654-86E0-5678-D06D-9777A64CC28C}"/>
-                </a:ext>
-              </a:extLst>
-            </p:cNvPr>
-            <p:cNvCxnSpPr>
-              <a:cxnSpLocks/>
-            </p:cNvCxnSpPr>
-            <p:nvPr/>
-          </p:nvCxnSpPr>
-          <p:spPr>
-            <a:xfrm flipV="1">
-              <a:off x="3067580" y="2888373"/>
-              <a:ext cx="64406" cy="67793"/>
-            </a:xfrm>
-            <a:prstGeom prst="line">
-              <a:avLst/>
-            </a:prstGeom>
-          </p:spPr>
-          <p:style>
-            <a:lnRef idx="1">
-              <a:schemeClr val="accent1"/>
-            </a:lnRef>
-            <a:fillRef idx="0">
-              <a:schemeClr val="accent1"/>
-            </a:fillRef>
-            <a:effectRef idx="0">
-              <a:schemeClr val="accent1"/>
-            </a:effectRef>
-            <a:fontRef idx="minor">
-              <a:schemeClr val="tx1"/>
-            </a:fontRef>
-          </p:style>
-        </p:cxnSp>
-        <p:cxnSp>
-          <p:nvCxnSpPr>
-            <p:cNvPr id="30" name="Straight Connector 29">
-              <a:extLst>
-                <a:ext uri="{FF2B5EF4-FFF2-40B4-BE49-F238E27FC236}">
-                  <a16:creationId xmlns:a16="http://schemas.microsoft.com/office/drawing/2014/main" id="{06CE717A-19D1-DBF8-F134-E9A78972DBEC}"/>
-                </a:ext>
-              </a:extLst>
-            </p:cNvPr>
-            <p:cNvCxnSpPr>
-              <a:cxnSpLocks/>
-            </p:cNvCxnSpPr>
-            <p:nvPr/>
-          </p:nvCxnSpPr>
-          <p:spPr>
-            <a:xfrm>
-              <a:off x="3015800" y="2888373"/>
-              <a:ext cx="59872" cy="67793"/>
-            </a:xfrm>
-            <a:prstGeom prst="line">
-              <a:avLst/>
-            </a:prstGeom>
-          </p:spPr>
-          <p:style>
-            <a:lnRef idx="1">
-              <a:schemeClr val="accent1"/>
-            </a:lnRef>
-            <a:fillRef idx="0">
-              <a:schemeClr val="accent1"/>
-            </a:fillRef>
-            <a:effectRef idx="0">
-              <a:schemeClr val="accent1"/>
-            </a:effectRef>
-            <a:fontRef idx="minor">
-              <a:schemeClr val="tx1"/>
-            </a:fontRef>
-          </p:style>
-        </p:cxnSp>
-        <p:cxnSp>
-          <p:nvCxnSpPr>
-            <p:cNvPr id="31" name="Straight Connector 30">
-              <a:extLst>
-                <a:ext uri="{FF2B5EF4-FFF2-40B4-BE49-F238E27FC236}">
-                  <a16:creationId xmlns:a16="http://schemas.microsoft.com/office/drawing/2014/main" id="{B4B52C25-02AD-FA2D-6F99-C48E36666C01}"/>
-                </a:ext>
-              </a:extLst>
-            </p:cNvPr>
-            <p:cNvCxnSpPr>
-              <a:cxnSpLocks/>
-            </p:cNvCxnSpPr>
-            <p:nvPr/>
-          </p:nvCxnSpPr>
-          <p:spPr>
-            <a:xfrm>
-              <a:off x="3224015" y="2867797"/>
-              <a:ext cx="59872" cy="67793"/>
-            </a:xfrm>
-            <a:prstGeom prst="line">
-              <a:avLst/>
-            </a:prstGeom>
-          </p:spPr>
-          <p:style>
-            <a:lnRef idx="1">
-              <a:schemeClr val="accent1"/>
-            </a:lnRef>
-            <a:fillRef idx="0">
-              <a:schemeClr val="accent1"/>
-            </a:fillRef>
-            <a:effectRef idx="0">
-              <a:schemeClr val="accent1"/>
-            </a:effectRef>
-            <a:fontRef idx="minor">
-              <a:schemeClr val="tx1"/>
-            </a:fontRef>
-          </p:style>
-        </p:cxnSp>
-        <p:cxnSp>
-          <p:nvCxnSpPr>
-            <p:cNvPr id="32" name="Straight Connector 31">
-              <a:extLst>
-                <a:ext uri="{FF2B5EF4-FFF2-40B4-BE49-F238E27FC236}">
-                  <a16:creationId xmlns:a16="http://schemas.microsoft.com/office/drawing/2014/main" id="{3D92F03D-F806-A3B8-E388-132FE20767E8}"/>
-                </a:ext>
-              </a:extLst>
-            </p:cNvPr>
-            <p:cNvCxnSpPr>
-              <a:cxnSpLocks/>
-            </p:cNvCxnSpPr>
-            <p:nvPr/>
-          </p:nvCxnSpPr>
-          <p:spPr>
-            <a:xfrm flipV="1">
-              <a:off x="3287634" y="2866731"/>
-              <a:ext cx="64406" cy="67793"/>
-            </a:xfrm>
-            <a:prstGeom prst="line">
-              <a:avLst/>
-            </a:prstGeom>
-          </p:spPr>
-          <p:style>
-            <a:lnRef idx="1">
-              <a:schemeClr val="accent1"/>
-            </a:lnRef>
-            <a:fillRef idx="0">
-              <a:schemeClr val="accent1"/>
-            </a:fillRef>
-            <a:effectRef idx="0">
-              <a:schemeClr val="accent1"/>
-            </a:effectRef>
-            <a:fontRef idx="minor">
-              <a:schemeClr val="tx1"/>
-            </a:fontRef>
-          </p:style>
-        </p:cxnSp>
       </p:grpSp>
-      <p:grpSp>
-        <p:nvGrpSpPr>
-          <p:cNvPr id="13" name="Group 12">
-            <a:extLst>
-              <a:ext uri="{FF2B5EF4-FFF2-40B4-BE49-F238E27FC236}">
-                <a16:creationId xmlns:a16="http://schemas.microsoft.com/office/drawing/2014/main" id="{94340C20-0C6E-F659-3475-A0DB2D7709B4}"/>
-              </a:ext>
-            </a:extLst>
-          </p:cNvPr>
-          <p:cNvGrpSpPr/>
+      <p:sp>
+        <p:nvSpPr>
+          <p:cNvPr id="78" name="Arc 77">
+            <a:extLst>
+              <a:ext uri="{FF2B5EF4-FFF2-40B4-BE49-F238E27FC236}">
+                <a16:creationId xmlns:a16="http://schemas.microsoft.com/office/drawing/2014/main" id="{02F93204-9F89-2C9E-8DDE-EAE548F4DA74}"/>
+              </a:ext>
+            </a:extLst>
+          </p:cNvPr>
+          <p:cNvSpPr/>
           <p:nvPr/>
-        </p:nvGrpSpPr>
-        <p:grpSpPr>
-          <a:xfrm flipH="1">
-            <a:off x="4114675" y="1017079"/>
-            <a:ext cx="2448000" cy="3699304"/>
-            <a:chOff x="2596262" y="996307"/>
-            <a:chExt cx="2087055" cy="3699304"/>
+        </p:nvSpPr>
+        <p:spPr>
+          <a:xfrm rot="10800000">
+            <a:off x="3283888" y="1768343"/>
+            <a:ext cx="1399429" cy="2097350"/>
           </a:xfrm>
-        </p:grpSpPr>
-        <p:sp>
-          <p:nvSpPr>
-            <p:cNvPr id="15" name="Arc 14">
-              <a:extLst>
-                <a:ext uri="{FF2B5EF4-FFF2-40B4-BE49-F238E27FC236}">
-                  <a16:creationId xmlns:a16="http://schemas.microsoft.com/office/drawing/2014/main" id="{060A4288-7B45-CF18-DF36-C0AB2764CF33}"/>
-                </a:ext>
-              </a:extLst>
-            </p:cNvPr>
-            <p:cNvSpPr/>
-            <p:nvPr/>
-          </p:nvSpPr>
-          <p:spPr>
-            <a:xfrm rot="10800000">
-              <a:off x="3283888" y="1768343"/>
-              <a:ext cx="1399429" cy="2097350"/>
-            </a:xfrm>
-            <a:prstGeom prst="arc">
-              <a:avLst>
-                <a:gd name="adj1" fmla="val 15885701"/>
-                <a:gd name="adj2" fmla="val 5692140"/>
-              </a:avLst>
-            </a:prstGeom>
-          </p:spPr>
-          <p:style>
-            <a:lnRef idx="1">
-              <a:schemeClr val="accent1"/>
-            </a:lnRef>
-            <a:fillRef idx="0">
-              <a:schemeClr val="accent1"/>
-            </a:fillRef>
-            <a:effectRef idx="0">
-              <a:schemeClr val="accent1"/>
-            </a:effectRef>
-            <a:fontRef idx="minor">
-              <a:schemeClr val="tx1"/>
-            </a:fontRef>
-          </p:style>
-          <p:txBody>
-            <a:bodyPr rtlCol="0" anchor="ctr"/>
-            <a:lstStyle/>
-            <a:p>
-              <a:pPr algn="ctr"/>
-              <a:endParaRPr lang="fr-FR"/>
-            </a:p>
-          </p:txBody>
-        </p:sp>
-        <p:sp>
-          <p:nvSpPr>
-            <p:cNvPr id="16" name="Arc 15">
-              <a:extLst>
-                <a:ext uri="{FF2B5EF4-FFF2-40B4-BE49-F238E27FC236}">
-                  <a16:creationId xmlns:a16="http://schemas.microsoft.com/office/drawing/2014/main" id="{C6166CE2-4FEF-02E1-5C4C-B7470944EF7D}"/>
-                </a:ext>
-              </a:extLst>
-            </p:cNvPr>
-            <p:cNvSpPr/>
-            <p:nvPr/>
-          </p:nvSpPr>
-          <p:spPr>
-            <a:xfrm rot="10800000">
-              <a:off x="3068368" y="1444773"/>
-              <a:ext cx="1399429" cy="2802372"/>
-            </a:xfrm>
-            <a:prstGeom prst="arc">
-              <a:avLst>
-                <a:gd name="adj1" fmla="val 15039800"/>
-                <a:gd name="adj2" fmla="val 6385720"/>
-              </a:avLst>
-            </a:prstGeom>
-          </p:spPr>
-          <p:style>
-            <a:lnRef idx="1">
-              <a:schemeClr val="accent1"/>
-            </a:lnRef>
-            <a:fillRef idx="0">
-              <a:schemeClr val="accent1"/>
-            </a:fillRef>
-            <a:effectRef idx="0">
-              <a:schemeClr val="accent1"/>
-            </a:effectRef>
-            <a:fontRef idx="minor">
-              <a:schemeClr val="tx1"/>
-            </a:fontRef>
-          </p:style>
-          <p:txBody>
-            <a:bodyPr rtlCol="0" anchor="ctr"/>
-            <a:lstStyle/>
-            <a:p>
-              <a:pPr algn="ctr"/>
-              <a:endParaRPr lang="fr-FR"/>
-            </a:p>
-          </p:txBody>
-        </p:sp>
-        <p:sp>
-          <p:nvSpPr>
-            <p:cNvPr id="17" name="Arc 16">
-              <a:extLst>
-                <a:ext uri="{FF2B5EF4-FFF2-40B4-BE49-F238E27FC236}">
-                  <a16:creationId xmlns:a16="http://schemas.microsoft.com/office/drawing/2014/main" id="{63F365BE-D09B-FB9C-4AB8-0A471E48EBF4}"/>
-                </a:ext>
-              </a:extLst>
-            </p:cNvPr>
-            <p:cNvSpPr/>
-            <p:nvPr/>
-          </p:nvSpPr>
-          <p:spPr>
-            <a:xfrm rot="10800000">
-              <a:off x="2656135" y="996307"/>
-              <a:ext cx="1854352" cy="3699304"/>
-            </a:xfrm>
-            <a:prstGeom prst="arc">
-              <a:avLst>
-                <a:gd name="adj1" fmla="val 14097423"/>
-                <a:gd name="adj2" fmla="val 7225553"/>
-              </a:avLst>
-            </a:prstGeom>
-          </p:spPr>
-          <p:style>
-            <a:lnRef idx="1">
-              <a:schemeClr val="accent1"/>
-            </a:lnRef>
-            <a:fillRef idx="0">
-              <a:schemeClr val="accent1"/>
-            </a:fillRef>
-            <a:effectRef idx="0">
-              <a:schemeClr val="accent1"/>
-            </a:effectRef>
-            <a:fontRef idx="minor">
-              <a:schemeClr val="tx1"/>
-            </a:fontRef>
-          </p:style>
-          <p:txBody>
-            <a:bodyPr rtlCol="0" anchor="ctr"/>
-            <a:lstStyle/>
-            <a:p>
-              <a:pPr algn="ctr"/>
-              <a:endParaRPr lang="fr-FR"/>
-            </a:p>
-          </p:txBody>
-        </p:sp>
-        <p:cxnSp>
-          <p:nvCxnSpPr>
-            <p:cNvPr id="18" name="Straight Connector 17">
-              <a:extLst>
-                <a:ext uri="{FF2B5EF4-FFF2-40B4-BE49-F238E27FC236}">
-                  <a16:creationId xmlns:a16="http://schemas.microsoft.com/office/drawing/2014/main" id="{D96F69B9-A724-009D-E2F8-A0470AAAB0E8}"/>
-                </a:ext>
-              </a:extLst>
-            </p:cNvPr>
-            <p:cNvCxnSpPr>
-              <a:cxnSpLocks/>
-            </p:cNvCxnSpPr>
-            <p:nvPr/>
-          </p:nvCxnSpPr>
-          <p:spPr>
-            <a:xfrm>
-              <a:off x="2596262" y="2922270"/>
-              <a:ext cx="59872" cy="67793"/>
-            </a:xfrm>
-            <a:prstGeom prst="line">
-              <a:avLst/>
-            </a:prstGeom>
-          </p:spPr>
-          <p:style>
-            <a:lnRef idx="1">
-              <a:schemeClr val="accent1"/>
-            </a:lnRef>
-            <a:fillRef idx="0">
-              <a:schemeClr val="accent1"/>
-            </a:fillRef>
-            <a:effectRef idx="0">
-              <a:schemeClr val="accent1"/>
-            </a:effectRef>
-            <a:fontRef idx="minor">
-              <a:schemeClr val="tx1"/>
-            </a:fontRef>
-          </p:style>
-        </p:cxnSp>
-        <p:cxnSp>
-          <p:nvCxnSpPr>
-            <p:cNvPr id="19" name="Straight Connector 18">
-              <a:extLst>
-                <a:ext uri="{FF2B5EF4-FFF2-40B4-BE49-F238E27FC236}">
-                  <a16:creationId xmlns:a16="http://schemas.microsoft.com/office/drawing/2014/main" id="{F9147F50-5419-F847-8991-98693C7F6736}"/>
-                </a:ext>
-              </a:extLst>
-            </p:cNvPr>
-            <p:cNvCxnSpPr>
-              <a:cxnSpLocks/>
-            </p:cNvCxnSpPr>
-            <p:nvPr/>
-          </p:nvCxnSpPr>
-          <p:spPr>
-            <a:xfrm flipV="1">
-              <a:off x="2662704" y="2922270"/>
-              <a:ext cx="64406" cy="67793"/>
-            </a:xfrm>
-            <a:prstGeom prst="line">
-              <a:avLst/>
-            </a:prstGeom>
-          </p:spPr>
-          <p:style>
-            <a:lnRef idx="1">
-              <a:schemeClr val="accent1"/>
-            </a:lnRef>
-            <a:fillRef idx="0">
-              <a:schemeClr val="accent1"/>
-            </a:fillRef>
-            <a:effectRef idx="0">
-              <a:schemeClr val="accent1"/>
-            </a:effectRef>
-            <a:fontRef idx="minor">
-              <a:schemeClr val="tx1"/>
-            </a:fontRef>
-          </p:style>
-        </p:cxnSp>
-        <p:cxnSp>
-          <p:nvCxnSpPr>
-            <p:cNvPr id="20" name="Straight Connector 19">
-              <a:extLst>
-                <a:ext uri="{FF2B5EF4-FFF2-40B4-BE49-F238E27FC236}">
-                  <a16:creationId xmlns:a16="http://schemas.microsoft.com/office/drawing/2014/main" id="{739BD6BF-BE28-2737-627C-E1FA070D87A1}"/>
-                </a:ext>
-              </a:extLst>
-            </p:cNvPr>
-            <p:cNvCxnSpPr>
-              <a:cxnSpLocks/>
-            </p:cNvCxnSpPr>
-            <p:nvPr/>
-          </p:nvCxnSpPr>
-          <p:spPr>
-            <a:xfrm flipV="1">
-              <a:off x="3067580" y="2888373"/>
-              <a:ext cx="64406" cy="67793"/>
-            </a:xfrm>
-            <a:prstGeom prst="line">
-              <a:avLst/>
-            </a:prstGeom>
-          </p:spPr>
-          <p:style>
-            <a:lnRef idx="1">
-              <a:schemeClr val="accent1"/>
-            </a:lnRef>
-            <a:fillRef idx="0">
-              <a:schemeClr val="accent1"/>
-            </a:fillRef>
-            <a:effectRef idx="0">
-              <a:schemeClr val="accent1"/>
-            </a:effectRef>
-            <a:fontRef idx="minor">
-              <a:schemeClr val="tx1"/>
-            </a:fontRef>
-          </p:style>
-        </p:cxnSp>
-        <p:cxnSp>
-          <p:nvCxnSpPr>
-            <p:cNvPr id="21" name="Straight Connector 20">
-              <a:extLst>
-                <a:ext uri="{FF2B5EF4-FFF2-40B4-BE49-F238E27FC236}">
-                  <a16:creationId xmlns:a16="http://schemas.microsoft.com/office/drawing/2014/main" id="{27788EC6-A021-A72F-4FC5-8F7A0BF3FED0}"/>
-                </a:ext>
-              </a:extLst>
-            </p:cNvPr>
-            <p:cNvCxnSpPr>
-              <a:cxnSpLocks/>
-            </p:cNvCxnSpPr>
-            <p:nvPr/>
-          </p:nvCxnSpPr>
-          <p:spPr>
-            <a:xfrm>
-              <a:off x="3015800" y="2888373"/>
-              <a:ext cx="59872" cy="67793"/>
-            </a:xfrm>
-            <a:prstGeom prst="line">
-              <a:avLst/>
-            </a:prstGeom>
-          </p:spPr>
-          <p:style>
-            <a:lnRef idx="1">
-              <a:schemeClr val="accent1"/>
-            </a:lnRef>
-            <a:fillRef idx="0">
-              <a:schemeClr val="accent1"/>
-            </a:fillRef>
-            <a:effectRef idx="0">
-              <a:schemeClr val="accent1"/>
-            </a:effectRef>
-            <a:fontRef idx="minor">
-              <a:schemeClr val="tx1"/>
-            </a:fontRef>
-          </p:style>
-        </p:cxnSp>
-        <p:cxnSp>
-          <p:nvCxnSpPr>
-            <p:cNvPr id="22" name="Straight Connector 21">
-              <a:extLst>
-                <a:ext uri="{FF2B5EF4-FFF2-40B4-BE49-F238E27FC236}">
-                  <a16:creationId xmlns:a16="http://schemas.microsoft.com/office/drawing/2014/main" id="{0919003F-7A2A-ACD4-8D91-1CF3A5F516FF}"/>
-                </a:ext>
-              </a:extLst>
-            </p:cNvPr>
-            <p:cNvCxnSpPr>
-              <a:cxnSpLocks/>
-            </p:cNvCxnSpPr>
-            <p:nvPr/>
-          </p:nvCxnSpPr>
-          <p:spPr>
-            <a:xfrm>
-              <a:off x="3224015" y="2867797"/>
-              <a:ext cx="59872" cy="67793"/>
-            </a:xfrm>
-            <a:prstGeom prst="line">
-              <a:avLst/>
-            </a:prstGeom>
-          </p:spPr>
-          <p:style>
-            <a:lnRef idx="1">
-              <a:schemeClr val="accent1"/>
-            </a:lnRef>
-            <a:fillRef idx="0">
-              <a:schemeClr val="accent1"/>
-            </a:fillRef>
-            <a:effectRef idx="0">
-              <a:schemeClr val="accent1"/>
-            </a:effectRef>
-            <a:fontRef idx="minor">
-              <a:schemeClr val="tx1"/>
-            </a:fontRef>
-          </p:style>
-        </p:cxnSp>
-        <p:cxnSp>
-          <p:nvCxnSpPr>
-            <p:cNvPr id="23" name="Straight Connector 22">
-              <a:extLst>
-                <a:ext uri="{FF2B5EF4-FFF2-40B4-BE49-F238E27FC236}">
-                  <a16:creationId xmlns:a16="http://schemas.microsoft.com/office/drawing/2014/main" id="{08514DA3-C046-0BCD-008F-6AD0E9629FC2}"/>
-                </a:ext>
-              </a:extLst>
-            </p:cNvPr>
-            <p:cNvCxnSpPr>
-              <a:cxnSpLocks/>
-            </p:cNvCxnSpPr>
-            <p:nvPr/>
-          </p:nvCxnSpPr>
-          <p:spPr>
-            <a:xfrm flipV="1">
-              <a:off x="3287634" y="2866731"/>
-              <a:ext cx="64406" cy="67793"/>
-            </a:xfrm>
-            <a:prstGeom prst="line">
-              <a:avLst/>
-            </a:prstGeom>
-          </p:spPr>
-          <p:style>
-            <a:lnRef idx="1">
-              <a:schemeClr val="accent1"/>
-            </a:lnRef>
-            <a:fillRef idx="0">
-              <a:schemeClr val="accent1"/>
-            </a:fillRef>
-            <a:effectRef idx="0">
-              <a:schemeClr val="accent1"/>
-            </a:effectRef>
-            <a:fontRef idx="minor">
-              <a:schemeClr val="tx1"/>
-            </a:fontRef>
-          </p:style>
-        </p:cxnSp>
-      </p:grpSp>
+          <a:prstGeom prst="arc">
+            <a:avLst>
+              <a:gd name="adj1" fmla="val 15885701"/>
+              <a:gd name="adj2" fmla="val 5692140"/>
+            </a:avLst>
+          </a:prstGeom>
+          <a:ln w="28575">
+            <a:solidFill>
+              <a:schemeClr val="accent6">
+                <a:lumMod val="50000"/>
+              </a:schemeClr>
+            </a:solidFill>
+          </a:ln>
+        </p:spPr>
+        <p:style>
+          <a:lnRef idx="1">
+            <a:schemeClr val="accent1"/>
+          </a:lnRef>
+          <a:fillRef idx="0">
+            <a:schemeClr val="accent1"/>
+          </a:fillRef>
+          <a:effectRef idx="0">
+            <a:schemeClr val="accent1"/>
+          </a:effectRef>
+          <a:fontRef idx="minor">
+            <a:schemeClr val="tx1"/>
+          </a:fontRef>
+        </p:style>
+        <p:txBody>
+          <a:bodyPr rtlCol="0" anchor="ctr"/>
+          <a:lstStyle/>
+          <a:p>
+            <a:pPr algn="ctr"/>
+            <a:endParaRPr lang="fr-FR"/>
+          </a:p>
+        </p:txBody>
+      </p:sp>
+      <p:sp>
+        <p:nvSpPr>
+          <p:cNvPr id="79" name="Arc 78">
+            <a:extLst>
+              <a:ext uri="{FF2B5EF4-FFF2-40B4-BE49-F238E27FC236}">
+                <a16:creationId xmlns:a16="http://schemas.microsoft.com/office/drawing/2014/main" id="{D61DDABF-9808-9D54-3794-56EABCCC7B88}"/>
+              </a:ext>
+            </a:extLst>
+          </p:cNvPr>
+          <p:cNvSpPr/>
+          <p:nvPr/>
+        </p:nvSpPr>
+        <p:spPr>
+          <a:xfrm rot="10800000">
+            <a:off x="3068368" y="1444773"/>
+            <a:ext cx="1399429" cy="2802372"/>
+          </a:xfrm>
+          <a:prstGeom prst="arc">
+            <a:avLst>
+              <a:gd name="adj1" fmla="val 15039800"/>
+              <a:gd name="adj2" fmla="val 6385720"/>
+            </a:avLst>
+          </a:prstGeom>
+          <a:ln w="28575">
+            <a:solidFill>
+              <a:schemeClr val="accent6">
+                <a:lumMod val="50000"/>
+              </a:schemeClr>
+            </a:solidFill>
+          </a:ln>
+        </p:spPr>
+        <p:style>
+          <a:lnRef idx="1">
+            <a:schemeClr val="accent1"/>
+          </a:lnRef>
+          <a:fillRef idx="0">
+            <a:schemeClr val="accent1"/>
+          </a:fillRef>
+          <a:effectRef idx="0">
+            <a:schemeClr val="accent1"/>
+          </a:effectRef>
+          <a:fontRef idx="minor">
+            <a:schemeClr val="tx1"/>
+          </a:fontRef>
+        </p:style>
+        <p:txBody>
+          <a:bodyPr rtlCol="0" anchor="ctr"/>
+          <a:lstStyle/>
+          <a:p>
+            <a:pPr algn="ctr"/>
+            <a:endParaRPr lang="fr-FR"/>
+          </a:p>
+        </p:txBody>
+      </p:sp>
+      <p:sp>
+        <p:nvSpPr>
+          <p:cNvPr id="80" name="Arc 79">
+            <a:extLst>
+              <a:ext uri="{FF2B5EF4-FFF2-40B4-BE49-F238E27FC236}">
+                <a16:creationId xmlns:a16="http://schemas.microsoft.com/office/drawing/2014/main" id="{6E671BEF-F78A-A13D-59E6-EF5544CEB01B}"/>
+              </a:ext>
+            </a:extLst>
+          </p:cNvPr>
+          <p:cNvSpPr/>
+          <p:nvPr/>
+        </p:nvSpPr>
+        <p:spPr>
+          <a:xfrm rot="10800000">
+            <a:off x="2656135" y="996307"/>
+            <a:ext cx="1854352" cy="3699304"/>
+          </a:xfrm>
+          <a:prstGeom prst="arc">
+            <a:avLst>
+              <a:gd name="adj1" fmla="val 14349328"/>
+              <a:gd name="adj2" fmla="val 6991892"/>
+            </a:avLst>
+          </a:prstGeom>
+          <a:ln w="28575">
+            <a:solidFill>
+              <a:schemeClr val="accent6">
+                <a:lumMod val="50000"/>
+              </a:schemeClr>
+            </a:solidFill>
+          </a:ln>
+        </p:spPr>
+        <p:style>
+          <a:lnRef idx="1">
+            <a:schemeClr val="accent1"/>
+          </a:lnRef>
+          <a:fillRef idx="0">
+            <a:schemeClr val="accent1"/>
+          </a:fillRef>
+          <a:effectRef idx="0">
+            <a:schemeClr val="accent1"/>
+          </a:effectRef>
+          <a:fontRef idx="minor">
+            <a:schemeClr val="tx1"/>
+          </a:fontRef>
+        </p:style>
+        <p:txBody>
+          <a:bodyPr rtlCol="0" anchor="ctr"/>
+          <a:lstStyle/>
+          <a:p>
+            <a:pPr algn="ctr"/>
+            <a:endParaRPr lang="fr-FR"/>
+          </a:p>
+        </p:txBody>
+      </p:sp>
       <p:cxnSp>
         <p:nvCxnSpPr>
-          <p:cNvPr id="14" name="Straight Arrow Connector 13">
-            <a:extLst>
-              <a:ext uri="{FF2B5EF4-FFF2-40B4-BE49-F238E27FC236}">
-                <a16:creationId xmlns:a16="http://schemas.microsoft.com/office/drawing/2014/main" id="{FA7EAFB8-4A45-E0B0-4786-BD51FB893703}"/>
+          <p:cNvPr id="82" name="Straight Connector 81">
+            <a:extLst>
+              <a:ext uri="{FF2B5EF4-FFF2-40B4-BE49-F238E27FC236}">
+                <a16:creationId xmlns:a16="http://schemas.microsoft.com/office/drawing/2014/main" id="{C2A1F321-4235-A6E4-8C33-496596240492}"/>
               </a:ext>
             </a:extLst>
           </p:cNvPr>
           <p:cNvCxnSpPr>
             <a:cxnSpLocks/>
-            <a:endCxn id="5" idx="3"/>
           </p:cNvCxnSpPr>
           <p:nvPr/>
         </p:nvCxnSpPr>
         <p:spPr>
-          <a:xfrm flipH="1">
-            <a:off x="6105765" y="1211379"/>
-            <a:ext cx="1180330" cy="11382"/>
+          <a:xfrm>
+            <a:off x="2596262" y="2922270"/>
+            <a:ext cx="59872" cy="67793"/>
           </a:xfrm>
-          <a:prstGeom prst="straightConnector1">
+          <a:prstGeom prst="line">
             <a:avLst/>
           </a:prstGeom>
-          <a:ln>
-            <a:tailEnd type="triangle"/>
+          <a:ln w="28575">
+            <a:solidFill>
+              <a:schemeClr val="accent6">
+                <a:lumMod val="50000"/>
+              </a:schemeClr>
+            </a:solidFill>
           </a:ln>
         </p:spPr>
         <p:style>
-          <a:lnRef idx="2">
-            <a:schemeClr val="dk1"/>
+          <a:lnRef idx="1">
+            <a:schemeClr val="accent1"/>
           </a:lnRef>
           <a:fillRef idx="0">
-            <a:schemeClr val="dk1"/>
+            <a:schemeClr val="accent1"/>
           </a:fillRef>
-          <a:effectRef idx="1">
-            <a:schemeClr val="dk1"/>
+          <a:effectRef idx="0">
+            <a:schemeClr val="accent1"/>
+          </a:effectRef>
+          <a:fontRef idx="minor">
+            <a:schemeClr val="tx1"/>
+          </a:fontRef>
+        </p:style>
+      </p:cxnSp>
+      <p:cxnSp>
+        <p:nvCxnSpPr>
+          <p:cNvPr id="83" name="Straight Connector 82">
+            <a:extLst>
+              <a:ext uri="{FF2B5EF4-FFF2-40B4-BE49-F238E27FC236}">
+                <a16:creationId xmlns:a16="http://schemas.microsoft.com/office/drawing/2014/main" id="{ABF99BD9-FFDF-1F5D-EEED-4F5A572CB05E}"/>
+              </a:ext>
+            </a:extLst>
+          </p:cNvPr>
+          <p:cNvCxnSpPr>
+            <a:cxnSpLocks/>
+          </p:cNvCxnSpPr>
+          <p:nvPr/>
+        </p:nvCxnSpPr>
+        <p:spPr>
+          <a:xfrm flipV="1">
+            <a:off x="2662704" y="2922270"/>
+            <a:ext cx="64406" cy="67793"/>
+          </a:xfrm>
+          <a:prstGeom prst="line">
+            <a:avLst/>
+          </a:prstGeom>
+          <a:ln w="28575">
+            <a:solidFill>
+              <a:schemeClr val="accent6">
+                <a:lumMod val="50000"/>
+              </a:schemeClr>
+            </a:solidFill>
+          </a:ln>
+        </p:spPr>
+        <p:style>
+          <a:lnRef idx="1">
+            <a:schemeClr val="accent1"/>
+          </a:lnRef>
+          <a:fillRef idx="0">
+            <a:schemeClr val="accent1"/>
+          </a:fillRef>
+          <a:effectRef idx="0">
+            <a:schemeClr val="accent1"/>
+          </a:effectRef>
+          <a:fontRef idx="minor">
+            <a:schemeClr val="tx1"/>
+          </a:fontRef>
+        </p:style>
+      </p:cxnSp>
+      <p:cxnSp>
+        <p:nvCxnSpPr>
+          <p:cNvPr id="87" name="Straight Connector 86">
+            <a:extLst>
+              <a:ext uri="{FF2B5EF4-FFF2-40B4-BE49-F238E27FC236}">
+                <a16:creationId xmlns:a16="http://schemas.microsoft.com/office/drawing/2014/main" id="{469D2BF5-09C5-DDEC-4C4B-D602032CBDD9}"/>
+              </a:ext>
+            </a:extLst>
+          </p:cNvPr>
+          <p:cNvCxnSpPr>
+            <a:cxnSpLocks/>
+          </p:cNvCxnSpPr>
+          <p:nvPr/>
+        </p:nvCxnSpPr>
+        <p:spPr>
+          <a:xfrm flipV="1">
+            <a:off x="3067580" y="2888373"/>
+            <a:ext cx="64406" cy="67793"/>
+          </a:xfrm>
+          <a:prstGeom prst="line">
+            <a:avLst/>
+          </a:prstGeom>
+          <a:ln w="28575">
+            <a:solidFill>
+              <a:schemeClr val="accent6">
+                <a:lumMod val="50000"/>
+              </a:schemeClr>
+            </a:solidFill>
+          </a:ln>
+        </p:spPr>
+        <p:style>
+          <a:lnRef idx="1">
+            <a:schemeClr val="accent1"/>
+          </a:lnRef>
+          <a:fillRef idx="0">
+            <a:schemeClr val="accent1"/>
+          </a:fillRef>
+          <a:effectRef idx="0">
+            <a:schemeClr val="accent1"/>
+          </a:effectRef>
+          <a:fontRef idx="minor">
+            <a:schemeClr val="tx1"/>
+          </a:fontRef>
+        </p:style>
+      </p:cxnSp>
+      <p:cxnSp>
+        <p:nvCxnSpPr>
+          <p:cNvPr id="88" name="Straight Connector 87">
+            <a:extLst>
+              <a:ext uri="{FF2B5EF4-FFF2-40B4-BE49-F238E27FC236}">
+                <a16:creationId xmlns:a16="http://schemas.microsoft.com/office/drawing/2014/main" id="{FBF9E69C-7CE0-5040-5869-BB0BF47D4970}"/>
+              </a:ext>
+            </a:extLst>
+          </p:cNvPr>
+          <p:cNvCxnSpPr>
+            <a:cxnSpLocks/>
+          </p:cNvCxnSpPr>
+          <p:nvPr/>
+        </p:nvCxnSpPr>
+        <p:spPr>
+          <a:xfrm>
+            <a:off x="3015800" y="2888373"/>
+            <a:ext cx="59872" cy="67793"/>
+          </a:xfrm>
+          <a:prstGeom prst="line">
+            <a:avLst/>
+          </a:prstGeom>
+          <a:ln w="28575">
+            <a:solidFill>
+              <a:schemeClr val="accent6">
+                <a:lumMod val="50000"/>
+              </a:schemeClr>
+            </a:solidFill>
+          </a:ln>
+        </p:spPr>
+        <p:style>
+          <a:lnRef idx="1">
+            <a:schemeClr val="accent1"/>
+          </a:lnRef>
+          <a:fillRef idx="0">
+            <a:schemeClr val="accent1"/>
+          </a:fillRef>
+          <a:effectRef idx="0">
+            <a:schemeClr val="accent1"/>
+          </a:effectRef>
+          <a:fontRef idx="minor">
+            <a:schemeClr val="tx1"/>
+          </a:fontRef>
+        </p:style>
+      </p:cxnSp>
+      <p:cxnSp>
+        <p:nvCxnSpPr>
+          <p:cNvPr id="89" name="Straight Connector 88">
+            <a:extLst>
+              <a:ext uri="{FF2B5EF4-FFF2-40B4-BE49-F238E27FC236}">
+                <a16:creationId xmlns:a16="http://schemas.microsoft.com/office/drawing/2014/main" id="{3561BB8F-CC7A-299A-7F6C-4B6B16805733}"/>
+              </a:ext>
+            </a:extLst>
+          </p:cNvPr>
+          <p:cNvCxnSpPr>
+            <a:cxnSpLocks/>
+          </p:cNvCxnSpPr>
+          <p:nvPr/>
+        </p:nvCxnSpPr>
+        <p:spPr>
+          <a:xfrm>
+            <a:off x="3224015" y="2867797"/>
+            <a:ext cx="59872" cy="67793"/>
+          </a:xfrm>
+          <a:prstGeom prst="line">
+            <a:avLst/>
+          </a:prstGeom>
+          <a:ln w="28575">
+            <a:solidFill>
+              <a:schemeClr val="accent6">
+                <a:lumMod val="50000"/>
+              </a:schemeClr>
+            </a:solidFill>
+          </a:ln>
+        </p:spPr>
+        <p:style>
+          <a:lnRef idx="1">
+            <a:schemeClr val="accent1"/>
+          </a:lnRef>
+          <a:fillRef idx="0">
+            <a:schemeClr val="accent1"/>
+          </a:fillRef>
+          <a:effectRef idx="0">
+            <a:schemeClr val="accent1"/>
+          </a:effectRef>
+          <a:fontRef idx="minor">
+            <a:schemeClr val="tx1"/>
+          </a:fontRef>
+        </p:style>
+      </p:cxnSp>
+      <p:cxnSp>
+        <p:nvCxnSpPr>
+          <p:cNvPr id="90" name="Straight Connector 89">
+            <a:extLst>
+              <a:ext uri="{FF2B5EF4-FFF2-40B4-BE49-F238E27FC236}">
+                <a16:creationId xmlns:a16="http://schemas.microsoft.com/office/drawing/2014/main" id="{66CC4658-5D21-3D2C-9720-FA7E52587C9C}"/>
+              </a:ext>
+            </a:extLst>
+          </p:cNvPr>
+          <p:cNvCxnSpPr>
+            <a:cxnSpLocks/>
+          </p:cNvCxnSpPr>
+          <p:nvPr/>
+        </p:nvCxnSpPr>
+        <p:spPr>
+          <a:xfrm flipV="1">
+            <a:off x="3287634" y="2866731"/>
+            <a:ext cx="64406" cy="67793"/>
+          </a:xfrm>
+          <a:prstGeom prst="line">
+            <a:avLst/>
+          </a:prstGeom>
+          <a:ln w="28575">
+            <a:solidFill>
+              <a:schemeClr val="accent6">
+                <a:lumMod val="50000"/>
+              </a:schemeClr>
+            </a:solidFill>
+          </a:ln>
+        </p:spPr>
+        <p:style>
+          <a:lnRef idx="1">
+            <a:schemeClr val="accent1"/>
+          </a:lnRef>
+          <a:fillRef idx="0">
+            <a:schemeClr val="accent1"/>
+          </a:fillRef>
+          <a:effectRef idx="0">
+            <a:schemeClr val="accent1"/>
           </a:effectRef>
           <a:fontRef idx="minor">
             <a:schemeClr val="tx1"/>
@@ -8357,10 +5078,10 @@
       </p:cxnSp>
       <p:sp>
         <p:nvSpPr>
-          <p:cNvPr id="5" name="Rectangle 4">
-            <a:extLst>
-              <a:ext uri="{FF2B5EF4-FFF2-40B4-BE49-F238E27FC236}">
-                <a16:creationId xmlns:a16="http://schemas.microsoft.com/office/drawing/2014/main" id="{B4721D9A-6397-2877-E7C3-1E6A0D31AE9D}"/>
+          <p:cNvPr id="93" name="Arc 92">
+            <a:extLst>
+              <a:ext uri="{FF2B5EF4-FFF2-40B4-BE49-F238E27FC236}">
+                <a16:creationId xmlns:a16="http://schemas.microsoft.com/office/drawing/2014/main" id="{EE083B42-6005-01FD-A97D-33C9765F41B2}"/>
               </a:ext>
             </a:extLst>
           </p:cNvPr>
@@ -8369,7 +5090,439 @@
         </p:nvSpPr>
         <p:spPr>
           <a:xfrm>
-            <a:off x="2829828" y="1184392"/>
+            <a:off x="4759508" y="1735503"/>
+            <a:ext cx="1648344" cy="2097350"/>
+          </a:xfrm>
+          <a:prstGeom prst="arc">
+            <a:avLst>
+              <a:gd name="adj1" fmla="val 15885701"/>
+              <a:gd name="adj2" fmla="val 5692140"/>
+            </a:avLst>
+          </a:prstGeom>
+          <a:ln w="28575">
+            <a:solidFill>
+              <a:schemeClr val="accent6">
+                <a:lumMod val="50000"/>
+              </a:schemeClr>
+            </a:solidFill>
+          </a:ln>
+        </p:spPr>
+        <p:style>
+          <a:lnRef idx="1">
+            <a:schemeClr val="accent1"/>
+          </a:lnRef>
+          <a:fillRef idx="0">
+            <a:schemeClr val="accent1"/>
+          </a:fillRef>
+          <a:effectRef idx="0">
+            <a:schemeClr val="accent1"/>
+          </a:effectRef>
+          <a:fontRef idx="minor">
+            <a:schemeClr val="tx1"/>
+          </a:fontRef>
+        </p:style>
+        <p:txBody>
+          <a:bodyPr rtlCol="0" anchor="ctr"/>
+          <a:lstStyle/>
+          <a:p>
+            <a:pPr algn="ctr"/>
+            <a:endParaRPr lang="fr-FR"/>
+          </a:p>
+        </p:txBody>
+      </p:sp>
+      <p:sp>
+        <p:nvSpPr>
+          <p:cNvPr id="94" name="Arc 93">
+            <a:extLst>
+              <a:ext uri="{FF2B5EF4-FFF2-40B4-BE49-F238E27FC236}">
+                <a16:creationId xmlns:a16="http://schemas.microsoft.com/office/drawing/2014/main" id="{9F37E834-0E05-A5F0-0ADC-98B01F21ECFB}"/>
+              </a:ext>
+            </a:extLst>
+          </p:cNvPr>
+          <p:cNvSpPr/>
+          <p:nvPr/>
+        </p:nvSpPr>
+        <p:spPr>
+          <a:xfrm>
+            <a:off x="5013362" y="1354051"/>
+            <a:ext cx="1648344" cy="2802372"/>
+          </a:xfrm>
+          <a:prstGeom prst="arc">
+            <a:avLst>
+              <a:gd name="adj1" fmla="val 15039800"/>
+              <a:gd name="adj2" fmla="val 6385720"/>
+            </a:avLst>
+          </a:prstGeom>
+          <a:ln w="28575">
+            <a:solidFill>
+              <a:schemeClr val="accent6">
+                <a:lumMod val="50000"/>
+              </a:schemeClr>
+            </a:solidFill>
+          </a:ln>
+        </p:spPr>
+        <p:style>
+          <a:lnRef idx="1">
+            <a:schemeClr val="accent1"/>
+          </a:lnRef>
+          <a:fillRef idx="0">
+            <a:schemeClr val="accent1"/>
+          </a:fillRef>
+          <a:effectRef idx="0">
+            <a:schemeClr val="accent1"/>
+          </a:effectRef>
+          <a:fontRef idx="minor">
+            <a:schemeClr val="tx1"/>
+          </a:fontRef>
+        </p:style>
+        <p:txBody>
+          <a:bodyPr rtlCol="0" anchor="ctr"/>
+          <a:lstStyle/>
+          <a:p>
+            <a:pPr algn="ctr"/>
+            <a:endParaRPr lang="fr-FR"/>
+          </a:p>
+        </p:txBody>
+      </p:sp>
+      <p:sp>
+        <p:nvSpPr>
+          <p:cNvPr id="95" name="Arc 94">
+            <a:extLst>
+              <a:ext uri="{FF2B5EF4-FFF2-40B4-BE49-F238E27FC236}">
+                <a16:creationId xmlns:a16="http://schemas.microsoft.com/office/drawing/2014/main" id="{0F219F75-9589-A628-1216-826B7855196F}"/>
+              </a:ext>
+            </a:extLst>
+          </p:cNvPr>
+          <p:cNvSpPr/>
+          <p:nvPr/>
+        </p:nvSpPr>
+        <p:spPr>
+          <a:xfrm>
+            <a:off x="4963079" y="905585"/>
+            <a:ext cx="2184183" cy="3699304"/>
+          </a:xfrm>
+          <a:prstGeom prst="arc">
+            <a:avLst>
+              <a:gd name="adj1" fmla="val 14274424"/>
+              <a:gd name="adj2" fmla="val 7225553"/>
+            </a:avLst>
+          </a:prstGeom>
+          <a:ln w="28575">
+            <a:solidFill>
+              <a:schemeClr val="accent6">
+                <a:lumMod val="50000"/>
+              </a:schemeClr>
+            </a:solidFill>
+          </a:ln>
+        </p:spPr>
+        <p:style>
+          <a:lnRef idx="1">
+            <a:schemeClr val="accent1"/>
+          </a:lnRef>
+          <a:fillRef idx="0">
+            <a:schemeClr val="accent1"/>
+          </a:fillRef>
+          <a:effectRef idx="0">
+            <a:schemeClr val="accent1"/>
+          </a:effectRef>
+          <a:fontRef idx="minor">
+            <a:schemeClr val="tx1"/>
+          </a:fontRef>
+        </p:style>
+        <p:txBody>
+          <a:bodyPr rtlCol="0" anchor="ctr"/>
+          <a:lstStyle/>
+          <a:p>
+            <a:pPr algn="ctr"/>
+            <a:endParaRPr lang="fr-FR"/>
+          </a:p>
+        </p:txBody>
+      </p:sp>
+      <p:cxnSp>
+        <p:nvCxnSpPr>
+          <p:cNvPr id="96" name="Straight Connector 95">
+            <a:extLst>
+              <a:ext uri="{FF2B5EF4-FFF2-40B4-BE49-F238E27FC236}">
+                <a16:creationId xmlns:a16="http://schemas.microsoft.com/office/drawing/2014/main" id="{9F2470BA-F805-22EB-4E2D-0503AFB7D679}"/>
+              </a:ext>
+            </a:extLst>
+          </p:cNvPr>
+          <p:cNvCxnSpPr>
+            <a:cxnSpLocks/>
+          </p:cNvCxnSpPr>
+          <p:nvPr/>
+        </p:nvCxnSpPr>
+        <p:spPr>
+          <a:xfrm rot="10800000">
+            <a:off x="7147264" y="2611133"/>
+            <a:ext cx="70521" cy="67793"/>
+          </a:xfrm>
+          <a:prstGeom prst="line">
+            <a:avLst/>
+          </a:prstGeom>
+          <a:ln w="28575">
+            <a:solidFill>
+              <a:schemeClr val="accent6">
+                <a:lumMod val="50000"/>
+              </a:schemeClr>
+            </a:solidFill>
+          </a:ln>
+        </p:spPr>
+        <p:style>
+          <a:lnRef idx="1">
+            <a:schemeClr val="accent1"/>
+          </a:lnRef>
+          <a:fillRef idx="0">
+            <a:schemeClr val="accent1"/>
+          </a:fillRef>
+          <a:effectRef idx="0">
+            <a:schemeClr val="accent1"/>
+          </a:effectRef>
+          <a:fontRef idx="minor">
+            <a:schemeClr val="tx1"/>
+          </a:fontRef>
+        </p:style>
+      </p:cxnSp>
+      <p:cxnSp>
+        <p:nvCxnSpPr>
+          <p:cNvPr id="97" name="Straight Connector 96">
+            <a:extLst>
+              <a:ext uri="{FF2B5EF4-FFF2-40B4-BE49-F238E27FC236}">
+                <a16:creationId xmlns:a16="http://schemas.microsoft.com/office/drawing/2014/main" id="{76BF596F-947E-41EA-C7FF-2A8B65A14971}"/>
+              </a:ext>
+            </a:extLst>
+          </p:cNvPr>
+          <p:cNvCxnSpPr>
+            <a:cxnSpLocks/>
+          </p:cNvCxnSpPr>
+          <p:nvPr/>
+        </p:nvCxnSpPr>
+        <p:spPr>
+          <a:xfrm rot="10800000" flipV="1">
+            <a:off x="7063663" y="2611133"/>
+            <a:ext cx="75862" cy="67793"/>
+          </a:xfrm>
+          <a:prstGeom prst="line">
+            <a:avLst/>
+          </a:prstGeom>
+          <a:ln w="28575">
+            <a:solidFill>
+              <a:schemeClr val="accent6">
+                <a:lumMod val="50000"/>
+              </a:schemeClr>
+            </a:solidFill>
+          </a:ln>
+        </p:spPr>
+        <p:style>
+          <a:lnRef idx="1">
+            <a:schemeClr val="accent1"/>
+          </a:lnRef>
+          <a:fillRef idx="0">
+            <a:schemeClr val="accent1"/>
+          </a:fillRef>
+          <a:effectRef idx="0">
+            <a:schemeClr val="accent1"/>
+          </a:effectRef>
+          <a:fontRef idx="minor">
+            <a:schemeClr val="tx1"/>
+          </a:fontRef>
+        </p:style>
+      </p:cxnSp>
+      <p:cxnSp>
+        <p:nvCxnSpPr>
+          <p:cNvPr id="98" name="Straight Connector 97">
+            <a:extLst>
+              <a:ext uri="{FF2B5EF4-FFF2-40B4-BE49-F238E27FC236}">
+                <a16:creationId xmlns:a16="http://schemas.microsoft.com/office/drawing/2014/main" id="{948807FF-EADA-081D-8388-ED7A202FD18E}"/>
+              </a:ext>
+            </a:extLst>
+          </p:cNvPr>
+          <p:cNvCxnSpPr>
+            <a:cxnSpLocks/>
+          </p:cNvCxnSpPr>
+          <p:nvPr/>
+        </p:nvCxnSpPr>
+        <p:spPr>
+          <a:xfrm rot="10800000" flipV="1">
+            <a:off x="6586772" y="2645030"/>
+            <a:ext cx="75862" cy="67793"/>
+          </a:xfrm>
+          <a:prstGeom prst="line">
+            <a:avLst/>
+          </a:prstGeom>
+          <a:ln w="28575">
+            <a:solidFill>
+              <a:schemeClr val="accent6">
+                <a:lumMod val="50000"/>
+              </a:schemeClr>
+            </a:solidFill>
+          </a:ln>
+        </p:spPr>
+        <p:style>
+          <a:lnRef idx="1">
+            <a:schemeClr val="accent1"/>
+          </a:lnRef>
+          <a:fillRef idx="0">
+            <a:schemeClr val="accent1"/>
+          </a:fillRef>
+          <a:effectRef idx="0">
+            <a:schemeClr val="accent1"/>
+          </a:effectRef>
+          <a:fontRef idx="minor">
+            <a:schemeClr val="tx1"/>
+          </a:fontRef>
+        </p:style>
+      </p:cxnSp>
+      <p:cxnSp>
+        <p:nvCxnSpPr>
+          <p:cNvPr id="99" name="Straight Connector 98">
+            <a:extLst>
+              <a:ext uri="{FF2B5EF4-FFF2-40B4-BE49-F238E27FC236}">
+                <a16:creationId xmlns:a16="http://schemas.microsoft.com/office/drawing/2014/main" id="{9CFF0590-AAB4-7CC9-2130-2744903F33DF}"/>
+              </a:ext>
+            </a:extLst>
+          </p:cNvPr>
+          <p:cNvCxnSpPr>
+            <a:cxnSpLocks/>
+          </p:cNvCxnSpPr>
+          <p:nvPr/>
+        </p:nvCxnSpPr>
+        <p:spPr>
+          <a:xfrm rot="10800000">
+            <a:off x="6653103" y="2645030"/>
+            <a:ext cx="70521" cy="67793"/>
+          </a:xfrm>
+          <a:prstGeom prst="line">
+            <a:avLst/>
+          </a:prstGeom>
+          <a:ln w="28575">
+            <a:solidFill>
+              <a:schemeClr val="accent6">
+                <a:lumMod val="50000"/>
+              </a:schemeClr>
+            </a:solidFill>
+          </a:ln>
+        </p:spPr>
+        <p:style>
+          <a:lnRef idx="1">
+            <a:schemeClr val="accent1"/>
+          </a:lnRef>
+          <a:fillRef idx="0">
+            <a:schemeClr val="accent1"/>
+          </a:fillRef>
+          <a:effectRef idx="0">
+            <a:schemeClr val="accent1"/>
+          </a:effectRef>
+          <a:fontRef idx="minor">
+            <a:schemeClr val="tx1"/>
+          </a:fontRef>
+        </p:style>
+      </p:cxnSp>
+      <p:cxnSp>
+        <p:nvCxnSpPr>
+          <p:cNvPr id="100" name="Straight Connector 99">
+            <a:extLst>
+              <a:ext uri="{FF2B5EF4-FFF2-40B4-BE49-F238E27FC236}">
+                <a16:creationId xmlns:a16="http://schemas.microsoft.com/office/drawing/2014/main" id="{57F9F332-42CA-26E0-362B-7CF605EFD442}"/>
+              </a:ext>
+            </a:extLst>
+          </p:cNvPr>
+          <p:cNvCxnSpPr>
+            <a:cxnSpLocks/>
+          </p:cNvCxnSpPr>
+          <p:nvPr/>
+        </p:nvCxnSpPr>
+        <p:spPr>
+          <a:xfrm rot="10800000">
+            <a:off x="6407853" y="2665606"/>
+            <a:ext cx="70521" cy="67793"/>
+          </a:xfrm>
+          <a:prstGeom prst="line">
+            <a:avLst/>
+          </a:prstGeom>
+          <a:ln w="28575">
+            <a:solidFill>
+              <a:schemeClr val="accent6">
+                <a:lumMod val="50000"/>
+              </a:schemeClr>
+            </a:solidFill>
+          </a:ln>
+        </p:spPr>
+        <p:style>
+          <a:lnRef idx="1">
+            <a:schemeClr val="accent1"/>
+          </a:lnRef>
+          <a:fillRef idx="0">
+            <a:schemeClr val="accent1"/>
+          </a:fillRef>
+          <a:effectRef idx="0">
+            <a:schemeClr val="accent1"/>
+          </a:effectRef>
+          <a:fontRef idx="minor">
+            <a:schemeClr val="tx1"/>
+          </a:fontRef>
+        </p:style>
+      </p:cxnSp>
+      <p:cxnSp>
+        <p:nvCxnSpPr>
+          <p:cNvPr id="101" name="Straight Connector 100">
+            <a:extLst>
+              <a:ext uri="{FF2B5EF4-FFF2-40B4-BE49-F238E27FC236}">
+                <a16:creationId xmlns:a16="http://schemas.microsoft.com/office/drawing/2014/main" id="{4B87C225-D2E8-BAD4-4780-5FE18D628533}"/>
+              </a:ext>
+            </a:extLst>
+          </p:cNvPr>
+          <p:cNvCxnSpPr>
+            <a:cxnSpLocks/>
+          </p:cNvCxnSpPr>
+          <p:nvPr/>
+        </p:nvCxnSpPr>
+        <p:spPr>
+          <a:xfrm rot="10800000" flipV="1">
+            <a:off x="6327578" y="2666672"/>
+            <a:ext cx="75862" cy="67793"/>
+          </a:xfrm>
+          <a:prstGeom prst="line">
+            <a:avLst/>
+          </a:prstGeom>
+          <a:ln w="28575">
+            <a:solidFill>
+              <a:schemeClr val="accent6">
+                <a:lumMod val="50000"/>
+              </a:schemeClr>
+            </a:solidFill>
+          </a:ln>
+        </p:spPr>
+        <p:style>
+          <a:lnRef idx="1">
+            <a:schemeClr val="accent1"/>
+          </a:lnRef>
+          <a:fillRef idx="0">
+            <a:schemeClr val="accent1"/>
+          </a:fillRef>
+          <a:effectRef idx="0">
+            <a:schemeClr val="accent1"/>
+          </a:effectRef>
+          <a:fontRef idx="minor">
+            <a:schemeClr val="tx1"/>
+          </a:fontRef>
+        </p:style>
+      </p:cxnSp>
+      <p:sp>
+        <p:nvSpPr>
+          <p:cNvPr id="63" name="Rectangle 62">
+            <a:extLst>
+              <a:ext uri="{FF2B5EF4-FFF2-40B4-BE49-F238E27FC236}">
+                <a16:creationId xmlns:a16="http://schemas.microsoft.com/office/drawing/2014/main" id="{584F810C-ED7D-A33F-51CC-F141822DADB6}"/>
+              </a:ext>
+            </a:extLst>
+          </p:cNvPr>
+          <p:cNvSpPr/>
+          <p:nvPr/>
+        </p:nvSpPr>
+        <p:spPr>
+          <a:xfrm>
+            <a:off x="3177084" y="1176839"/>
             <a:ext cx="3275937" cy="76737"/>
           </a:xfrm>
           <a:prstGeom prst="rect">
@@ -8387,7 +5540,7 @@
               <a:fillRect/>
             </a:stretch>
           </a:blipFill>
-          <a:ln>
+          <a:ln w="28575">
             <a:noFill/>
           </a:ln>
         </p:spPr>
@@ -8416,10 +5569,2954 @@
           </a:p>
         </p:txBody>
       </p:sp>
+      <p:sp>
+        <p:nvSpPr>
+          <p:cNvPr id="2" name="Freeform: Shape 1">
+            <a:extLst>
+              <a:ext uri="{FF2B5EF4-FFF2-40B4-BE49-F238E27FC236}">
+                <a16:creationId xmlns:a16="http://schemas.microsoft.com/office/drawing/2014/main" id="{76D59339-0E85-790A-FD96-C3CF7E7867CA}"/>
+              </a:ext>
+            </a:extLst>
+          </p:cNvPr>
+          <p:cNvSpPr/>
+          <p:nvPr/>
+        </p:nvSpPr>
+        <p:spPr>
+          <a:xfrm>
+            <a:off x="4806332" y="2180651"/>
+            <a:ext cx="697124" cy="41543"/>
+          </a:xfrm>
+          <a:custGeom>
+            <a:avLst/>
+            <a:gdLst>
+              <a:gd name="connsiteX0" fmla="*/ 0 w 421005"/>
+              <a:gd name="connsiteY0" fmla="*/ 0 h 24791"/>
+              <a:gd name="connsiteX1" fmla="*/ 219075 w 421005"/>
+              <a:gd name="connsiteY1" fmla="*/ 24765 h 24791"/>
+              <a:gd name="connsiteX2" fmla="*/ 421005 w 421005"/>
+              <a:gd name="connsiteY2" fmla="*/ 3810 h 24791"/>
+            </a:gdLst>
+            <a:ahLst/>
+            <a:cxnLst>
+              <a:cxn ang="0">
+                <a:pos x="connsiteX0" y="connsiteY0"/>
+              </a:cxn>
+              <a:cxn ang="0">
+                <a:pos x="connsiteX1" y="connsiteY1"/>
+              </a:cxn>
+              <a:cxn ang="0">
+                <a:pos x="connsiteX2" y="connsiteY2"/>
+              </a:cxn>
+            </a:cxnLst>
+            <a:rect l="l" t="t" r="r" b="b"/>
+            <a:pathLst>
+              <a:path w="421005" h="24791">
+                <a:moveTo>
+                  <a:pt x="0" y="0"/>
+                </a:moveTo>
+                <a:cubicBezTo>
+                  <a:pt x="74454" y="12065"/>
+                  <a:pt x="148908" y="24130"/>
+                  <a:pt x="219075" y="24765"/>
+                </a:cubicBezTo>
+                <a:cubicBezTo>
+                  <a:pt x="289242" y="25400"/>
+                  <a:pt x="355123" y="14605"/>
+                  <a:pt x="421005" y="3810"/>
+                </a:cubicBezTo>
+              </a:path>
+            </a:pathLst>
+          </a:custGeom>
+          <a:ln w="28575">
+            <a:solidFill>
+              <a:schemeClr val="accent2">
+                <a:lumMod val="75000"/>
+              </a:schemeClr>
+            </a:solidFill>
+          </a:ln>
+        </p:spPr>
+        <p:style>
+          <a:lnRef idx="1">
+            <a:schemeClr val="accent2"/>
+          </a:lnRef>
+          <a:fillRef idx="0">
+            <a:schemeClr val="accent2"/>
+          </a:fillRef>
+          <a:effectRef idx="0">
+            <a:schemeClr val="accent2"/>
+          </a:effectRef>
+          <a:fontRef idx="minor">
+            <a:schemeClr val="tx1"/>
+          </a:fontRef>
+        </p:style>
+        <p:txBody>
+          <a:bodyPr rtlCol="0" anchor="ctr"/>
+          <a:lstStyle/>
+          <a:p>
+            <a:pPr algn="ctr"/>
+            <a:endParaRPr lang="fr-FR"/>
+          </a:p>
+        </p:txBody>
+      </p:sp>
+      <p:sp>
+        <p:nvSpPr>
+          <p:cNvPr id="3" name="Freeform: Shape 2">
+            <a:extLst>
+              <a:ext uri="{FF2B5EF4-FFF2-40B4-BE49-F238E27FC236}">
+                <a16:creationId xmlns:a16="http://schemas.microsoft.com/office/drawing/2014/main" id="{1FA998FA-D6D9-37F7-5619-03904C3010F0}"/>
+              </a:ext>
+            </a:extLst>
+          </p:cNvPr>
+          <p:cNvSpPr/>
+          <p:nvPr/>
+        </p:nvSpPr>
+        <p:spPr>
+          <a:xfrm>
+            <a:off x="4806330" y="2338463"/>
+            <a:ext cx="697124" cy="41543"/>
+          </a:xfrm>
+          <a:custGeom>
+            <a:avLst/>
+            <a:gdLst>
+              <a:gd name="connsiteX0" fmla="*/ 0 w 421005"/>
+              <a:gd name="connsiteY0" fmla="*/ 0 h 24791"/>
+              <a:gd name="connsiteX1" fmla="*/ 219075 w 421005"/>
+              <a:gd name="connsiteY1" fmla="*/ 24765 h 24791"/>
+              <a:gd name="connsiteX2" fmla="*/ 421005 w 421005"/>
+              <a:gd name="connsiteY2" fmla="*/ 3810 h 24791"/>
+            </a:gdLst>
+            <a:ahLst/>
+            <a:cxnLst>
+              <a:cxn ang="0">
+                <a:pos x="connsiteX0" y="connsiteY0"/>
+              </a:cxn>
+              <a:cxn ang="0">
+                <a:pos x="connsiteX1" y="connsiteY1"/>
+              </a:cxn>
+              <a:cxn ang="0">
+                <a:pos x="connsiteX2" y="connsiteY2"/>
+              </a:cxn>
+            </a:cxnLst>
+            <a:rect l="l" t="t" r="r" b="b"/>
+            <a:pathLst>
+              <a:path w="421005" h="24791">
+                <a:moveTo>
+                  <a:pt x="0" y="0"/>
+                </a:moveTo>
+                <a:cubicBezTo>
+                  <a:pt x="74454" y="12065"/>
+                  <a:pt x="148908" y="24130"/>
+                  <a:pt x="219075" y="24765"/>
+                </a:cubicBezTo>
+                <a:cubicBezTo>
+                  <a:pt x="289242" y="25400"/>
+                  <a:pt x="355123" y="14605"/>
+                  <a:pt x="421005" y="3810"/>
+                </a:cubicBezTo>
+              </a:path>
+            </a:pathLst>
+          </a:custGeom>
+          <a:ln w="28575">
+            <a:solidFill>
+              <a:schemeClr val="accent2">
+                <a:lumMod val="75000"/>
+              </a:schemeClr>
+            </a:solidFill>
+          </a:ln>
+        </p:spPr>
+        <p:style>
+          <a:lnRef idx="1">
+            <a:schemeClr val="accent2"/>
+          </a:lnRef>
+          <a:fillRef idx="0">
+            <a:schemeClr val="accent2"/>
+          </a:fillRef>
+          <a:effectRef idx="0">
+            <a:schemeClr val="accent2"/>
+          </a:effectRef>
+          <a:fontRef idx="minor">
+            <a:schemeClr val="tx1"/>
+          </a:fontRef>
+        </p:style>
+        <p:txBody>
+          <a:bodyPr rtlCol="0" anchor="ctr"/>
+          <a:lstStyle/>
+          <a:p>
+            <a:pPr algn="ctr"/>
+            <a:endParaRPr lang="fr-FR"/>
+          </a:p>
+        </p:txBody>
+      </p:sp>
+      <p:sp>
+        <p:nvSpPr>
+          <p:cNvPr id="7" name="Freeform: Shape 6">
+            <a:extLst>
+              <a:ext uri="{FF2B5EF4-FFF2-40B4-BE49-F238E27FC236}">
+                <a16:creationId xmlns:a16="http://schemas.microsoft.com/office/drawing/2014/main" id="{75352D34-6FB8-B0B2-5610-45880C2CB6A1}"/>
+              </a:ext>
+            </a:extLst>
+          </p:cNvPr>
+          <p:cNvSpPr/>
+          <p:nvPr/>
+        </p:nvSpPr>
+        <p:spPr>
+          <a:xfrm>
+            <a:off x="4806330" y="2496274"/>
+            <a:ext cx="697124" cy="41543"/>
+          </a:xfrm>
+          <a:custGeom>
+            <a:avLst/>
+            <a:gdLst>
+              <a:gd name="connsiteX0" fmla="*/ 0 w 421005"/>
+              <a:gd name="connsiteY0" fmla="*/ 0 h 24791"/>
+              <a:gd name="connsiteX1" fmla="*/ 219075 w 421005"/>
+              <a:gd name="connsiteY1" fmla="*/ 24765 h 24791"/>
+              <a:gd name="connsiteX2" fmla="*/ 421005 w 421005"/>
+              <a:gd name="connsiteY2" fmla="*/ 3810 h 24791"/>
+            </a:gdLst>
+            <a:ahLst/>
+            <a:cxnLst>
+              <a:cxn ang="0">
+                <a:pos x="connsiteX0" y="connsiteY0"/>
+              </a:cxn>
+              <a:cxn ang="0">
+                <a:pos x="connsiteX1" y="connsiteY1"/>
+              </a:cxn>
+              <a:cxn ang="0">
+                <a:pos x="connsiteX2" y="connsiteY2"/>
+              </a:cxn>
+            </a:cxnLst>
+            <a:rect l="l" t="t" r="r" b="b"/>
+            <a:pathLst>
+              <a:path w="421005" h="24791">
+                <a:moveTo>
+                  <a:pt x="0" y="0"/>
+                </a:moveTo>
+                <a:cubicBezTo>
+                  <a:pt x="74454" y="12065"/>
+                  <a:pt x="148908" y="24130"/>
+                  <a:pt x="219075" y="24765"/>
+                </a:cubicBezTo>
+                <a:cubicBezTo>
+                  <a:pt x="289242" y="25400"/>
+                  <a:pt x="355123" y="14605"/>
+                  <a:pt x="421005" y="3810"/>
+                </a:cubicBezTo>
+              </a:path>
+            </a:pathLst>
+          </a:custGeom>
+          <a:ln w="28575">
+            <a:solidFill>
+              <a:schemeClr val="accent2">
+                <a:lumMod val="75000"/>
+              </a:schemeClr>
+            </a:solidFill>
+          </a:ln>
+        </p:spPr>
+        <p:style>
+          <a:lnRef idx="1">
+            <a:schemeClr val="accent2"/>
+          </a:lnRef>
+          <a:fillRef idx="0">
+            <a:schemeClr val="accent2"/>
+          </a:fillRef>
+          <a:effectRef idx="0">
+            <a:schemeClr val="accent2"/>
+          </a:effectRef>
+          <a:fontRef idx="minor">
+            <a:schemeClr val="tx1"/>
+          </a:fontRef>
+        </p:style>
+        <p:txBody>
+          <a:bodyPr rtlCol="0" anchor="ctr"/>
+          <a:lstStyle/>
+          <a:p>
+            <a:pPr algn="ctr"/>
+            <a:endParaRPr lang="fr-FR"/>
+          </a:p>
+        </p:txBody>
+      </p:sp>
+      <p:sp>
+        <p:nvSpPr>
+          <p:cNvPr id="8" name="Freeform: Shape 7">
+            <a:extLst>
+              <a:ext uri="{FF2B5EF4-FFF2-40B4-BE49-F238E27FC236}">
+                <a16:creationId xmlns:a16="http://schemas.microsoft.com/office/drawing/2014/main" id="{C6659324-1C2B-0ED0-01BC-887C760AAD70}"/>
+              </a:ext>
+            </a:extLst>
+          </p:cNvPr>
+          <p:cNvSpPr/>
+          <p:nvPr/>
+        </p:nvSpPr>
+        <p:spPr>
+          <a:xfrm>
+            <a:off x="4806330" y="2663655"/>
+            <a:ext cx="697124" cy="41543"/>
+          </a:xfrm>
+          <a:custGeom>
+            <a:avLst/>
+            <a:gdLst>
+              <a:gd name="connsiteX0" fmla="*/ 0 w 421005"/>
+              <a:gd name="connsiteY0" fmla="*/ 0 h 24791"/>
+              <a:gd name="connsiteX1" fmla="*/ 219075 w 421005"/>
+              <a:gd name="connsiteY1" fmla="*/ 24765 h 24791"/>
+              <a:gd name="connsiteX2" fmla="*/ 421005 w 421005"/>
+              <a:gd name="connsiteY2" fmla="*/ 3810 h 24791"/>
+            </a:gdLst>
+            <a:ahLst/>
+            <a:cxnLst>
+              <a:cxn ang="0">
+                <a:pos x="connsiteX0" y="connsiteY0"/>
+              </a:cxn>
+              <a:cxn ang="0">
+                <a:pos x="connsiteX1" y="connsiteY1"/>
+              </a:cxn>
+              <a:cxn ang="0">
+                <a:pos x="connsiteX2" y="connsiteY2"/>
+              </a:cxn>
+            </a:cxnLst>
+            <a:rect l="l" t="t" r="r" b="b"/>
+            <a:pathLst>
+              <a:path w="421005" h="24791">
+                <a:moveTo>
+                  <a:pt x="0" y="0"/>
+                </a:moveTo>
+                <a:cubicBezTo>
+                  <a:pt x="74454" y="12065"/>
+                  <a:pt x="148908" y="24130"/>
+                  <a:pt x="219075" y="24765"/>
+                </a:cubicBezTo>
+                <a:cubicBezTo>
+                  <a:pt x="289242" y="25400"/>
+                  <a:pt x="355123" y="14605"/>
+                  <a:pt x="421005" y="3810"/>
+                </a:cubicBezTo>
+              </a:path>
+            </a:pathLst>
+          </a:custGeom>
+          <a:ln w="28575">
+            <a:solidFill>
+              <a:schemeClr val="accent2">
+                <a:lumMod val="75000"/>
+              </a:schemeClr>
+            </a:solidFill>
+          </a:ln>
+        </p:spPr>
+        <p:style>
+          <a:lnRef idx="1">
+            <a:schemeClr val="accent2"/>
+          </a:lnRef>
+          <a:fillRef idx="0">
+            <a:schemeClr val="accent2"/>
+          </a:fillRef>
+          <a:effectRef idx="0">
+            <a:schemeClr val="accent2"/>
+          </a:effectRef>
+          <a:fontRef idx="minor">
+            <a:schemeClr val="tx1"/>
+          </a:fontRef>
+        </p:style>
+        <p:txBody>
+          <a:bodyPr rtlCol="0" anchor="ctr"/>
+          <a:lstStyle/>
+          <a:p>
+            <a:pPr algn="ctr"/>
+            <a:endParaRPr lang="fr-FR"/>
+          </a:p>
+        </p:txBody>
+      </p:sp>
+      <p:sp>
+        <p:nvSpPr>
+          <p:cNvPr id="9" name="Freeform: Shape 8">
+            <a:extLst>
+              <a:ext uri="{FF2B5EF4-FFF2-40B4-BE49-F238E27FC236}">
+                <a16:creationId xmlns:a16="http://schemas.microsoft.com/office/drawing/2014/main" id="{A098AB9B-B434-47E4-9428-25B97DFD6E5A}"/>
+              </a:ext>
+            </a:extLst>
+          </p:cNvPr>
+          <p:cNvSpPr/>
+          <p:nvPr/>
+        </p:nvSpPr>
+        <p:spPr>
+          <a:xfrm>
+            <a:off x="4806330" y="2834914"/>
+            <a:ext cx="697124" cy="41543"/>
+          </a:xfrm>
+          <a:custGeom>
+            <a:avLst/>
+            <a:gdLst>
+              <a:gd name="connsiteX0" fmla="*/ 0 w 421005"/>
+              <a:gd name="connsiteY0" fmla="*/ 0 h 24791"/>
+              <a:gd name="connsiteX1" fmla="*/ 219075 w 421005"/>
+              <a:gd name="connsiteY1" fmla="*/ 24765 h 24791"/>
+              <a:gd name="connsiteX2" fmla="*/ 421005 w 421005"/>
+              <a:gd name="connsiteY2" fmla="*/ 3810 h 24791"/>
+            </a:gdLst>
+            <a:ahLst/>
+            <a:cxnLst>
+              <a:cxn ang="0">
+                <a:pos x="connsiteX0" y="connsiteY0"/>
+              </a:cxn>
+              <a:cxn ang="0">
+                <a:pos x="connsiteX1" y="connsiteY1"/>
+              </a:cxn>
+              <a:cxn ang="0">
+                <a:pos x="connsiteX2" y="connsiteY2"/>
+              </a:cxn>
+            </a:cxnLst>
+            <a:rect l="l" t="t" r="r" b="b"/>
+            <a:pathLst>
+              <a:path w="421005" h="24791">
+                <a:moveTo>
+                  <a:pt x="0" y="0"/>
+                </a:moveTo>
+                <a:cubicBezTo>
+                  <a:pt x="74454" y="12065"/>
+                  <a:pt x="148908" y="24130"/>
+                  <a:pt x="219075" y="24765"/>
+                </a:cubicBezTo>
+                <a:cubicBezTo>
+                  <a:pt x="289242" y="25400"/>
+                  <a:pt x="355123" y="14605"/>
+                  <a:pt x="421005" y="3810"/>
+                </a:cubicBezTo>
+              </a:path>
+            </a:pathLst>
+          </a:custGeom>
+          <a:ln w="28575">
+            <a:solidFill>
+              <a:schemeClr val="accent2">
+                <a:lumMod val="75000"/>
+              </a:schemeClr>
+            </a:solidFill>
+          </a:ln>
+        </p:spPr>
+        <p:style>
+          <a:lnRef idx="1">
+            <a:schemeClr val="accent2"/>
+          </a:lnRef>
+          <a:fillRef idx="0">
+            <a:schemeClr val="accent2"/>
+          </a:fillRef>
+          <a:effectRef idx="0">
+            <a:schemeClr val="accent2"/>
+          </a:effectRef>
+          <a:fontRef idx="minor">
+            <a:schemeClr val="tx1"/>
+          </a:fontRef>
+        </p:style>
+        <p:txBody>
+          <a:bodyPr rtlCol="0" anchor="ctr"/>
+          <a:lstStyle/>
+          <a:p>
+            <a:pPr algn="ctr"/>
+            <a:endParaRPr lang="fr-FR"/>
+          </a:p>
+        </p:txBody>
+      </p:sp>
+      <p:sp>
+        <p:nvSpPr>
+          <p:cNvPr id="10" name="Freeform: Shape 9">
+            <a:extLst>
+              <a:ext uri="{FF2B5EF4-FFF2-40B4-BE49-F238E27FC236}">
+                <a16:creationId xmlns:a16="http://schemas.microsoft.com/office/drawing/2014/main" id="{42551FA5-27A8-6122-007A-EA01A7114CEC}"/>
+              </a:ext>
+            </a:extLst>
+          </p:cNvPr>
+          <p:cNvSpPr/>
+          <p:nvPr/>
+        </p:nvSpPr>
+        <p:spPr>
+          <a:xfrm>
+            <a:off x="4806330" y="2999789"/>
+            <a:ext cx="697124" cy="41543"/>
+          </a:xfrm>
+          <a:custGeom>
+            <a:avLst/>
+            <a:gdLst>
+              <a:gd name="connsiteX0" fmla="*/ 0 w 421005"/>
+              <a:gd name="connsiteY0" fmla="*/ 0 h 24791"/>
+              <a:gd name="connsiteX1" fmla="*/ 219075 w 421005"/>
+              <a:gd name="connsiteY1" fmla="*/ 24765 h 24791"/>
+              <a:gd name="connsiteX2" fmla="*/ 421005 w 421005"/>
+              <a:gd name="connsiteY2" fmla="*/ 3810 h 24791"/>
+            </a:gdLst>
+            <a:ahLst/>
+            <a:cxnLst>
+              <a:cxn ang="0">
+                <a:pos x="connsiteX0" y="connsiteY0"/>
+              </a:cxn>
+              <a:cxn ang="0">
+                <a:pos x="connsiteX1" y="connsiteY1"/>
+              </a:cxn>
+              <a:cxn ang="0">
+                <a:pos x="connsiteX2" y="connsiteY2"/>
+              </a:cxn>
+            </a:cxnLst>
+            <a:rect l="l" t="t" r="r" b="b"/>
+            <a:pathLst>
+              <a:path w="421005" h="24791">
+                <a:moveTo>
+                  <a:pt x="0" y="0"/>
+                </a:moveTo>
+                <a:cubicBezTo>
+                  <a:pt x="74454" y="12065"/>
+                  <a:pt x="148908" y="24130"/>
+                  <a:pt x="219075" y="24765"/>
+                </a:cubicBezTo>
+                <a:cubicBezTo>
+                  <a:pt x="289242" y="25400"/>
+                  <a:pt x="355123" y="14605"/>
+                  <a:pt x="421005" y="3810"/>
+                </a:cubicBezTo>
+              </a:path>
+            </a:pathLst>
+          </a:custGeom>
+          <a:ln w="28575">
+            <a:solidFill>
+              <a:schemeClr val="accent2">
+                <a:lumMod val="75000"/>
+              </a:schemeClr>
+            </a:solidFill>
+          </a:ln>
+        </p:spPr>
+        <p:style>
+          <a:lnRef idx="1">
+            <a:schemeClr val="accent2"/>
+          </a:lnRef>
+          <a:fillRef idx="0">
+            <a:schemeClr val="accent2"/>
+          </a:fillRef>
+          <a:effectRef idx="0">
+            <a:schemeClr val="accent2"/>
+          </a:effectRef>
+          <a:fontRef idx="minor">
+            <a:schemeClr val="tx1"/>
+          </a:fontRef>
+        </p:style>
+        <p:txBody>
+          <a:bodyPr rtlCol="0" anchor="ctr"/>
+          <a:lstStyle/>
+          <a:p>
+            <a:pPr algn="ctr"/>
+            <a:endParaRPr lang="fr-FR"/>
+          </a:p>
+        </p:txBody>
+      </p:sp>
+      <p:sp>
+        <p:nvSpPr>
+          <p:cNvPr id="11" name="Freeform: Shape 10">
+            <a:extLst>
+              <a:ext uri="{FF2B5EF4-FFF2-40B4-BE49-F238E27FC236}">
+                <a16:creationId xmlns:a16="http://schemas.microsoft.com/office/drawing/2014/main" id="{31E3DE00-F074-B2AA-2116-34EE52AEC2E5}"/>
+              </a:ext>
+            </a:extLst>
+          </p:cNvPr>
+          <p:cNvSpPr/>
+          <p:nvPr/>
+        </p:nvSpPr>
+        <p:spPr>
+          <a:xfrm>
+            <a:off x="4809486" y="3141532"/>
+            <a:ext cx="697124" cy="41543"/>
+          </a:xfrm>
+          <a:custGeom>
+            <a:avLst/>
+            <a:gdLst>
+              <a:gd name="connsiteX0" fmla="*/ 0 w 421005"/>
+              <a:gd name="connsiteY0" fmla="*/ 0 h 24791"/>
+              <a:gd name="connsiteX1" fmla="*/ 219075 w 421005"/>
+              <a:gd name="connsiteY1" fmla="*/ 24765 h 24791"/>
+              <a:gd name="connsiteX2" fmla="*/ 421005 w 421005"/>
+              <a:gd name="connsiteY2" fmla="*/ 3810 h 24791"/>
+            </a:gdLst>
+            <a:ahLst/>
+            <a:cxnLst>
+              <a:cxn ang="0">
+                <a:pos x="connsiteX0" y="connsiteY0"/>
+              </a:cxn>
+              <a:cxn ang="0">
+                <a:pos x="connsiteX1" y="connsiteY1"/>
+              </a:cxn>
+              <a:cxn ang="0">
+                <a:pos x="connsiteX2" y="connsiteY2"/>
+              </a:cxn>
+            </a:cxnLst>
+            <a:rect l="l" t="t" r="r" b="b"/>
+            <a:pathLst>
+              <a:path w="421005" h="24791">
+                <a:moveTo>
+                  <a:pt x="0" y="0"/>
+                </a:moveTo>
+                <a:cubicBezTo>
+                  <a:pt x="74454" y="12065"/>
+                  <a:pt x="148908" y="24130"/>
+                  <a:pt x="219075" y="24765"/>
+                </a:cubicBezTo>
+                <a:cubicBezTo>
+                  <a:pt x="289242" y="25400"/>
+                  <a:pt x="355123" y="14605"/>
+                  <a:pt x="421005" y="3810"/>
+                </a:cubicBezTo>
+              </a:path>
+            </a:pathLst>
+          </a:custGeom>
+          <a:ln w="28575">
+            <a:solidFill>
+              <a:schemeClr val="accent2">
+                <a:lumMod val="75000"/>
+              </a:schemeClr>
+            </a:solidFill>
+          </a:ln>
+        </p:spPr>
+        <p:style>
+          <a:lnRef idx="1">
+            <a:schemeClr val="accent2"/>
+          </a:lnRef>
+          <a:fillRef idx="0">
+            <a:schemeClr val="accent2"/>
+          </a:fillRef>
+          <a:effectRef idx="0">
+            <a:schemeClr val="accent2"/>
+          </a:effectRef>
+          <a:fontRef idx="minor">
+            <a:schemeClr val="tx1"/>
+          </a:fontRef>
+        </p:style>
+        <p:txBody>
+          <a:bodyPr rtlCol="0" anchor="ctr"/>
+          <a:lstStyle/>
+          <a:p>
+            <a:pPr algn="ctr"/>
+            <a:endParaRPr lang="fr-FR"/>
+          </a:p>
+        </p:txBody>
+      </p:sp>
+      <p:sp>
+        <p:nvSpPr>
+          <p:cNvPr id="12" name="Freeform: Shape 11">
+            <a:extLst>
+              <a:ext uri="{FF2B5EF4-FFF2-40B4-BE49-F238E27FC236}">
+                <a16:creationId xmlns:a16="http://schemas.microsoft.com/office/drawing/2014/main" id="{76F5184A-457D-4BE4-A59C-60F76A98DBF1}"/>
+              </a:ext>
+            </a:extLst>
+          </p:cNvPr>
+          <p:cNvSpPr/>
+          <p:nvPr/>
+        </p:nvSpPr>
+        <p:spPr>
+          <a:xfrm>
+            <a:off x="4809484" y="3299344"/>
+            <a:ext cx="697124" cy="41543"/>
+          </a:xfrm>
+          <a:custGeom>
+            <a:avLst/>
+            <a:gdLst>
+              <a:gd name="connsiteX0" fmla="*/ 0 w 421005"/>
+              <a:gd name="connsiteY0" fmla="*/ 0 h 24791"/>
+              <a:gd name="connsiteX1" fmla="*/ 219075 w 421005"/>
+              <a:gd name="connsiteY1" fmla="*/ 24765 h 24791"/>
+              <a:gd name="connsiteX2" fmla="*/ 421005 w 421005"/>
+              <a:gd name="connsiteY2" fmla="*/ 3810 h 24791"/>
+            </a:gdLst>
+            <a:ahLst/>
+            <a:cxnLst>
+              <a:cxn ang="0">
+                <a:pos x="connsiteX0" y="connsiteY0"/>
+              </a:cxn>
+              <a:cxn ang="0">
+                <a:pos x="connsiteX1" y="connsiteY1"/>
+              </a:cxn>
+              <a:cxn ang="0">
+                <a:pos x="connsiteX2" y="connsiteY2"/>
+              </a:cxn>
+            </a:cxnLst>
+            <a:rect l="l" t="t" r="r" b="b"/>
+            <a:pathLst>
+              <a:path w="421005" h="24791">
+                <a:moveTo>
+                  <a:pt x="0" y="0"/>
+                </a:moveTo>
+                <a:cubicBezTo>
+                  <a:pt x="74454" y="12065"/>
+                  <a:pt x="148908" y="24130"/>
+                  <a:pt x="219075" y="24765"/>
+                </a:cubicBezTo>
+                <a:cubicBezTo>
+                  <a:pt x="289242" y="25400"/>
+                  <a:pt x="355123" y="14605"/>
+                  <a:pt x="421005" y="3810"/>
+                </a:cubicBezTo>
+              </a:path>
+            </a:pathLst>
+          </a:custGeom>
+          <a:ln w="28575">
+            <a:solidFill>
+              <a:schemeClr val="accent2">
+                <a:lumMod val="75000"/>
+              </a:schemeClr>
+            </a:solidFill>
+          </a:ln>
+        </p:spPr>
+        <p:style>
+          <a:lnRef idx="1">
+            <a:schemeClr val="accent2"/>
+          </a:lnRef>
+          <a:fillRef idx="0">
+            <a:schemeClr val="accent2"/>
+          </a:fillRef>
+          <a:effectRef idx="0">
+            <a:schemeClr val="accent2"/>
+          </a:effectRef>
+          <a:fontRef idx="minor">
+            <a:schemeClr val="tx1"/>
+          </a:fontRef>
+        </p:style>
+        <p:txBody>
+          <a:bodyPr rtlCol="0" anchor="ctr"/>
+          <a:lstStyle/>
+          <a:p>
+            <a:pPr algn="ctr"/>
+            <a:endParaRPr lang="fr-FR"/>
+          </a:p>
+        </p:txBody>
+      </p:sp>
+      <p:sp>
+        <p:nvSpPr>
+          <p:cNvPr id="13" name="Freeform: Shape 12">
+            <a:extLst>
+              <a:ext uri="{FF2B5EF4-FFF2-40B4-BE49-F238E27FC236}">
+                <a16:creationId xmlns:a16="http://schemas.microsoft.com/office/drawing/2014/main" id="{6A881A03-8BD6-9C6B-71BD-7BB86E0832D6}"/>
+              </a:ext>
+            </a:extLst>
+          </p:cNvPr>
+          <p:cNvSpPr/>
+          <p:nvPr/>
+        </p:nvSpPr>
+        <p:spPr>
+          <a:xfrm>
+            <a:off x="4809484" y="3457156"/>
+            <a:ext cx="697124" cy="41543"/>
+          </a:xfrm>
+          <a:custGeom>
+            <a:avLst/>
+            <a:gdLst>
+              <a:gd name="connsiteX0" fmla="*/ 0 w 421005"/>
+              <a:gd name="connsiteY0" fmla="*/ 0 h 24791"/>
+              <a:gd name="connsiteX1" fmla="*/ 219075 w 421005"/>
+              <a:gd name="connsiteY1" fmla="*/ 24765 h 24791"/>
+              <a:gd name="connsiteX2" fmla="*/ 421005 w 421005"/>
+              <a:gd name="connsiteY2" fmla="*/ 3810 h 24791"/>
+            </a:gdLst>
+            <a:ahLst/>
+            <a:cxnLst>
+              <a:cxn ang="0">
+                <a:pos x="connsiteX0" y="connsiteY0"/>
+              </a:cxn>
+              <a:cxn ang="0">
+                <a:pos x="connsiteX1" y="connsiteY1"/>
+              </a:cxn>
+              <a:cxn ang="0">
+                <a:pos x="connsiteX2" y="connsiteY2"/>
+              </a:cxn>
+            </a:cxnLst>
+            <a:rect l="l" t="t" r="r" b="b"/>
+            <a:pathLst>
+              <a:path w="421005" h="24791">
+                <a:moveTo>
+                  <a:pt x="0" y="0"/>
+                </a:moveTo>
+                <a:cubicBezTo>
+                  <a:pt x="74454" y="12065"/>
+                  <a:pt x="148908" y="24130"/>
+                  <a:pt x="219075" y="24765"/>
+                </a:cubicBezTo>
+                <a:cubicBezTo>
+                  <a:pt x="289242" y="25400"/>
+                  <a:pt x="355123" y="14605"/>
+                  <a:pt x="421005" y="3810"/>
+                </a:cubicBezTo>
+              </a:path>
+            </a:pathLst>
+          </a:custGeom>
+          <a:ln w="28575">
+            <a:solidFill>
+              <a:schemeClr val="accent2">
+                <a:lumMod val="75000"/>
+              </a:schemeClr>
+            </a:solidFill>
+          </a:ln>
+        </p:spPr>
+        <p:style>
+          <a:lnRef idx="1">
+            <a:schemeClr val="accent2"/>
+          </a:lnRef>
+          <a:fillRef idx="0">
+            <a:schemeClr val="accent2"/>
+          </a:fillRef>
+          <a:effectRef idx="0">
+            <a:schemeClr val="accent2"/>
+          </a:effectRef>
+          <a:fontRef idx="minor">
+            <a:schemeClr val="tx1"/>
+          </a:fontRef>
+        </p:style>
+        <p:txBody>
+          <a:bodyPr rtlCol="0" anchor="ctr"/>
+          <a:lstStyle/>
+          <a:p>
+            <a:pPr algn="ctr"/>
+            <a:endParaRPr lang="fr-FR"/>
+          </a:p>
+        </p:txBody>
+      </p:sp>
+      <p:sp>
+        <p:nvSpPr>
+          <p:cNvPr id="14" name="Freeform: Shape 13">
+            <a:extLst>
+              <a:ext uri="{FF2B5EF4-FFF2-40B4-BE49-F238E27FC236}">
+                <a16:creationId xmlns:a16="http://schemas.microsoft.com/office/drawing/2014/main" id="{3C10839C-EAB5-F634-13F0-5CD1C3A13EEF}"/>
+              </a:ext>
+            </a:extLst>
+          </p:cNvPr>
+          <p:cNvSpPr/>
+          <p:nvPr/>
+        </p:nvSpPr>
+        <p:spPr>
+          <a:xfrm>
+            <a:off x="4809484" y="3624536"/>
+            <a:ext cx="697124" cy="41543"/>
+          </a:xfrm>
+          <a:custGeom>
+            <a:avLst/>
+            <a:gdLst>
+              <a:gd name="connsiteX0" fmla="*/ 0 w 421005"/>
+              <a:gd name="connsiteY0" fmla="*/ 0 h 24791"/>
+              <a:gd name="connsiteX1" fmla="*/ 219075 w 421005"/>
+              <a:gd name="connsiteY1" fmla="*/ 24765 h 24791"/>
+              <a:gd name="connsiteX2" fmla="*/ 421005 w 421005"/>
+              <a:gd name="connsiteY2" fmla="*/ 3810 h 24791"/>
+            </a:gdLst>
+            <a:ahLst/>
+            <a:cxnLst>
+              <a:cxn ang="0">
+                <a:pos x="connsiteX0" y="connsiteY0"/>
+              </a:cxn>
+              <a:cxn ang="0">
+                <a:pos x="connsiteX1" y="connsiteY1"/>
+              </a:cxn>
+              <a:cxn ang="0">
+                <a:pos x="connsiteX2" y="connsiteY2"/>
+              </a:cxn>
+            </a:cxnLst>
+            <a:rect l="l" t="t" r="r" b="b"/>
+            <a:pathLst>
+              <a:path w="421005" h="24791">
+                <a:moveTo>
+                  <a:pt x="0" y="0"/>
+                </a:moveTo>
+                <a:cubicBezTo>
+                  <a:pt x="74454" y="12065"/>
+                  <a:pt x="148908" y="24130"/>
+                  <a:pt x="219075" y="24765"/>
+                </a:cubicBezTo>
+                <a:cubicBezTo>
+                  <a:pt x="289242" y="25400"/>
+                  <a:pt x="355123" y="14605"/>
+                  <a:pt x="421005" y="3810"/>
+                </a:cubicBezTo>
+              </a:path>
+            </a:pathLst>
+          </a:custGeom>
+          <a:ln w="28575">
+            <a:solidFill>
+              <a:schemeClr val="accent2">
+                <a:lumMod val="75000"/>
+              </a:schemeClr>
+            </a:solidFill>
+          </a:ln>
+        </p:spPr>
+        <p:style>
+          <a:lnRef idx="1">
+            <a:schemeClr val="accent2"/>
+          </a:lnRef>
+          <a:fillRef idx="0">
+            <a:schemeClr val="accent2"/>
+          </a:fillRef>
+          <a:effectRef idx="0">
+            <a:schemeClr val="accent2"/>
+          </a:effectRef>
+          <a:fontRef idx="minor">
+            <a:schemeClr val="tx1"/>
+          </a:fontRef>
+        </p:style>
+        <p:txBody>
+          <a:bodyPr rtlCol="0" anchor="ctr"/>
+          <a:lstStyle/>
+          <a:p>
+            <a:pPr algn="ctr"/>
+            <a:endParaRPr lang="fr-FR"/>
+          </a:p>
+        </p:txBody>
+      </p:sp>
     </p:spTree>
     <p:extLst>
       <p:ext uri="{BB962C8B-B14F-4D97-AF65-F5344CB8AC3E}">
-        <p14:creationId xmlns:p14="http://schemas.microsoft.com/office/powerpoint/2010/main" val="1228029514"/>
+        <p14:creationId xmlns:p14="http://schemas.microsoft.com/office/powerpoint/2010/main" val="2517241274"/>
+      </p:ext>
+    </p:extLst>
+  </p:cSld>
+  <p:clrMapOvr>
+    <a:masterClrMapping/>
+  </p:clrMapOvr>
+</p:sld>
+</file>
+
+<file path=ppt/slides/slide2.xml><?xml version="1.0" encoding="utf-8"?>
+<p:sld xmlns:a="http://schemas.openxmlformats.org/drawingml/2006/main" xmlns:r="http://schemas.openxmlformats.org/officeDocument/2006/relationships" xmlns:p="http://schemas.openxmlformats.org/presentationml/2006/main">
+  <p:cSld>
+    <p:spTree>
+      <p:nvGrpSpPr>
+        <p:cNvPr id="1" name="">
+          <a:extLst>
+            <a:ext uri="{FF2B5EF4-FFF2-40B4-BE49-F238E27FC236}">
+              <a16:creationId xmlns:a16="http://schemas.microsoft.com/office/drawing/2014/main" id="{93EAF621-5654-44B8-E8E6-EFBDF6834CB3}"/>
+            </a:ext>
+          </a:extLst>
+        </p:cNvPr>
+        <p:cNvGrpSpPr/>
+        <p:nvPr/>
+      </p:nvGrpSpPr>
+      <p:grpSpPr>
+        <a:xfrm>
+          <a:off x="0" y="0"/>
+          <a:ext cx="0" cy="0"/>
+          <a:chOff x="0" y="0"/>
+          <a:chExt cx="0" cy="0"/>
+        </a:xfrm>
+      </p:grpSpPr>
+      <p:grpSp>
+        <p:nvGrpSpPr>
+          <p:cNvPr id="31" name="Group 30">
+            <a:extLst>
+              <a:ext uri="{FF2B5EF4-FFF2-40B4-BE49-F238E27FC236}">
+                <a16:creationId xmlns:a16="http://schemas.microsoft.com/office/drawing/2014/main" id="{BA49F4CF-D58B-286A-4A6C-CA9F187D8273}"/>
+              </a:ext>
+            </a:extLst>
+          </p:cNvPr>
+          <p:cNvGrpSpPr/>
+          <p:nvPr/>
+        </p:nvGrpSpPr>
+        <p:grpSpPr>
+          <a:xfrm>
+            <a:off x="4105274" y="1544541"/>
+            <a:ext cx="710566" cy="2516919"/>
+            <a:chOff x="6436994" y="2687541"/>
+            <a:chExt cx="429123" cy="1501969"/>
+          </a:xfrm>
+        </p:grpSpPr>
+        <p:sp>
+          <p:nvSpPr>
+            <p:cNvPr id="5" name="Rectangle 4">
+              <a:extLst>
+                <a:ext uri="{FF2B5EF4-FFF2-40B4-BE49-F238E27FC236}">
+                  <a16:creationId xmlns:a16="http://schemas.microsoft.com/office/drawing/2014/main" id="{E5BE1B01-0711-A607-3C1F-926CDA77B21C}"/>
+                </a:ext>
+              </a:extLst>
+            </p:cNvPr>
+            <p:cNvSpPr/>
+            <p:nvPr/>
+          </p:nvSpPr>
+          <p:spPr>
+            <a:xfrm>
+              <a:off x="6438260" y="2798859"/>
+              <a:ext cx="427382" cy="1296063"/>
+            </a:xfrm>
+            <a:prstGeom prst="rect">
+              <a:avLst/>
+            </a:prstGeom>
+            <a:solidFill>
+              <a:schemeClr val="bg2">
+                <a:lumMod val="75000"/>
+              </a:schemeClr>
+            </a:solidFill>
+            <a:ln w="28575">
+              <a:solidFill>
+                <a:schemeClr val="tx1"/>
+              </a:solidFill>
+            </a:ln>
+          </p:spPr>
+          <p:style>
+            <a:lnRef idx="2">
+              <a:schemeClr val="accent1">
+                <a:shade val="15000"/>
+              </a:schemeClr>
+            </a:lnRef>
+            <a:fillRef idx="1">
+              <a:schemeClr val="accent1"/>
+            </a:fillRef>
+            <a:effectRef idx="0">
+              <a:schemeClr val="accent1"/>
+            </a:effectRef>
+            <a:fontRef idx="minor">
+              <a:schemeClr val="lt1"/>
+            </a:fontRef>
+          </p:style>
+          <p:txBody>
+            <a:bodyPr rtlCol="0" anchor="ctr"/>
+            <a:lstStyle/>
+            <a:p>
+              <a:pPr algn="ctr"/>
+              <a:endParaRPr lang="fr-FR"/>
+            </a:p>
+          </p:txBody>
+        </p:sp>
+        <p:sp>
+          <p:nvSpPr>
+            <p:cNvPr id="4" name="Oval 3">
+              <a:extLst>
+                <a:ext uri="{FF2B5EF4-FFF2-40B4-BE49-F238E27FC236}">
+                  <a16:creationId xmlns:a16="http://schemas.microsoft.com/office/drawing/2014/main" id="{667D7E0B-0939-7C9A-4FC1-9B5FADC30A84}"/>
+                </a:ext>
+              </a:extLst>
+            </p:cNvPr>
+            <p:cNvSpPr/>
+            <p:nvPr/>
+          </p:nvSpPr>
+          <p:spPr>
+            <a:xfrm>
+              <a:off x="6438260" y="2687541"/>
+              <a:ext cx="427382" cy="222637"/>
+            </a:xfrm>
+            <a:prstGeom prst="ellipse">
+              <a:avLst/>
+            </a:prstGeom>
+            <a:solidFill>
+              <a:schemeClr val="bg2">
+                <a:lumMod val="75000"/>
+              </a:schemeClr>
+            </a:solidFill>
+            <a:ln w="28575">
+              <a:solidFill>
+                <a:schemeClr val="tx1"/>
+              </a:solidFill>
+            </a:ln>
+          </p:spPr>
+          <p:style>
+            <a:lnRef idx="2">
+              <a:schemeClr val="accent1">
+                <a:shade val="15000"/>
+              </a:schemeClr>
+            </a:lnRef>
+            <a:fillRef idx="1">
+              <a:schemeClr val="accent1"/>
+            </a:fillRef>
+            <a:effectRef idx="0">
+              <a:schemeClr val="accent1"/>
+            </a:effectRef>
+            <a:fontRef idx="minor">
+              <a:schemeClr val="lt1"/>
+            </a:fontRef>
+          </p:style>
+          <p:txBody>
+            <a:bodyPr rtlCol="0" anchor="ctr"/>
+            <a:lstStyle/>
+            <a:p>
+              <a:pPr algn="ctr"/>
+              <a:r>
+                <a:rPr lang="fr-FR" sz="1100" b="1" dirty="0">
+                  <a:solidFill>
+                    <a:schemeClr val="tx1"/>
+                  </a:solidFill>
+                </a:rPr>
+                <a:t>N</a:t>
+              </a:r>
+            </a:p>
+          </p:txBody>
+        </p:sp>
+        <p:sp>
+          <p:nvSpPr>
+            <p:cNvPr id="19" name="Freeform: Shape 18">
+              <a:extLst>
+                <a:ext uri="{FF2B5EF4-FFF2-40B4-BE49-F238E27FC236}">
+                  <a16:creationId xmlns:a16="http://schemas.microsoft.com/office/drawing/2014/main" id="{355AE4D5-5DB1-F613-8437-195419E8939F}"/>
+                </a:ext>
+              </a:extLst>
+            </p:cNvPr>
+            <p:cNvSpPr/>
+            <p:nvPr/>
+          </p:nvSpPr>
+          <p:spPr>
+            <a:xfrm>
+              <a:off x="6436995" y="3061335"/>
+              <a:ext cx="421005" cy="24791"/>
+            </a:xfrm>
+            <a:custGeom>
+              <a:avLst/>
+              <a:gdLst>
+                <a:gd name="connsiteX0" fmla="*/ 0 w 421005"/>
+                <a:gd name="connsiteY0" fmla="*/ 0 h 24791"/>
+                <a:gd name="connsiteX1" fmla="*/ 219075 w 421005"/>
+                <a:gd name="connsiteY1" fmla="*/ 24765 h 24791"/>
+                <a:gd name="connsiteX2" fmla="*/ 421005 w 421005"/>
+                <a:gd name="connsiteY2" fmla="*/ 3810 h 24791"/>
+              </a:gdLst>
+              <a:ahLst/>
+              <a:cxnLst>
+                <a:cxn ang="0">
+                  <a:pos x="connsiteX0" y="connsiteY0"/>
+                </a:cxn>
+                <a:cxn ang="0">
+                  <a:pos x="connsiteX1" y="connsiteY1"/>
+                </a:cxn>
+                <a:cxn ang="0">
+                  <a:pos x="connsiteX2" y="connsiteY2"/>
+                </a:cxn>
+              </a:cxnLst>
+              <a:rect l="l" t="t" r="r" b="b"/>
+              <a:pathLst>
+                <a:path w="421005" h="24791">
+                  <a:moveTo>
+                    <a:pt x="0" y="0"/>
+                  </a:moveTo>
+                  <a:cubicBezTo>
+                    <a:pt x="74454" y="12065"/>
+                    <a:pt x="148908" y="24130"/>
+                    <a:pt x="219075" y="24765"/>
+                  </a:cubicBezTo>
+                  <a:cubicBezTo>
+                    <a:pt x="289242" y="25400"/>
+                    <a:pt x="355123" y="14605"/>
+                    <a:pt x="421005" y="3810"/>
+                  </a:cubicBezTo>
+                </a:path>
+              </a:pathLst>
+            </a:custGeom>
+            <a:ln w="28575">
+              <a:solidFill>
+                <a:schemeClr val="accent2">
+                  <a:lumMod val="75000"/>
+                </a:schemeClr>
+              </a:solidFill>
+            </a:ln>
+          </p:spPr>
+          <p:style>
+            <a:lnRef idx="1">
+              <a:schemeClr val="accent2"/>
+            </a:lnRef>
+            <a:fillRef idx="0">
+              <a:schemeClr val="accent2"/>
+            </a:fillRef>
+            <a:effectRef idx="0">
+              <a:schemeClr val="accent2"/>
+            </a:effectRef>
+            <a:fontRef idx="minor">
+              <a:schemeClr val="tx1"/>
+            </a:fontRef>
+          </p:style>
+          <p:txBody>
+            <a:bodyPr rtlCol="0" anchor="ctr"/>
+            <a:lstStyle/>
+            <a:p>
+              <a:pPr algn="ctr"/>
+              <a:endParaRPr lang="fr-FR"/>
+            </a:p>
+          </p:txBody>
+        </p:sp>
+        <p:sp>
+          <p:nvSpPr>
+            <p:cNvPr id="20" name="Freeform: Shape 19">
+              <a:extLst>
+                <a:ext uri="{FF2B5EF4-FFF2-40B4-BE49-F238E27FC236}">
+                  <a16:creationId xmlns:a16="http://schemas.microsoft.com/office/drawing/2014/main" id="{B4AFCFFE-794C-87E6-B794-3A0E24C6C785}"/>
+                </a:ext>
+              </a:extLst>
+            </p:cNvPr>
+            <p:cNvSpPr/>
+            <p:nvPr/>
+          </p:nvSpPr>
+          <p:spPr>
+            <a:xfrm>
+              <a:off x="6436994" y="3155509"/>
+              <a:ext cx="421005" cy="24791"/>
+            </a:xfrm>
+            <a:custGeom>
+              <a:avLst/>
+              <a:gdLst>
+                <a:gd name="connsiteX0" fmla="*/ 0 w 421005"/>
+                <a:gd name="connsiteY0" fmla="*/ 0 h 24791"/>
+                <a:gd name="connsiteX1" fmla="*/ 219075 w 421005"/>
+                <a:gd name="connsiteY1" fmla="*/ 24765 h 24791"/>
+                <a:gd name="connsiteX2" fmla="*/ 421005 w 421005"/>
+                <a:gd name="connsiteY2" fmla="*/ 3810 h 24791"/>
+              </a:gdLst>
+              <a:ahLst/>
+              <a:cxnLst>
+                <a:cxn ang="0">
+                  <a:pos x="connsiteX0" y="connsiteY0"/>
+                </a:cxn>
+                <a:cxn ang="0">
+                  <a:pos x="connsiteX1" y="connsiteY1"/>
+                </a:cxn>
+                <a:cxn ang="0">
+                  <a:pos x="connsiteX2" y="connsiteY2"/>
+                </a:cxn>
+              </a:cxnLst>
+              <a:rect l="l" t="t" r="r" b="b"/>
+              <a:pathLst>
+                <a:path w="421005" h="24791">
+                  <a:moveTo>
+                    <a:pt x="0" y="0"/>
+                  </a:moveTo>
+                  <a:cubicBezTo>
+                    <a:pt x="74454" y="12065"/>
+                    <a:pt x="148908" y="24130"/>
+                    <a:pt x="219075" y="24765"/>
+                  </a:cubicBezTo>
+                  <a:cubicBezTo>
+                    <a:pt x="289242" y="25400"/>
+                    <a:pt x="355123" y="14605"/>
+                    <a:pt x="421005" y="3810"/>
+                  </a:cubicBezTo>
+                </a:path>
+              </a:pathLst>
+            </a:custGeom>
+            <a:ln w="28575">
+              <a:solidFill>
+                <a:schemeClr val="accent2">
+                  <a:lumMod val="75000"/>
+                </a:schemeClr>
+              </a:solidFill>
+            </a:ln>
+          </p:spPr>
+          <p:style>
+            <a:lnRef idx="1">
+              <a:schemeClr val="accent2"/>
+            </a:lnRef>
+            <a:fillRef idx="0">
+              <a:schemeClr val="accent2"/>
+            </a:fillRef>
+            <a:effectRef idx="0">
+              <a:schemeClr val="accent2"/>
+            </a:effectRef>
+            <a:fontRef idx="minor">
+              <a:schemeClr val="tx1"/>
+            </a:fontRef>
+          </p:style>
+          <p:txBody>
+            <a:bodyPr rtlCol="0" anchor="ctr"/>
+            <a:lstStyle/>
+            <a:p>
+              <a:pPr algn="ctr"/>
+              <a:endParaRPr lang="fr-FR"/>
+            </a:p>
+          </p:txBody>
+        </p:sp>
+        <p:sp>
+          <p:nvSpPr>
+            <p:cNvPr id="21" name="Freeform: Shape 20">
+              <a:extLst>
+                <a:ext uri="{FF2B5EF4-FFF2-40B4-BE49-F238E27FC236}">
+                  <a16:creationId xmlns:a16="http://schemas.microsoft.com/office/drawing/2014/main" id="{216D9FDA-D13A-82F6-CF8A-F7B8062726AE}"/>
+                </a:ext>
+              </a:extLst>
+            </p:cNvPr>
+            <p:cNvSpPr/>
+            <p:nvPr/>
+          </p:nvSpPr>
+          <p:spPr>
+            <a:xfrm>
+              <a:off x="6436994" y="3249683"/>
+              <a:ext cx="421005" cy="24791"/>
+            </a:xfrm>
+            <a:custGeom>
+              <a:avLst/>
+              <a:gdLst>
+                <a:gd name="connsiteX0" fmla="*/ 0 w 421005"/>
+                <a:gd name="connsiteY0" fmla="*/ 0 h 24791"/>
+                <a:gd name="connsiteX1" fmla="*/ 219075 w 421005"/>
+                <a:gd name="connsiteY1" fmla="*/ 24765 h 24791"/>
+                <a:gd name="connsiteX2" fmla="*/ 421005 w 421005"/>
+                <a:gd name="connsiteY2" fmla="*/ 3810 h 24791"/>
+              </a:gdLst>
+              <a:ahLst/>
+              <a:cxnLst>
+                <a:cxn ang="0">
+                  <a:pos x="connsiteX0" y="connsiteY0"/>
+                </a:cxn>
+                <a:cxn ang="0">
+                  <a:pos x="connsiteX1" y="connsiteY1"/>
+                </a:cxn>
+                <a:cxn ang="0">
+                  <a:pos x="connsiteX2" y="connsiteY2"/>
+                </a:cxn>
+              </a:cxnLst>
+              <a:rect l="l" t="t" r="r" b="b"/>
+              <a:pathLst>
+                <a:path w="421005" h="24791">
+                  <a:moveTo>
+                    <a:pt x="0" y="0"/>
+                  </a:moveTo>
+                  <a:cubicBezTo>
+                    <a:pt x="74454" y="12065"/>
+                    <a:pt x="148908" y="24130"/>
+                    <a:pt x="219075" y="24765"/>
+                  </a:cubicBezTo>
+                  <a:cubicBezTo>
+                    <a:pt x="289242" y="25400"/>
+                    <a:pt x="355123" y="14605"/>
+                    <a:pt x="421005" y="3810"/>
+                  </a:cubicBezTo>
+                </a:path>
+              </a:pathLst>
+            </a:custGeom>
+            <a:ln w="28575">
+              <a:solidFill>
+                <a:schemeClr val="accent2">
+                  <a:lumMod val="75000"/>
+                </a:schemeClr>
+              </a:solidFill>
+            </a:ln>
+          </p:spPr>
+          <p:style>
+            <a:lnRef idx="1">
+              <a:schemeClr val="accent2"/>
+            </a:lnRef>
+            <a:fillRef idx="0">
+              <a:schemeClr val="accent2"/>
+            </a:fillRef>
+            <a:effectRef idx="0">
+              <a:schemeClr val="accent2"/>
+            </a:effectRef>
+            <a:fontRef idx="minor">
+              <a:schemeClr val="tx1"/>
+            </a:fontRef>
+          </p:style>
+          <p:txBody>
+            <a:bodyPr rtlCol="0" anchor="ctr"/>
+            <a:lstStyle/>
+            <a:p>
+              <a:pPr algn="ctr"/>
+              <a:endParaRPr lang="fr-FR"/>
+            </a:p>
+          </p:txBody>
+        </p:sp>
+        <p:sp>
+          <p:nvSpPr>
+            <p:cNvPr id="22" name="Freeform: Shape 21">
+              <a:extLst>
+                <a:ext uri="{FF2B5EF4-FFF2-40B4-BE49-F238E27FC236}">
+                  <a16:creationId xmlns:a16="http://schemas.microsoft.com/office/drawing/2014/main" id="{90A6AEEB-A11C-5983-AB7A-B61442640465}"/>
+                </a:ext>
+              </a:extLst>
+            </p:cNvPr>
+            <p:cNvSpPr/>
+            <p:nvPr/>
+          </p:nvSpPr>
+          <p:spPr>
+            <a:xfrm>
+              <a:off x="6436994" y="3349567"/>
+              <a:ext cx="421005" cy="24791"/>
+            </a:xfrm>
+            <a:custGeom>
+              <a:avLst/>
+              <a:gdLst>
+                <a:gd name="connsiteX0" fmla="*/ 0 w 421005"/>
+                <a:gd name="connsiteY0" fmla="*/ 0 h 24791"/>
+                <a:gd name="connsiteX1" fmla="*/ 219075 w 421005"/>
+                <a:gd name="connsiteY1" fmla="*/ 24765 h 24791"/>
+                <a:gd name="connsiteX2" fmla="*/ 421005 w 421005"/>
+                <a:gd name="connsiteY2" fmla="*/ 3810 h 24791"/>
+              </a:gdLst>
+              <a:ahLst/>
+              <a:cxnLst>
+                <a:cxn ang="0">
+                  <a:pos x="connsiteX0" y="connsiteY0"/>
+                </a:cxn>
+                <a:cxn ang="0">
+                  <a:pos x="connsiteX1" y="connsiteY1"/>
+                </a:cxn>
+                <a:cxn ang="0">
+                  <a:pos x="connsiteX2" y="connsiteY2"/>
+                </a:cxn>
+              </a:cxnLst>
+              <a:rect l="l" t="t" r="r" b="b"/>
+              <a:pathLst>
+                <a:path w="421005" h="24791">
+                  <a:moveTo>
+                    <a:pt x="0" y="0"/>
+                  </a:moveTo>
+                  <a:cubicBezTo>
+                    <a:pt x="74454" y="12065"/>
+                    <a:pt x="148908" y="24130"/>
+                    <a:pt x="219075" y="24765"/>
+                  </a:cubicBezTo>
+                  <a:cubicBezTo>
+                    <a:pt x="289242" y="25400"/>
+                    <a:pt x="355123" y="14605"/>
+                    <a:pt x="421005" y="3810"/>
+                  </a:cubicBezTo>
+                </a:path>
+              </a:pathLst>
+            </a:custGeom>
+            <a:ln w="28575">
+              <a:solidFill>
+                <a:schemeClr val="accent2">
+                  <a:lumMod val="75000"/>
+                </a:schemeClr>
+              </a:solidFill>
+            </a:ln>
+          </p:spPr>
+          <p:style>
+            <a:lnRef idx="1">
+              <a:schemeClr val="accent2"/>
+            </a:lnRef>
+            <a:fillRef idx="0">
+              <a:schemeClr val="accent2"/>
+            </a:fillRef>
+            <a:effectRef idx="0">
+              <a:schemeClr val="accent2"/>
+            </a:effectRef>
+            <a:fontRef idx="minor">
+              <a:schemeClr val="tx1"/>
+            </a:fontRef>
+          </p:style>
+          <p:txBody>
+            <a:bodyPr rtlCol="0" anchor="ctr"/>
+            <a:lstStyle/>
+            <a:p>
+              <a:pPr algn="ctr"/>
+              <a:endParaRPr lang="fr-FR"/>
+            </a:p>
+          </p:txBody>
+        </p:sp>
+        <p:sp>
+          <p:nvSpPr>
+            <p:cNvPr id="23" name="Freeform: Shape 22">
+              <a:extLst>
+                <a:ext uri="{FF2B5EF4-FFF2-40B4-BE49-F238E27FC236}">
+                  <a16:creationId xmlns:a16="http://schemas.microsoft.com/office/drawing/2014/main" id="{6A287B07-82B6-75C1-801A-37BEA98CDA64}"/>
+                </a:ext>
+              </a:extLst>
+            </p:cNvPr>
+            <p:cNvSpPr/>
+            <p:nvPr/>
+          </p:nvSpPr>
+          <p:spPr>
+            <a:xfrm>
+              <a:off x="6436994" y="3451766"/>
+              <a:ext cx="421005" cy="24791"/>
+            </a:xfrm>
+            <a:custGeom>
+              <a:avLst/>
+              <a:gdLst>
+                <a:gd name="connsiteX0" fmla="*/ 0 w 421005"/>
+                <a:gd name="connsiteY0" fmla="*/ 0 h 24791"/>
+                <a:gd name="connsiteX1" fmla="*/ 219075 w 421005"/>
+                <a:gd name="connsiteY1" fmla="*/ 24765 h 24791"/>
+                <a:gd name="connsiteX2" fmla="*/ 421005 w 421005"/>
+                <a:gd name="connsiteY2" fmla="*/ 3810 h 24791"/>
+              </a:gdLst>
+              <a:ahLst/>
+              <a:cxnLst>
+                <a:cxn ang="0">
+                  <a:pos x="connsiteX0" y="connsiteY0"/>
+                </a:cxn>
+                <a:cxn ang="0">
+                  <a:pos x="connsiteX1" y="connsiteY1"/>
+                </a:cxn>
+                <a:cxn ang="0">
+                  <a:pos x="connsiteX2" y="connsiteY2"/>
+                </a:cxn>
+              </a:cxnLst>
+              <a:rect l="l" t="t" r="r" b="b"/>
+              <a:pathLst>
+                <a:path w="421005" h="24791">
+                  <a:moveTo>
+                    <a:pt x="0" y="0"/>
+                  </a:moveTo>
+                  <a:cubicBezTo>
+                    <a:pt x="74454" y="12065"/>
+                    <a:pt x="148908" y="24130"/>
+                    <a:pt x="219075" y="24765"/>
+                  </a:cubicBezTo>
+                  <a:cubicBezTo>
+                    <a:pt x="289242" y="25400"/>
+                    <a:pt x="355123" y="14605"/>
+                    <a:pt x="421005" y="3810"/>
+                  </a:cubicBezTo>
+                </a:path>
+              </a:pathLst>
+            </a:custGeom>
+            <a:ln w="28575">
+              <a:solidFill>
+                <a:schemeClr val="accent2">
+                  <a:lumMod val="75000"/>
+                </a:schemeClr>
+              </a:solidFill>
+            </a:ln>
+          </p:spPr>
+          <p:style>
+            <a:lnRef idx="1">
+              <a:schemeClr val="accent2"/>
+            </a:lnRef>
+            <a:fillRef idx="0">
+              <a:schemeClr val="accent2"/>
+            </a:fillRef>
+            <a:effectRef idx="0">
+              <a:schemeClr val="accent2"/>
+            </a:effectRef>
+            <a:fontRef idx="minor">
+              <a:schemeClr val="tx1"/>
+            </a:fontRef>
+          </p:style>
+          <p:txBody>
+            <a:bodyPr rtlCol="0" anchor="ctr"/>
+            <a:lstStyle/>
+            <a:p>
+              <a:pPr algn="ctr"/>
+              <a:endParaRPr lang="fr-FR"/>
+            </a:p>
+          </p:txBody>
+        </p:sp>
+        <p:sp>
+          <p:nvSpPr>
+            <p:cNvPr id="24" name="Freeform: Shape 23">
+              <a:extLst>
+                <a:ext uri="{FF2B5EF4-FFF2-40B4-BE49-F238E27FC236}">
+                  <a16:creationId xmlns:a16="http://schemas.microsoft.com/office/drawing/2014/main" id="{6F1EC203-71E4-F58B-88B7-6B1FEDCD74E3}"/>
+                </a:ext>
+              </a:extLst>
+            </p:cNvPr>
+            <p:cNvSpPr/>
+            <p:nvPr/>
+          </p:nvSpPr>
+          <p:spPr>
+            <a:xfrm>
+              <a:off x="6436994" y="3550155"/>
+              <a:ext cx="421005" cy="24791"/>
+            </a:xfrm>
+            <a:custGeom>
+              <a:avLst/>
+              <a:gdLst>
+                <a:gd name="connsiteX0" fmla="*/ 0 w 421005"/>
+                <a:gd name="connsiteY0" fmla="*/ 0 h 24791"/>
+                <a:gd name="connsiteX1" fmla="*/ 219075 w 421005"/>
+                <a:gd name="connsiteY1" fmla="*/ 24765 h 24791"/>
+                <a:gd name="connsiteX2" fmla="*/ 421005 w 421005"/>
+                <a:gd name="connsiteY2" fmla="*/ 3810 h 24791"/>
+              </a:gdLst>
+              <a:ahLst/>
+              <a:cxnLst>
+                <a:cxn ang="0">
+                  <a:pos x="connsiteX0" y="connsiteY0"/>
+                </a:cxn>
+                <a:cxn ang="0">
+                  <a:pos x="connsiteX1" y="connsiteY1"/>
+                </a:cxn>
+                <a:cxn ang="0">
+                  <a:pos x="connsiteX2" y="connsiteY2"/>
+                </a:cxn>
+              </a:cxnLst>
+              <a:rect l="l" t="t" r="r" b="b"/>
+              <a:pathLst>
+                <a:path w="421005" h="24791">
+                  <a:moveTo>
+                    <a:pt x="0" y="0"/>
+                  </a:moveTo>
+                  <a:cubicBezTo>
+                    <a:pt x="74454" y="12065"/>
+                    <a:pt x="148908" y="24130"/>
+                    <a:pt x="219075" y="24765"/>
+                  </a:cubicBezTo>
+                  <a:cubicBezTo>
+                    <a:pt x="289242" y="25400"/>
+                    <a:pt x="355123" y="14605"/>
+                    <a:pt x="421005" y="3810"/>
+                  </a:cubicBezTo>
+                </a:path>
+              </a:pathLst>
+            </a:custGeom>
+            <a:ln w="28575">
+              <a:solidFill>
+                <a:schemeClr val="accent2">
+                  <a:lumMod val="75000"/>
+                </a:schemeClr>
+              </a:solidFill>
+            </a:ln>
+          </p:spPr>
+          <p:style>
+            <a:lnRef idx="1">
+              <a:schemeClr val="accent2"/>
+            </a:lnRef>
+            <a:fillRef idx="0">
+              <a:schemeClr val="accent2"/>
+            </a:fillRef>
+            <a:effectRef idx="0">
+              <a:schemeClr val="accent2"/>
+            </a:effectRef>
+            <a:fontRef idx="minor">
+              <a:schemeClr val="tx1"/>
+            </a:fontRef>
+          </p:style>
+          <p:txBody>
+            <a:bodyPr rtlCol="0" anchor="ctr"/>
+            <a:lstStyle/>
+            <a:p>
+              <a:pPr algn="ctr"/>
+              <a:endParaRPr lang="fr-FR"/>
+            </a:p>
+          </p:txBody>
+        </p:sp>
+        <p:sp>
+          <p:nvSpPr>
+            <p:cNvPr id="25" name="Freeform: Shape 24">
+              <a:extLst>
+                <a:ext uri="{FF2B5EF4-FFF2-40B4-BE49-F238E27FC236}">
+                  <a16:creationId xmlns:a16="http://schemas.microsoft.com/office/drawing/2014/main" id="{257327AB-AF65-BF93-2DA4-CA4AD92C86F5}"/>
+                </a:ext>
+              </a:extLst>
+            </p:cNvPr>
+            <p:cNvSpPr/>
+            <p:nvPr/>
+          </p:nvSpPr>
+          <p:spPr>
+            <a:xfrm>
+              <a:off x="6438900" y="3634740"/>
+              <a:ext cx="421005" cy="24791"/>
+            </a:xfrm>
+            <a:custGeom>
+              <a:avLst/>
+              <a:gdLst>
+                <a:gd name="connsiteX0" fmla="*/ 0 w 421005"/>
+                <a:gd name="connsiteY0" fmla="*/ 0 h 24791"/>
+                <a:gd name="connsiteX1" fmla="*/ 219075 w 421005"/>
+                <a:gd name="connsiteY1" fmla="*/ 24765 h 24791"/>
+                <a:gd name="connsiteX2" fmla="*/ 421005 w 421005"/>
+                <a:gd name="connsiteY2" fmla="*/ 3810 h 24791"/>
+              </a:gdLst>
+              <a:ahLst/>
+              <a:cxnLst>
+                <a:cxn ang="0">
+                  <a:pos x="connsiteX0" y="connsiteY0"/>
+                </a:cxn>
+                <a:cxn ang="0">
+                  <a:pos x="connsiteX1" y="connsiteY1"/>
+                </a:cxn>
+                <a:cxn ang="0">
+                  <a:pos x="connsiteX2" y="connsiteY2"/>
+                </a:cxn>
+              </a:cxnLst>
+              <a:rect l="l" t="t" r="r" b="b"/>
+              <a:pathLst>
+                <a:path w="421005" h="24791">
+                  <a:moveTo>
+                    <a:pt x="0" y="0"/>
+                  </a:moveTo>
+                  <a:cubicBezTo>
+                    <a:pt x="74454" y="12065"/>
+                    <a:pt x="148908" y="24130"/>
+                    <a:pt x="219075" y="24765"/>
+                  </a:cubicBezTo>
+                  <a:cubicBezTo>
+                    <a:pt x="289242" y="25400"/>
+                    <a:pt x="355123" y="14605"/>
+                    <a:pt x="421005" y="3810"/>
+                  </a:cubicBezTo>
+                </a:path>
+              </a:pathLst>
+            </a:custGeom>
+            <a:ln w="28575">
+              <a:solidFill>
+                <a:schemeClr val="accent2">
+                  <a:lumMod val="75000"/>
+                </a:schemeClr>
+              </a:solidFill>
+            </a:ln>
+          </p:spPr>
+          <p:style>
+            <a:lnRef idx="1">
+              <a:schemeClr val="accent2"/>
+            </a:lnRef>
+            <a:fillRef idx="0">
+              <a:schemeClr val="accent2"/>
+            </a:fillRef>
+            <a:effectRef idx="0">
+              <a:schemeClr val="accent2"/>
+            </a:effectRef>
+            <a:fontRef idx="minor">
+              <a:schemeClr val="tx1"/>
+            </a:fontRef>
+          </p:style>
+          <p:txBody>
+            <a:bodyPr rtlCol="0" anchor="ctr"/>
+            <a:lstStyle/>
+            <a:p>
+              <a:pPr algn="ctr"/>
+              <a:endParaRPr lang="fr-FR"/>
+            </a:p>
+          </p:txBody>
+        </p:sp>
+        <p:sp>
+          <p:nvSpPr>
+            <p:cNvPr id="26" name="Freeform: Shape 25">
+              <a:extLst>
+                <a:ext uri="{FF2B5EF4-FFF2-40B4-BE49-F238E27FC236}">
+                  <a16:creationId xmlns:a16="http://schemas.microsoft.com/office/drawing/2014/main" id="{8C00C5E8-1658-2AD8-B3BD-F8D2691CD3AB}"/>
+                </a:ext>
+              </a:extLst>
+            </p:cNvPr>
+            <p:cNvSpPr/>
+            <p:nvPr/>
+          </p:nvSpPr>
+          <p:spPr>
+            <a:xfrm>
+              <a:off x="6438899" y="3728914"/>
+              <a:ext cx="421005" cy="24791"/>
+            </a:xfrm>
+            <a:custGeom>
+              <a:avLst/>
+              <a:gdLst>
+                <a:gd name="connsiteX0" fmla="*/ 0 w 421005"/>
+                <a:gd name="connsiteY0" fmla="*/ 0 h 24791"/>
+                <a:gd name="connsiteX1" fmla="*/ 219075 w 421005"/>
+                <a:gd name="connsiteY1" fmla="*/ 24765 h 24791"/>
+                <a:gd name="connsiteX2" fmla="*/ 421005 w 421005"/>
+                <a:gd name="connsiteY2" fmla="*/ 3810 h 24791"/>
+              </a:gdLst>
+              <a:ahLst/>
+              <a:cxnLst>
+                <a:cxn ang="0">
+                  <a:pos x="connsiteX0" y="connsiteY0"/>
+                </a:cxn>
+                <a:cxn ang="0">
+                  <a:pos x="connsiteX1" y="connsiteY1"/>
+                </a:cxn>
+                <a:cxn ang="0">
+                  <a:pos x="connsiteX2" y="connsiteY2"/>
+                </a:cxn>
+              </a:cxnLst>
+              <a:rect l="l" t="t" r="r" b="b"/>
+              <a:pathLst>
+                <a:path w="421005" h="24791">
+                  <a:moveTo>
+                    <a:pt x="0" y="0"/>
+                  </a:moveTo>
+                  <a:cubicBezTo>
+                    <a:pt x="74454" y="12065"/>
+                    <a:pt x="148908" y="24130"/>
+                    <a:pt x="219075" y="24765"/>
+                  </a:cubicBezTo>
+                  <a:cubicBezTo>
+                    <a:pt x="289242" y="25400"/>
+                    <a:pt x="355123" y="14605"/>
+                    <a:pt x="421005" y="3810"/>
+                  </a:cubicBezTo>
+                </a:path>
+              </a:pathLst>
+            </a:custGeom>
+            <a:ln w="28575">
+              <a:solidFill>
+                <a:schemeClr val="accent2">
+                  <a:lumMod val="75000"/>
+                </a:schemeClr>
+              </a:solidFill>
+            </a:ln>
+          </p:spPr>
+          <p:style>
+            <a:lnRef idx="1">
+              <a:schemeClr val="accent2"/>
+            </a:lnRef>
+            <a:fillRef idx="0">
+              <a:schemeClr val="accent2"/>
+            </a:fillRef>
+            <a:effectRef idx="0">
+              <a:schemeClr val="accent2"/>
+            </a:effectRef>
+            <a:fontRef idx="minor">
+              <a:schemeClr val="tx1"/>
+            </a:fontRef>
+          </p:style>
+          <p:txBody>
+            <a:bodyPr rtlCol="0" anchor="ctr"/>
+            <a:lstStyle/>
+            <a:p>
+              <a:pPr algn="ctr"/>
+              <a:endParaRPr lang="fr-FR"/>
+            </a:p>
+          </p:txBody>
+        </p:sp>
+        <p:sp>
+          <p:nvSpPr>
+            <p:cNvPr id="27" name="Freeform: Shape 26">
+              <a:extLst>
+                <a:ext uri="{FF2B5EF4-FFF2-40B4-BE49-F238E27FC236}">
+                  <a16:creationId xmlns:a16="http://schemas.microsoft.com/office/drawing/2014/main" id="{4D1112C1-F64A-ED5F-7BF8-C4D9A8FC3E67}"/>
+                </a:ext>
+              </a:extLst>
+            </p:cNvPr>
+            <p:cNvSpPr/>
+            <p:nvPr/>
+          </p:nvSpPr>
+          <p:spPr>
+            <a:xfrm>
+              <a:off x="6438899" y="3823088"/>
+              <a:ext cx="421005" cy="24791"/>
+            </a:xfrm>
+            <a:custGeom>
+              <a:avLst/>
+              <a:gdLst>
+                <a:gd name="connsiteX0" fmla="*/ 0 w 421005"/>
+                <a:gd name="connsiteY0" fmla="*/ 0 h 24791"/>
+                <a:gd name="connsiteX1" fmla="*/ 219075 w 421005"/>
+                <a:gd name="connsiteY1" fmla="*/ 24765 h 24791"/>
+                <a:gd name="connsiteX2" fmla="*/ 421005 w 421005"/>
+                <a:gd name="connsiteY2" fmla="*/ 3810 h 24791"/>
+              </a:gdLst>
+              <a:ahLst/>
+              <a:cxnLst>
+                <a:cxn ang="0">
+                  <a:pos x="connsiteX0" y="connsiteY0"/>
+                </a:cxn>
+                <a:cxn ang="0">
+                  <a:pos x="connsiteX1" y="connsiteY1"/>
+                </a:cxn>
+                <a:cxn ang="0">
+                  <a:pos x="connsiteX2" y="connsiteY2"/>
+                </a:cxn>
+              </a:cxnLst>
+              <a:rect l="l" t="t" r="r" b="b"/>
+              <a:pathLst>
+                <a:path w="421005" h="24791">
+                  <a:moveTo>
+                    <a:pt x="0" y="0"/>
+                  </a:moveTo>
+                  <a:cubicBezTo>
+                    <a:pt x="74454" y="12065"/>
+                    <a:pt x="148908" y="24130"/>
+                    <a:pt x="219075" y="24765"/>
+                  </a:cubicBezTo>
+                  <a:cubicBezTo>
+                    <a:pt x="289242" y="25400"/>
+                    <a:pt x="355123" y="14605"/>
+                    <a:pt x="421005" y="3810"/>
+                  </a:cubicBezTo>
+                </a:path>
+              </a:pathLst>
+            </a:custGeom>
+            <a:ln w="28575">
+              <a:solidFill>
+                <a:schemeClr val="accent2">
+                  <a:lumMod val="75000"/>
+                </a:schemeClr>
+              </a:solidFill>
+            </a:ln>
+          </p:spPr>
+          <p:style>
+            <a:lnRef idx="1">
+              <a:schemeClr val="accent2"/>
+            </a:lnRef>
+            <a:fillRef idx="0">
+              <a:schemeClr val="accent2"/>
+            </a:fillRef>
+            <a:effectRef idx="0">
+              <a:schemeClr val="accent2"/>
+            </a:effectRef>
+            <a:fontRef idx="minor">
+              <a:schemeClr val="tx1"/>
+            </a:fontRef>
+          </p:style>
+          <p:txBody>
+            <a:bodyPr rtlCol="0" anchor="ctr"/>
+            <a:lstStyle/>
+            <a:p>
+              <a:pPr algn="ctr"/>
+              <a:endParaRPr lang="fr-FR"/>
+            </a:p>
+          </p:txBody>
+        </p:sp>
+        <p:sp>
+          <p:nvSpPr>
+            <p:cNvPr id="28" name="Freeform: Shape 27">
+              <a:extLst>
+                <a:ext uri="{FF2B5EF4-FFF2-40B4-BE49-F238E27FC236}">
+                  <a16:creationId xmlns:a16="http://schemas.microsoft.com/office/drawing/2014/main" id="{85317294-4118-E708-139D-5DD7932E5ED3}"/>
+                </a:ext>
+              </a:extLst>
+            </p:cNvPr>
+            <p:cNvSpPr/>
+            <p:nvPr/>
+          </p:nvSpPr>
+          <p:spPr>
+            <a:xfrm>
+              <a:off x="6438899" y="3922972"/>
+              <a:ext cx="421005" cy="24791"/>
+            </a:xfrm>
+            <a:custGeom>
+              <a:avLst/>
+              <a:gdLst>
+                <a:gd name="connsiteX0" fmla="*/ 0 w 421005"/>
+                <a:gd name="connsiteY0" fmla="*/ 0 h 24791"/>
+                <a:gd name="connsiteX1" fmla="*/ 219075 w 421005"/>
+                <a:gd name="connsiteY1" fmla="*/ 24765 h 24791"/>
+                <a:gd name="connsiteX2" fmla="*/ 421005 w 421005"/>
+                <a:gd name="connsiteY2" fmla="*/ 3810 h 24791"/>
+              </a:gdLst>
+              <a:ahLst/>
+              <a:cxnLst>
+                <a:cxn ang="0">
+                  <a:pos x="connsiteX0" y="connsiteY0"/>
+                </a:cxn>
+                <a:cxn ang="0">
+                  <a:pos x="connsiteX1" y="connsiteY1"/>
+                </a:cxn>
+                <a:cxn ang="0">
+                  <a:pos x="connsiteX2" y="connsiteY2"/>
+                </a:cxn>
+              </a:cxnLst>
+              <a:rect l="l" t="t" r="r" b="b"/>
+              <a:pathLst>
+                <a:path w="421005" h="24791">
+                  <a:moveTo>
+                    <a:pt x="0" y="0"/>
+                  </a:moveTo>
+                  <a:cubicBezTo>
+                    <a:pt x="74454" y="12065"/>
+                    <a:pt x="148908" y="24130"/>
+                    <a:pt x="219075" y="24765"/>
+                  </a:cubicBezTo>
+                  <a:cubicBezTo>
+                    <a:pt x="289242" y="25400"/>
+                    <a:pt x="355123" y="14605"/>
+                    <a:pt x="421005" y="3810"/>
+                  </a:cubicBezTo>
+                </a:path>
+              </a:pathLst>
+            </a:custGeom>
+            <a:ln w="28575">
+              <a:solidFill>
+                <a:schemeClr val="accent2">
+                  <a:lumMod val="75000"/>
+                </a:schemeClr>
+              </a:solidFill>
+            </a:ln>
+          </p:spPr>
+          <p:style>
+            <a:lnRef idx="1">
+              <a:schemeClr val="accent2"/>
+            </a:lnRef>
+            <a:fillRef idx="0">
+              <a:schemeClr val="accent2"/>
+            </a:fillRef>
+            <a:effectRef idx="0">
+              <a:schemeClr val="accent2"/>
+            </a:effectRef>
+            <a:fontRef idx="minor">
+              <a:schemeClr val="tx1"/>
+            </a:fontRef>
+          </p:style>
+          <p:txBody>
+            <a:bodyPr rtlCol="0" anchor="ctr"/>
+            <a:lstStyle/>
+            <a:p>
+              <a:pPr algn="ctr"/>
+              <a:endParaRPr lang="fr-FR"/>
+            </a:p>
+          </p:txBody>
+        </p:sp>
+        <p:sp>
+          <p:nvSpPr>
+            <p:cNvPr id="6" name="Oval 5">
+              <a:extLst>
+                <a:ext uri="{FF2B5EF4-FFF2-40B4-BE49-F238E27FC236}">
+                  <a16:creationId xmlns:a16="http://schemas.microsoft.com/office/drawing/2014/main" id="{7D1E03CE-AC48-7FBB-C201-C282FED32038}"/>
+                </a:ext>
+              </a:extLst>
+            </p:cNvPr>
+            <p:cNvSpPr/>
+            <p:nvPr/>
+          </p:nvSpPr>
+          <p:spPr>
+            <a:xfrm>
+              <a:off x="6438735" y="3966873"/>
+              <a:ext cx="427382" cy="222637"/>
+            </a:xfrm>
+            <a:prstGeom prst="ellipse">
+              <a:avLst/>
+            </a:prstGeom>
+            <a:solidFill>
+              <a:schemeClr val="bg2">
+                <a:lumMod val="75000"/>
+              </a:schemeClr>
+            </a:solidFill>
+            <a:ln w="28575">
+              <a:solidFill>
+                <a:schemeClr val="tx1"/>
+              </a:solidFill>
+            </a:ln>
+          </p:spPr>
+          <p:style>
+            <a:lnRef idx="2">
+              <a:schemeClr val="accent1">
+                <a:shade val="15000"/>
+              </a:schemeClr>
+            </a:lnRef>
+            <a:fillRef idx="1">
+              <a:schemeClr val="accent1"/>
+            </a:fillRef>
+            <a:effectRef idx="0">
+              <a:schemeClr val="accent1"/>
+            </a:effectRef>
+            <a:fontRef idx="minor">
+              <a:schemeClr val="lt1"/>
+            </a:fontRef>
+          </p:style>
+          <p:txBody>
+            <a:bodyPr rtlCol="0" anchor="ctr"/>
+            <a:lstStyle/>
+            <a:p>
+              <a:pPr algn="ctr"/>
+              <a:r>
+                <a:rPr lang="fr-FR" sz="1100" b="1" dirty="0">
+                  <a:solidFill>
+                    <a:schemeClr val="tx1"/>
+                  </a:solidFill>
+                </a:rPr>
+                <a:t>S</a:t>
+              </a:r>
+            </a:p>
+          </p:txBody>
+        </p:sp>
+      </p:grpSp>
+      <p:sp>
+        <p:nvSpPr>
+          <p:cNvPr id="78" name="Arc 77">
+            <a:extLst>
+              <a:ext uri="{FF2B5EF4-FFF2-40B4-BE49-F238E27FC236}">
+                <a16:creationId xmlns:a16="http://schemas.microsoft.com/office/drawing/2014/main" id="{145B4E19-2682-DFAB-3115-85372CD26A72}"/>
+              </a:ext>
+            </a:extLst>
+          </p:cNvPr>
+          <p:cNvSpPr/>
+          <p:nvPr/>
+        </p:nvSpPr>
+        <p:spPr>
+          <a:xfrm rot="10800000">
+            <a:off x="3283888" y="1768343"/>
+            <a:ext cx="1399429" cy="2097350"/>
+          </a:xfrm>
+          <a:prstGeom prst="arc">
+            <a:avLst>
+              <a:gd name="adj1" fmla="val 15885701"/>
+              <a:gd name="adj2" fmla="val 5692140"/>
+            </a:avLst>
+          </a:prstGeom>
+          <a:ln w="28575">
+            <a:solidFill>
+              <a:schemeClr val="accent6">
+                <a:lumMod val="50000"/>
+              </a:schemeClr>
+            </a:solidFill>
+          </a:ln>
+        </p:spPr>
+        <p:style>
+          <a:lnRef idx="1">
+            <a:schemeClr val="accent1"/>
+          </a:lnRef>
+          <a:fillRef idx="0">
+            <a:schemeClr val="accent1"/>
+          </a:fillRef>
+          <a:effectRef idx="0">
+            <a:schemeClr val="accent1"/>
+          </a:effectRef>
+          <a:fontRef idx="minor">
+            <a:schemeClr val="tx1"/>
+          </a:fontRef>
+        </p:style>
+        <p:txBody>
+          <a:bodyPr rtlCol="0" anchor="ctr"/>
+          <a:lstStyle/>
+          <a:p>
+            <a:pPr algn="ctr"/>
+            <a:endParaRPr lang="fr-FR"/>
+          </a:p>
+        </p:txBody>
+      </p:sp>
+      <p:sp>
+        <p:nvSpPr>
+          <p:cNvPr id="79" name="Arc 78">
+            <a:extLst>
+              <a:ext uri="{FF2B5EF4-FFF2-40B4-BE49-F238E27FC236}">
+                <a16:creationId xmlns:a16="http://schemas.microsoft.com/office/drawing/2014/main" id="{A71C20E5-BB1E-4405-DA04-73490EA43930}"/>
+              </a:ext>
+            </a:extLst>
+          </p:cNvPr>
+          <p:cNvSpPr/>
+          <p:nvPr/>
+        </p:nvSpPr>
+        <p:spPr>
+          <a:xfrm rot="10800000">
+            <a:off x="3068368" y="1444773"/>
+            <a:ext cx="1399429" cy="2802372"/>
+          </a:xfrm>
+          <a:prstGeom prst="arc">
+            <a:avLst>
+              <a:gd name="adj1" fmla="val 15039800"/>
+              <a:gd name="adj2" fmla="val 6385720"/>
+            </a:avLst>
+          </a:prstGeom>
+          <a:ln w="28575">
+            <a:solidFill>
+              <a:schemeClr val="accent6">
+                <a:lumMod val="50000"/>
+              </a:schemeClr>
+            </a:solidFill>
+          </a:ln>
+        </p:spPr>
+        <p:style>
+          <a:lnRef idx="1">
+            <a:schemeClr val="accent1"/>
+          </a:lnRef>
+          <a:fillRef idx="0">
+            <a:schemeClr val="accent1"/>
+          </a:fillRef>
+          <a:effectRef idx="0">
+            <a:schemeClr val="accent1"/>
+          </a:effectRef>
+          <a:fontRef idx="minor">
+            <a:schemeClr val="tx1"/>
+          </a:fontRef>
+        </p:style>
+        <p:txBody>
+          <a:bodyPr rtlCol="0" anchor="ctr"/>
+          <a:lstStyle/>
+          <a:p>
+            <a:pPr algn="ctr"/>
+            <a:endParaRPr lang="fr-FR"/>
+          </a:p>
+        </p:txBody>
+      </p:sp>
+      <p:sp>
+        <p:nvSpPr>
+          <p:cNvPr id="80" name="Arc 79">
+            <a:extLst>
+              <a:ext uri="{FF2B5EF4-FFF2-40B4-BE49-F238E27FC236}">
+                <a16:creationId xmlns:a16="http://schemas.microsoft.com/office/drawing/2014/main" id="{55C0F90D-4A99-031D-004E-D6FBA0016A41}"/>
+              </a:ext>
+            </a:extLst>
+          </p:cNvPr>
+          <p:cNvSpPr/>
+          <p:nvPr/>
+        </p:nvSpPr>
+        <p:spPr>
+          <a:xfrm rot="10800000">
+            <a:off x="2656135" y="996307"/>
+            <a:ext cx="1854352" cy="3699304"/>
+          </a:xfrm>
+          <a:prstGeom prst="arc">
+            <a:avLst>
+              <a:gd name="adj1" fmla="val 14349328"/>
+              <a:gd name="adj2" fmla="val 6991892"/>
+            </a:avLst>
+          </a:prstGeom>
+          <a:ln w="28575">
+            <a:solidFill>
+              <a:schemeClr val="accent6">
+                <a:lumMod val="50000"/>
+              </a:schemeClr>
+            </a:solidFill>
+          </a:ln>
+        </p:spPr>
+        <p:style>
+          <a:lnRef idx="1">
+            <a:schemeClr val="accent1"/>
+          </a:lnRef>
+          <a:fillRef idx="0">
+            <a:schemeClr val="accent1"/>
+          </a:fillRef>
+          <a:effectRef idx="0">
+            <a:schemeClr val="accent1"/>
+          </a:effectRef>
+          <a:fontRef idx="minor">
+            <a:schemeClr val="tx1"/>
+          </a:fontRef>
+        </p:style>
+        <p:txBody>
+          <a:bodyPr rtlCol="0" anchor="ctr"/>
+          <a:lstStyle/>
+          <a:p>
+            <a:pPr algn="ctr"/>
+            <a:endParaRPr lang="fr-FR"/>
+          </a:p>
+        </p:txBody>
+      </p:sp>
+      <p:cxnSp>
+        <p:nvCxnSpPr>
+          <p:cNvPr id="82" name="Straight Connector 81">
+            <a:extLst>
+              <a:ext uri="{FF2B5EF4-FFF2-40B4-BE49-F238E27FC236}">
+                <a16:creationId xmlns:a16="http://schemas.microsoft.com/office/drawing/2014/main" id="{A345C394-111B-E1D0-D0E1-A06186E4C059}"/>
+              </a:ext>
+            </a:extLst>
+          </p:cNvPr>
+          <p:cNvCxnSpPr>
+            <a:cxnSpLocks/>
+          </p:cNvCxnSpPr>
+          <p:nvPr/>
+        </p:nvCxnSpPr>
+        <p:spPr>
+          <a:xfrm>
+            <a:off x="2596262" y="2922270"/>
+            <a:ext cx="59872" cy="67793"/>
+          </a:xfrm>
+          <a:prstGeom prst="line">
+            <a:avLst/>
+          </a:prstGeom>
+          <a:ln w="28575">
+            <a:solidFill>
+              <a:schemeClr val="accent6">
+                <a:lumMod val="50000"/>
+              </a:schemeClr>
+            </a:solidFill>
+          </a:ln>
+        </p:spPr>
+        <p:style>
+          <a:lnRef idx="1">
+            <a:schemeClr val="accent1"/>
+          </a:lnRef>
+          <a:fillRef idx="0">
+            <a:schemeClr val="accent1"/>
+          </a:fillRef>
+          <a:effectRef idx="0">
+            <a:schemeClr val="accent1"/>
+          </a:effectRef>
+          <a:fontRef idx="minor">
+            <a:schemeClr val="tx1"/>
+          </a:fontRef>
+        </p:style>
+      </p:cxnSp>
+      <p:cxnSp>
+        <p:nvCxnSpPr>
+          <p:cNvPr id="83" name="Straight Connector 82">
+            <a:extLst>
+              <a:ext uri="{FF2B5EF4-FFF2-40B4-BE49-F238E27FC236}">
+                <a16:creationId xmlns:a16="http://schemas.microsoft.com/office/drawing/2014/main" id="{32EFFE05-5B37-476C-0853-0BA9603D1B12}"/>
+              </a:ext>
+            </a:extLst>
+          </p:cNvPr>
+          <p:cNvCxnSpPr>
+            <a:cxnSpLocks/>
+          </p:cNvCxnSpPr>
+          <p:nvPr/>
+        </p:nvCxnSpPr>
+        <p:spPr>
+          <a:xfrm flipV="1">
+            <a:off x="2662704" y="2922270"/>
+            <a:ext cx="64406" cy="67793"/>
+          </a:xfrm>
+          <a:prstGeom prst="line">
+            <a:avLst/>
+          </a:prstGeom>
+          <a:ln w="28575">
+            <a:solidFill>
+              <a:schemeClr val="accent6">
+                <a:lumMod val="50000"/>
+              </a:schemeClr>
+            </a:solidFill>
+          </a:ln>
+        </p:spPr>
+        <p:style>
+          <a:lnRef idx="1">
+            <a:schemeClr val="accent1"/>
+          </a:lnRef>
+          <a:fillRef idx="0">
+            <a:schemeClr val="accent1"/>
+          </a:fillRef>
+          <a:effectRef idx="0">
+            <a:schemeClr val="accent1"/>
+          </a:effectRef>
+          <a:fontRef idx="minor">
+            <a:schemeClr val="tx1"/>
+          </a:fontRef>
+        </p:style>
+      </p:cxnSp>
+      <p:cxnSp>
+        <p:nvCxnSpPr>
+          <p:cNvPr id="87" name="Straight Connector 86">
+            <a:extLst>
+              <a:ext uri="{FF2B5EF4-FFF2-40B4-BE49-F238E27FC236}">
+                <a16:creationId xmlns:a16="http://schemas.microsoft.com/office/drawing/2014/main" id="{7D1085D5-260E-6FCF-4BB9-EB18A50D843C}"/>
+              </a:ext>
+            </a:extLst>
+          </p:cNvPr>
+          <p:cNvCxnSpPr>
+            <a:cxnSpLocks/>
+          </p:cNvCxnSpPr>
+          <p:nvPr/>
+        </p:nvCxnSpPr>
+        <p:spPr>
+          <a:xfrm flipV="1">
+            <a:off x="3067580" y="2888373"/>
+            <a:ext cx="64406" cy="67793"/>
+          </a:xfrm>
+          <a:prstGeom prst="line">
+            <a:avLst/>
+          </a:prstGeom>
+          <a:ln w="28575">
+            <a:solidFill>
+              <a:schemeClr val="accent6">
+                <a:lumMod val="50000"/>
+              </a:schemeClr>
+            </a:solidFill>
+          </a:ln>
+        </p:spPr>
+        <p:style>
+          <a:lnRef idx="1">
+            <a:schemeClr val="accent1"/>
+          </a:lnRef>
+          <a:fillRef idx="0">
+            <a:schemeClr val="accent1"/>
+          </a:fillRef>
+          <a:effectRef idx="0">
+            <a:schemeClr val="accent1"/>
+          </a:effectRef>
+          <a:fontRef idx="minor">
+            <a:schemeClr val="tx1"/>
+          </a:fontRef>
+        </p:style>
+      </p:cxnSp>
+      <p:cxnSp>
+        <p:nvCxnSpPr>
+          <p:cNvPr id="88" name="Straight Connector 87">
+            <a:extLst>
+              <a:ext uri="{FF2B5EF4-FFF2-40B4-BE49-F238E27FC236}">
+                <a16:creationId xmlns:a16="http://schemas.microsoft.com/office/drawing/2014/main" id="{67843C35-F16C-2F37-1A86-F2386C00D0CF}"/>
+              </a:ext>
+            </a:extLst>
+          </p:cNvPr>
+          <p:cNvCxnSpPr>
+            <a:cxnSpLocks/>
+          </p:cNvCxnSpPr>
+          <p:nvPr/>
+        </p:nvCxnSpPr>
+        <p:spPr>
+          <a:xfrm>
+            <a:off x="3015800" y="2888373"/>
+            <a:ext cx="59872" cy="67793"/>
+          </a:xfrm>
+          <a:prstGeom prst="line">
+            <a:avLst/>
+          </a:prstGeom>
+          <a:ln w="28575">
+            <a:solidFill>
+              <a:schemeClr val="accent6">
+                <a:lumMod val="50000"/>
+              </a:schemeClr>
+            </a:solidFill>
+          </a:ln>
+        </p:spPr>
+        <p:style>
+          <a:lnRef idx="1">
+            <a:schemeClr val="accent1"/>
+          </a:lnRef>
+          <a:fillRef idx="0">
+            <a:schemeClr val="accent1"/>
+          </a:fillRef>
+          <a:effectRef idx="0">
+            <a:schemeClr val="accent1"/>
+          </a:effectRef>
+          <a:fontRef idx="minor">
+            <a:schemeClr val="tx1"/>
+          </a:fontRef>
+        </p:style>
+      </p:cxnSp>
+      <p:cxnSp>
+        <p:nvCxnSpPr>
+          <p:cNvPr id="89" name="Straight Connector 88">
+            <a:extLst>
+              <a:ext uri="{FF2B5EF4-FFF2-40B4-BE49-F238E27FC236}">
+                <a16:creationId xmlns:a16="http://schemas.microsoft.com/office/drawing/2014/main" id="{81267E70-4A49-BF2D-AEF9-C013F563B814}"/>
+              </a:ext>
+            </a:extLst>
+          </p:cNvPr>
+          <p:cNvCxnSpPr>
+            <a:cxnSpLocks/>
+          </p:cNvCxnSpPr>
+          <p:nvPr/>
+        </p:nvCxnSpPr>
+        <p:spPr>
+          <a:xfrm>
+            <a:off x="3224015" y="2867797"/>
+            <a:ext cx="59872" cy="67793"/>
+          </a:xfrm>
+          <a:prstGeom prst="line">
+            <a:avLst/>
+          </a:prstGeom>
+          <a:ln w="28575">
+            <a:solidFill>
+              <a:schemeClr val="accent6">
+                <a:lumMod val="50000"/>
+              </a:schemeClr>
+            </a:solidFill>
+          </a:ln>
+        </p:spPr>
+        <p:style>
+          <a:lnRef idx="1">
+            <a:schemeClr val="accent1"/>
+          </a:lnRef>
+          <a:fillRef idx="0">
+            <a:schemeClr val="accent1"/>
+          </a:fillRef>
+          <a:effectRef idx="0">
+            <a:schemeClr val="accent1"/>
+          </a:effectRef>
+          <a:fontRef idx="minor">
+            <a:schemeClr val="tx1"/>
+          </a:fontRef>
+        </p:style>
+      </p:cxnSp>
+      <p:cxnSp>
+        <p:nvCxnSpPr>
+          <p:cNvPr id="90" name="Straight Connector 89">
+            <a:extLst>
+              <a:ext uri="{FF2B5EF4-FFF2-40B4-BE49-F238E27FC236}">
+                <a16:creationId xmlns:a16="http://schemas.microsoft.com/office/drawing/2014/main" id="{C96E5688-8B3A-885D-6024-F2AAECDD7AFA}"/>
+              </a:ext>
+            </a:extLst>
+          </p:cNvPr>
+          <p:cNvCxnSpPr>
+            <a:cxnSpLocks/>
+          </p:cNvCxnSpPr>
+          <p:nvPr/>
+        </p:nvCxnSpPr>
+        <p:spPr>
+          <a:xfrm flipV="1">
+            <a:off x="3287634" y="2866731"/>
+            <a:ext cx="64406" cy="67793"/>
+          </a:xfrm>
+          <a:prstGeom prst="line">
+            <a:avLst/>
+          </a:prstGeom>
+          <a:ln w="28575">
+            <a:solidFill>
+              <a:schemeClr val="accent6">
+                <a:lumMod val="50000"/>
+              </a:schemeClr>
+            </a:solidFill>
+          </a:ln>
+        </p:spPr>
+        <p:style>
+          <a:lnRef idx="1">
+            <a:schemeClr val="accent1"/>
+          </a:lnRef>
+          <a:fillRef idx="0">
+            <a:schemeClr val="accent1"/>
+          </a:fillRef>
+          <a:effectRef idx="0">
+            <a:schemeClr val="accent1"/>
+          </a:effectRef>
+          <a:fontRef idx="minor">
+            <a:schemeClr val="tx1"/>
+          </a:fontRef>
+        </p:style>
+      </p:cxnSp>
+      <p:sp>
+        <p:nvSpPr>
+          <p:cNvPr id="93" name="Arc 92">
+            <a:extLst>
+              <a:ext uri="{FF2B5EF4-FFF2-40B4-BE49-F238E27FC236}">
+                <a16:creationId xmlns:a16="http://schemas.microsoft.com/office/drawing/2014/main" id="{C86B208F-6113-AD93-EE32-41056376CABD}"/>
+              </a:ext>
+            </a:extLst>
+          </p:cNvPr>
+          <p:cNvSpPr/>
+          <p:nvPr/>
+        </p:nvSpPr>
+        <p:spPr>
+          <a:xfrm>
+            <a:off x="4115600" y="1713665"/>
+            <a:ext cx="1648344" cy="2097350"/>
+          </a:xfrm>
+          <a:prstGeom prst="arc">
+            <a:avLst>
+              <a:gd name="adj1" fmla="val 15885701"/>
+              <a:gd name="adj2" fmla="val 5692140"/>
+            </a:avLst>
+          </a:prstGeom>
+          <a:ln w="28575">
+            <a:solidFill>
+              <a:schemeClr val="accent6">
+                <a:lumMod val="50000"/>
+              </a:schemeClr>
+            </a:solidFill>
+          </a:ln>
+        </p:spPr>
+        <p:style>
+          <a:lnRef idx="1">
+            <a:schemeClr val="accent1"/>
+          </a:lnRef>
+          <a:fillRef idx="0">
+            <a:schemeClr val="accent1"/>
+          </a:fillRef>
+          <a:effectRef idx="0">
+            <a:schemeClr val="accent1"/>
+          </a:effectRef>
+          <a:fontRef idx="minor">
+            <a:schemeClr val="tx1"/>
+          </a:fontRef>
+        </p:style>
+        <p:txBody>
+          <a:bodyPr rtlCol="0" anchor="ctr"/>
+          <a:lstStyle/>
+          <a:p>
+            <a:pPr algn="ctr"/>
+            <a:endParaRPr lang="fr-FR"/>
+          </a:p>
+        </p:txBody>
+      </p:sp>
+      <p:sp>
+        <p:nvSpPr>
+          <p:cNvPr id="94" name="Arc 93">
+            <a:extLst>
+              <a:ext uri="{FF2B5EF4-FFF2-40B4-BE49-F238E27FC236}">
+                <a16:creationId xmlns:a16="http://schemas.microsoft.com/office/drawing/2014/main" id="{FC4E6C12-9148-A8B2-6527-D2B7B65DA69A}"/>
+              </a:ext>
+            </a:extLst>
+          </p:cNvPr>
+          <p:cNvSpPr/>
+          <p:nvPr/>
+        </p:nvSpPr>
+        <p:spPr>
+          <a:xfrm>
+            <a:off x="4369454" y="1332213"/>
+            <a:ext cx="1648344" cy="2802372"/>
+          </a:xfrm>
+          <a:prstGeom prst="arc">
+            <a:avLst>
+              <a:gd name="adj1" fmla="val 15039800"/>
+              <a:gd name="adj2" fmla="val 6385720"/>
+            </a:avLst>
+          </a:prstGeom>
+          <a:ln w="28575">
+            <a:solidFill>
+              <a:schemeClr val="accent6">
+                <a:lumMod val="50000"/>
+              </a:schemeClr>
+            </a:solidFill>
+          </a:ln>
+        </p:spPr>
+        <p:style>
+          <a:lnRef idx="1">
+            <a:schemeClr val="accent1"/>
+          </a:lnRef>
+          <a:fillRef idx="0">
+            <a:schemeClr val="accent1"/>
+          </a:fillRef>
+          <a:effectRef idx="0">
+            <a:schemeClr val="accent1"/>
+          </a:effectRef>
+          <a:fontRef idx="minor">
+            <a:schemeClr val="tx1"/>
+          </a:fontRef>
+        </p:style>
+        <p:txBody>
+          <a:bodyPr rtlCol="0" anchor="ctr"/>
+          <a:lstStyle/>
+          <a:p>
+            <a:pPr algn="ctr"/>
+            <a:endParaRPr lang="fr-FR"/>
+          </a:p>
+        </p:txBody>
+      </p:sp>
+      <p:sp>
+        <p:nvSpPr>
+          <p:cNvPr id="95" name="Arc 94">
+            <a:extLst>
+              <a:ext uri="{FF2B5EF4-FFF2-40B4-BE49-F238E27FC236}">
+                <a16:creationId xmlns:a16="http://schemas.microsoft.com/office/drawing/2014/main" id="{22E0F8FA-91DE-3760-10FD-F2E2224E5200}"/>
+              </a:ext>
+            </a:extLst>
+          </p:cNvPr>
+          <p:cNvSpPr/>
+          <p:nvPr/>
+        </p:nvSpPr>
+        <p:spPr>
+          <a:xfrm>
+            <a:off x="4319171" y="883747"/>
+            <a:ext cx="2184183" cy="3699304"/>
+          </a:xfrm>
+          <a:prstGeom prst="arc">
+            <a:avLst>
+              <a:gd name="adj1" fmla="val 14219305"/>
+              <a:gd name="adj2" fmla="val 7225553"/>
+            </a:avLst>
+          </a:prstGeom>
+          <a:ln w="28575">
+            <a:solidFill>
+              <a:schemeClr val="accent6">
+                <a:lumMod val="50000"/>
+              </a:schemeClr>
+            </a:solidFill>
+          </a:ln>
+        </p:spPr>
+        <p:style>
+          <a:lnRef idx="1">
+            <a:schemeClr val="accent1"/>
+          </a:lnRef>
+          <a:fillRef idx="0">
+            <a:schemeClr val="accent1"/>
+          </a:fillRef>
+          <a:effectRef idx="0">
+            <a:schemeClr val="accent1"/>
+          </a:effectRef>
+          <a:fontRef idx="minor">
+            <a:schemeClr val="tx1"/>
+          </a:fontRef>
+        </p:style>
+        <p:txBody>
+          <a:bodyPr rtlCol="0" anchor="ctr"/>
+          <a:lstStyle/>
+          <a:p>
+            <a:pPr algn="ctr"/>
+            <a:endParaRPr lang="fr-FR"/>
+          </a:p>
+        </p:txBody>
+      </p:sp>
+      <p:sp>
+        <p:nvSpPr>
+          <p:cNvPr id="63" name="Rectangle 62">
+            <a:extLst>
+              <a:ext uri="{FF2B5EF4-FFF2-40B4-BE49-F238E27FC236}">
+                <a16:creationId xmlns:a16="http://schemas.microsoft.com/office/drawing/2014/main" id="{74D618F4-FC34-5CCE-6347-E3960682A3F6}"/>
+              </a:ext>
+            </a:extLst>
+          </p:cNvPr>
+          <p:cNvSpPr/>
+          <p:nvPr/>
+        </p:nvSpPr>
+        <p:spPr>
+          <a:xfrm>
+            <a:off x="2749850" y="1194676"/>
+            <a:ext cx="3275937" cy="76737"/>
+          </a:xfrm>
+          <a:prstGeom prst="rect">
+            <a:avLst/>
+          </a:prstGeom>
+          <a:blipFill>
+            <a:blip r:embed="rId2">
+              <a:extLst>
+                <a:ext uri="{837473B0-CC2E-450A-ABE3-18F120FF3D39}">
+                  <a1611:picAttrSrcUrl xmlns:a1611="http://schemas.microsoft.com/office/drawing/2016/11/main" r:id="rId3"/>
+                </a:ext>
+              </a:extLst>
+            </a:blip>
+            <a:stretch>
+              <a:fillRect/>
+            </a:stretch>
+          </a:blipFill>
+          <a:ln w="28575">
+            <a:noFill/>
+          </a:ln>
+        </p:spPr>
+        <p:style>
+          <a:lnRef idx="2">
+            <a:schemeClr val="accent1">
+              <a:shade val="15000"/>
+            </a:schemeClr>
+          </a:lnRef>
+          <a:fillRef idx="1">
+            <a:schemeClr val="accent1"/>
+          </a:fillRef>
+          <a:effectRef idx="0">
+            <a:schemeClr val="accent1"/>
+          </a:effectRef>
+          <a:fontRef idx="minor">
+            <a:schemeClr val="lt1"/>
+          </a:fontRef>
+        </p:style>
+        <p:txBody>
+          <a:bodyPr rtlCol="0" anchor="ctr"/>
+          <a:lstStyle/>
+          <a:p>
+            <a:pPr algn="ctr"/>
+            <a:endParaRPr lang="fr-FR"/>
+          </a:p>
+        </p:txBody>
+      </p:sp>
+      <p:cxnSp>
+        <p:nvCxnSpPr>
+          <p:cNvPr id="15" name="Straight Connector 14">
+            <a:extLst>
+              <a:ext uri="{FF2B5EF4-FFF2-40B4-BE49-F238E27FC236}">
+                <a16:creationId xmlns:a16="http://schemas.microsoft.com/office/drawing/2014/main" id="{A1B74AF5-BDBE-0E14-9F18-4969136BF9B1}"/>
+              </a:ext>
+            </a:extLst>
+          </p:cNvPr>
+          <p:cNvCxnSpPr>
+            <a:cxnSpLocks/>
+          </p:cNvCxnSpPr>
+          <p:nvPr/>
+        </p:nvCxnSpPr>
+        <p:spPr>
+          <a:xfrm>
+            <a:off x="5698456" y="2732314"/>
+            <a:ext cx="59872" cy="67793"/>
+          </a:xfrm>
+          <a:prstGeom prst="line">
+            <a:avLst/>
+          </a:prstGeom>
+          <a:ln w="28575">
+            <a:solidFill>
+              <a:schemeClr val="accent6">
+                <a:lumMod val="50000"/>
+              </a:schemeClr>
+            </a:solidFill>
+          </a:ln>
+        </p:spPr>
+        <p:style>
+          <a:lnRef idx="1">
+            <a:schemeClr val="accent1"/>
+          </a:lnRef>
+          <a:fillRef idx="0">
+            <a:schemeClr val="accent1"/>
+          </a:fillRef>
+          <a:effectRef idx="0">
+            <a:schemeClr val="accent1"/>
+          </a:effectRef>
+          <a:fontRef idx="minor">
+            <a:schemeClr val="tx1"/>
+          </a:fontRef>
+        </p:style>
+      </p:cxnSp>
+      <p:cxnSp>
+        <p:nvCxnSpPr>
+          <p:cNvPr id="16" name="Straight Connector 15">
+            <a:extLst>
+              <a:ext uri="{FF2B5EF4-FFF2-40B4-BE49-F238E27FC236}">
+                <a16:creationId xmlns:a16="http://schemas.microsoft.com/office/drawing/2014/main" id="{6181DA8D-1E14-FFC1-EF52-BE29393EA379}"/>
+              </a:ext>
+            </a:extLst>
+          </p:cNvPr>
+          <p:cNvCxnSpPr>
+            <a:cxnSpLocks/>
+          </p:cNvCxnSpPr>
+          <p:nvPr/>
+        </p:nvCxnSpPr>
+        <p:spPr>
+          <a:xfrm flipV="1">
+            <a:off x="5764898" y="2732314"/>
+            <a:ext cx="64406" cy="67793"/>
+          </a:xfrm>
+          <a:prstGeom prst="line">
+            <a:avLst/>
+          </a:prstGeom>
+          <a:ln w="28575">
+            <a:solidFill>
+              <a:schemeClr val="accent6">
+                <a:lumMod val="50000"/>
+              </a:schemeClr>
+            </a:solidFill>
+          </a:ln>
+        </p:spPr>
+        <p:style>
+          <a:lnRef idx="1">
+            <a:schemeClr val="accent1"/>
+          </a:lnRef>
+          <a:fillRef idx="0">
+            <a:schemeClr val="accent1"/>
+          </a:fillRef>
+          <a:effectRef idx="0">
+            <a:schemeClr val="accent1"/>
+          </a:effectRef>
+          <a:fontRef idx="minor">
+            <a:schemeClr val="tx1"/>
+          </a:fontRef>
+        </p:style>
+      </p:cxnSp>
+      <p:cxnSp>
+        <p:nvCxnSpPr>
+          <p:cNvPr id="17" name="Straight Connector 16">
+            <a:extLst>
+              <a:ext uri="{FF2B5EF4-FFF2-40B4-BE49-F238E27FC236}">
+                <a16:creationId xmlns:a16="http://schemas.microsoft.com/office/drawing/2014/main" id="{5F59B852-0E8E-CEA3-36DC-7085452090E4}"/>
+              </a:ext>
+            </a:extLst>
+          </p:cNvPr>
+          <p:cNvCxnSpPr>
+            <a:cxnSpLocks/>
+          </p:cNvCxnSpPr>
+          <p:nvPr/>
+        </p:nvCxnSpPr>
+        <p:spPr>
+          <a:xfrm flipV="1">
+            <a:off x="6017695" y="2732314"/>
+            <a:ext cx="64406" cy="67793"/>
+          </a:xfrm>
+          <a:prstGeom prst="line">
+            <a:avLst/>
+          </a:prstGeom>
+          <a:ln w="28575">
+            <a:solidFill>
+              <a:schemeClr val="accent6">
+                <a:lumMod val="50000"/>
+              </a:schemeClr>
+            </a:solidFill>
+          </a:ln>
+        </p:spPr>
+        <p:style>
+          <a:lnRef idx="1">
+            <a:schemeClr val="accent1"/>
+          </a:lnRef>
+          <a:fillRef idx="0">
+            <a:schemeClr val="accent1"/>
+          </a:fillRef>
+          <a:effectRef idx="0">
+            <a:schemeClr val="accent1"/>
+          </a:effectRef>
+          <a:fontRef idx="minor">
+            <a:schemeClr val="tx1"/>
+          </a:fontRef>
+        </p:style>
+      </p:cxnSp>
+      <p:cxnSp>
+        <p:nvCxnSpPr>
+          <p:cNvPr id="18" name="Straight Connector 17">
+            <a:extLst>
+              <a:ext uri="{FF2B5EF4-FFF2-40B4-BE49-F238E27FC236}">
+                <a16:creationId xmlns:a16="http://schemas.microsoft.com/office/drawing/2014/main" id="{43E1D8DF-95B4-7124-AF52-1BB161673CB9}"/>
+              </a:ext>
+            </a:extLst>
+          </p:cNvPr>
+          <p:cNvCxnSpPr>
+            <a:cxnSpLocks/>
+          </p:cNvCxnSpPr>
+          <p:nvPr/>
+        </p:nvCxnSpPr>
+        <p:spPr>
+          <a:xfrm>
+            <a:off x="5965915" y="2732314"/>
+            <a:ext cx="59872" cy="67793"/>
+          </a:xfrm>
+          <a:prstGeom prst="line">
+            <a:avLst/>
+          </a:prstGeom>
+          <a:ln w="28575">
+            <a:solidFill>
+              <a:schemeClr val="accent6">
+                <a:lumMod val="50000"/>
+              </a:schemeClr>
+            </a:solidFill>
+          </a:ln>
+        </p:spPr>
+        <p:style>
+          <a:lnRef idx="1">
+            <a:schemeClr val="accent1"/>
+          </a:lnRef>
+          <a:fillRef idx="0">
+            <a:schemeClr val="accent1"/>
+          </a:fillRef>
+          <a:effectRef idx="0">
+            <a:schemeClr val="accent1"/>
+          </a:effectRef>
+          <a:fontRef idx="minor">
+            <a:schemeClr val="tx1"/>
+          </a:fontRef>
+        </p:style>
+      </p:cxnSp>
+      <p:cxnSp>
+        <p:nvCxnSpPr>
+          <p:cNvPr id="29" name="Straight Connector 28">
+            <a:extLst>
+              <a:ext uri="{FF2B5EF4-FFF2-40B4-BE49-F238E27FC236}">
+                <a16:creationId xmlns:a16="http://schemas.microsoft.com/office/drawing/2014/main" id="{D8644BCF-18B9-B6DF-3869-674238A11903}"/>
+              </a:ext>
+            </a:extLst>
+          </p:cNvPr>
+          <p:cNvCxnSpPr>
+            <a:cxnSpLocks/>
+          </p:cNvCxnSpPr>
+          <p:nvPr/>
+        </p:nvCxnSpPr>
+        <p:spPr>
+          <a:xfrm>
+            <a:off x="6442150" y="2695472"/>
+            <a:ext cx="59872" cy="67793"/>
+          </a:xfrm>
+          <a:prstGeom prst="line">
+            <a:avLst/>
+          </a:prstGeom>
+          <a:ln w="28575">
+            <a:solidFill>
+              <a:schemeClr val="accent6">
+                <a:lumMod val="50000"/>
+              </a:schemeClr>
+            </a:solidFill>
+          </a:ln>
+        </p:spPr>
+        <p:style>
+          <a:lnRef idx="1">
+            <a:schemeClr val="accent1"/>
+          </a:lnRef>
+          <a:fillRef idx="0">
+            <a:schemeClr val="accent1"/>
+          </a:fillRef>
+          <a:effectRef idx="0">
+            <a:schemeClr val="accent1"/>
+          </a:effectRef>
+          <a:fontRef idx="minor">
+            <a:schemeClr val="tx1"/>
+          </a:fontRef>
+        </p:style>
+      </p:cxnSp>
+      <p:cxnSp>
+        <p:nvCxnSpPr>
+          <p:cNvPr id="30" name="Straight Connector 29">
+            <a:extLst>
+              <a:ext uri="{FF2B5EF4-FFF2-40B4-BE49-F238E27FC236}">
+                <a16:creationId xmlns:a16="http://schemas.microsoft.com/office/drawing/2014/main" id="{3D467385-BA15-504E-EF79-C5F8987E83BA}"/>
+              </a:ext>
+            </a:extLst>
+          </p:cNvPr>
+          <p:cNvCxnSpPr>
+            <a:cxnSpLocks/>
+          </p:cNvCxnSpPr>
+          <p:nvPr/>
+        </p:nvCxnSpPr>
+        <p:spPr>
+          <a:xfrm flipV="1">
+            <a:off x="6505769" y="2694406"/>
+            <a:ext cx="64406" cy="67793"/>
+          </a:xfrm>
+          <a:prstGeom prst="line">
+            <a:avLst/>
+          </a:prstGeom>
+          <a:ln w="28575">
+            <a:solidFill>
+              <a:schemeClr val="accent6">
+                <a:lumMod val="50000"/>
+              </a:schemeClr>
+            </a:solidFill>
+          </a:ln>
+        </p:spPr>
+        <p:style>
+          <a:lnRef idx="1">
+            <a:schemeClr val="accent1"/>
+          </a:lnRef>
+          <a:fillRef idx="0">
+            <a:schemeClr val="accent1"/>
+          </a:fillRef>
+          <a:effectRef idx="0">
+            <a:schemeClr val="accent1"/>
+          </a:effectRef>
+          <a:fontRef idx="minor">
+            <a:schemeClr val="tx1"/>
+          </a:fontRef>
+        </p:style>
+      </p:cxnSp>
+    </p:spTree>
+    <p:extLst>
+      <p:ext uri="{BB962C8B-B14F-4D97-AF65-F5344CB8AC3E}">
+        <p14:creationId xmlns:p14="http://schemas.microsoft.com/office/powerpoint/2010/main" val="455052462"/>
       </p:ext>
     </p:extLst>
   </p:cSld>

--- a/Attachment/Schema/schema.pptx
+++ b/Attachment/Schema/schema.pptx
@@ -7,6 +7,7 @@
   <p:sldIdLst>
     <p:sldId id="257" r:id="rId2"/>
     <p:sldId id="259" r:id="rId3"/>
+    <p:sldId id="260" r:id="rId4"/>
   </p:sldIdLst>
   <p:sldSz cx="12192000" cy="6858000"/>
   <p:notesSz cx="6858000" cy="9144000"/>
@@ -262,7 +263,7 @@
           <a:p>
             <a:fld id="{619190FE-5B53-445B-A2B6-CFE3664BDC25}" type="datetimeFigureOut">
               <a:rPr lang="fr-FR" smtClean="0"/>
-              <a:t>19/11/2025</a:t>
+              <a:t>24/11/2025</a:t>
             </a:fld>
             <a:endParaRPr lang="fr-FR"/>
           </a:p>
@@ -462,7 +463,7 @@
           <a:p>
             <a:fld id="{619190FE-5B53-445B-A2B6-CFE3664BDC25}" type="datetimeFigureOut">
               <a:rPr lang="fr-FR" smtClean="0"/>
-              <a:t>19/11/2025</a:t>
+              <a:t>24/11/2025</a:t>
             </a:fld>
             <a:endParaRPr lang="fr-FR"/>
           </a:p>
@@ -672,7 +673,7 @@
           <a:p>
             <a:fld id="{619190FE-5B53-445B-A2B6-CFE3664BDC25}" type="datetimeFigureOut">
               <a:rPr lang="fr-FR" smtClean="0"/>
-              <a:t>19/11/2025</a:t>
+              <a:t>24/11/2025</a:t>
             </a:fld>
             <a:endParaRPr lang="fr-FR"/>
           </a:p>
@@ -872,7 +873,7 @@
           <a:p>
             <a:fld id="{619190FE-5B53-445B-A2B6-CFE3664BDC25}" type="datetimeFigureOut">
               <a:rPr lang="fr-FR" smtClean="0"/>
-              <a:t>19/11/2025</a:t>
+              <a:t>24/11/2025</a:t>
             </a:fld>
             <a:endParaRPr lang="fr-FR"/>
           </a:p>
@@ -1148,7 +1149,7 @@
           <a:p>
             <a:fld id="{619190FE-5B53-445B-A2B6-CFE3664BDC25}" type="datetimeFigureOut">
               <a:rPr lang="fr-FR" smtClean="0"/>
-              <a:t>19/11/2025</a:t>
+              <a:t>24/11/2025</a:t>
             </a:fld>
             <a:endParaRPr lang="fr-FR"/>
           </a:p>
@@ -1416,7 +1417,7 @@
           <a:p>
             <a:fld id="{619190FE-5B53-445B-A2B6-CFE3664BDC25}" type="datetimeFigureOut">
               <a:rPr lang="fr-FR" smtClean="0"/>
-              <a:t>19/11/2025</a:t>
+              <a:t>24/11/2025</a:t>
             </a:fld>
             <a:endParaRPr lang="fr-FR"/>
           </a:p>
@@ -1831,7 +1832,7 @@
           <a:p>
             <a:fld id="{619190FE-5B53-445B-A2B6-CFE3664BDC25}" type="datetimeFigureOut">
               <a:rPr lang="fr-FR" smtClean="0"/>
-              <a:t>19/11/2025</a:t>
+              <a:t>24/11/2025</a:t>
             </a:fld>
             <a:endParaRPr lang="fr-FR"/>
           </a:p>
@@ -1973,7 +1974,7 @@
           <a:p>
             <a:fld id="{619190FE-5B53-445B-A2B6-CFE3664BDC25}" type="datetimeFigureOut">
               <a:rPr lang="fr-FR" smtClean="0"/>
-              <a:t>19/11/2025</a:t>
+              <a:t>24/11/2025</a:t>
             </a:fld>
             <a:endParaRPr lang="fr-FR"/>
           </a:p>
@@ -2086,7 +2087,7 @@
           <a:p>
             <a:fld id="{619190FE-5B53-445B-A2B6-CFE3664BDC25}" type="datetimeFigureOut">
               <a:rPr lang="fr-FR" smtClean="0"/>
-              <a:t>19/11/2025</a:t>
+              <a:t>24/11/2025</a:t>
             </a:fld>
             <a:endParaRPr lang="fr-FR"/>
           </a:p>
@@ -2399,7 +2400,7 @@
           <a:p>
             <a:fld id="{619190FE-5B53-445B-A2B6-CFE3664BDC25}" type="datetimeFigureOut">
               <a:rPr lang="fr-FR" smtClean="0"/>
-              <a:t>19/11/2025</a:t>
+              <a:t>24/11/2025</a:t>
             </a:fld>
             <a:endParaRPr lang="fr-FR"/>
           </a:p>
@@ -2688,7 +2689,7 @@
           <a:p>
             <a:fld id="{619190FE-5B53-445B-A2B6-CFE3664BDC25}" type="datetimeFigureOut">
               <a:rPr lang="fr-FR" smtClean="0"/>
-              <a:t>19/11/2025</a:t>
+              <a:t>24/11/2025</a:t>
             </a:fld>
             <a:endParaRPr lang="fr-FR"/>
           </a:p>
@@ -2931,7 +2932,7 @@
           <a:p>
             <a:fld id="{619190FE-5B53-445B-A2B6-CFE3664BDC25}" type="datetimeFigureOut">
               <a:rPr lang="fr-FR" smtClean="0"/>
-              <a:t>19/11/2025</a:t>
+              <a:t>24/11/2025</a:t>
             </a:fld>
             <a:endParaRPr lang="fr-FR"/>
           </a:p>
@@ -8526,6 +8527,2425 @@
 </p:sld>
 </file>
 
+<file path=ppt/slides/slide3.xml><?xml version="1.0" encoding="utf-8"?>
+<p:sld xmlns:a="http://schemas.openxmlformats.org/drawingml/2006/main" xmlns:r="http://schemas.openxmlformats.org/officeDocument/2006/relationships" xmlns:p="http://schemas.openxmlformats.org/presentationml/2006/main">
+  <p:cSld>
+    <p:spTree>
+      <p:nvGrpSpPr>
+        <p:cNvPr id="1" name="">
+          <a:extLst>
+            <a:ext uri="{FF2B5EF4-FFF2-40B4-BE49-F238E27FC236}">
+              <a16:creationId xmlns:a16="http://schemas.microsoft.com/office/drawing/2014/main" id="{471E4DFC-300A-9D57-FC93-FD0227EB593C}"/>
+            </a:ext>
+          </a:extLst>
+        </p:cNvPr>
+        <p:cNvGrpSpPr/>
+        <p:nvPr/>
+      </p:nvGrpSpPr>
+      <p:grpSpPr>
+        <a:xfrm>
+          <a:off x="0" y="0"/>
+          <a:ext cx="0" cy="0"/>
+          <a:chOff x="0" y="0"/>
+          <a:chExt cx="0" cy="0"/>
+        </a:xfrm>
+      </p:grpSpPr>
+      <p:grpSp>
+        <p:nvGrpSpPr>
+          <p:cNvPr id="31" name="Group 30">
+            <a:extLst>
+              <a:ext uri="{FF2B5EF4-FFF2-40B4-BE49-F238E27FC236}">
+                <a16:creationId xmlns:a16="http://schemas.microsoft.com/office/drawing/2014/main" id="{0E7F0C09-C18C-01C4-4FA0-B8B1FF151DD8}"/>
+              </a:ext>
+            </a:extLst>
+          </p:cNvPr>
+          <p:cNvGrpSpPr/>
+          <p:nvPr/>
+        </p:nvGrpSpPr>
+        <p:grpSpPr>
+          <a:xfrm>
+            <a:off x="4107375" y="1544541"/>
+            <a:ext cx="708470" cy="2516919"/>
+            <a:chOff x="6438260" y="2687541"/>
+            <a:chExt cx="427857" cy="1501969"/>
+          </a:xfrm>
+        </p:grpSpPr>
+        <p:sp>
+          <p:nvSpPr>
+            <p:cNvPr id="5" name="Rectangle 4">
+              <a:extLst>
+                <a:ext uri="{FF2B5EF4-FFF2-40B4-BE49-F238E27FC236}">
+                  <a16:creationId xmlns:a16="http://schemas.microsoft.com/office/drawing/2014/main" id="{76EEF7D9-5D76-E167-2225-7C7938494B2E}"/>
+                </a:ext>
+              </a:extLst>
+            </p:cNvPr>
+            <p:cNvSpPr/>
+            <p:nvPr/>
+          </p:nvSpPr>
+          <p:spPr>
+            <a:xfrm>
+              <a:off x="6438260" y="2798859"/>
+              <a:ext cx="427382" cy="1296063"/>
+            </a:xfrm>
+            <a:prstGeom prst="rect">
+              <a:avLst/>
+            </a:prstGeom>
+            <a:solidFill>
+              <a:schemeClr val="bg2">
+                <a:lumMod val="75000"/>
+              </a:schemeClr>
+            </a:solidFill>
+            <a:ln w="28575">
+              <a:solidFill>
+                <a:schemeClr val="tx1"/>
+              </a:solidFill>
+            </a:ln>
+          </p:spPr>
+          <p:style>
+            <a:lnRef idx="2">
+              <a:schemeClr val="accent1">
+                <a:shade val="15000"/>
+              </a:schemeClr>
+            </a:lnRef>
+            <a:fillRef idx="1">
+              <a:schemeClr val="accent1"/>
+            </a:fillRef>
+            <a:effectRef idx="0">
+              <a:schemeClr val="accent1"/>
+            </a:effectRef>
+            <a:fontRef idx="minor">
+              <a:schemeClr val="lt1"/>
+            </a:fontRef>
+          </p:style>
+          <p:txBody>
+            <a:bodyPr rtlCol="0" anchor="ctr"/>
+            <a:lstStyle/>
+            <a:p>
+              <a:pPr algn="ctr"/>
+              <a:endParaRPr lang="fr-FR"/>
+            </a:p>
+          </p:txBody>
+        </p:sp>
+        <p:sp>
+          <p:nvSpPr>
+            <p:cNvPr id="4" name="Oval 3">
+              <a:extLst>
+                <a:ext uri="{FF2B5EF4-FFF2-40B4-BE49-F238E27FC236}">
+                  <a16:creationId xmlns:a16="http://schemas.microsoft.com/office/drawing/2014/main" id="{969F6E5F-2B42-3DAF-32D2-1ABD563B7624}"/>
+                </a:ext>
+              </a:extLst>
+            </p:cNvPr>
+            <p:cNvSpPr/>
+            <p:nvPr/>
+          </p:nvSpPr>
+          <p:spPr>
+            <a:xfrm>
+              <a:off x="6438260" y="2687541"/>
+              <a:ext cx="427382" cy="222637"/>
+            </a:xfrm>
+            <a:prstGeom prst="ellipse">
+              <a:avLst/>
+            </a:prstGeom>
+            <a:solidFill>
+              <a:schemeClr val="bg2">
+                <a:lumMod val="75000"/>
+              </a:schemeClr>
+            </a:solidFill>
+            <a:ln w="28575">
+              <a:solidFill>
+                <a:schemeClr val="tx1"/>
+              </a:solidFill>
+            </a:ln>
+          </p:spPr>
+          <p:style>
+            <a:lnRef idx="2">
+              <a:schemeClr val="accent1">
+                <a:shade val="15000"/>
+              </a:schemeClr>
+            </a:lnRef>
+            <a:fillRef idx="1">
+              <a:schemeClr val="accent1"/>
+            </a:fillRef>
+            <a:effectRef idx="0">
+              <a:schemeClr val="accent1"/>
+            </a:effectRef>
+            <a:fontRef idx="minor">
+              <a:schemeClr val="lt1"/>
+            </a:fontRef>
+          </p:style>
+          <p:txBody>
+            <a:bodyPr rtlCol="0" anchor="ctr"/>
+            <a:lstStyle/>
+            <a:p>
+              <a:pPr algn="ctr"/>
+              <a:r>
+                <a:rPr lang="fr-FR" sz="1100" b="1" dirty="0">
+                  <a:solidFill>
+                    <a:schemeClr val="tx1"/>
+                  </a:solidFill>
+                </a:rPr>
+                <a:t>N</a:t>
+              </a:r>
+            </a:p>
+          </p:txBody>
+        </p:sp>
+        <p:sp>
+          <p:nvSpPr>
+            <p:cNvPr id="6" name="Oval 5">
+              <a:extLst>
+                <a:ext uri="{FF2B5EF4-FFF2-40B4-BE49-F238E27FC236}">
+                  <a16:creationId xmlns:a16="http://schemas.microsoft.com/office/drawing/2014/main" id="{AA4DAFE7-E4BA-C010-D1C3-02B60C59C01C}"/>
+                </a:ext>
+              </a:extLst>
+            </p:cNvPr>
+            <p:cNvSpPr/>
+            <p:nvPr/>
+          </p:nvSpPr>
+          <p:spPr>
+            <a:xfrm>
+              <a:off x="6438735" y="3966873"/>
+              <a:ext cx="427382" cy="222637"/>
+            </a:xfrm>
+            <a:prstGeom prst="ellipse">
+              <a:avLst/>
+            </a:prstGeom>
+            <a:solidFill>
+              <a:schemeClr val="bg2">
+                <a:lumMod val="75000"/>
+              </a:schemeClr>
+            </a:solidFill>
+            <a:ln w="28575">
+              <a:solidFill>
+                <a:schemeClr val="tx1"/>
+              </a:solidFill>
+            </a:ln>
+          </p:spPr>
+          <p:style>
+            <a:lnRef idx="2">
+              <a:schemeClr val="accent1">
+                <a:shade val="15000"/>
+              </a:schemeClr>
+            </a:lnRef>
+            <a:fillRef idx="1">
+              <a:schemeClr val="accent1"/>
+            </a:fillRef>
+            <a:effectRef idx="0">
+              <a:schemeClr val="accent1"/>
+            </a:effectRef>
+            <a:fontRef idx="minor">
+              <a:schemeClr val="lt1"/>
+            </a:fontRef>
+          </p:style>
+          <p:txBody>
+            <a:bodyPr rtlCol="0" anchor="ctr"/>
+            <a:lstStyle/>
+            <a:p>
+              <a:pPr algn="ctr"/>
+              <a:r>
+                <a:rPr lang="fr-FR" sz="1100" b="1" dirty="0">
+                  <a:solidFill>
+                    <a:schemeClr val="tx1"/>
+                  </a:solidFill>
+                </a:rPr>
+                <a:t>S</a:t>
+              </a:r>
+            </a:p>
+          </p:txBody>
+        </p:sp>
+      </p:grpSp>
+      <p:sp>
+        <p:nvSpPr>
+          <p:cNvPr id="38" name="Oval 37">
+            <a:extLst>
+              <a:ext uri="{FF2B5EF4-FFF2-40B4-BE49-F238E27FC236}">
+                <a16:creationId xmlns:a16="http://schemas.microsoft.com/office/drawing/2014/main" id="{0E4E5932-685A-7199-3E41-9858BCB9F0A2}"/>
+              </a:ext>
+            </a:extLst>
+          </p:cNvPr>
+          <p:cNvSpPr/>
+          <p:nvPr/>
+        </p:nvSpPr>
+        <p:spPr>
+          <a:xfrm>
+            <a:off x="4295908" y="853954"/>
+            <a:ext cx="360000" cy="360000"/>
+          </a:xfrm>
+          <a:prstGeom prst="ellipse">
+            <a:avLst/>
+          </a:prstGeom>
+          <a:blipFill>
+            <a:blip r:embed="rId2">
+              <a:extLst>
+                <a:ext uri="{837473B0-CC2E-450A-ABE3-18F120FF3D39}">
+                  <a1611:picAttrSrcUrl xmlns:a1611="http://schemas.microsoft.com/office/drawing/2016/11/main" r:id="rId3"/>
+                </a:ext>
+              </a:extLst>
+            </a:blip>
+            <a:stretch>
+              <a:fillRect/>
+            </a:stretch>
+          </a:blipFill>
+          <a:ln>
+            <a:noFill/>
+          </a:ln>
+        </p:spPr>
+        <p:style>
+          <a:lnRef idx="2">
+            <a:schemeClr val="accent1">
+              <a:shade val="15000"/>
+            </a:schemeClr>
+          </a:lnRef>
+          <a:fillRef idx="1">
+            <a:schemeClr val="accent1"/>
+          </a:fillRef>
+          <a:effectRef idx="0">
+            <a:schemeClr val="accent1"/>
+          </a:effectRef>
+          <a:fontRef idx="minor">
+            <a:schemeClr val="lt1"/>
+          </a:fontRef>
+        </p:style>
+        <p:txBody>
+          <a:bodyPr rtlCol="0" anchor="ctr"/>
+          <a:lstStyle/>
+          <a:p>
+            <a:pPr algn="ctr"/>
+            <a:endParaRPr lang="fr-FR"/>
+          </a:p>
+        </p:txBody>
+      </p:sp>
+      <p:sp>
+        <p:nvSpPr>
+          <p:cNvPr id="47" name="Arc 46">
+            <a:extLst>
+              <a:ext uri="{FF2B5EF4-FFF2-40B4-BE49-F238E27FC236}">
+                <a16:creationId xmlns:a16="http://schemas.microsoft.com/office/drawing/2014/main" id="{143DDE78-34F1-6C3F-00B1-E11364BC86F7}"/>
+              </a:ext>
+            </a:extLst>
+          </p:cNvPr>
+          <p:cNvSpPr/>
+          <p:nvPr/>
+        </p:nvSpPr>
+        <p:spPr>
+          <a:xfrm>
+            <a:off x="4475908" y="752651"/>
+            <a:ext cx="353842" cy="554419"/>
+          </a:xfrm>
+          <a:prstGeom prst="arc">
+            <a:avLst>
+              <a:gd name="adj1" fmla="val 14031949"/>
+              <a:gd name="adj2" fmla="val 7971631"/>
+            </a:avLst>
+          </a:prstGeom>
+          <a:ln w="28575">
+            <a:solidFill>
+              <a:srgbClr val="0070C0"/>
+            </a:solidFill>
+          </a:ln>
+        </p:spPr>
+        <p:style>
+          <a:lnRef idx="1">
+            <a:schemeClr val="accent1"/>
+          </a:lnRef>
+          <a:fillRef idx="0">
+            <a:schemeClr val="accent1"/>
+          </a:fillRef>
+          <a:effectRef idx="0">
+            <a:schemeClr val="accent1"/>
+          </a:effectRef>
+          <a:fontRef idx="minor">
+            <a:schemeClr val="tx1"/>
+          </a:fontRef>
+        </p:style>
+        <p:txBody>
+          <a:bodyPr rtlCol="0" anchor="ctr"/>
+          <a:lstStyle/>
+          <a:p>
+            <a:pPr algn="ctr"/>
+            <a:endParaRPr lang="fr-FR"/>
+          </a:p>
+        </p:txBody>
+      </p:sp>
+      <p:sp>
+        <p:nvSpPr>
+          <p:cNvPr id="48" name="Arc 47">
+            <a:extLst>
+              <a:ext uri="{FF2B5EF4-FFF2-40B4-BE49-F238E27FC236}">
+                <a16:creationId xmlns:a16="http://schemas.microsoft.com/office/drawing/2014/main" id="{DA08D103-DBE9-63F2-CB67-ED8E16B5464E}"/>
+              </a:ext>
+            </a:extLst>
+          </p:cNvPr>
+          <p:cNvSpPr/>
+          <p:nvPr/>
+        </p:nvSpPr>
+        <p:spPr>
+          <a:xfrm flipH="1">
+            <a:off x="4096931" y="757615"/>
+            <a:ext cx="360000" cy="554419"/>
+          </a:xfrm>
+          <a:prstGeom prst="arc">
+            <a:avLst>
+              <a:gd name="adj1" fmla="val 14031949"/>
+              <a:gd name="adj2" fmla="val 7971631"/>
+            </a:avLst>
+          </a:prstGeom>
+          <a:ln w="28575">
+            <a:solidFill>
+              <a:schemeClr val="accent6">
+                <a:lumMod val="50000"/>
+              </a:schemeClr>
+            </a:solidFill>
+          </a:ln>
+        </p:spPr>
+        <p:style>
+          <a:lnRef idx="1">
+            <a:schemeClr val="accent1"/>
+          </a:lnRef>
+          <a:fillRef idx="0">
+            <a:schemeClr val="accent1"/>
+          </a:fillRef>
+          <a:effectRef idx="0">
+            <a:schemeClr val="accent1"/>
+          </a:effectRef>
+          <a:fontRef idx="minor">
+            <a:schemeClr val="tx1"/>
+          </a:fontRef>
+        </p:style>
+        <p:txBody>
+          <a:bodyPr rtlCol="0" anchor="ctr"/>
+          <a:lstStyle/>
+          <a:p>
+            <a:pPr algn="ctr"/>
+            <a:endParaRPr lang="fr-FR">
+              <a:solidFill>
+                <a:srgbClr val="00B050"/>
+              </a:solidFill>
+            </a:endParaRPr>
+          </a:p>
+        </p:txBody>
+      </p:sp>
+      <p:sp>
+        <p:nvSpPr>
+          <p:cNvPr id="49" name="Arc 48">
+            <a:extLst>
+              <a:ext uri="{FF2B5EF4-FFF2-40B4-BE49-F238E27FC236}">
+                <a16:creationId xmlns:a16="http://schemas.microsoft.com/office/drawing/2014/main" id="{4324369C-BA1C-773E-DE04-95A6B53C1DEC}"/>
+              </a:ext>
+            </a:extLst>
+          </p:cNvPr>
+          <p:cNvSpPr/>
+          <p:nvPr/>
+        </p:nvSpPr>
+        <p:spPr>
+          <a:xfrm>
+            <a:off x="4475908" y="640091"/>
+            <a:ext cx="494832" cy="786048"/>
+          </a:xfrm>
+          <a:prstGeom prst="arc">
+            <a:avLst>
+              <a:gd name="adj1" fmla="val 13126645"/>
+              <a:gd name="adj2" fmla="val 8641118"/>
+            </a:avLst>
+          </a:prstGeom>
+          <a:ln w="28575">
+            <a:solidFill>
+              <a:srgbClr val="0070C0"/>
+            </a:solidFill>
+          </a:ln>
+        </p:spPr>
+        <p:style>
+          <a:lnRef idx="1">
+            <a:schemeClr val="accent1"/>
+          </a:lnRef>
+          <a:fillRef idx="0">
+            <a:schemeClr val="accent1"/>
+          </a:fillRef>
+          <a:effectRef idx="0">
+            <a:schemeClr val="accent1"/>
+          </a:effectRef>
+          <a:fontRef idx="minor">
+            <a:schemeClr val="tx1"/>
+          </a:fontRef>
+        </p:style>
+        <p:txBody>
+          <a:bodyPr rtlCol="0" anchor="ctr"/>
+          <a:lstStyle/>
+          <a:p>
+            <a:pPr algn="ctr"/>
+            <a:endParaRPr lang="fr-FR"/>
+          </a:p>
+        </p:txBody>
+      </p:sp>
+      <p:sp>
+        <p:nvSpPr>
+          <p:cNvPr id="50" name="Arc 49">
+            <a:extLst>
+              <a:ext uri="{FF2B5EF4-FFF2-40B4-BE49-F238E27FC236}">
+                <a16:creationId xmlns:a16="http://schemas.microsoft.com/office/drawing/2014/main" id="{57A92347-888A-458C-4113-133FB43059B7}"/>
+              </a:ext>
+            </a:extLst>
+          </p:cNvPr>
+          <p:cNvSpPr/>
+          <p:nvPr/>
+        </p:nvSpPr>
+        <p:spPr>
+          <a:xfrm flipH="1">
+            <a:off x="3938692" y="640343"/>
+            <a:ext cx="498016" cy="786048"/>
+          </a:xfrm>
+          <a:prstGeom prst="arc">
+            <a:avLst>
+              <a:gd name="adj1" fmla="val 12957390"/>
+              <a:gd name="adj2" fmla="val 8641118"/>
+            </a:avLst>
+          </a:prstGeom>
+          <a:ln w="28575">
+            <a:solidFill>
+              <a:schemeClr val="accent6">
+                <a:lumMod val="50000"/>
+              </a:schemeClr>
+            </a:solidFill>
+          </a:ln>
+        </p:spPr>
+        <p:style>
+          <a:lnRef idx="1">
+            <a:schemeClr val="accent1"/>
+          </a:lnRef>
+          <a:fillRef idx="0">
+            <a:schemeClr val="accent1"/>
+          </a:fillRef>
+          <a:effectRef idx="0">
+            <a:schemeClr val="accent1"/>
+          </a:effectRef>
+          <a:fontRef idx="minor">
+            <a:schemeClr val="tx1"/>
+          </a:fontRef>
+        </p:style>
+        <p:txBody>
+          <a:bodyPr rtlCol="0" anchor="ctr"/>
+          <a:lstStyle/>
+          <a:p>
+            <a:pPr algn="ctr"/>
+            <a:endParaRPr lang="fr-FR">
+              <a:solidFill>
+                <a:srgbClr val="00B050"/>
+              </a:solidFill>
+            </a:endParaRPr>
+          </a:p>
+        </p:txBody>
+      </p:sp>
+      <p:sp>
+        <p:nvSpPr>
+          <p:cNvPr id="51" name="TextBox 50">
+            <a:extLst>
+              <a:ext uri="{FF2B5EF4-FFF2-40B4-BE49-F238E27FC236}">
+                <a16:creationId xmlns:a16="http://schemas.microsoft.com/office/drawing/2014/main" id="{8FD9DE4C-4067-3305-5269-F469A52702EE}"/>
+              </a:ext>
+            </a:extLst>
+          </p:cNvPr>
+          <p:cNvSpPr txBox="1"/>
+          <p:nvPr/>
+        </p:nvSpPr>
+        <p:spPr>
+          <a:xfrm>
+            <a:off x="4819062" y="824107"/>
+            <a:ext cx="396252" cy="400110"/>
+          </a:xfrm>
+          <a:prstGeom prst="rect">
+            <a:avLst/>
+          </a:prstGeom>
+          <a:noFill/>
+        </p:spPr>
+        <p:txBody>
+          <a:bodyPr wrap="square" rtlCol="0">
+            <a:spAutoFit/>
+          </a:bodyPr>
+          <a:lstStyle/>
+          <a:p>
+            <a:r>
+              <a:rPr lang="fr-FR" sz="2000" b="1" dirty="0">
+                <a:solidFill>
+                  <a:srgbClr val="0070C0"/>
+                </a:solidFill>
+              </a:rPr>
+              <a:t>v</a:t>
+            </a:r>
+          </a:p>
+        </p:txBody>
+      </p:sp>
+      <p:sp>
+        <p:nvSpPr>
+          <p:cNvPr id="52" name="TextBox 51">
+            <a:extLst>
+              <a:ext uri="{FF2B5EF4-FFF2-40B4-BE49-F238E27FC236}">
+                <a16:creationId xmlns:a16="http://schemas.microsoft.com/office/drawing/2014/main" id="{AB354FD5-AE8C-DEC4-F108-C42FF81A9553}"/>
+              </a:ext>
+            </a:extLst>
+          </p:cNvPr>
+          <p:cNvSpPr txBox="1"/>
+          <p:nvPr/>
+        </p:nvSpPr>
+        <p:spPr>
+          <a:xfrm>
+            <a:off x="4678343" y="813844"/>
+            <a:ext cx="396252" cy="400110"/>
+          </a:xfrm>
+          <a:prstGeom prst="rect">
+            <a:avLst/>
+          </a:prstGeom>
+          <a:noFill/>
+        </p:spPr>
+        <p:txBody>
+          <a:bodyPr wrap="square" rtlCol="0">
+            <a:spAutoFit/>
+          </a:bodyPr>
+          <a:lstStyle/>
+          <a:p>
+            <a:r>
+              <a:rPr lang="fr-FR" sz="2000" b="1" dirty="0">
+                <a:solidFill>
+                  <a:srgbClr val="0070C0"/>
+                </a:solidFill>
+              </a:rPr>
+              <a:t>v</a:t>
+            </a:r>
+          </a:p>
+        </p:txBody>
+      </p:sp>
+      <p:sp>
+        <p:nvSpPr>
+          <p:cNvPr id="53" name="TextBox 52">
+            <a:extLst>
+              <a:ext uri="{FF2B5EF4-FFF2-40B4-BE49-F238E27FC236}">
+                <a16:creationId xmlns:a16="http://schemas.microsoft.com/office/drawing/2014/main" id="{4103FAD6-F790-E335-6518-185E33FA2651}"/>
+              </a:ext>
+            </a:extLst>
+          </p:cNvPr>
+          <p:cNvSpPr txBox="1"/>
+          <p:nvPr/>
+        </p:nvSpPr>
+        <p:spPr>
+          <a:xfrm>
+            <a:off x="3942398" y="824107"/>
+            <a:ext cx="396252" cy="400110"/>
+          </a:xfrm>
+          <a:prstGeom prst="rect">
+            <a:avLst/>
+          </a:prstGeom>
+          <a:noFill/>
+          <a:ln>
+            <a:noFill/>
+          </a:ln>
+        </p:spPr>
+        <p:txBody>
+          <a:bodyPr wrap="square" rtlCol="0">
+            <a:spAutoFit/>
+          </a:bodyPr>
+          <a:lstStyle/>
+          <a:p>
+            <a:r>
+              <a:rPr lang="fr-FR" sz="2000" b="1" dirty="0">
+                <a:solidFill>
+                  <a:schemeClr val="accent6">
+                    <a:lumMod val="50000"/>
+                  </a:schemeClr>
+                </a:solidFill>
+              </a:rPr>
+              <a:t>v</a:t>
+            </a:r>
+          </a:p>
+        </p:txBody>
+      </p:sp>
+      <p:sp>
+        <p:nvSpPr>
+          <p:cNvPr id="54" name="TextBox 53">
+            <a:extLst>
+              <a:ext uri="{FF2B5EF4-FFF2-40B4-BE49-F238E27FC236}">
+                <a16:creationId xmlns:a16="http://schemas.microsoft.com/office/drawing/2014/main" id="{37A5E13C-7968-B374-3505-ACA4CF869B8F}"/>
+              </a:ext>
+            </a:extLst>
+          </p:cNvPr>
+          <p:cNvSpPr txBox="1"/>
+          <p:nvPr/>
+        </p:nvSpPr>
+        <p:spPr>
+          <a:xfrm>
+            <a:off x="3785773" y="824107"/>
+            <a:ext cx="396252" cy="400110"/>
+          </a:xfrm>
+          <a:prstGeom prst="rect">
+            <a:avLst/>
+          </a:prstGeom>
+          <a:noFill/>
+          <a:ln>
+            <a:noFill/>
+          </a:ln>
+        </p:spPr>
+        <p:txBody>
+          <a:bodyPr wrap="square" rtlCol="0">
+            <a:spAutoFit/>
+          </a:bodyPr>
+          <a:lstStyle/>
+          <a:p>
+            <a:r>
+              <a:rPr lang="fr-FR" sz="2000" b="1" dirty="0">
+                <a:solidFill>
+                  <a:schemeClr val="accent6">
+                    <a:lumMod val="50000"/>
+                  </a:schemeClr>
+                </a:solidFill>
+              </a:rPr>
+              <a:t>v</a:t>
+            </a:r>
+          </a:p>
+        </p:txBody>
+      </p:sp>
+      <p:sp>
+        <p:nvSpPr>
+          <p:cNvPr id="56" name="Arc 55">
+            <a:extLst>
+              <a:ext uri="{FF2B5EF4-FFF2-40B4-BE49-F238E27FC236}">
+                <a16:creationId xmlns:a16="http://schemas.microsoft.com/office/drawing/2014/main" id="{6822A8C7-2C80-1BDF-D265-78D15DCE602B}"/>
+              </a:ext>
+            </a:extLst>
+          </p:cNvPr>
+          <p:cNvSpPr/>
+          <p:nvPr/>
+        </p:nvSpPr>
+        <p:spPr>
+          <a:xfrm>
+            <a:off x="4490750" y="481585"/>
+            <a:ext cx="682154" cy="1090991"/>
+          </a:xfrm>
+          <a:prstGeom prst="arc">
+            <a:avLst>
+              <a:gd name="adj1" fmla="val 12548837"/>
+              <a:gd name="adj2" fmla="val 8641118"/>
+            </a:avLst>
+          </a:prstGeom>
+          <a:ln w="28575">
+            <a:solidFill>
+              <a:srgbClr val="0070C0"/>
+            </a:solidFill>
+          </a:ln>
+        </p:spPr>
+        <p:style>
+          <a:lnRef idx="1">
+            <a:schemeClr val="accent1"/>
+          </a:lnRef>
+          <a:fillRef idx="0">
+            <a:schemeClr val="accent1"/>
+          </a:fillRef>
+          <a:effectRef idx="0">
+            <a:schemeClr val="accent1"/>
+          </a:effectRef>
+          <a:fontRef idx="minor">
+            <a:schemeClr val="tx1"/>
+          </a:fontRef>
+        </p:style>
+        <p:txBody>
+          <a:bodyPr rtlCol="0" anchor="ctr"/>
+          <a:lstStyle/>
+          <a:p>
+            <a:pPr algn="ctr"/>
+            <a:endParaRPr lang="fr-FR"/>
+          </a:p>
+        </p:txBody>
+      </p:sp>
+      <p:sp>
+        <p:nvSpPr>
+          <p:cNvPr id="57" name="Arc 56">
+            <a:extLst>
+              <a:ext uri="{FF2B5EF4-FFF2-40B4-BE49-F238E27FC236}">
+                <a16:creationId xmlns:a16="http://schemas.microsoft.com/office/drawing/2014/main" id="{2312CA9C-BC25-E8DD-78FA-5A669386FE28}"/>
+              </a:ext>
+            </a:extLst>
+          </p:cNvPr>
+          <p:cNvSpPr/>
+          <p:nvPr/>
+        </p:nvSpPr>
+        <p:spPr>
+          <a:xfrm flipH="1">
+            <a:off x="3754327" y="511398"/>
+            <a:ext cx="682154" cy="1090991"/>
+          </a:xfrm>
+          <a:prstGeom prst="arc">
+            <a:avLst>
+              <a:gd name="adj1" fmla="val 12957390"/>
+              <a:gd name="adj2" fmla="val 9275915"/>
+            </a:avLst>
+          </a:prstGeom>
+          <a:ln w="28575">
+            <a:solidFill>
+              <a:schemeClr val="accent6">
+                <a:lumMod val="50000"/>
+              </a:schemeClr>
+            </a:solidFill>
+          </a:ln>
+        </p:spPr>
+        <p:style>
+          <a:lnRef idx="1">
+            <a:schemeClr val="accent1"/>
+          </a:lnRef>
+          <a:fillRef idx="0">
+            <a:schemeClr val="accent1"/>
+          </a:fillRef>
+          <a:effectRef idx="0">
+            <a:schemeClr val="accent1"/>
+          </a:effectRef>
+          <a:fontRef idx="minor">
+            <a:schemeClr val="tx1"/>
+          </a:fontRef>
+        </p:style>
+        <p:txBody>
+          <a:bodyPr rtlCol="0" anchor="ctr"/>
+          <a:lstStyle/>
+          <a:p>
+            <a:pPr algn="ctr"/>
+            <a:endParaRPr lang="fr-FR">
+              <a:solidFill>
+                <a:srgbClr val="00B050"/>
+              </a:solidFill>
+            </a:endParaRPr>
+          </a:p>
+        </p:txBody>
+      </p:sp>
+      <p:sp>
+        <p:nvSpPr>
+          <p:cNvPr id="58" name="TextBox 57">
+            <a:extLst>
+              <a:ext uri="{FF2B5EF4-FFF2-40B4-BE49-F238E27FC236}">
+                <a16:creationId xmlns:a16="http://schemas.microsoft.com/office/drawing/2014/main" id="{77B93A38-5C24-E5DB-FE10-F6314530C5BA}"/>
+              </a:ext>
+            </a:extLst>
+          </p:cNvPr>
+          <p:cNvSpPr txBox="1"/>
+          <p:nvPr/>
+        </p:nvSpPr>
+        <p:spPr>
+          <a:xfrm>
+            <a:off x="5023933" y="813844"/>
+            <a:ext cx="396252" cy="400110"/>
+          </a:xfrm>
+          <a:prstGeom prst="rect">
+            <a:avLst/>
+          </a:prstGeom>
+          <a:noFill/>
+        </p:spPr>
+        <p:txBody>
+          <a:bodyPr wrap="square" rtlCol="0">
+            <a:spAutoFit/>
+          </a:bodyPr>
+          <a:lstStyle/>
+          <a:p>
+            <a:r>
+              <a:rPr lang="fr-FR" sz="2000" b="1" dirty="0">
+                <a:solidFill>
+                  <a:srgbClr val="0070C0"/>
+                </a:solidFill>
+              </a:rPr>
+              <a:t>v</a:t>
+            </a:r>
+          </a:p>
+        </p:txBody>
+      </p:sp>
+      <p:sp>
+        <p:nvSpPr>
+          <p:cNvPr id="59" name="TextBox 58">
+            <a:extLst>
+              <a:ext uri="{FF2B5EF4-FFF2-40B4-BE49-F238E27FC236}">
+                <a16:creationId xmlns:a16="http://schemas.microsoft.com/office/drawing/2014/main" id="{941DF818-518C-CD6F-21F6-BC61E6A1C452}"/>
+              </a:ext>
+            </a:extLst>
+          </p:cNvPr>
+          <p:cNvSpPr txBox="1"/>
+          <p:nvPr/>
+        </p:nvSpPr>
+        <p:spPr>
+          <a:xfrm>
+            <a:off x="3597559" y="824107"/>
+            <a:ext cx="396252" cy="400110"/>
+          </a:xfrm>
+          <a:prstGeom prst="rect">
+            <a:avLst/>
+          </a:prstGeom>
+          <a:noFill/>
+          <a:ln>
+            <a:noFill/>
+          </a:ln>
+        </p:spPr>
+        <p:txBody>
+          <a:bodyPr wrap="square" rtlCol="0">
+            <a:spAutoFit/>
+          </a:bodyPr>
+          <a:lstStyle/>
+          <a:p>
+            <a:r>
+              <a:rPr lang="fr-FR" sz="2000" b="1" dirty="0">
+                <a:solidFill>
+                  <a:schemeClr val="accent6">
+                    <a:lumMod val="50000"/>
+                  </a:schemeClr>
+                </a:solidFill>
+              </a:rPr>
+              <a:t>v</a:t>
+            </a:r>
+          </a:p>
+        </p:txBody>
+      </p:sp>
+      <p:sp>
+        <p:nvSpPr>
+          <p:cNvPr id="62" name="Rectangle 61">
+            <a:extLst>
+              <a:ext uri="{FF2B5EF4-FFF2-40B4-BE49-F238E27FC236}">
+                <a16:creationId xmlns:a16="http://schemas.microsoft.com/office/drawing/2014/main" id="{6DDFEE0C-2F7B-ECB5-627B-32D9A67D792A}"/>
+              </a:ext>
+            </a:extLst>
+          </p:cNvPr>
+          <p:cNvSpPr/>
+          <p:nvPr/>
+        </p:nvSpPr>
+        <p:spPr>
+          <a:xfrm rot="335136">
+            <a:off x="3992886" y="1951774"/>
+            <a:ext cx="908255" cy="180000"/>
+          </a:xfrm>
+          <a:prstGeom prst="rect">
+            <a:avLst/>
+          </a:prstGeom>
+          <a:blipFill dpi="0" rotWithShape="1">
+            <a:blip r:embed="rId4">
+              <a:extLst>
+                <a:ext uri="{BEBA8EAE-BF5A-486C-A8C5-ECC9F3942E4B}">
+                  <a14:imgProps xmlns:a14="http://schemas.microsoft.com/office/drawing/2010/main">
+                    <a14:imgLayer r:embed="rId5">
+                      <a14:imgEffect>
+                        <a14:brightnessContrast bright="-20000" contrast="-20000"/>
+                      </a14:imgEffect>
+                    </a14:imgLayer>
+                  </a14:imgProps>
+                </a:ext>
+                <a:ext uri="{28A0092B-C50C-407E-A947-70E740481C1C}">
+                  <a14:useLocalDpi xmlns:a14="http://schemas.microsoft.com/office/drawing/2010/main" val="0"/>
+                </a:ext>
+                <a:ext uri="{837473B0-CC2E-450A-ABE3-18F120FF3D39}">
+                  <a1611:picAttrSrcUrl xmlns:a1611="http://schemas.microsoft.com/office/drawing/2016/11/main" r:id="rId6"/>
+                </a:ext>
+              </a:extLst>
+            </a:blip>
+            <a:srcRect/>
+            <a:stretch>
+              <a:fillRect/>
+            </a:stretch>
+          </a:blipFill>
+          <a:ln>
+            <a:noFill/>
+          </a:ln>
+        </p:spPr>
+        <p:style>
+          <a:lnRef idx="2">
+            <a:schemeClr val="accent1">
+              <a:shade val="15000"/>
+            </a:schemeClr>
+          </a:lnRef>
+          <a:fillRef idx="1">
+            <a:schemeClr val="accent1"/>
+          </a:fillRef>
+          <a:effectRef idx="0">
+            <a:schemeClr val="accent1"/>
+          </a:effectRef>
+          <a:fontRef idx="minor">
+            <a:schemeClr val="lt1"/>
+          </a:fontRef>
+        </p:style>
+        <p:txBody>
+          <a:bodyPr rtlCol="0" anchor="ctr"/>
+          <a:lstStyle/>
+          <a:p>
+            <a:pPr algn="ctr"/>
+            <a:endParaRPr lang="fr-FR"/>
+          </a:p>
+        </p:txBody>
+      </p:sp>
+      <p:sp>
+        <p:nvSpPr>
+          <p:cNvPr id="64" name="Rectangle 63">
+            <a:extLst>
+              <a:ext uri="{FF2B5EF4-FFF2-40B4-BE49-F238E27FC236}">
+                <a16:creationId xmlns:a16="http://schemas.microsoft.com/office/drawing/2014/main" id="{31E37E3B-1D3C-4668-3826-288BBB187424}"/>
+              </a:ext>
+            </a:extLst>
+          </p:cNvPr>
+          <p:cNvSpPr/>
+          <p:nvPr/>
+        </p:nvSpPr>
+        <p:spPr>
+          <a:xfrm rot="335136">
+            <a:off x="4000325" y="2203774"/>
+            <a:ext cx="908255" cy="180000"/>
+          </a:xfrm>
+          <a:prstGeom prst="rect">
+            <a:avLst/>
+          </a:prstGeom>
+          <a:blipFill dpi="0" rotWithShape="1">
+            <a:blip r:embed="rId4">
+              <a:extLst>
+                <a:ext uri="{BEBA8EAE-BF5A-486C-A8C5-ECC9F3942E4B}">
+                  <a14:imgProps xmlns:a14="http://schemas.microsoft.com/office/drawing/2010/main">
+                    <a14:imgLayer r:embed="rId5">
+                      <a14:imgEffect>
+                        <a14:brightnessContrast bright="-20000" contrast="-20000"/>
+                      </a14:imgEffect>
+                    </a14:imgLayer>
+                  </a14:imgProps>
+                </a:ext>
+                <a:ext uri="{28A0092B-C50C-407E-A947-70E740481C1C}">
+                  <a14:useLocalDpi xmlns:a14="http://schemas.microsoft.com/office/drawing/2010/main" val="0"/>
+                </a:ext>
+                <a:ext uri="{837473B0-CC2E-450A-ABE3-18F120FF3D39}">
+                  <a1611:picAttrSrcUrl xmlns:a1611="http://schemas.microsoft.com/office/drawing/2016/11/main" r:id="rId6"/>
+                </a:ext>
+              </a:extLst>
+            </a:blip>
+            <a:srcRect/>
+            <a:stretch>
+              <a:fillRect/>
+            </a:stretch>
+          </a:blipFill>
+          <a:ln>
+            <a:noFill/>
+          </a:ln>
+        </p:spPr>
+        <p:style>
+          <a:lnRef idx="2">
+            <a:schemeClr val="accent1">
+              <a:shade val="15000"/>
+            </a:schemeClr>
+          </a:lnRef>
+          <a:fillRef idx="1">
+            <a:schemeClr val="accent1"/>
+          </a:fillRef>
+          <a:effectRef idx="0">
+            <a:schemeClr val="accent1"/>
+          </a:effectRef>
+          <a:fontRef idx="minor">
+            <a:schemeClr val="lt1"/>
+          </a:fontRef>
+        </p:style>
+        <p:txBody>
+          <a:bodyPr rtlCol="0" anchor="ctr"/>
+          <a:lstStyle/>
+          <a:p>
+            <a:pPr algn="ctr"/>
+            <a:endParaRPr lang="fr-FR"/>
+          </a:p>
+        </p:txBody>
+      </p:sp>
+      <p:sp>
+        <p:nvSpPr>
+          <p:cNvPr id="65" name="Rectangle 64">
+            <a:extLst>
+              <a:ext uri="{FF2B5EF4-FFF2-40B4-BE49-F238E27FC236}">
+                <a16:creationId xmlns:a16="http://schemas.microsoft.com/office/drawing/2014/main" id="{20E5F0F6-0AD0-E81D-BF26-0A17A276DE95}"/>
+              </a:ext>
+            </a:extLst>
+          </p:cNvPr>
+          <p:cNvSpPr/>
+          <p:nvPr/>
+        </p:nvSpPr>
+        <p:spPr>
+          <a:xfrm rot="335136">
+            <a:off x="4007764" y="2455774"/>
+            <a:ext cx="908255" cy="180000"/>
+          </a:xfrm>
+          <a:prstGeom prst="rect">
+            <a:avLst/>
+          </a:prstGeom>
+          <a:blipFill dpi="0" rotWithShape="1">
+            <a:blip r:embed="rId4">
+              <a:extLst>
+                <a:ext uri="{BEBA8EAE-BF5A-486C-A8C5-ECC9F3942E4B}">
+                  <a14:imgProps xmlns:a14="http://schemas.microsoft.com/office/drawing/2010/main">
+                    <a14:imgLayer r:embed="rId5">
+                      <a14:imgEffect>
+                        <a14:brightnessContrast bright="-20000" contrast="-20000"/>
+                      </a14:imgEffect>
+                    </a14:imgLayer>
+                  </a14:imgProps>
+                </a:ext>
+                <a:ext uri="{28A0092B-C50C-407E-A947-70E740481C1C}">
+                  <a14:useLocalDpi xmlns:a14="http://schemas.microsoft.com/office/drawing/2010/main" val="0"/>
+                </a:ext>
+                <a:ext uri="{837473B0-CC2E-450A-ABE3-18F120FF3D39}">
+                  <a1611:picAttrSrcUrl xmlns:a1611="http://schemas.microsoft.com/office/drawing/2016/11/main" r:id="rId6"/>
+                </a:ext>
+              </a:extLst>
+            </a:blip>
+            <a:srcRect/>
+            <a:stretch>
+              <a:fillRect/>
+            </a:stretch>
+          </a:blipFill>
+          <a:ln>
+            <a:noFill/>
+          </a:ln>
+        </p:spPr>
+        <p:style>
+          <a:lnRef idx="2">
+            <a:schemeClr val="accent1">
+              <a:shade val="15000"/>
+            </a:schemeClr>
+          </a:lnRef>
+          <a:fillRef idx="1">
+            <a:schemeClr val="accent1"/>
+          </a:fillRef>
+          <a:effectRef idx="0">
+            <a:schemeClr val="accent1"/>
+          </a:effectRef>
+          <a:fontRef idx="minor">
+            <a:schemeClr val="lt1"/>
+          </a:fontRef>
+        </p:style>
+        <p:txBody>
+          <a:bodyPr rtlCol="0" anchor="ctr"/>
+          <a:lstStyle/>
+          <a:p>
+            <a:pPr algn="ctr"/>
+            <a:endParaRPr lang="fr-FR"/>
+          </a:p>
+        </p:txBody>
+      </p:sp>
+      <p:sp>
+        <p:nvSpPr>
+          <p:cNvPr id="66" name="Rectangle 65">
+            <a:extLst>
+              <a:ext uri="{FF2B5EF4-FFF2-40B4-BE49-F238E27FC236}">
+                <a16:creationId xmlns:a16="http://schemas.microsoft.com/office/drawing/2014/main" id="{BAB843F1-60D5-EE07-438E-2CDA0F7A41DB}"/>
+              </a:ext>
+            </a:extLst>
+          </p:cNvPr>
+          <p:cNvSpPr/>
+          <p:nvPr/>
+        </p:nvSpPr>
+        <p:spPr>
+          <a:xfrm rot="335136">
+            <a:off x="4015203" y="2707774"/>
+            <a:ext cx="908255" cy="180000"/>
+          </a:xfrm>
+          <a:prstGeom prst="rect">
+            <a:avLst/>
+          </a:prstGeom>
+          <a:blipFill dpi="0" rotWithShape="1">
+            <a:blip r:embed="rId4">
+              <a:extLst>
+                <a:ext uri="{BEBA8EAE-BF5A-486C-A8C5-ECC9F3942E4B}">
+                  <a14:imgProps xmlns:a14="http://schemas.microsoft.com/office/drawing/2010/main">
+                    <a14:imgLayer r:embed="rId5">
+                      <a14:imgEffect>
+                        <a14:brightnessContrast bright="-20000" contrast="-20000"/>
+                      </a14:imgEffect>
+                    </a14:imgLayer>
+                  </a14:imgProps>
+                </a:ext>
+                <a:ext uri="{28A0092B-C50C-407E-A947-70E740481C1C}">
+                  <a14:useLocalDpi xmlns:a14="http://schemas.microsoft.com/office/drawing/2010/main" val="0"/>
+                </a:ext>
+                <a:ext uri="{837473B0-CC2E-450A-ABE3-18F120FF3D39}">
+                  <a1611:picAttrSrcUrl xmlns:a1611="http://schemas.microsoft.com/office/drawing/2016/11/main" r:id="rId6"/>
+                </a:ext>
+              </a:extLst>
+            </a:blip>
+            <a:srcRect/>
+            <a:stretch>
+              <a:fillRect/>
+            </a:stretch>
+          </a:blipFill>
+          <a:ln>
+            <a:noFill/>
+          </a:ln>
+        </p:spPr>
+        <p:style>
+          <a:lnRef idx="2">
+            <a:schemeClr val="accent1">
+              <a:shade val="15000"/>
+            </a:schemeClr>
+          </a:lnRef>
+          <a:fillRef idx="1">
+            <a:schemeClr val="accent1"/>
+          </a:fillRef>
+          <a:effectRef idx="0">
+            <a:schemeClr val="accent1"/>
+          </a:effectRef>
+          <a:fontRef idx="minor">
+            <a:schemeClr val="lt1"/>
+          </a:fontRef>
+        </p:style>
+        <p:txBody>
+          <a:bodyPr rtlCol="0" anchor="ctr"/>
+          <a:lstStyle/>
+          <a:p>
+            <a:pPr algn="ctr"/>
+            <a:endParaRPr lang="fr-FR"/>
+          </a:p>
+        </p:txBody>
+      </p:sp>
+      <p:sp>
+        <p:nvSpPr>
+          <p:cNvPr id="67" name="Rectangle 66">
+            <a:extLst>
+              <a:ext uri="{FF2B5EF4-FFF2-40B4-BE49-F238E27FC236}">
+                <a16:creationId xmlns:a16="http://schemas.microsoft.com/office/drawing/2014/main" id="{9D52A5E8-0D74-40B6-E1D3-3C5D771FB124}"/>
+              </a:ext>
+            </a:extLst>
+          </p:cNvPr>
+          <p:cNvSpPr/>
+          <p:nvPr/>
+        </p:nvSpPr>
+        <p:spPr>
+          <a:xfrm rot="335136">
+            <a:off x="4022642" y="2959774"/>
+            <a:ext cx="908255" cy="180000"/>
+          </a:xfrm>
+          <a:prstGeom prst="rect">
+            <a:avLst/>
+          </a:prstGeom>
+          <a:blipFill dpi="0" rotWithShape="1">
+            <a:blip r:embed="rId4">
+              <a:extLst>
+                <a:ext uri="{BEBA8EAE-BF5A-486C-A8C5-ECC9F3942E4B}">
+                  <a14:imgProps xmlns:a14="http://schemas.microsoft.com/office/drawing/2010/main">
+                    <a14:imgLayer r:embed="rId5">
+                      <a14:imgEffect>
+                        <a14:brightnessContrast bright="-20000" contrast="-20000"/>
+                      </a14:imgEffect>
+                    </a14:imgLayer>
+                  </a14:imgProps>
+                </a:ext>
+                <a:ext uri="{28A0092B-C50C-407E-A947-70E740481C1C}">
+                  <a14:useLocalDpi xmlns:a14="http://schemas.microsoft.com/office/drawing/2010/main" val="0"/>
+                </a:ext>
+                <a:ext uri="{837473B0-CC2E-450A-ABE3-18F120FF3D39}">
+                  <a1611:picAttrSrcUrl xmlns:a1611="http://schemas.microsoft.com/office/drawing/2016/11/main" r:id="rId6"/>
+                </a:ext>
+              </a:extLst>
+            </a:blip>
+            <a:srcRect/>
+            <a:stretch>
+              <a:fillRect/>
+            </a:stretch>
+          </a:blipFill>
+          <a:ln>
+            <a:noFill/>
+          </a:ln>
+        </p:spPr>
+        <p:style>
+          <a:lnRef idx="2">
+            <a:schemeClr val="accent1">
+              <a:shade val="15000"/>
+            </a:schemeClr>
+          </a:lnRef>
+          <a:fillRef idx="1">
+            <a:schemeClr val="accent1"/>
+          </a:fillRef>
+          <a:effectRef idx="0">
+            <a:schemeClr val="accent1"/>
+          </a:effectRef>
+          <a:fontRef idx="minor">
+            <a:schemeClr val="lt1"/>
+          </a:fontRef>
+        </p:style>
+        <p:txBody>
+          <a:bodyPr rtlCol="0" anchor="ctr"/>
+          <a:lstStyle/>
+          <a:p>
+            <a:pPr algn="ctr"/>
+            <a:endParaRPr lang="fr-FR"/>
+          </a:p>
+        </p:txBody>
+      </p:sp>
+      <p:sp>
+        <p:nvSpPr>
+          <p:cNvPr id="68" name="Rectangle 67">
+            <a:extLst>
+              <a:ext uri="{FF2B5EF4-FFF2-40B4-BE49-F238E27FC236}">
+                <a16:creationId xmlns:a16="http://schemas.microsoft.com/office/drawing/2014/main" id="{11FBE8AE-3873-C82D-79FC-1D70668B6FD0}"/>
+              </a:ext>
+            </a:extLst>
+          </p:cNvPr>
+          <p:cNvSpPr/>
+          <p:nvPr/>
+        </p:nvSpPr>
+        <p:spPr>
+          <a:xfrm rot="335136">
+            <a:off x="4030081" y="3211774"/>
+            <a:ext cx="908255" cy="180000"/>
+          </a:xfrm>
+          <a:prstGeom prst="rect">
+            <a:avLst/>
+          </a:prstGeom>
+          <a:blipFill dpi="0" rotWithShape="1">
+            <a:blip r:embed="rId4">
+              <a:extLst>
+                <a:ext uri="{BEBA8EAE-BF5A-486C-A8C5-ECC9F3942E4B}">
+                  <a14:imgProps xmlns:a14="http://schemas.microsoft.com/office/drawing/2010/main">
+                    <a14:imgLayer r:embed="rId5">
+                      <a14:imgEffect>
+                        <a14:brightnessContrast bright="-20000" contrast="-20000"/>
+                      </a14:imgEffect>
+                    </a14:imgLayer>
+                  </a14:imgProps>
+                </a:ext>
+                <a:ext uri="{28A0092B-C50C-407E-A947-70E740481C1C}">
+                  <a14:useLocalDpi xmlns:a14="http://schemas.microsoft.com/office/drawing/2010/main" val="0"/>
+                </a:ext>
+                <a:ext uri="{837473B0-CC2E-450A-ABE3-18F120FF3D39}">
+                  <a1611:picAttrSrcUrl xmlns:a1611="http://schemas.microsoft.com/office/drawing/2016/11/main" r:id="rId6"/>
+                </a:ext>
+              </a:extLst>
+            </a:blip>
+            <a:srcRect/>
+            <a:stretch>
+              <a:fillRect/>
+            </a:stretch>
+          </a:blipFill>
+          <a:ln>
+            <a:noFill/>
+          </a:ln>
+        </p:spPr>
+        <p:style>
+          <a:lnRef idx="2">
+            <a:schemeClr val="accent1">
+              <a:shade val="15000"/>
+            </a:schemeClr>
+          </a:lnRef>
+          <a:fillRef idx="1">
+            <a:schemeClr val="accent1"/>
+          </a:fillRef>
+          <a:effectRef idx="0">
+            <a:schemeClr val="accent1"/>
+          </a:effectRef>
+          <a:fontRef idx="minor">
+            <a:schemeClr val="lt1"/>
+          </a:fontRef>
+        </p:style>
+        <p:txBody>
+          <a:bodyPr rtlCol="0" anchor="ctr"/>
+          <a:lstStyle/>
+          <a:p>
+            <a:pPr algn="ctr"/>
+            <a:endParaRPr lang="fr-FR"/>
+          </a:p>
+        </p:txBody>
+      </p:sp>
+      <p:sp>
+        <p:nvSpPr>
+          <p:cNvPr id="69" name="Rectangle 68">
+            <a:extLst>
+              <a:ext uri="{FF2B5EF4-FFF2-40B4-BE49-F238E27FC236}">
+                <a16:creationId xmlns:a16="http://schemas.microsoft.com/office/drawing/2014/main" id="{89FD249D-9FE5-1115-A4EB-B4CCF685B92C}"/>
+              </a:ext>
+            </a:extLst>
+          </p:cNvPr>
+          <p:cNvSpPr/>
+          <p:nvPr/>
+        </p:nvSpPr>
+        <p:spPr>
+          <a:xfrm rot="335136">
+            <a:off x="4037520" y="3463774"/>
+            <a:ext cx="908255" cy="180000"/>
+          </a:xfrm>
+          <a:prstGeom prst="rect">
+            <a:avLst/>
+          </a:prstGeom>
+          <a:blipFill dpi="0" rotWithShape="1">
+            <a:blip r:embed="rId4">
+              <a:extLst>
+                <a:ext uri="{BEBA8EAE-BF5A-486C-A8C5-ECC9F3942E4B}">
+                  <a14:imgProps xmlns:a14="http://schemas.microsoft.com/office/drawing/2010/main">
+                    <a14:imgLayer r:embed="rId5">
+                      <a14:imgEffect>
+                        <a14:brightnessContrast bright="-20000" contrast="-20000"/>
+                      </a14:imgEffect>
+                    </a14:imgLayer>
+                  </a14:imgProps>
+                </a:ext>
+                <a:ext uri="{28A0092B-C50C-407E-A947-70E740481C1C}">
+                  <a14:useLocalDpi xmlns:a14="http://schemas.microsoft.com/office/drawing/2010/main" val="0"/>
+                </a:ext>
+                <a:ext uri="{837473B0-CC2E-450A-ABE3-18F120FF3D39}">
+                  <a1611:picAttrSrcUrl xmlns:a1611="http://schemas.microsoft.com/office/drawing/2016/11/main" r:id="rId6"/>
+                </a:ext>
+              </a:extLst>
+            </a:blip>
+            <a:srcRect/>
+            <a:stretch>
+              <a:fillRect/>
+            </a:stretch>
+          </a:blipFill>
+          <a:ln>
+            <a:noFill/>
+          </a:ln>
+        </p:spPr>
+        <p:style>
+          <a:lnRef idx="2">
+            <a:schemeClr val="accent1">
+              <a:shade val="15000"/>
+            </a:schemeClr>
+          </a:lnRef>
+          <a:fillRef idx="1">
+            <a:schemeClr val="accent1"/>
+          </a:fillRef>
+          <a:effectRef idx="0">
+            <a:schemeClr val="accent1"/>
+          </a:effectRef>
+          <a:fontRef idx="minor">
+            <a:schemeClr val="lt1"/>
+          </a:fontRef>
+        </p:style>
+        <p:txBody>
+          <a:bodyPr rtlCol="0" anchor="ctr"/>
+          <a:lstStyle/>
+          <a:p>
+            <a:pPr algn="ctr"/>
+            <a:endParaRPr lang="fr-FR"/>
+          </a:p>
+        </p:txBody>
+      </p:sp>
+      <p:grpSp>
+        <p:nvGrpSpPr>
+          <p:cNvPr id="12" name="Group 11">
+            <a:extLst>
+              <a:ext uri="{FF2B5EF4-FFF2-40B4-BE49-F238E27FC236}">
+                <a16:creationId xmlns:a16="http://schemas.microsoft.com/office/drawing/2014/main" id="{AACBC521-C028-940B-A54A-C3E383B3D5DD}"/>
+              </a:ext>
+            </a:extLst>
+          </p:cNvPr>
+          <p:cNvGrpSpPr/>
+          <p:nvPr/>
+        </p:nvGrpSpPr>
+        <p:grpSpPr>
+          <a:xfrm>
+            <a:off x="3924000" y="1908000"/>
+            <a:ext cx="180000" cy="1692000"/>
+            <a:chOff x="3924000" y="1908000"/>
+            <a:chExt cx="180000" cy="1692000"/>
+          </a:xfrm>
+        </p:grpSpPr>
+        <p:sp>
+          <p:nvSpPr>
+            <p:cNvPr id="2" name="Oval 1">
+              <a:extLst>
+                <a:ext uri="{FF2B5EF4-FFF2-40B4-BE49-F238E27FC236}">
+                  <a16:creationId xmlns:a16="http://schemas.microsoft.com/office/drawing/2014/main" id="{00CAD9D8-216C-6FEE-CA14-71067900BC08}"/>
+                </a:ext>
+              </a:extLst>
+            </p:cNvPr>
+            <p:cNvSpPr/>
+            <p:nvPr/>
+          </p:nvSpPr>
+          <p:spPr>
+            <a:xfrm>
+              <a:off x="3924000" y="1908000"/>
+              <a:ext cx="180000" cy="180000"/>
+            </a:xfrm>
+            <a:prstGeom prst="ellipse">
+              <a:avLst/>
+            </a:prstGeom>
+            <a:blipFill>
+              <a:blip r:embed="rId7">
+                <a:extLst>
+                  <a:ext uri="{BEBA8EAE-BF5A-486C-A8C5-ECC9F3942E4B}">
+                    <a14:imgProps xmlns:a14="http://schemas.microsoft.com/office/drawing/2010/main">
+                      <a14:imgLayer r:embed="rId5">
+                        <a14:imgEffect>
+                          <a14:brightnessContrast bright="-20000"/>
+                        </a14:imgEffect>
+                      </a14:imgLayer>
+                    </a14:imgProps>
+                  </a:ext>
+                  <a:ext uri="{837473B0-CC2E-450A-ABE3-18F120FF3D39}">
+                    <a1611:picAttrSrcUrl xmlns:a1611="http://schemas.microsoft.com/office/drawing/2016/11/main" r:id="rId6"/>
+                  </a:ext>
+                </a:extLst>
+              </a:blip>
+              <a:stretch>
+                <a:fillRect/>
+              </a:stretch>
+            </a:blipFill>
+            <a:ln>
+              <a:noFill/>
+            </a:ln>
+          </p:spPr>
+          <p:style>
+            <a:lnRef idx="2">
+              <a:schemeClr val="accent1">
+                <a:shade val="15000"/>
+              </a:schemeClr>
+            </a:lnRef>
+            <a:fillRef idx="1">
+              <a:schemeClr val="accent1"/>
+            </a:fillRef>
+            <a:effectRef idx="0">
+              <a:schemeClr val="accent1"/>
+            </a:effectRef>
+            <a:fontRef idx="minor">
+              <a:schemeClr val="lt1"/>
+            </a:fontRef>
+          </p:style>
+          <p:txBody>
+            <a:bodyPr rtlCol="0" anchor="ctr"/>
+            <a:lstStyle/>
+            <a:p>
+              <a:pPr algn="ctr"/>
+              <a:endParaRPr lang="fr-FR"/>
+            </a:p>
+          </p:txBody>
+        </p:sp>
+        <p:sp>
+          <p:nvSpPr>
+            <p:cNvPr id="3" name="Oval 2">
+              <a:extLst>
+                <a:ext uri="{FF2B5EF4-FFF2-40B4-BE49-F238E27FC236}">
+                  <a16:creationId xmlns:a16="http://schemas.microsoft.com/office/drawing/2014/main" id="{578D21E3-6282-C26E-5F3E-52B0944692DC}"/>
+                </a:ext>
+              </a:extLst>
+            </p:cNvPr>
+            <p:cNvSpPr/>
+            <p:nvPr/>
+          </p:nvSpPr>
+          <p:spPr>
+            <a:xfrm>
+              <a:off x="3924000" y="2160000"/>
+              <a:ext cx="180000" cy="180000"/>
+            </a:xfrm>
+            <a:prstGeom prst="ellipse">
+              <a:avLst/>
+            </a:prstGeom>
+            <a:blipFill>
+              <a:blip r:embed="rId7">
+                <a:extLst>
+                  <a:ext uri="{BEBA8EAE-BF5A-486C-A8C5-ECC9F3942E4B}">
+                    <a14:imgProps xmlns:a14="http://schemas.microsoft.com/office/drawing/2010/main">
+                      <a14:imgLayer r:embed="rId5">
+                        <a14:imgEffect>
+                          <a14:brightnessContrast bright="-20000"/>
+                        </a14:imgEffect>
+                      </a14:imgLayer>
+                    </a14:imgProps>
+                  </a:ext>
+                  <a:ext uri="{837473B0-CC2E-450A-ABE3-18F120FF3D39}">
+                    <a1611:picAttrSrcUrl xmlns:a1611="http://schemas.microsoft.com/office/drawing/2016/11/main" r:id="rId6"/>
+                  </a:ext>
+                </a:extLst>
+              </a:blip>
+              <a:stretch>
+                <a:fillRect/>
+              </a:stretch>
+            </a:blipFill>
+            <a:ln>
+              <a:noFill/>
+            </a:ln>
+          </p:spPr>
+          <p:style>
+            <a:lnRef idx="2">
+              <a:schemeClr val="accent1">
+                <a:shade val="15000"/>
+              </a:schemeClr>
+            </a:lnRef>
+            <a:fillRef idx="1">
+              <a:schemeClr val="accent1"/>
+            </a:fillRef>
+            <a:effectRef idx="0">
+              <a:schemeClr val="accent1"/>
+            </a:effectRef>
+            <a:fontRef idx="minor">
+              <a:schemeClr val="lt1"/>
+            </a:fontRef>
+          </p:style>
+          <p:txBody>
+            <a:bodyPr rtlCol="0" anchor="ctr"/>
+            <a:lstStyle/>
+            <a:p>
+              <a:pPr algn="ctr"/>
+              <a:endParaRPr lang="fr-FR"/>
+            </a:p>
+          </p:txBody>
+        </p:sp>
+        <p:sp>
+          <p:nvSpPr>
+            <p:cNvPr id="7" name="Oval 6">
+              <a:extLst>
+                <a:ext uri="{FF2B5EF4-FFF2-40B4-BE49-F238E27FC236}">
+                  <a16:creationId xmlns:a16="http://schemas.microsoft.com/office/drawing/2014/main" id="{8414C731-6CCD-D1B0-8710-C0B659D468D3}"/>
+                </a:ext>
+              </a:extLst>
+            </p:cNvPr>
+            <p:cNvSpPr/>
+            <p:nvPr/>
+          </p:nvSpPr>
+          <p:spPr>
+            <a:xfrm>
+              <a:off x="3924000" y="2412000"/>
+              <a:ext cx="180000" cy="180000"/>
+            </a:xfrm>
+            <a:prstGeom prst="ellipse">
+              <a:avLst/>
+            </a:prstGeom>
+            <a:blipFill>
+              <a:blip r:embed="rId7">
+                <a:extLst>
+                  <a:ext uri="{BEBA8EAE-BF5A-486C-A8C5-ECC9F3942E4B}">
+                    <a14:imgProps xmlns:a14="http://schemas.microsoft.com/office/drawing/2010/main">
+                      <a14:imgLayer r:embed="rId5">
+                        <a14:imgEffect>
+                          <a14:brightnessContrast bright="-20000"/>
+                        </a14:imgEffect>
+                      </a14:imgLayer>
+                    </a14:imgProps>
+                  </a:ext>
+                  <a:ext uri="{837473B0-CC2E-450A-ABE3-18F120FF3D39}">
+                    <a1611:picAttrSrcUrl xmlns:a1611="http://schemas.microsoft.com/office/drawing/2016/11/main" r:id="rId6"/>
+                  </a:ext>
+                </a:extLst>
+              </a:blip>
+              <a:stretch>
+                <a:fillRect/>
+              </a:stretch>
+            </a:blipFill>
+            <a:ln>
+              <a:noFill/>
+            </a:ln>
+          </p:spPr>
+          <p:style>
+            <a:lnRef idx="2">
+              <a:schemeClr val="accent1">
+                <a:shade val="15000"/>
+              </a:schemeClr>
+            </a:lnRef>
+            <a:fillRef idx="1">
+              <a:schemeClr val="accent1"/>
+            </a:fillRef>
+            <a:effectRef idx="0">
+              <a:schemeClr val="accent1"/>
+            </a:effectRef>
+            <a:fontRef idx="minor">
+              <a:schemeClr val="lt1"/>
+            </a:fontRef>
+          </p:style>
+          <p:txBody>
+            <a:bodyPr rtlCol="0" anchor="ctr"/>
+            <a:lstStyle/>
+            <a:p>
+              <a:pPr algn="ctr"/>
+              <a:endParaRPr lang="fr-FR"/>
+            </a:p>
+          </p:txBody>
+        </p:sp>
+        <p:sp>
+          <p:nvSpPr>
+            <p:cNvPr id="8" name="Oval 7">
+              <a:extLst>
+                <a:ext uri="{FF2B5EF4-FFF2-40B4-BE49-F238E27FC236}">
+                  <a16:creationId xmlns:a16="http://schemas.microsoft.com/office/drawing/2014/main" id="{88D1D0F3-30BE-FBED-93E4-0180FBCBE219}"/>
+                </a:ext>
+              </a:extLst>
+            </p:cNvPr>
+            <p:cNvSpPr/>
+            <p:nvPr/>
+          </p:nvSpPr>
+          <p:spPr>
+            <a:xfrm>
+              <a:off x="3924000" y="2664000"/>
+              <a:ext cx="180000" cy="180000"/>
+            </a:xfrm>
+            <a:prstGeom prst="ellipse">
+              <a:avLst/>
+            </a:prstGeom>
+            <a:blipFill>
+              <a:blip r:embed="rId7">
+                <a:extLst>
+                  <a:ext uri="{BEBA8EAE-BF5A-486C-A8C5-ECC9F3942E4B}">
+                    <a14:imgProps xmlns:a14="http://schemas.microsoft.com/office/drawing/2010/main">
+                      <a14:imgLayer r:embed="rId5">
+                        <a14:imgEffect>
+                          <a14:brightnessContrast bright="-20000"/>
+                        </a14:imgEffect>
+                      </a14:imgLayer>
+                    </a14:imgProps>
+                  </a:ext>
+                  <a:ext uri="{837473B0-CC2E-450A-ABE3-18F120FF3D39}">
+                    <a1611:picAttrSrcUrl xmlns:a1611="http://schemas.microsoft.com/office/drawing/2016/11/main" r:id="rId6"/>
+                  </a:ext>
+                </a:extLst>
+              </a:blip>
+              <a:stretch>
+                <a:fillRect/>
+              </a:stretch>
+            </a:blipFill>
+            <a:ln>
+              <a:noFill/>
+            </a:ln>
+          </p:spPr>
+          <p:style>
+            <a:lnRef idx="2">
+              <a:schemeClr val="accent1">
+                <a:shade val="15000"/>
+              </a:schemeClr>
+            </a:lnRef>
+            <a:fillRef idx="1">
+              <a:schemeClr val="accent1"/>
+            </a:fillRef>
+            <a:effectRef idx="0">
+              <a:schemeClr val="accent1"/>
+            </a:effectRef>
+            <a:fontRef idx="minor">
+              <a:schemeClr val="lt1"/>
+            </a:fontRef>
+          </p:style>
+          <p:txBody>
+            <a:bodyPr rtlCol="0" anchor="ctr"/>
+            <a:lstStyle/>
+            <a:p>
+              <a:pPr algn="ctr"/>
+              <a:endParaRPr lang="fr-FR"/>
+            </a:p>
+          </p:txBody>
+        </p:sp>
+        <p:sp>
+          <p:nvSpPr>
+            <p:cNvPr id="9" name="Oval 8">
+              <a:extLst>
+                <a:ext uri="{FF2B5EF4-FFF2-40B4-BE49-F238E27FC236}">
+                  <a16:creationId xmlns:a16="http://schemas.microsoft.com/office/drawing/2014/main" id="{49C516C2-F41E-AF38-26E3-F5E6F9F0BF64}"/>
+                </a:ext>
+              </a:extLst>
+            </p:cNvPr>
+            <p:cNvSpPr/>
+            <p:nvPr/>
+          </p:nvSpPr>
+          <p:spPr>
+            <a:xfrm>
+              <a:off x="3924000" y="2916000"/>
+              <a:ext cx="180000" cy="180000"/>
+            </a:xfrm>
+            <a:prstGeom prst="ellipse">
+              <a:avLst/>
+            </a:prstGeom>
+            <a:blipFill>
+              <a:blip r:embed="rId7">
+                <a:extLst>
+                  <a:ext uri="{BEBA8EAE-BF5A-486C-A8C5-ECC9F3942E4B}">
+                    <a14:imgProps xmlns:a14="http://schemas.microsoft.com/office/drawing/2010/main">
+                      <a14:imgLayer r:embed="rId5">
+                        <a14:imgEffect>
+                          <a14:brightnessContrast bright="-20000"/>
+                        </a14:imgEffect>
+                      </a14:imgLayer>
+                    </a14:imgProps>
+                  </a:ext>
+                  <a:ext uri="{837473B0-CC2E-450A-ABE3-18F120FF3D39}">
+                    <a1611:picAttrSrcUrl xmlns:a1611="http://schemas.microsoft.com/office/drawing/2016/11/main" r:id="rId6"/>
+                  </a:ext>
+                </a:extLst>
+              </a:blip>
+              <a:stretch>
+                <a:fillRect/>
+              </a:stretch>
+            </a:blipFill>
+            <a:ln>
+              <a:noFill/>
+            </a:ln>
+          </p:spPr>
+          <p:style>
+            <a:lnRef idx="2">
+              <a:schemeClr val="accent1">
+                <a:shade val="15000"/>
+              </a:schemeClr>
+            </a:lnRef>
+            <a:fillRef idx="1">
+              <a:schemeClr val="accent1"/>
+            </a:fillRef>
+            <a:effectRef idx="0">
+              <a:schemeClr val="accent1"/>
+            </a:effectRef>
+            <a:fontRef idx="minor">
+              <a:schemeClr val="lt1"/>
+            </a:fontRef>
+          </p:style>
+          <p:txBody>
+            <a:bodyPr rtlCol="0" anchor="ctr"/>
+            <a:lstStyle/>
+            <a:p>
+              <a:pPr algn="ctr"/>
+              <a:endParaRPr lang="fr-FR"/>
+            </a:p>
+          </p:txBody>
+        </p:sp>
+        <p:sp>
+          <p:nvSpPr>
+            <p:cNvPr id="10" name="Oval 9">
+              <a:extLst>
+                <a:ext uri="{FF2B5EF4-FFF2-40B4-BE49-F238E27FC236}">
+                  <a16:creationId xmlns:a16="http://schemas.microsoft.com/office/drawing/2014/main" id="{1D6DF4B0-BB45-2624-026A-E403C5D7B669}"/>
+                </a:ext>
+              </a:extLst>
+            </p:cNvPr>
+            <p:cNvSpPr/>
+            <p:nvPr/>
+          </p:nvSpPr>
+          <p:spPr>
+            <a:xfrm>
+              <a:off x="3924000" y="3168000"/>
+              <a:ext cx="180000" cy="180000"/>
+            </a:xfrm>
+            <a:prstGeom prst="ellipse">
+              <a:avLst/>
+            </a:prstGeom>
+            <a:blipFill>
+              <a:blip r:embed="rId7">
+                <a:extLst>
+                  <a:ext uri="{BEBA8EAE-BF5A-486C-A8C5-ECC9F3942E4B}">
+                    <a14:imgProps xmlns:a14="http://schemas.microsoft.com/office/drawing/2010/main">
+                      <a14:imgLayer r:embed="rId5">
+                        <a14:imgEffect>
+                          <a14:brightnessContrast bright="-20000"/>
+                        </a14:imgEffect>
+                      </a14:imgLayer>
+                    </a14:imgProps>
+                  </a:ext>
+                  <a:ext uri="{837473B0-CC2E-450A-ABE3-18F120FF3D39}">
+                    <a1611:picAttrSrcUrl xmlns:a1611="http://schemas.microsoft.com/office/drawing/2016/11/main" r:id="rId6"/>
+                  </a:ext>
+                </a:extLst>
+              </a:blip>
+              <a:stretch>
+                <a:fillRect/>
+              </a:stretch>
+            </a:blipFill>
+            <a:ln>
+              <a:noFill/>
+            </a:ln>
+          </p:spPr>
+          <p:style>
+            <a:lnRef idx="2">
+              <a:schemeClr val="accent1">
+                <a:shade val="15000"/>
+              </a:schemeClr>
+            </a:lnRef>
+            <a:fillRef idx="1">
+              <a:schemeClr val="accent1"/>
+            </a:fillRef>
+            <a:effectRef idx="0">
+              <a:schemeClr val="accent1"/>
+            </a:effectRef>
+            <a:fontRef idx="minor">
+              <a:schemeClr val="lt1"/>
+            </a:fontRef>
+          </p:style>
+          <p:txBody>
+            <a:bodyPr rtlCol="0" anchor="ctr"/>
+            <a:lstStyle/>
+            <a:p>
+              <a:pPr algn="ctr"/>
+              <a:endParaRPr lang="fr-FR"/>
+            </a:p>
+          </p:txBody>
+        </p:sp>
+        <p:sp>
+          <p:nvSpPr>
+            <p:cNvPr id="11" name="Oval 10">
+              <a:extLst>
+                <a:ext uri="{FF2B5EF4-FFF2-40B4-BE49-F238E27FC236}">
+                  <a16:creationId xmlns:a16="http://schemas.microsoft.com/office/drawing/2014/main" id="{A1751D60-7E0D-E788-3873-2E364D65362B}"/>
+                </a:ext>
+              </a:extLst>
+            </p:cNvPr>
+            <p:cNvSpPr/>
+            <p:nvPr/>
+          </p:nvSpPr>
+          <p:spPr>
+            <a:xfrm>
+              <a:off x="3924000" y="3420000"/>
+              <a:ext cx="180000" cy="180000"/>
+            </a:xfrm>
+            <a:prstGeom prst="ellipse">
+              <a:avLst/>
+            </a:prstGeom>
+            <a:blipFill>
+              <a:blip r:embed="rId7">
+                <a:extLst>
+                  <a:ext uri="{BEBA8EAE-BF5A-486C-A8C5-ECC9F3942E4B}">
+                    <a14:imgProps xmlns:a14="http://schemas.microsoft.com/office/drawing/2010/main">
+                      <a14:imgLayer r:embed="rId5">
+                        <a14:imgEffect>
+                          <a14:brightnessContrast bright="-20000"/>
+                        </a14:imgEffect>
+                      </a14:imgLayer>
+                    </a14:imgProps>
+                  </a:ext>
+                  <a:ext uri="{837473B0-CC2E-450A-ABE3-18F120FF3D39}">
+                    <a1611:picAttrSrcUrl xmlns:a1611="http://schemas.microsoft.com/office/drawing/2016/11/main" r:id="rId6"/>
+                  </a:ext>
+                </a:extLst>
+              </a:blip>
+              <a:stretch>
+                <a:fillRect/>
+              </a:stretch>
+            </a:blipFill>
+            <a:ln>
+              <a:noFill/>
+            </a:ln>
+          </p:spPr>
+          <p:style>
+            <a:lnRef idx="2">
+              <a:schemeClr val="accent1">
+                <a:shade val="15000"/>
+              </a:schemeClr>
+            </a:lnRef>
+            <a:fillRef idx="1">
+              <a:schemeClr val="accent1"/>
+            </a:fillRef>
+            <a:effectRef idx="0">
+              <a:schemeClr val="accent1"/>
+            </a:effectRef>
+            <a:fontRef idx="minor">
+              <a:schemeClr val="lt1"/>
+            </a:fontRef>
+          </p:style>
+          <p:txBody>
+            <a:bodyPr rtlCol="0" anchor="ctr"/>
+            <a:lstStyle/>
+            <a:p>
+              <a:pPr algn="ctr"/>
+              <a:endParaRPr lang="fr-FR"/>
+            </a:p>
+          </p:txBody>
+        </p:sp>
+      </p:grpSp>
+      <p:grpSp>
+        <p:nvGrpSpPr>
+          <p:cNvPr id="13" name="Group 12">
+            <a:extLst>
+              <a:ext uri="{FF2B5EF4-FFF2-40B4-BE49-F238E27FC236}">
+                <a16:creationId xmlns:a16="http://schemas.microsoft.com/office/drawing/2014/main" id="{DC17E69D-4052-CCB4-3451-D16C9563ED44}"/>
+              </a:ext>
+            </a:extLst>
+          </p:cNvPr>
+          <p:cNvGrpSpPr/>
+          <p:nvPr/>
+        </p:nvGrpSpPr>
+        <p:grpSpPr>
+          <a:xfrm>
+            <a:off x="4822496" y="1996377"/>
+            <a:ext cx="180000" cy="1692000"/>
+            <a:chOff x="3924000" y="1908000"/>
+            <a:chExt cx="180000" cy="1692000"/>
+          </a:xfrm>
+        </p:grpSpPr>
+        <p:sp>
+          <p:nvSpPr>
+            <p:cNvPr id="14" name="Oval 13">
+              <a:extLst>
+                <a:ext uri="{FF2B5EF4-FFF2-40B4-BE49-F238E27FC236}">
+                  <a16:creationId xmlns:a16="http://schemas.microsoft.com/office/drawing/2014/main" id="{E8DCD056-FFCA-08F9-6029-468A37D36F7D}"/>
+                </a:ext>
+              </a:extLst>
+            </p:cNvPr>
+            <p:cNvSpPr/>
+            <p:nvPr/>
+          </p:nvSpPr>
+          <p:spPr>
+            <a:xfrm>
+              <a:off x="3924000" y="1908000"/>
+              <a:ext cx="180000" cy="180000"/>
+            </a:xfrm>
+            <a:prstGeom prst="ellipse">
+              <a:avLst/>
+            </a:prstGeom>
+            <a:blipFill>
+              <a:blip r:embed="rId7">
+                <a:extLst>
+                  <a:ext uri="{BEBA8EAE-BF5A-486C-A8C5-ECC9F3942E4B}">
+                    <a14:imgProps xmlns:a14="http://schemas.microsoft.com/office/drawing/2010/main">
+                      <a14:imgLayer r:embed="rId5">
+                        <a14:imgEffect>
+                          <a14:brightnessContrast bright="-20000"/>
+                        </a14:imgEffect>
+                      </a14:imgLayer>
+                    </a14:imgProps>
+                  </a:ext>
+                  <a:ext uri="{837473B0-CC2E-450A-ABE3-18F120FF3D39}">
+                    <a1611:picAttrSrcUrl xmlns:a1611="http://schemas.microsoft.com/office/drawing/2016/11/main" r:id="rId6"/>
+                  </a:ext>
+                </a:extLst>
+              </a:blip>
+              <a:stretch>
+                <a:fillRect/>
+              </a:stretch>
+            </a:blipFill>
+            <a:ln>
+              <a:noFill/>
+            </a:ln>
+          </p:spPr>
+          <p:style>
+            <a:lnRef idx="2">
+              <a:schemeClr val="accent1">
+                <a:shade val="15000"/>
+              </a:schemeClr>
+            </a:lnRef>
+            <a:fillRef idx="1">
+              <a:schemeClr val="accent1"/>
+            </a:fillRef>
+            <a:effectRef idx="0">
+              <a:schemeClr val="accent1"/>
+            </a:effectRef>
+            <a:fontRef idx="minor">
+              <a:schemeClr val="lt1"/>
+            </a:fontRef>
+          </p:style>
+          <p:txBody>
+            <a:bodyPr rtlCol="0" anchor="ctr"/>
+            <a:lstStyle/>
+            <a:p>
+              <a:pPr algn="ctr"/>
+              <a:endParaRPr lang="fr-FR"/>
+            </a:p>
+          </p:txBody>
+        </p:sp>
+        <p:sp>
+          <p:nvSpPr>
+            <p:cNvPr id="32" name="Oval 31">
+              <a:extLst>
+                <a:ext uri="{FF2B5EF4-FFF2-40B4-BE49-F238E27FC236}">
+                  <a16:creationId xmlns:a16="http://schemas.microsoft.com/office/drawing/2014/main" id="{03E36A5A-3D53-4900-B50B-4231D0901FC3}"/>
+                </a:ext>
+              </a:extLst>
+            </p:cNvPr>
+            <p:cNvSpPr/>
+            <p:nvPr/>
+          </p:nvSpPr>
+          <p:spPr>
+            <a:xfrm>
+              <a:off x="3924000" y="2160000"/>
+              <a:ext cx="180000" cy="180000"/>
+            </a:xfrm>
+            <a:prstGeom prst="ellipse">
+              <a:avLst/>
+            </a:prstGeom>
+            <a:blipFill>
+              <a:blip r:embed="rId7">
+                <a:extLst>
+                  <a:ext uri="{BEBA8EAE-BF5A-486C-A8C5-ECC9F3942E4B}">
+                    <a14:imgProps xmlns:a14="http://schemas.microsoft.com/office/drawing/2010/main">
+                      <a14:imgLayer r:embed="rId5">
+                        <a14:imgEffect>
+                          <a14:brightnessContrast bright="-20000"/>
+                        </a14:imgEffect>
+                      </a14:imgLayer>
+                    </a14:imgProps>
+                  </a:ext>
+                  <a:ext uri="{837473B0-CC2E-450A-ABE3-18F120FF3D39}">
+                    <a1611:picAttrSrcUrl xmlns:a1611="http://schemas.microsoft.com/office/drawing/2016/11/main" r:id="rId6"/>
+                  </a:ext>
+                </a:extLst>
+              </a:blip>
+              <a:stretch>
+                <a:fillRect/>
+              </a:stretch>
+            </a:blipFill>
+            <a:ln>
+              <a:noFill/>
+            </a:ln>
+          </p:spPr>
+          <p:style>
+            <a:lnRef idx="2">
+              <a:schemeClr val="accent1">
+                <a:shade val="15000"/>
+              </a:schemeClr>
+            </a:lnRef>
+            <a:fillRef idx="1">
+              <a:schemeClr val="accent1"/>
+            </a:fillRef>
+            <a:effectRef idx="0">
+              <a:schemeClr val="accent1"/>
+            </a:effectRef>
+            <a:fontRef idx="minor">
+              <a:schemeClr val="lt1"/>
+            </a:fontRef>
+          </p:style>
+          <p:txBody>
+            <a:bodyPr rtlCol="0" anchor="ctr"/>
+            <a:lstStyle/>
+            <a:p>
+              <a:pPr algn="ctr"/>
+              <a:endParaRPr lang="fr-FR"/>
+            </a:p>
+          </p:txBody>
+        </p:sp>
+        <p:sp>
+          <p:nvSpPr>
+            <p:cNvPr id="33" name="Oval 32">
+              <a:extLst>
+                <a:ext uri="{FF2B5EF4-FFF2-40B4-BE49-F238E27FC236}">
+                  <a16:creationId xmlns:a16="http://schemas.microsoft.com/office/drawing/2014/main" id="{BE9E0CB3-5CDF-0CF2-A1F9-E2B892545E10}"/>
+                </a:ext>
+              </a:extLst>
+            </p:cNvPr>
+            <p:cNvSpPr/>
+            <p:nvPr/>
+          </p:nvSpPr>
+          <p:spPr>
+            <a:xfrm>
+              <a:off x="3924000" y="2412000"/>
+              <a:ext cx="180000" cy="180000"/>
+            </a:xfrm>
+            <a:prstGeom prst="ellipse">
+              <a:avLst/>
+            </a:prstGeom>
+            <a:blipFill>
+              <a:blip r:embed="rId7">
+                <a:extLst>
+                  <a:ext uri="{BEBA8EAE-BF5A-486C-A8C5-ECC9F3942E4B}">
+                    <a14:imgProps xmlns:a14="http://schemas.microsoft.com/office/drawing/2010/main">
+                      <a14:imgLayer r:embed="rId5">
+                        <a14:imgEffect>
+                          <a14:brightnessContrast bright="-20000"/>
+                        </a14:imgEffect>
+                      </a14:imgLayer>
+                    </a14:imgProps>
+                  </a:ext>
+                  <a:ext uri="{837473B0-CC2E-450A-ABE3-18F120FF3D39}">
+                    <a1611:picAttrSrcUrl xmlns:a1611="http://schemas.microsoft.com/office/drawing/2016/11/main" r:id="rId6"/>
+                  </a:ext>
+                </a:extLst>
+              </a:blip>
+              <a:stretch>
+                <a:fillRect/>
+              </a:stretch>
+            </a:blipFill>
+            <a:ln>
+              <a:noFill/>
+            </a:ln>
+          </p:spPr>
+          <p:style>
+            <a:lnRef idx="2">
+              <a:schemeClr val="accent1">
+                <a:shade val="15000"/>
+              </a:schemeClr>
+            </a:lnRef>
+            <a:fillRef idx="1">
+              <a:schemeClr val="accent1"/>
+            </a:fillRef>
+            <a:effectRef idx="0">
+              <a:schemeClr val="accent1"/>
+            </a:effectRef>
+            <a:fontRef idx="minor">
+              <a:schemeClr val="lt1"/>
+            </a:fontRef>
+          </p:style>
+          <p:txBody>
+            <a:bodyPr rtlCol="0" anchor="ctr"/>
+            <a:lstStyle/>
+            <a:p>
+              <a:pPr algn="ctr"/>
+              <a:endParaRPr lang="fr-FR"/>
+            </a:p>
+          </p:txBody>
+        </p:sp>
+        <p:sp>
+          <p:nvSpPr>
+            <p:cNvPr id="34" name="Oval 33">
+              <a:extLst>
+                <a:ext uri="{FF2B5EF4-FFF2-40B4-BE49-F238E27FC236}">
+                  <a16:creationId xmlns:a16="http://schemas.microsoft.com/office/drawing/2014/main" id="{14A98A2A-865B-625D-260C-2A9F50C3A540}"/>
+                </a:ext>
+              </a:extLst>
+            </p:cNvPr>
+            <p:cNvSpPr/>
+            <p:nvPr/>
+          </p:nvSpPr>
+          <p:spPr>
+            <a:xfrm>
+              <a:off x="3924000" y="2664000"/>
+              <a:ext cx="180000" cy="180000"/>
+            </a:xfrm>
+            <a:prstGeom prst="ellipse">
+              <a:avLst/>
+            </a:prstGeom>
+            <a:blipFill>
+              <a:blip r:embed="rId7">
+                <a:extLst>
+                  <a:ext uri="{BEBA8EAE-BF5A-486C-A8C5-ECC9F3942E4B}">
+                    <a14:imgProps xmlns:a14="http://schemas.microsoft.com/office/drawing/2010/main">
+                      <a14:imgLayer r:embed="rId5">
+                        <a14:imgEffect>
+                          <a14:brightnessContrast bright="-20000"/>
+                        </a14:imgEffect>
+                      </a14:imgLayer>
+                    </a14:imgProps>
+                  </a:ext>
+                  <a:ext uri="{837473B0-CC2E-450A-ABE3-18F120FF3D39}">
+                    <a1611:picAttrSrcUrl xmlns:a1611="http://schemas.microsoft.com/office/drawing/2016/11/main" r:id="rId6"/>
+                  </a:ext>
+                </a:extLst>
+              </a:blip>
+              <a:stretch>
+                <a:fillRect/>
+              </a:stretch>
+            </a:blipFill>
+            <a:ln>
+              <a:noFill/>
+            </a:ln>
+          </p:spPr>
+          <p:style>
+            <a:lnRef idx="2">
+              <a:schemeClr val="accent1">
+                <a:shade val="15000"/>
+              </a:schemeClr>
+            </a:lnRef>
+            <a:fillRef idx="1">
+              <a:schemeClr val="accent1"/>
+            </a:fillRef>
+            <a:effectRef idx="0">
+              <a:schemeClr val="accent1"/>
+            </a:effectRef>
+            <a:fontRef idx="minor">
+              <a:schemeClr val="lt1"/>
+            </a:fontRef>
+          </p:style>
+          <p:txBody>
+            <a:bodyPr rtlCol="0" anchor="ctr"/>
+            <a:lstStyle/>
+            <a:p>
+              <a:pPr algn="ctr"/>
+              <a:endParaRPr lang="fr-FR"/>
+            </a:p>
+          </p:txBody>
+        </p:sp>
+        <p:sp>
+          <p:nvSpPr>
+            <p:cNvPr id="35" name="Oval 34">
+              <a:extLst>
+                <a:ext uri="{FF2B5EF4-FFF2-40B4-BE49-F238E27FC236}">
+                  <a16:creationId xmlns:a16="http://schemas.microsoft.com/office/drawing/2014/main" id="{9639EABF-DEBC-2E80-699C-153C27EDAFA4}"/>
+                </a:ext>
+              </a:extLst>
+            </p:cNvPr>
+            <p:cNvSpPr/>
+            <p:nvPr/>
+          </p:nvSpPr>
+          <p:spPr>
+            <a:xfrm>
+              <a:off x="3924000" y="2916000"/>
+              <a:ext cx="180000" cy="180000"/>
+            </a:xfrm>
+            <a:prstGeom prst="ellipse">
+              <a:avLst/>
+            </a:prstGeom>
+            <a:blipFill>
+              <a:blip r:embed="rId7">
+                <a:extLst>
+                  <a:ext uri="{BEBA8EAE-BF5A-486C-A8C5-ECC9F3942E4B}">
+                    <a14:imgProps xmlns:a14="http://schemas.microsoft.com/office/drawing/2010/main">
+                      <a14:imgLayer r:embed="rId5">
+                        <a14:imgEffect>
+                          <a14:brightnessContrast bright="-20000"/>
+                        </a14:imgEffect>
+                      </a14:imgLayer>
+                    </a14:imgProps>
+                  </a:ext>
+                  <a:ext uri="{837473B0-CC2E-450A-ABE3-18F120FF3D39}">
+                    <a1611:picAttrSrcUrl xmlns:a1611="http://schemas.microsoft.com/office/drawing/2016/11/main" r:id="rId6"/>
+                  </a:ext>
+                </a:extLst>
+              </a:blip>
+              <a:stretch>
+                <a:fillRect/>
+              </a:stretch>
+            </a:blipFill>
+            <a:ln>
+              <a:noFill/>
+            </a:ln>
+          </p:spPr>
+          <p:style>
+            <a:lnRef idx="2">
+              <a:schemeClr val="accent1">
+                <a:shade val="15000"/>
+              </a:schemeClr>
+            </a:lnRef>
+            <a:fillRef idx="1">
+              <a:schemeClr val="accent1"/>
+            </a:fillRef>
+            <a:effectRef idx="0">
+              <a:schemeClr val="accent1"/>
+            </a:effectRef>
+            <a:fontRef idx="minor">
+              <a:schemeClr val="lt1"/>
+            </a:fontRef>
+          </p:style>
+          <p:txBody>
+            <a:bodyPr rtlCol="0" anchor="ctr"/>
+            <a:lstStyle/>
+            <a:p>
+              <a:pPr algn="ctr"/>
+              <a:endParaRPr lang="fr-FR"/>
+            </a:p>
+          </p:txBody>
+        </p:sp>
+        <p:sp>
+          <p:nvSpPr>
+            <p:cNvPr id="36" name="Oval 35">
+              <a:extLst>
+                <a:ext uri="{FF2B5EF4-FFF2-40B4-BE49-F238E27FC236}">
+                  <a16:creationId xmlns:a16="http://schemas.microsoft.com/office/drawing/2014/main" id="{897F6BEE-A3A8-0B4A-0F7A-27A2521BF8C2}"/>
+                </a:ext>
+              </a:extLst>
+            </p:cNvPr>
+            <p:cNvSpPr/>
+            <p:nvPr/>
+          </p:nvSpPr>
+          <p:spPr>
+            <a:xfrm>
+              <a:off x="3924000" y="3168000"/>
+              <a:ext cx="180000" cy="180000"/>
+            </a:xfrm>
+            <a:prstGeom prst="ellipse">
+              <a:avLst/>
+            </a:prstGeom>
+            <a:blipFill>
+              <a:blip r:embed="rId7">
+                <a:extLst>
+                  <a:ext uri="{BEBA8EAE-BF5A-486C-A8C5-ECC9F3942E4B}">
+                    <a14:imgProps xmlns:a14="http://schemas.microsoft.com/office/drawing/2010/main">
+                      <a14:imgLayer r:embed="rId5">
+                        <a14:imgEffect>
+                          <a14:brightnessContrast bright="-20000"/>
+                        </a14:imgEffect>
+                      </a14:imgLayer>
+                    </a14:imgProps>
+                  </a:ext>
+                  <a:ext uri="{837473B0-CC2E-450A-ABE3-18F120FF3D39}">
+                    <a1611:picAttrSrcUrl xmlns:a1611="http://schemas.microsoft.com/office/drawing/2016/11/main" r:id="rId6"/>
+                  </a:ext>
+                </a:extLst>
+              </a:blip>
+              <a:stretch>
+                <a:fillRect/>
+              </a:stretch>
+            </a:blipFill>
+            <a:ln>
+              <a:noFill/>
+            </a:ln>
+          </p:spPr>
+          <p:style>
+            <a:lnRef idx="2">
+              <a:schemeClr val="accent1">
+                <a:shade val="15000"/>
+              </a:schemeClr>
+            </a:lnRef>
+            <a:fillRef idx="1">
+              <a:schemeClr val="accent1"/>
+            </a:fillRef>
+            <a:effectRef idx="0">
+              <a:schemeClr val="accent1"/>
+            </a:effectRef>
+            <a:fontRef idx="minor">
+              <a:schemeClr val="lt1"/>
+            </a:fontRef>
+          </p:style>
+          <p:txBody>
+            <a:bodyPr rtlCol="0" anchor="ctr"/>
+            <a:lstStyle/>
+            <a:p>
+              <a:pPr algn="ctr"/>
+              <a:endParaRPr lang="fr-FR"/>
+            </a:p>
+          </p:txBody>
+        </p:sp>
+        <p:sp>
+          <p:nvSpPr>
+            <p:cNvPr id="37" name="Oval 36">
+              <a:extLst>
+                <a:ext uri="{FF2B5EF4-FFF2-40B4-BE49-F238E27FC236}">
+                  <a16:creationId xmlns:a16="http://schemas.microsoft.com/office/drawing/2014/main" id="{2BAE5A66-E05C-11A0-451A-D98E3A8E5C97}"/>
+                </a:ext>
+              </a:extLst>
+            </p:cNvPr>
+            <p:cNvSpPr/>
+            <p:nvPr/>
+          </p:nvSpPr>
+          <p:spPr>
+            <a:xfrm>
+              <a:off x="3924000" y="3420000"/>
+              <a:ext cx="180000" cy="180000"/>
+            </a:xfrm>
+            <a:prstGeom prst="ellipse">
+              <a:avLst/>
+            </a:prstGeom>
+            <a:blipFill>
+              <a:blip r:embed="rId7">
+                <a:extLst>
+                  <a:ext uri="{BEBA8EAE-BF5A-486C-A8C5-ECC9F3942E4B}">
+                    <a14:imgProps xmlns:a14="http://schemas.microsoft.com/office/drawing/2010/main">
+                      <a14:imgLayer r:embed="rId5">
+                        <a14:imgEffect>
+                          <a14:brightnessContrast bright="-20000"/>
+                        </a14:imgEffect>
+                      </a14:imgLayer>
+                    </a14:imgProps>
+                  </a:ext>
+                  <a:ext uri="{837473B0-CC2E-450A-ABE3-18F120FF3D39}">
+                    <a1611:picAttrSrcUrl xmlns:a1611="http://schemas.microsoft.com/office/drawing/2016/11/main" r:id="rId6"/>
+                  </a:ext>
+                </a:extLst>
+              </a:blip>
+              <a:stretch>
+                <a:fillRect/>
+              </a:stretch>
+            </a:blipFill>
+            <a:ln>
+              <a:noFill/>
+            </a:ln>
+          </p:spPr>
+          <p:style>
+            <a:lnRef idx="2">
+              <a:schemeClr val="accent1">
+                <a:shade val="15000"/>
+              </a:schemeClr>
+            </a:lnRef>
+            <a:fillRef idx="1">
+              <a:schemeClr val="accent1"/>
+            </a:fillRef>
+            <a:effectRef idx="0">
+              <a:schemeClr val="accent1"/>
+            </a:effectRef>
+            <a:fontRef idx="minor">
+              <a:schemeClr val="lt1"/>
+            </a:fontRef>
+          </p:style>
+          <p:txBody>
+            <a:bodyPr rtlCol="0" anchor="ctr"/>
+            <a:lstStyle/>
+            <a:p>
+              <a:pPr algn="ctr"/>
+              <a:endParaRPr lang="fr-FR"/>
+            </a:p>
+          </p:txBody>
+        </p:sp>
+      </p:grpSp>
+    </p:spTree>
+    <p:extLst>
+      <p:ext uri="{BB962C8B-B14F-4D97-AF65-F5344CB8AC3E}">
+        <p14:creationId xmlns:p14="http://schemas.microsoft.com/office/powerpoint/2010/main" val="3017518309"/>
+      </p:ext>
+    </p:extLst>
+  </p:cSld>
+  <p:clrMapOvr>
+    <a:masterClrMapping/>
+  </p:clrMapOvr>
+</p:sld>
+</file>
+
 <file path=ppt/theme/theme1.xml><?xml version="1.0" encoding="utf-8"?>
 <a:theme xmlns:a="http://schemas.openxmlformats.org/drawingml/2006/main" name="Office Theme">
   <a:themeElements>
